--- a/decks/ntu-taiwan-info-session/ntu-taiwan-info-session.pptx
+++ b/decks/ntu-taiwan-info-session/ntu-taiwan-info-session.pptx
@@ -631,43 +631,21 @@
       </p:grpSpPr>
       <p:grpSp>
         <p:nvGrpSpPr>
-          <p:cNvPr id="6" name="topband"/>
+          <p:cNvPr id="9" name="topband"/>
           <p:cNvGrpSpPr/>
           <p:nvPr/>
         </p:nvGrpSpPr>
         <p:grpSpPr>
           <a:xfrm>
-            <a:off x="0" y="95250"/>
-            <a:ext cx="12192000" cy="809625"/>
-            <a:chOff x="0" y="95250"/>
-            <a:chExt cx="12192000" cy="809625"/>
+            <a:off x="0" y="152400"/>
+            <a:ext cx="12192000" cy="752475"/>
+            <a:chOff x="0" y="152400"/>
+            <a:chExt cx="12192000" cy="752475"/>
           </a:xfrm>
         </p:grpSpPr>
-        <p:sp>
-          <p:nvSpPr>
-            <p:cNvPr id="2" name="Rectangle 2"/>
-            <p:cNvSpPr/>
-            <p:nvPr/>
-          </p:nvSpPr>
-          <p:spPr>
-            <a:xfrm>
-              <a:off x="457200" y="95250"/>
-              <a:ext cx="2933700" cy="701626"/>
-            </a:xfrm>
-            <a:prstGeom prst="rect">
-              <a:avLst/>
-            </a:prstGeom>
-            <a:solidFill>
-              <a:srgbClr val="0A1138"/>
-            </a:solidFill>
-            <a:ln>
-              <a:noFill/>
-            </a:ln>
-          </p:spPr>
-        </p:sp>
         <p:pic>
           <p:nvPicPr>
-            <p:cNvPr id="3" name="Image 3"/>
+            <p:cNvPr id="2" name="Image 2"/>
             <p:cNvPicPr>
               <a:picLocks noChangeAspect="1"/>
             </p:cNvPicPr>
@@ -681,8 +659,8 @@
           </p:blipFill>
           <p:spPr>
             <a:xfrm>
-              <a:off x="590550" y="228600"/>
-              <a:ext cx="2667000" cy="434926"/>
+              <a:off x="457200" y="152400"/>
+              <a:ext cx="1447094" cy="533400"/>
             </a:xfrm>
             <a:prstGeom prst="rect">
               <a:avLst/>
@@ -691,7 +669,149 @@
         </p:pic>
         <p:sp>
           <p:nvSpPr>
+            <p:cNvPr id="3" name="Rectangle 3"/>
+            <p:cNvSpPr/>
+            <p:nvPr/>
+          </p:nvSpPr>
+          <p:spPr>
+            <a:xfrm>
+              <a:off x="2113844" y="171450"/>
+              <a:ext cx="19050" cy="495300"/>
+            </a:xfrm>
+            <a:prstGeom prst="rect">
+              <a:avLst/>
+            </a:prstGeom>
+            <a:solidFill>
+              <a:srgbClr val="93A0C9"/>
+            </a:solidFill>
+            <a:ln>
+              <a:noFill/>
+            </a:ln>
+          </p:spPr>
+        </p:sp>
+        <p:sp>
+          <p:nvSpPr>
             <p:cNvPr id="4" name="TextBox 4"/>
+            <p:cNvSpPr txBox="1"/>
+            <p:nvPr/>
+          </p:nvSpPr>
+          <p:spPr>
+            <a:xfrm>
+              <a:off x="2318441" y="260096"/>
+              <a:ext cx="1909040" cy="191643"/>
+            </a:xfrm>
+            <a:prstGeom prst="rect">
+              <a:avLst/>
+            </a:prstGeom>
+            <a:noFill/>
+            <a:ln>
+              <a:noFill/>
+            </a:ln>
+          </p:spPr>
+          <p:txBody>
+            <a:bodyPr wrap="none" lIns="0" tIns="0" rIns="0" bIns="0" anchor="t" anchorCtr="0">
+              <a:spAutoFit/>
+            </a:bodyPr>
+            <a:lstStyle/>
+            <a:p>
+              <a:pPr algn="l"/>
+              <a:r>
+                <a:rPr lang="en-US" sz="980" b="1" dirty="0">
+                  <a:solidFill>
+                    <a:srgbClr val="0A1138"/>
+                  </a:solidFill>
+                  <a:latin typeface="+mn-lt"/>
+                  <a:ea typeface="+mn-ea"/>
+                  <a:cs typeface="+mn-cs"/>
+                </a:rPr>
+                <a:t>NTU Centre in Computational</a:t>
+              </a:r>
+            </a:p>
+          </p:txBody>
+        </p:sp>
+        <p:sp>
+          <p:nvSpPr>
+            <p:cNvPr id="5" name="TextBox 5"/>
+            <p:cNvSpPr txBox="1"/>
+            <p:nvPr/>
+          </p:nvSpPr>
+          <p:spPr>
+            <a:xfrm>
+              <a:off x="2318441" y="422021"/>
+              <a:ext cx="1673786" cy="191643"/>
+            </a:xfrm>
+            <a:prstGeom prst="rect">
+              <a:avLst/>
+            </a:prstGeom>
+            <a:noFill/>
+            <a:ln>
+              <a:noFill/>
+            </a:ln>
+          </p:spPr>
+          <p:txBody>
+            <a:bodyPr wrap="none" lIns="0" tIns="0" rIns="0" bIns="0" anchor="t" anchorCtr="0">
+              <a:spAutoFit/>
+            </a:bodyPr>
+            <a:lstStyle/>
+            <a:p>
+              <a:pPr algn="l"/>
+              <a:r>
+                <a:rPr lang="en-US" sz="980" b="1" dirty="0">
+                  <a:solidFill>
+                    <a:srgbClr val="0A1138"/>
+                  </a:solidFill>
+                  <a:latin typeface="+mn-lt"/>
+                  <a:ea typeface="+mn-ea"/>
+                  <a:cs typeface="+mn-cs"/>
+                </a:rPr>
+                <a:t>Technologies for Finance</a:t>
+              </a:r>
+            </a:p>
+          </p:txBody>
+        </p:sp>
+        <p:sp>
+          <p:nvSpPr>
+            <p:cNvPr id="6" name="TextBox 6"/>
+            <p:cNvSpPr txBox="1"/>
+            <p:nvPr/>
+          </p:nvSpPr>
+          <p:spPr>
+            <a:xfrm>
+              <a:off x="2318632" y="641096"/>
+              <a:ext cx="869372" cy="147638"/>
+            </a:xfrm>
+            <a:prstGeom prst="rect">
+              <a:avLst/>
+            </a:prstGeom>
+            <a:noFill/>
+            <a:ln>
+              <a:noFill/>
+            </a:ln>
+          </p:spPr>
+          <p:txBody>
+            <a:bodyPr wrap="none" lIns="0" tIns="0" rIns="0" bIns="0" anchor="t" anchorCtr="0">
+              <a:spAutoFit/>
+            </a:bodyPr>
+            <a:lstStyle/>
+            <a:p>
+              <a:pPr algn="l"/>
+              <a:r>
+                <a:rPr lang="en-US" sz="750" b="1" dirty="0">
+                  <a:solidFill>
+                    <a:srgbClr val="6B6B6B"/>
+                  </a:solidFill>
+                  <a:latin typeface="+mn-lt"/>
+                  <a:ea typeface="+mn-ea"/>
+                  <a:cs typeface="+mn-cs"/>
+                </a:rPr>
+                <a:t>Graduate College</a:t>
+              </a:r>
+            </a:p>
+          </p:txBody>
+        </p:sp>
+        <p:sp>
+          <p:nvSpPr>
+            <p:cNvPr id="7" name="TextBox 7"/>
             <p:cNvSpPr txBox="1"/>
             <p:nvPr/>
           </p:nvSpPr>
@@ -731,7 +851,7 @@
         </p:sp>
         <p:sp>
           <p:nvSpPr>
-            <p:cNvPr id="5" name="Rectangle 5"/>
+            <p:cNvPr id="8" name="Rectangle 8"/>
             <p:cNvSpPr/>
             <p:nvPr/>
           </p:nvSpPr>
@@ -754,7 +874,7 @@
       </p:grpSp>
       <p:pic>
         <p:nvPicPr>
-          <p:cNvPr id="7" name="Image 7"/>
+          <p:cNvPr id="10" name="Image 10"/>
           <p:cNvPicPr>
             <a:picLocks noChangeAspect="1"/>
           </p:cNvPicPr>
@@ -778,7 +898,7 @@
       </p:pic>
       <p:grpSp>
         <p:nvGrpSpPr>
-          <p:cNvPr id="14" name="title"/>
+          <p:cNvPr id="17" name="title"/>
           <p:cNvGrpSpPr/>
           <p:nvPr/>
         </p:nvGrpSpPr>
@@ -792,7 +912,7 @@
         </p:grpSpPr>
         <p:sp>
           <p:nvSpPr>
-            <p:cNvPr id="8" name="Rectangle 8"/>
+            <p:cNvPr id="11" name="Rectangle 11"/>
             <p:cNvSpPr/>
             <p:nvPr/>
           </p:nvSpPr>
@@ -814,7 +934,7 @@
         </p:sp>
         <p:sp>
           <p:nvSpPr>
-            <p:cNvPr id="9" name="Rectangle 9"/>
+            <p:cNvPr id="12" name="Rectangle 12"/>
             <p:cNvSpPr/>
             <p:nvPr/>
           </p:nvSpPr>
@@ -838,14 +958,14 @@
         </p:sp>
         <p:sp>
           <p:nvSpPr>
-            <p:cNvPr id="10" name="TextBox 10"/>
+            <p:cNvPr id="13" name="TextBox 13"/>
             <p:cNvSpPr txBox="1"/>
             <p:nvPr/>
           </p:nvSpPr>
           <p:spPr>
             <a:xfrm>
-              <a:off x="819150" y="2082800"/>
-              <a:ext cx="4760519" cy="1047750"/>
+              <a:off x="819150" y="1968500"/>
+              <a:ext cx="2945892" cy="1047750"/>
             </a:xfrm>
             <a:prstGeom prst="rect">
               <a:avLst/>
@@ -871,20 +991,20 @@
                   <a:ea typeface="+mn-ea"/>
                   <a:cs typeface="+mn-cs"/>
                 </a:rPr>
-                <a:t>來 NTU 之前，</a:t>
+                <a:t>在新加坡</a:t>
               </a:r>
             </a:p>
           </p:txBody>
         </p:sp>
         <p:sp>
           <p:nvSpPr>
-            <p:cNvPr id="11" name="TextBox 11"/>
+            <p:cNvPr id="14" name="TextBox 14"/>
             <p:cNvSpPr txBox="1"/>
             <p:nvPr/>
           </p:nvSpPr>
           <p:spPr>
             <a:xfrm>
-              <a:off x="819150" y="2921000"/>
+              <a:off x="819150" y="2787650"/>
               <a:ext cx="3672840" cy="1047750"/>
             </a:xfrm>
             <a:prstGeom prst="rect">
@@ -911,43 +1031,21 @@
                   <a:ea typeface="+mn-ea"/>
                   <a:cs typeface="+mn-cs"/>
                 </a:rPr>
-                <a:t>該知道的事</a:t>
+                <a:t>念書這一年</a:t>
               </a:r>
             </a:p>
           </p:txBody>
         </p:sp>
         <p:sp>
           <p:nvSpPr>
-            <p:cNvPr id="12" name="Rectangle 12"/>
-            <p:cNvSpPr/>
-            <p:nvPr/>
-          </p:nvSpPr>
-          <p:spPr>
-            <a:xfrm>
-              <a:off x="876300" y="3943350"/>
-              <a:ext cx="914400" cy="47625"/>
-            </a:xfrm>
-            <a:prstGeom prst="rect">
-              <a:avLst/>
-            </a:prstGeom>
-            <a:solidFill>
-              <a:srgbClr val="D21540"/>
-            </a:solidFill>
-            <a:ln>
-              <a:noFill/>
-            </a:ln>
-          </p:spPr>
-        </p:sp>
-        <p:sp>
-          <p:nvSpPr>
-            <p:cNvPr id="13" name="TextBox 13"/>
+            <p:cNvPr id="15" name="TextBox 15"/>
             <p:cNvSpPr txBox="1"/>
             <p:nvPr/>
           </p:nvSpPr>
           <p:spPr>
             <a:xfrm>
-              <a:off x="867156" y="4127500"/>
-              <a:ext cx="3943807" cy="352044"/>
+              <a:off x="867156" y="3746500"/>
+              <a:ext cx="2441448" cy="352044"/>
             </a:xfrm>
             <a:prstGeom prst="rect">
               <a:avLst/>
@@ -965,7 +1063,7 @@
             <a:p>
               <a:pPr algn="l"/>
               <a:r>
-                <a:rPr lang="ja-JP" sz="1800" dirty="0">
+                <a:rPr lang="zh-TW" sz="1800" dirty="0">
                   <a:solidFill>
                     <a:srgbClr val="6B6B6B"/>
                   </a:solidFill>
@@ -973,15 +1071,55 @@
                   <a:ea typeface="+mn-ea"/>
                   <a:cs typeface="+mn-cs"/>
                 </a:rPr>
-                <a:t>生活開銷 ・ 課程 ・ 還有我的真心話</a:t>
+                <a:t>花多少錢，念什麼課，</a:t>
               </a:r>
             </a:p>
           </p:txBody>
         </p:sp>
+        <p:sp>
+          <p:nvSpPr>
+            <p:cNvPr id="16" name="TextBox 16"/>
+            <p:cNvSpPr txBox="1"/>
+            <p:nvPr/>
+          </p:nvSpPr>
+          <p:spPr>
+            <a:xfrm>
+              <a:off x="867156" y="4070350"/>
+              <a:ext cx="2441448" cy="352044"/>
+            </a:xfrm>
+            <a:prstGeom prst="rect">
+              <a:avLst/>
+            </a:prstGeom>
+            <a:noFill/>
+            <a:ln>
+              <a:noFill/>
+            </a:ln>
+          </p:spPr>
+          <p:txBody>
+            <a:bodyPr wrap="none" lIns="0" tIns="0" rIns="0" bIns="0" anchor="t" anchorCtr="0">
+              <a:spAutoFit/>
+            </a:bodyPr>
+            <a:lstStyle/>
+            <a:p>
+              <a:pPr algn="l"/>
+              <a:r>
+                <a:rPr lang="zh-TW" sz="1800" dirty="0">
+                  <a:solidFill>
+                    <a:srgbClr val="6B6B6B"/>
+                  </a:solidFill>
+                  <a:latin typeface="+mn-lt"/>
+                  <a:ea typeface="+mn-ea"/>
+                  <a:cs typeface="+mn-cs"/>
+                </a:rPr>
+                <a:t>還有我會不會推薦你來</a:t>
+              </a:r>
+            </a:p>
+          </p:txBody>
+        </p:sp>
       </p:grpSp>
       <p:grpSp>
         <p:nvGrpSpPr>
-          <p:cNvPr id="18" name="footband"/>
+          <p:cNvPr id="21" name="footband"/>
           <p:cNvGrpSpPr/>
           <p:nvPr/>
         </p:nvGrpSpPr>
@@ -995,7 +1133,7 @@
         </p:grpSpPr>
         <p:sp>
           <p:nvSpPr>
-            <p:cNvPr id="15" name="Rectangle 15"/>
+            <p:cNvPr id="18" name="Rectangle 18"/>
             <p:cNvSpPr/>
             <p:nvPr/>
           </p:nvSpPr>
@@ -1017,7 +1155,7 @@
         </p:sp>
         <p:sp>
           <p:nvSpPr>
-            <p:cNvPr id="16" name="TextBox 16"/>
+            <p:cNvPr id="19" name="TextBox 19"/>
             <p:cNvSpPr txBox="1"/>
             <p:nvPr/>
           </p:nvSpPr>
@@ -1057,7 +1195,7 @@
         </p:sp>
         <p:sp>
           <p:nvSpPr>
-            <p:cNvPr id="17" name="TextBox 17"/>
+            <p:cNvPr id="20" name="TextBox 20"/>
             <p:cNvSpPr txBox="1"/>
             <p:nvPr/>
           </p:nvSpPr>
@@ -1412,7 +1550,7 @@
       </p:grpSp>
       <p:grpSp>
         <p:nvGrpSpPr>
-          <p:cNvPr id="15" name="name"/>
+          <p:cNvPr id="14" name="name"/>
           <p:cNvGrpSpPr/>
           <p:nvPr/>
         </p:nvGrpSpPr>
@@ -1464,32 +1602,10 @@
             </a:p>
           </p:txBody>
         </p:sp>
-        <p:sp>
-          <p:nvSpPr>
-            <p:cNvPr id="14" name="Rectangle 14"/>
-            <p:cNvSpPr/>
-            <p:nvPr/>
-          </p:nvSpPr>
-          <p:spPr>
-            <a:xfrm>
-              <a:off x="457200" y="2495550"/>
-              <a:ext cx="914400" cy="47625"/>
-            </a:xfrm>
-            <a:prstGeom prst="rect">
-              <a:avLst/>
-            </a:prstGeom>
-            <a:solidFill>
-              <a:srgbClr val="D21540"/>
-            </a:solidFill>
-            <a:ln>
-              <a:noFill/>
-            </a:ln>
-          </p:spPr>
-        </p:sp>
       </p:grpSp>
       <p:grpSp>
         <p:nvGrpSpPr>
-          <p:cNvPr id="20" name="rows"/>
+          <p:cNvPr id="19" name="rows"/>
           <p:cNvGrpSpPr/>
           <p:nvPr/>
         </p:nvGrpSpPr>
@@ -1503,7 +1619,7 @@
         </p:grpSpPr>
         <p:sp>
           <p:nvSpPr>
-            <p:cNvPr id="16" name="TextBox 16"/>
+            <p:cNvPr id="15" name="TextBox 15"/>
             <p:cNvSpPr txBox="1"/>
             <p:nvPr/>
           </p:nvSpPr>
@@ -1543,7 +1659,7 @@
         </p:sp>
         <p:sp>
           <p:nvSpPr>
-            <p:cNvPr id="17" name="TextBox 17"/>
+            <p:cNvPr id="16" name="TextBox 16"/>
             <p:cNvSpPr txBox="1"/>
             <p:nvPr/>
           </p:nvSpPr>
@@ -1583,7 +1699,7 @@
         </p:sp>
         <p:sp>
           <p:nvSpPr>
-            <p:cNvPr id="18" name="TextBox 18"/>
+            <p:cNvPr id="17" name="TextBox 17"/>
             <p:cNvSpPr txBox="1"/>
             <p:nvPr/>
           </p:nvSpPr>
@@ -1623,7 +1739,7 @@
         </p:sp>
         <p:sp>
           <p:nvSpPr>
-            <p:cNvPr id="19" name="TextBox 19"/>
+            <p:cNvPr id="18" name="TextBox 18"/>
             <p:cNvSpPr txBox="1"/>
             <p:nvPr/>
           </p:nvSpPr>
@@ -1664,7 +1780,7 @@
       </p:grpSp>
       <p:grpSp>
         <p:nvGrpSpPr>
-          <p:cNvPr id="25" name="portrait"/>
+          <p:cNvPr id="24" name="portrait"/>
           <p:cNvGrpSpPr/>
           <p:nvPr/>
         </p:nvGrpSpPr>
@@ -1678,7 +1794,7 @@
         </p:grpSpPr>
         <p:sp>
           <p:nvSpPr>
-            <p:cNvPr id="21" name="Rectangle 21"/>
+            <p:cNvPr id="20" name="Rectangle 20"/>
             <p:cNvSpPr/>
             <p:nvPr/>
           </p:nvSpPr>
@@ -1700,7 +1816,7 @@
         </p:sp>
         <p:sp>
           <p:nvSpPr>
-            <p:cNvPr id="22" name="Rectangle 22"/>
+            <p:cNvPr id="21" name="Rectangle 21"/>
             <p:cNvSpPr/>
             <p:nvPr/>
           </p:nvSpPr>
@@ -1724,7 +1840,7 @@
         </p:sp>
         <p:sp>
           <p:nvSpPr>
-            <p:cNvPr id="23" name="TextBox 23"/>
+            <p:cNvPr id="22" name="TextBox 22"/>
             <p:cNvSpPr txBox="1"/>
             <p:nvPr/>
           </p:nvSpPr>
@@ -1764,7 +1880,7 @@
         </p:sp>
         <p:sp>
           <p:nvSpPr>
-            <p:cNvPr id="24" name="TextBox 24"/>
+            <p:cNvPr id="23" name="TextBox 23"/>
             <p:cNvSpPr txBox="1"/>
             <p:nvPr/>
           </p:nvSpPr>
@@ -2119,16 +2235,16 @@
       </p:grpSp>
       <p:grpSp>
         <p:nvGrpSpPr>
-          <p:cNvPr id="27" name="reasons"/>
+          <p:cNvPr id="24" name="reasons"/>
           <p:cNvGrpSpPr/>
           <p:nvPr/>
         </p:nvGrpSpPr>
         <p:grpSpPr>
           <a:xfrm>
             <a:off x="438150" y="1876425"/>
-            <a:ext cx="5924550" cy="4606227"/>
+            <a:ext cx="5924550" cy="4333875"/>
             <a:chOff x="438150" y="1876425"/>
-            <a:chExt cx="5924550" cy="4606227"/>
+            <a:chExt cx="5924550" cy="4333875"/>
           </a:xfrm>
         </p:grpSpPr>
         <p:sp>
@@ -2180,7 +2296,7 @@
           <p:spPr>
             <a:xfrm>
               <a:off x="1245870" y="1930400"/>
-              <a:ext cx="2748915" cy="440055"/>
+              <a:ext cx="2446020" cy="440055"/>
             </a:xfrm>
             <a:prstGeom prst="rect">
               <a:avLst/>
@@ -2206,7 +2322,7 @@
                   <a:ea typeface="+mn-ea"/>
                   <a:cs typeface="+mn-cs"/>
                 </a:rPr>
-                <a:t>在國際級的職場裡學</a:t>
+                <a:t>公司總部都設在這</a:t>
               </a:r>
             </a:p>
           </p:txBody>
@@ -2362,7 +2478,7 @@
           <p:spPr>
             <a:xfrm>
               <a:off x="1245870" y="3702050"/>
-              <a:ext cx="2143125" cy="440055"/>
+              <a:ext cx="3051810" cy="440055"/>
             </a:xfrm>
             <a:prstGeom prst="rect">
               <a:avLst/>
@@ -2388,7 +2504,7 @@
                   <a:ea typeface="+mn-ea"/>
                   <a:cs typeface="+mn-cs"/>
                 </a:rPr>
-                <a:t>生活安全、乾淨</a:t>
+                <a:t>晚上一個人走路不用怕</a:t>
               </a:r>
             </a:p>
           </p:txBody>
@@ -2402,7 +2518,7 @@
           <p:spPr>
             <a:xfrm>
               <a:off x="1250061" y="4146550"/>
-              <a:ext cx="2117242" cy="278702"/>
+              <a:ext cx="1543761" cy="278702"/>
             </a:xfrm>
             <a:prstGeom prst="rect">
               <a:avLst/>
@@ -2428,54 +2544,14 @@
                   <a:ea typeface="+mn-ea"/>
                   <a:cs typeface="+mn-cs"/>
                 </a:rPr>
-                <a:t>治安好，公共環境整潔，</a:t>
+                <a:t>公共環境也乾淨。</a:t>
               </a:r>
             </a:p>
           </p:txBody>
         </p:sp>
         <p:sp>
           <p:nvSpPr>
-            <p:cNvPr id="21" name="TextBox 21"/>
-            <p:cNvSpPr txBox="1"/>
-            <p:nvPr/>
-          </p:nvSpPr>
-          <p:spPr>
-            <a:xfrm>
-              <a:off x="1250061" y="4432300"/>
-              <a:ext cx="1543761" cy="278702"/>
-            </a:xfrm>
-            <a:prstGeom prst="rect">
-              <a:avLst/>
-            </a:prstGeom>
-            <a:noFill/>
-            <a:ln>
-              <a:noFill/>
-            </a:ln>
-          </p:spPr>
-          <p:txBody>
-            <a:bodyPr wrap="none" lIns="0" tIns="0" rIns="0" bIns="0" anchor="t" anchorCtr="0">
-              <a:spAutoFit/>
-            </a:bodyPr>
-            <a:lstStyle/>
-            <a:p>
-              <a:pPr algn="l"/>
-              <a:r>
-                <a:rPr lang="zh-TW" sz="1420" dirty="0">
-                  <a:solidFill>
-                    <a:srgbClr val="6B6B6B"/>
-                  </a:solidFill>
-                  <a:latin typeface="+mn-lt"/>
-                  <a:ea typeface="+mn-ea"/>
-                  <a:cs typeface="+mn-cs"/>
-                </a:rPr>
-                <a:t>一個人住也放心。</a:t>
-              </a:r>
-            </a:p>
-          </p:txBody>
-        </p:sp>
-        <p:sp>
-          <p:nvSpPr>
-            <p:cNvPr id="22" name="Rectangle 22"/>
+            <p:cNvPr id="21" name="Rectangle 21"/>
             <p:cNvSpPr/>
             <p:nvPr/>
           </p:nvSpPr>
@@ -2497,7 +2573,7 @@
         </p:sp>
         <p:sp>
           <p:nvSpPr>
-            <p:cNvPr id="23" name="TextBox 23"/>
+            <p:cNvPr id="22" name="TextBox 22"/>
             <p:cNvSpPr txBox="1"/>
             <p:nvPr/>
           </p:nvSpPr>
@@ -2537,14 +2613,14 @@
         </p:sp>
         <p:sp>
           <p:nvSpPr>
-            <p:cNvPr id="24" name="TextBox 24"/>
+            <p:cNvPr id="23" name="TextBox 23"/>
             <p:cNvSpPr txBox="1"/>
             <p:nvPr/>
           </p:nvSpPr>
           <p:spPr>
             <a:xfrm>
               <a:off x="1245870" y="5473700"/>
-              <a:ext cx="1950029" cy="440055"/>
+              <a:ext cx="2252924" cy="440055"/>
             </a:xfrm>
             <a:prstGeom prst="rect">
               <a:avLst/>
@@ -2570,95 +2646,15 @@
                   <a:ea typeface="+mn-ea"/>
                   <a:cs typeface="+mn-cs"/>
                 </a:rPr>
-                <a:t>離家 4.5 小時</a:t>
+                <a:t>飛 4.5 小時到家</a:t>
               </a:r>
             </a:p>
           </p:txBody>
         </p:sp>
-        <p:sp>
-          <p:nvSpPr>
-            <p:cNvPr id="25" name="TextBox 25"/>
-            <p:cNvSpPr txBox="1"/>
-            <p:nvPr/>
-          </p:nvSpPr>
-          <p:spPr>
-            <a:xfrm>
-              <a:off x="1250061" y="5918200"/>
-              <a:ext cx="970280" cy="278702"/>
-            </a:xfrm>
-            <a:prstGeom prst="rect">
-              <a:avLst/>
-            </a:prstGeom>
-            <a:noFill/>
-            <a:ln>
-              <a:noFill/>
-            </a:ln>
-          </p:spPr>
-          <p:txBody>
-            <a:bodyPr wrap="none" lIns="0" tIns="0" rIns="0" bIns="0" anchor="t" anchorCtr="0">
-              <a:spAutoFit/>
-            </a:bodyPr>
-            <a:lstStyle/>
-            <a:p>
-              <a:pPr algn="l"/>
-              <a:r>
-                <a:rPr lang="zh-TW" sz="1420" dirty="0">
-                  <a:solidFill>
-                    <a:srgbClr val="6B6B6B"/>
-                  </a:solidFill>
-                  <a:latin typeface="+mn-lt"/>
-                  <a:ea typeface="+mn-ea"/>
-                  <a:cs typeface="+mn-cs"/>
-                </a:rPr>
-                <a:t>直飛台北，</a:t>
-              </a:r>
-            </a:p>
-          </p:txBody>
-        </p:sp>
-        <p:sp>
-          <p:nvSpPr>
-            <p:cNvPr id="26" name="TextBox 26"/>
-            <p:cNvSpPr txBox="1"/>
-            <p:nvPr/>
-          </p:nvSpPr>
-          <p:spPr>
-            <a:xfrm>
-              <a:off x="1250061" y="6203950"/>
-              <a:ext cx="1543761" cy="278702"/>
-            </a:xfrm>
-            <a:prstGeom prst="rect">
-              <a:avLst/>
-            </a:prstGeom>
-            <a:noFill/>
-            <a:ln>
-              <a:noFill/>
-            </a:ln>
-          </p:spPr>
-          <p:txBody>
-            <a:bodyPr wrap="none" lIns="0" tIns="0" rIns="0" bIns="0" anchor="t" anchorCtr="0">
-              <a:spAutoFit/>
-            </a:bodyPr>
-            <a:lstStyle/>
-            <a:p>
-              <a:pPr algn="l"/>
-              <a:r>
-                <a:rPr lang="zh-TW" sz="1420" dirty="0">
-                  <a:solidFill>
-                    <a:srgbClr val="6B6B6B"/>
-                  </a:solidFill>
-                  <a:latin typeface="+mn-lt"/>
-                  <a:ea typeface="+mn-ea"/>
-                  <a:cs typeface="+mn-cs"/>
-                </a:rPr>
-                <a:t>想回去隨時可以。</a:t>
-              </a:r>
-            </a:p>
-          </p:txBody>
-        </p:sp>
       </p:grpSp>
       <p:grpSp>
         <p:nvGrpSpPr>
-          <p:cNvPr id="156" name="map"/>
+          <p:cNvPr id="153" name="map"/>
           <p:cNvGrpSpPr/>
           <p:nvPr/>
         </p:nvGrpSpPr>
@@ -2672,7 +2668,7 @@
         </p:grpSpPr>
         <p:sp>
           <p:nvSpPr>
-            <p:cNvPr id="28" name="Rectangle 28"/>
+            <p:cNvPr id="25" name="Rectangle 25"/>
             <p:cNvSpPr/>
             <p:nvPr/>
           </p:nvSpPr>
@@ -2694,7 +2690,7 @@
         </p:sp>
         <p:sp>
           <p:nvSpPr>
-            <p:cNvPr id="29" name="Rectangle 29"/>
+            <p:cNvPr id="26" name="Rectangle 26"/>
             <p:cNvSpPr/>
             <p:nvPr/>
           </p:nvSpPr>
@@ -2716,7 +2712,7 @@
         </p:sp>
         <p:sp>
           <p:nvSpPr>
-            <p:cNvPr id="30" name="Rectangle 30"/>
+            <p:cNvPr id="27" name="Rectangle 27"/>
             <p:cNvSpPr/>
             <p:nvPr/>
           </p:nvSpPr>
@@ -2738,7 +2734,7 @@
         </p:sp>
         <p:sp>
           <p:nvSpPr>
-            <p:cNvPr id="31" name="Rectangle 31"/>
+            <p:cNvPr id="28" name="Rectangle 28"/>
             <p:cNvSpPr/>
             <p:nvPr/>
           </p:nvSpPr>
@@ -2760,7 +2756,7 @@
         </p:sp>
         <p:sp>
           <p:nvSpPr>
-            <p:cNvPr id="32" name="Rectangle 32"/>
+            <p:cNvPr id="29" name="Rectangle 29"/>
             <p:cNvSpPr/>
             <p:nvPr/>
           </p:nvSpPr>
@@ -2782,7 +2778,7 @@
         </p:sp>
         <p:sp>
           <p:nvSpPr>
-            <p:cNvPr id="33" name="Rectangle 33"/>
+            <p:cNvPr id="30" name="Rectangle 30"/>
             <p:cNvSpPr/>
             <p:nvPr/>
           </p:nvSpPr>
@@ -2804,7 +2800,7 @@
         </p:sp>
         <p:sp>
           <p:nvSpPr>
-            <p:cNvPr id="34" name="Rectangle 34"/>
+            <p:cNvPr id="31" name="Rectangle 31"/>
             <p:cNvSpPr/>
             <p:nvPr/>
           </p:nvSpPr>
@@ -2826,7 +2822,7 @@
         </p:sp>
         <p:sp>
           <p:nvSpPr>
-            <p:cNvPr id="35" name="Rectangle 35"/>
+            <p:cNvPr id="32" name="Rectangle 32"/>
             <p:cNvSpPr/>
             <p:nvPr/>
           </p:nvSpPr>
@@ -2848,7 +2844,7 @@
         </p:sp>
         <p:sp>
           <p:nvSpPr>
-            <p:cNvPr id="36" name="Rectangle 36"/>
+            <p:cNvPr id="33" name="Rectangle 33"/>
             <p:cNvSpPr/>
             <p:nvPr/>
           </p:nvSpPr>
@@ -2870,7 +2866,7 @@
         </p:sp>
         <p:sp>
           <p:nvSpPr>
-            <p:cNvPr id="37" name="Rectangle 37"/>
+            <p:cNvPr id="34" name="Rectangle 34"/>
             <p:cNvSpPr/>
             <p:nvPr/>
           </p:nvSpPr>
@@ -2892,7 +2888,7 @@
         </p:sp>
         <p:sp>
           <p:nvSpPr>
-            <p:cNvPr id="38" name="Rectangle 38"/>
+            <p:cNvPr id="35" name="Rectangle 35"/>
             <p:cNvSpPr/>
             <p:nvPr/>
           </p:nvSpPr>
@@ -2914,7 +2910,7 @@
         </p:sp>
         <p:sp>
           <p:nvSpPr>
-            <p:cNvPr id="39" name="Rectangle 39"/>
+            <p:cNvPr id="36" name="Rectangle 36"/>
             <p:cNvSpPr/>
             <p:nvPr/>
           </p:nvSpPr>
@@ -2936,7 +2932,7 @@
         </p:sp>
         <p:sp>
           <p:nvSpPr>
-            <p:cNvPr id="40" name="Rectangle 40"/>
+            <p:cNvPr id="37" name="Rectangle 37"/>
             <p:cNvSpPr/>
             <p:nvPr/>
           </p:nvSpPr>
@@ -2958,7 +2954,7 @@
         </p:sp>
         <p:sp>
           <p:nvSpPr>
-            <p:cNvPr id="41" name="Rectangle 41"/>
+            <p:cNvPr id="38" name="Rectangle 38"/>
             <p:cNvSpPr/>
             <p:nvPr/>
           </p:nvSpPr>
@@ -2980,7 +2976,7 @@
         </p:sp>
         <p:sp>
           <p:nvSpPr>
-            <p:cNvPr id="42" name="Rectangle 42"/>
+            <p:cNvPr id="39" name="Rectangle 39"/>
             <p:cNvSpPr/>
             <p:nvPr/>
           </p:nvSpPr>
@@ -3002,7 +2998,7 @@
         </p:sp>
         <p:sp>
           <p:nvSpPr>
-            <p:cNvPr id="43" name="Rectangle 43"/>
+            <p:cNvPr id="40" name="Rectangle 40"/>
             <p:cNvSpPr/>
             <p:nvPr/>
           </p:nvSpPr>
@@ -3024,7 +3020,7 @@
         </p:sp>
         <p:sp>
           <p:nvSpPr>
-            <p:cNvPr id="44" name="Rectangle 44"/>
+            <p:cNvPr id="41" name="Rectangle 41"/>
             <p:cNvSpPr/>
             <p:nvPr/>
           </p:nvSpPr>
@@ -3046,7 +3042,7 @@
         </p:sp>
         <p:sp>
           <p:nvSpPr>
-            <p:cNvPr id="45" name="Freeform 45"/>
+            <p:cNvPr id="42" name="Freeform 42"/>
             <p:cNvSpPr/>
             <p:nvPr/>
           </p:nvSpPr>
@@ -3382,7 +3378,7 @@
         </p:sp>
         <p:sp>
           <p:nvSpPr>
-            <p:cNvPr id="46" name="Freeform 46"/>
+            <p:cNvPr id="43" name="Freeform 43"/>
             <p:cNvSpPr/>
             <p:nvPr/>
           </p:nvSpPr>
@@ -3628,7 +3624,7 @@
         </p:sp>
         <p:sp>
           <p:nvSpPr>
-            <p:cNvPr id="47" name="Freeform 47"/>
+            <p:cNvPr id="44" name="Freeform 44"/>
             <p:cNvSpPr/>
             <p:nvPr/>
           </p:nvSpPr>
@@ -3805,7 +3801,7 @@
         </p:sp>
         <p:sp>
           <p:nvSpPr>
-            <p:cNvPr id="48" name="Freeform 48"/>
+            <p:cNvPr id="45" name="Freeform 45"/>
             <p:cNvSpPr/>
             <p:nvPr/>
           </p:nvSpPr>
@@ -3991,7 +3987,7 @@
         </p:sp>
         <p:sp>
           <p:nvSpPr>
-            <p:cNvPr id="49" name="Freeform 49"/>
+            <p:cNvPr id="46" name="Freeform 46"/>
             <p:cNvSpPr/>
             <p:nvPr/>
           </p:nvSpPr>
@@ -4180,7 +4176,7 @@
         </p:sp>
         <p:sp>
           <p:nvSpPr>
-            <p:cNvPr id="50" name="Freeform 50"/>
+            <p:cNvPr id="47" name="Freeform 47"/>
             <p:cNvSpPr/>
             <p:nvPr/>
           </p:nvSpPr>
@@ -4372,7 +4368,7 @@
         </p:sp>
         <p:sp>
           <p:nvSpPr>
-            <p:cNvPr id="51" name="Freeform 51"/>
+            <p:cNvPr id="48" name="Freeform 48"/>
             <p:cNvSpPr/>
             <p:nvPr/>
           </p:nvSpPr>
@@ -4570,7 +4566,7 @@
         </p:sp>
         <p:sp>
           <p:nvSpPr>
-            <p:cNvPr id="52" name="Freeform 52"/>
+            <p:cNvPr id="49" name="Freeform 49"/>
             <p:cNvSpPr/>
             <p:nvPr/>
           </p:nvSpPr>
@@ -4804,7 +4800,7 @@
         </p:sp>
         <p:sp>
           <p:nvSpPr>
-            <p:cNvPr id="53" name="Freeform 53"/>
+            <p:cNvPr id="50" name="Freeform 50"/>
             <p:cNvSpPr/>
             <p:nvPr/>
           </p:nvSpPr>
@@ -4930,7 +4926,7 @@
         </p:sp>
         <p:sp>
           <p:nvSpPr>
-            <p:cNvPr id="54" name="Freeform 54"/>
+            <p:cNvPr id="51" name="Freeform 51"/>
             <p:cNvSpPr/>
             <p:nvPr/>
           </p:nvSpPr>
@@ -5134,7 +5130,7 @@
         </p:sp>
         <p:sp>
           <p:nvSpPr>
-            <p:cNvPr id="55" name="Freeform 55"/>
+            <p:cNvPr id="52" name="Freeform 52"/>
             <p:cNvSpPr/>
             <p:nvPr/>
           </p:nvSpPr>
@@ -5740,7 +5736,7 @@
         </p:sp>
         <p:sp>
           <p:nvSpPr>
-            <p:cNvPr id="56" name="Freeform 56"/>
+            <p:cNvPr id="53" name="Freeform 53"/>
             <p:cNvSpPr/>
             <p:nvPr/>
           </p:nvSpPr>
@@ -6481,7 +6477,7 @@
         </p:sp>
         <p:sp>
           <p:nvSpPr>
-            <p:cNvPr id="57" name="Freeform 57"/>
+            <p:cNvPr id="54" name="Freeform 54"/>
             <p:cNvSpPr/>
             <p:nvPr/>
           </p:nvSpPr>
@@ -7543,7 +7539,7 @@
         </p:sp>
         <p:sp>
           <p:nvSpPr>
-            <p:cNvPr id="58" name="Freeform 58"/>
+            <p:cNvPr id="55" name="Freeform 55"/>
             <p:cNvSpPr/>
             <p:nvPr/>
           </p:nvSpPr>
@@ -8338,7 +8334,7 @@
         </p:sp>
         <p:sp>
           <p:nvSpPr>
-            <p:cNvPr id="59" name="Freeform 59"/>
+            <p:cNvPr id="56" name="Freeform 56"/>
             <p:cNvSpPr/>
             <p:nvPr/>
           </p:nvSpPr>
@@ -9676,7 +9672,7 @@
         </p:sp>
         <p:sp>
           <p:nvSpPr>
-            <p:cNvPr id="60" name="Freeform 60"/>
+            <p:cNvPr id="57" name="Freeform 57"/>
             <p:cNvSpPr/>
             <p:nvPr/>
           </p:nvSpPr>
@@ -9892,7 +9888,7 @@
         </p:sp>
         <p:sp>
           <p:nvSpPr>
-            <p:cNvPr id="61" name="Freeform 61"/>
+            <p:cNvPr id="58" name="Freeform 58"/>
             <p:cNvSpPr/>
             <p:nvPr/>
           </p:nvSpPr>
@@ -10147,7 +10143,7 @@
         </p:sp>
         <p:sp>
           <p:nvSpPr>
-            <p:cNvPr id="62" name="Freeform 62"/>
+            <p:cNvPr id="59" name="Freeform 59"/>
             <p:cNvSpPr/>
             <p:nvPr/>
           </p:nvSpPr>
@@ -13141,7 +13137,7 @@
         </p:sp>
         <p:sp>
           <p:nvSpPr>
-            <p:cNvPr id="63" name="Freeform 63"/>
+            <p:cNvPr id="60" name="Freeform 60"/>
             <p:cNvSpPr/>
             <p:nvPr/>
           </p:nvSpPr>
@@ -13204,7 +13200,7 @@
         </p:sp>
         <p:sp>
           <p:nvSpPr>
-            <p:cNvPr id="64" name="Freeform 64"/>
+            <p:cNvPr id="61" name="Freeform 61"/>
             <p:cNvSpPr/>
             <p:nvPr/>
           </p:nvSpPr>
@@ -13282,7 +13278,7 @@
         </p:sp>
         <p:sp>
           <p:nvSpPr>
-            <p:cNvPr id="65" name="Freeform 65"/>
+            <p:cNvPr id="62" name="Freeform 62"/>
             <p:cNvSpPr/>
             <p:nvPr/>
           </p:nvSpPr>
@@ -13339,7 +13335,7 @@
         </p:sp>
         <p:sp>
           <p:nvSpPr>
-            <p:cNvPr id="66" name="Freeform 66"/>
+            <p:cNvPr id="63" name="Freeform 63"/>
             <p:cNvSpPr/>
             <p:nvPr/>
           </p:nvSpPr>
@@ -13441,7 +13437,7 @@
         </p:sp>
         <p:sp>
           <p:nvSpPr>
-            <p:cNvPr id="67" name="Freeform 67"/>
+            <p:cNvPr id="64" name="Freeform 64"/>
             <p:cNvSpPr/>
             <p:nvPr/>
           </p:nvSpPr>
@@ -13516,7 +13512,7 @@
         </p:sp>
         <p:sp>
           <p:nvSpPr>
-            <p:cNvPr id="68" name="Freeform 68"/>
+            <p:cNvPr id="65" name="Freeform 65"/>
             <p:cNvSpPr/>
             <p:nvPr/>
           </p:nvSpPr>
@@ -13591,7 +13587,7 @@
         </p:sp>
         <p:sp>
           <p:nvSpPr>
-            <p:cNvPr id="69" name="Freeform 69"/>
+            <p:cNvPr id="66" name="Freeform 66"/>
             <p:cNvSpPr/>
             <p:nvPr/>
           </p:nvSpPr>
@@ -13723,7 +13719,7 @@
         </p:sp>
         <p:sp>
           <p:nvSpPr>
-            <p:cNvPr id="70" name="Freeform 70"/>
+            <p:cNvPr id="67" name="Freeform 67"/>
             <p:cNvSpPr/>
             <p:nvPr/>
           </p:nvSpPr>
@@ -13831,7 +13827,7 @@
         </p:sp>
         <p:sp>
           <p:nvSpPr>
-            <p:cNvPr id="71" name="Freeform 71"/>
+            <p:cNvPr id="68" name="Freeform 68"/>
             <p:cNvSpPr/>
             <p:nvPr/>
           </p:nvSpPr>
@@ -13894,7 +13890,7 @@
         </p:sp>
         <p:sp>
           <p:nvSpPr>
-            <p:cNvPr id="72" name="Freeform 72"/>
+            <p:cNvPr id="69" name="Freeform 69"/>
             <p:cNvSpPr/>
             <p:nvPr/>
           </p:nvSpPr>
@@ -13978,7 +13974,7 @@
         </p:sp>
         <p:sp>
           <p:nvSpPr>
-            <p:cNvPr id="73" name="Freeform 73"/>
+            <p:cNvPr id="70" name="Freeform 70"/>
             <p:cNvSpPr/>
             <p:nvPr/>
           </p:nvSpPr>
@@ -14053,7 +14049,7 @@
         </p:sp>
         <p:sp>
           <p:nvSpPr>
-            <p:cNvPr id="74" name="Freeform 74"/>
+            <p:cNvPr id="71" name="Freeform 71"/>
             <p:cNvSpPr/>
             <p:nvPr/>
           </p:nvSpPr>
@@ -14119,7 +14115,7 @@
         </p:sp>
         <p:sp>
           <p:nvSpPr>
-            <p:cNvPr id="75" name="Freeform 75"/>
+            <p:cNvPr id="72" name="Freeform 72"/>
             <p:cNvSpPr/>
             <p:nvPr/>
           </p:nvSpPr>
@@ -14206,7 +14202,7 @@
         </p:sp>
         <p:sp>
           <p:nvSpPr>
-            <p:cNvPr id="76" name="Freeform 76"/>
+            <p:cNvPr id="73" name="Freeform 73"/>
             <p:cNvSpPr/>
             <p:nvPr/>
           </p:nvSpPr>
@@ -14281,7 +14277,7 @@
         </p:sp>
         <p:sp>
           <p:nvSpPr>
-            <p:cNvPr id="77" name="Freeform 77"/>
+            <p:cNvPr id="74" name="Freeform 74"/>
             <p:cNvSpPr/>
             <p:nvPr/>
           </p:nvSpPr>
@@ -14356,7 +14352,7 @@
         </p:sp>
         <p:sp>
           <p:nvSpPr>
-            <p:cNvPr id="78" name="Freeform 78"/>
+            <p:cNvPr id="75" name="Freeform 75"/>
             <p:cNvSpPr/>
             <p:nvPr/>
           </p:nvSpPr>
@@ -14419,7 +14415,7 @@
         </p:sp>
         <p:sp>
           <p:nvSpPr>
-            <p:cNvPr id="79" name="Freeform 79"/>
+            <p:cNvPr id="76" name="Freeform 76"/>
             <p:cNvSpPr/>
             <p:nvPr/>
           </p:nvSpPr>
@@ -14488,7 +14484,7 @@
         </p:sp>
         <p:sp>
           <p:nvSpPr>
-            <p:cNvPr id="80" name="Freeform 80"/>
+            <p:cNvPr id="77" name="Freeform 77"/>
             <p:cNvSpPr/>
             <p:nvPr/>
           </p:nvSpPr>
@@ -14545,7 +14541,7 @@
         </p:sp>
         <p:sp>
           <p:nvSpPr>
-            <p:cNvPr id="81" name="Freeform 81"/>
+            <p:cNvPr id="78" name="Freeform 78"/>
             <p:cNvSpPr/>
             <p:nvPr/>
           </p:nvSpPr>
@@ -14665,7 +14661,7 @@
         </p:sp>
         <p:sp>
           <p:nvSpPr>
-            <p:cNvPr id="82" name="Freeform 82"/>
+            <p:cNvPr id="79" name="Freeform 79"/>
             <p:cNvSpPr/>
             <p:nvPr/>
           </p:nvSpPr>
@@ -14752,7 +14748,7 @@
         </p:sp>
         <p:sp>
           <p:nvSpPr>
-            <p:cNvPr id="83" name="Freeform 83"/>
+            <p:cNvPr id="80" name="Freeform 80"/>
             <p:cNvSpPr/>
             <p:nvPr/>
           </p:nvSpPr>
@@ -14839,7 +14835,7 @@
         </p:sp>
         <p:sp>
           <p:nvSpPr>
-            <p:cNvPr id="84" name="Freeform 84"/>
+            <p:cNvPr id="81" name="Freeform 81"/>
             <p:cNvSpPr/>
             <p:nvPr/>
           </p:nvSpPr>
@@ -14935,7 +14931,7 @@
         </p:sp>
         <p:sp>
           <p:nvSpPr>
-            <p:cNvPr id="85" name="Freeform 85"/>
+            <p:cNvPr id="82" name="Freeform 82"/>
             <p:cNvSpPr/>
             <p:nvPr/>
           </p:nvSpPr>
@@ -15004,7 +15000,7 @@
         </p:sp>
         <p:sp>
           <p:nvSpPr>
-            <p:cNvPr id="86" name="Freeform 86"/>
+            <p:cNvPr id="83" name="Freeform 83"/>
             <p:cNvSpPr/>
             <p:nvPr/>
           </p:nvSpPr>
@@ -15073,7 +15069,7 @@
         </p:sp>
         <p:sp>
           <p:nvSpPr>
-            <p:cNvPr id="87" name="Freeform 87"/>
+            <p:cNvPr id="84" name="Freeform 84"/>
             <p:cNvSpPr/>
             <p:nvPr/>
           </p:nvSpPr>
@@ -15136,7 +15132,7 @@
         </p:sp>
         <p:sp>
           <p:nvSpPr>
-            <p:cNvPr id="88" name="Freeform 88"/>
+            <p:cNvPr id="85" name="Freeform 85"/>
             <p:cNvSpPr/>
             <p:nvPr/>
           </p:nvSpPr>
@@ -15250,7 +15246,7 @@
         </p:sp>
         <p:sp>
           <p:nvSpPr>
-            <p:cNvPr id="89" name="Freeform 89"/>
+            <p:cNvPr id="86" name="Freeform 86"/>
             <p:cNvSpPr/>
             <p:nvPr/>
           </p:nvSpPr>
@@ -15334,7 +15330,7 @@
         </p:sp>
         <p:sp>
           <p:nvSpPr>
-            <p:cNvPr id="90" name="Freeform 90"/>
+            <p:cNvPr id="87" name="Freeform 87"/>
             <p:cNvSpPr/>
             <p:nvPr/>
           </p:nvSpPr>
@@ -15427,7 +15423,7 @@
         </p:sp>
         <p:sp>
           <p:nvSpPr>
-            <p:cNvPr id="91" name="Freeform 91"/>
+            <p:cNvPr id="88" name="Freeform 88"/>
             <p:cNvSpPr/>
             <p:nvPr/>
           </p:nvSpPr>
@@ -15604,7 +15600,7 @@
         </p:sp>
         <p:sp>
           <p:nvSpPr>
-            <p:cNvPr id="92" name="Freeform 92"/>
+            <p:cNvPr id="89" name="Freeform 89"/>
             <p:cNvSpPr/>
             <p:nvPr/>
           </p:nvSpPr>
@@ -15700,7 +15696,7 @@
         </p:sp>
         <p:sp>
           <p:nvSpPr>
-            <p:cNvPr id="93" name="Freeform 93"/>
+            <p:cNvPr id="90" name="Freeform 90"/>
             <p:cNvSpPr/>
             <p:nvPr/>
           </p:nvSpPr>
@@ -15775,7 +15771,7 @@
         </p:sp>
         <p:sp>
           <p:nvSpPr>
-            <p:cNvPr id="94" name="Freeform 94"/>
+            <p:cNvPr id="91" name="Freeform 91"/>
             <p:cNvSpPr/>
             <p:nvPr/>
           </p:nvSpPr>
@@ -15838,7 +15834,7 @@
         </p:sp>
         <p:sp>
           <p:nvSpPr>
-            <p:cNvPr id="95" name="Freeform 95"/>
+            <p:cNvPr id="92" name="Freeform 92"/>
             <p:cNvSpPr/>
             <p:nvPr/>
           </p:nvSpPr>
@@ -15910,7 +15906,7 @@
         </p:sp>
         <p:sp>
           <p:nvSpPr>
-            <p:cNvPr id="96" name="Freeform 96"/>
+            <p:cNvPr id="93" name="Freeform 93"/>
             <p:cNvSpPr/>
             <p:nvPr/>
           </p:nvSpPr>
@@ -15982,7 +15978,7 @@
         </p:sp>
         <p:sp>
           <p:nvSpPr>
-            <p:cNvPr id="97" name="Freeform 97"/>
+            <p:cNvPr id="94" name="Freeform 94"/>
             <p:cNvSpPr/>
             <p:nvPr/>
           </p:nvSpPr>
@@ -16084,7 +16080,7 @@
         </p:sp>
         <p:sp>
           <p:nvSpPr>
-            <p:cNvPr id="98" name="Freeform 98"/>
+            <p:cNvPr id="95" name="Freeform 95"/>
             <p:cNvSpPr/>
             <p:nvPr/>
           </p:nvSpPr>
@@ -16210,7 +16206,7 @@
         </p:sp>
         <p:sp>
           <p:nvSpPr>
-            <p:cNvPr id="99" name="Freeform 99"/>
+            <p:cNvPr id="96" name="Freeform 96"/>
             <p:cNvSpPr/>
             <p:nvPr/>
           </p:nvSpPr>
@@ -16279,7 +16275,7 @@
         </p:sp>
         <p:sp>
           <p:nvSpPr>
-            <p:cNvPr id="100" name="Freeform 100"/>
+            <p:cNvPr id="97" name="Freeform 97"/>
             <p:cNvSpPr/>
             <p:nvPr/>
           </p:nvSpPr>
@@ -16360,7 +16356,7 @@
         </p:sp>
         <p:sp>
           <p:nvSpPr>
-            <p:cNvPr id="101" name="Freeform 101"/>
+            <p:cNvPr id="98" name="Freeform 98"/>
             <p:cNvSpPr/>
             <p:nvPr/>
           </p:nvSpPr>
@@ -16429,7 +16425,7 @@
         </p:sp>
         <p:sp>
           <p:nvSpPr>
-            <p:cNvPr id="102" name="Freeform 102"/>
+            <p:cNvPr id="99" name="Freeform 99"/>
             <p:cNvSpPr/>
             <p:nvPr/>
           </p:nvSpPr>
@@ -16492,7 +16488,7 @@
         </p:sp>
         <p:sp>
           <p:nvSpPr>
-            <p:cNvPr id="103" name="Freeform 103"/>
+            <p:cNvPr id="100" name="Freeform 100"/>
             <p:cNvSpPr/>
             <p:nvPr/>
           </p:nvSpPr>
@@ -16579,7 +16575,7 @@
         </p:sp>
         <p:sp>
           <p:nvSpPr>
-            <p:cNvPr id="104" name="Freeform 104"/>
+            <p:cNvPr id="101" name="Freeform 101"/>
             <p:cNvSpPr/>
             <p:nvPr/>
           </p:nvSpPr>
@@ -16648,7 +16644,7 @@
         </p:sp>
         <p:sp>
           <p:nvSpPr>
-            <p:cNvPr id="105" name="Freeform 105"/>
+            <p:cNvPr id="102" name="Freeform 102"/>
             <p:cNvSpPr/>
             <p:nvPr/>
           </p:nvSpPr>
@@ -16735,7 +16731,7 @@
         </p:sp>
         <p:sp>
           <p:nvSpPr>
-            <p:cNvPr id="106" name="Freeform 106"/>
+            <p:cNvPr id="103" name="Freeform 103"/>
             <p:cNvSpPr/>
             <p:nvPr/>
           </p:nvSpPr>
@@ -16810,7 +16806,7 @@
         </p:sp>
         <p:sp>
           <p:nvSpPr>
-            <p:cNvPr id="107" name="Freeform 107"/>
+            <p:cNvPr id="104" name="Freeform 104"/>
             <p:cNvSpPr/>
             <p:nvPr/>
           </p:nvSpPr>
@@ -16888,7 +16884,7 @@
         </p:sp>
         <p:sp>
           <p:nvSpPr>
-            <p:cNvPr id="108" name="Freeform 108"/>
+            <p:cNvPr id="105" name="Freeform 105"/>
             <p:cNvSpPr/>
             <p:nvPr/>
           </p:nvSpPr>
@@ -16960,7 +16956,7 @@
         </p:sp>
         <p:sp>
           <p:nvSpPr>
-            <p:cNvPr id="109" name="Freeform 109"/>
+            <p:cNvPr id="106" name="Freeform 106"/>
             <p:cNvSpPr/>
             <p:nvPr/>
           </p:nvSpPr>
@@ -17047,7 +17043,7 @@
         </p:sp>
         <p:sp>
           <p:nvSpPr>
-            <p:cNvPr id="110" name="Freeform 110"/>
+            <p:cNvPr id="107" name="Freeform 107"/>
             <p:cNvSpPr/>
             <p:nvPr/>
           </p:nvSpPr>
@@ -17122,7 +17118,7 @@
         </p:sp>
         <p:sp>
           <p:nvSpPr>
-            <p:cNvPr id="111" name="Freeform 111"/>
+            <p:cNvPr id="108" name="Freeform 108"/>
             <p:cNvSpPr/>
             <p:nvPr/>
           </p:nvSpPr>
@@ -17182,7 +17178,7 @@
         </p:sp>
         <p:sp>
           <p:nvSpPr>
-            <p:cNvPr id="112" name="Freeform 112"/>
+            <p:cNvPr id="109" name="Freeform 109"/>
             <p:cNvSpPr/>
             <p:nvPr/>
           </p:nvSpPr>
@@ -17254,7 +17250,7 @@
         </p:sp>
         <p:sp>
           <p:nvSpPr>
-            <p:cNvPr id="113" name="Freeform 113"/>
+            <p:cNvPr id="110" name="Freeform 110"/>
             <p:cNvSpPr/>
             <p:nvPr/>
           </p:nvSpPr>
@@ -17353,7 +17349,7 @@
         </p:sp>
         <p:sp>
           <p:nvSpPr>
-            <p:cNvPr id="114" name="Freeform 114"/>
+            <p:cNvPr id="111" name="Freeform 111"/>
             <p:cNvSpPr/>
             <p:nvPr/>
           </p:nvSpPr>
@@ -17446,7 +17442,7 @@
         </p:sp>
         <p:sp>
           <p:nvSpPr>
-            <p:cNvPr id="115" name="Freeform 115"/>
+            <p:cNvPr id="112" name="Freeform 112"/>
             <p:cNvSpPr/>
             <p:nvPr/>
           </p:nvSpPr>
@@ -17524,7 +17520,7 @@
         </p:sp>
         <p:sp>
           <p:nvSpPr>
-            <p:cNvPr id="116" name="Freeform 116"/>
+            <p:cNvPr id="113" name="Freeform 113"/>
             <p:cNvSpPr/>
             <p:nvPr/>
           </p:nvSpPr>
@@ -17584,7 +17580,7 @@
         </p:sp>
         <p:sp>
           <p:nvSpPr>
-            <p:cNvPr id="117" name="Freeform 117"/>
+            <p:cNvPr id="114" name="Freeform 114"/>
             <p:cNvSpPr/>
             <p:nvPr/>
           </p:nvSpPr>
@@ -17701,7 +17697,7 @@
         </p:sp>
         <p:sp>
           <p:nvSpPr>
-            <p:cNvPr id="118" name="Freeform 118"/>
+            <p:cNvPr id="115" name="Freeform 115"/>
             <p:cNvSpPr/>
             <p:nvPr/>
           </p:nvSpPr>
@@ -17797,7 +17793,7 @@
         </p:sp>
         <p:sp>
           <p:nvSpPr>
-            <p:cNvPr id="119" name="Freeform 119"/>
+            <p:cNvPr id="116" name="Freeform 116"/>
             <p:cNvSpPr/>
             <p:nvPr/>
           </p:nvSpPr>
@@ -17857,7 +17853,7 @@
         </p:sp>
         <p:sp>
           <p:nvSpPr>
-            <p:cNvPr id="120" name="Freeform 120"/>
+            <p:cNvPr id="117" name="Freeform 117"/>
             <p:cNvSpPr/>
             <p:nvPr/>
           </p:nvSpPr>
@@ -17935,7 +17931,7 @@
         </p:sp>
         <p:sp>
           <p:nvSpPr>
-            <p:cNvPr id="121" name="Freeform 121"/>
+            <p:cNvPr id="118" name="Freeform 118"/>
             <p:cNvSpPr/>
             <p:nvPr/>
           </p:nvSpPr>
@@ -18001,7 +17997,7 @@
         </p:sp>
         <p:sp>
           <p:nvSpPr>
-            <p:cNvPr id="122" name="Freeform 122"/>
+            <p:cNvPr id="119" name="Freeform 119"/>
             <p:cNvSpPr/>
             <p:nvPr/>
           </p:nvSpPr>
@@ -18073,7 +18069,7 @@
         </p:sp>
         <p:sp>
           <p:nvSpPr>
-            <p:cNvPr id="123" name="Freeform 123"/>
+            <p:cNvPr id="120" name="Freeform 120"/>
             <p:cNvSpPr/>
             <p:nvPr/>
           </p:nvSpPr>
@@ -18166,7 +18162,7 @@
         </p:sp>
         <p:sp>
           <p:nvSpPr>
-            <p:cNvPr id="124" name="Freeform 124"/>
+            <p:cNvPr id="121" name="Freeform 121"/>
             <p:cNvSpPr/>
             <p:nvPr/>
           </p:nvSpPr>
@@ -18241,7 +18237,7 @@
         </p:sp>
         <p:sp>
           <p:nvSpPr>
-            <p:cNvPr id="125" name="Freeform 125"/>
+            <p:cNvPr id="122" name="Freeform 122"/>
             <p:cNvSpPr/>
             <p:nvPr/>
           </p:nvSpPr>
@@ -18301,7 +18297,7 @@
         </p:sp>
         <p:sp>
           <p:nvSpPr>
-            <p:cNvPr id="126" name="Freeform 126"/>
+            <p:cNvPr id="123" name="Freeform 123"/>
             <p:cNvSpPr/>
             <p:nvPr/>
           </p:nvSpPr>
@@ -18397,7 +18393,7 @@
         </p:sp>
         <p:sp>
           <p:nvSpPr>
-            <p:cNvPr id="127" name="Freeform 127"/>
+            <p:cNvPr id="124" name="Freeform 124"/>
             <p:cNvSpPr/>
             <p:nvPr/>
           </p:nvSpPr>
@@ -18460,7 +18456,7 @@
         </p:sp>
         <p:sp>
           <p:nvSpPr>
-            <p:cNvPr id="128" name="Freeform 128"/>
+            <p:cNvPr id="125" name="Freeform 125"/>
             <p:cNvSpPr/>
             <p:nvPr/>
           </p:nvSpPr>
@@ -18523,7 +18519,7 @@
         </p:sp>
         <p:sp>
           <p:nvSpPr>
-            <p:cNvPr id="129" name="Freeform 129"/>
+            <p:cNvPr id="126" name="Freeform 126"/>
             <p:cNvSpPr/>
             <p:nvPr/>
           </p:nvSpPr>
@@ -18589,7 +18585,7 @@
         </p:sp>
         <p:sp>
           <p:nvSpPr>
-            <p:cNvPr id="130" name="Freeform 130"/>
+            <p:cNvPr id="127" name="Freeform 127"/>
             <p:cNvSpPr/>
             <p:nvPr/>
           </p:nvSpPr>
@@ -18655,7 +18651,7 @@
         </p:sp>
         <p:sp>
           <p:nvSpPr>
-            <p:cNvPr id="131" name="Freeform 131"/>
+            <p:cNvPr id="128" name="Freeform 128"/>
             <p:cNvSpPr/>
             <p:nvPr/>
           </p:nvSpPr>
@@ -18796,7 +18792,7 @@
         </p:sp>
         <p:sp>
           <p:nvSpPr>
-            <p:cNvPr id="132" name="Freeform 132"/>
+            <p:cNvPr id="129" name="Freeform 129"/>
             <p:cNvSpPr/>
             <p:nvPr/>
           </p:nvSpPr>
@@ -18856,7 +18852,7 @@
         </p:sp>
         <p:sp>
           <p:nvSpPr>
-            <p:cNvPr id="133" name="Freeform 133"/>
+            <p:cNvPr id="130" name="Freeform 130"/>
             <p:cNvSpPr/>
             <p:nvPr/>
           </p:nvSpPr>
@@ -18955,7 +18951,7 @@
         </p:sp>
         <p:sp>
           <p:nvSpPr>
-            <p:cNvPr id="134" name="Freeform 134"/>
+            <p:cNvPr id="131" name="Freeform 131"/>
             <p:cNvSpPr/>
             <p:nvPr/>
           </p:nvSpPr>
@@ -19006,7 +19002,7 @@
         </p:sp>
         <p:sp>
           <p:nvSpPr>
-            <p:cNvPr id="135" name="Freeform 135"/>
+            <p:cNvPr id="132" name="Freeform 132"/>
             <p:cNvSpPr/>
             <p:nvPr/>
           </p:nvSpPr>
@@ -19069,7 +19065,7 @@
         </p:sp>
         <p:sp>
           <p:nvSpPr>
-            <p:cNvPr id="136" name="Freeform 136"/>
+            <p:cNvPr id="133" name="Freeform 133"/>
             <p:cNvSpPr/>
             <p:nvPr/>
           </p:nvSpPr>
@@ -19147,7 +19143,7 @@
         </p:sp>
         <p:sp>
           <p:nvSpPr>
-            <p:cNvPr id="137" name="Freeform 137"/>
+            <p:cNvPr id="134" name="Freeform 134"/>
             <p:cNvSpPr/>
             <p:nvPr/>
           </p:nvSpPr>
@@ -19216,7 +19212,7 @@
         </p:sp>
         <p:sp>
           <p:nvSpPr>
-            <p:cNvPr id="138" name="Freeform 138"/>
+            <p:cNvPr id="135" name="Freeform 135"/>
             <p:cNvSpPr/>
             <p:nvPr/>
           </p:nvSpPr>
@@ -19288,7 +19284,7 @@
         </p:sp>
         <p:sp>
           <p:nvSpPr>
-            <p:cNvPr id="139" name="Freeform 139"/>
+            <p:cNvPr id="136" name="Freeform 136"/>
             <p:cNvSpPr/>
             <p:nvPr/>
           </p:nvSpPr>
@@ -19348,7 +19344,7 @@
         </p:sp>
         <p:sp>
           <p:nvSpPr>
-            <p:cNvPr id="140" name="Freeform 140"/>
+            <p:cNvPr id="137" name="Freeform 137"/>
             <p:cNvSpPr/>
             <p:nvPr/>
           </p:nvSpPr>
@@ -19423,7 +19419,7 @@
         </p:sp>
         <p:sp>
           <p:nvSpPr>
-            <p:cNvPr id="141" name="Freeform 141"/>
+            <p:cNvPr id="138" name="Freeform 138"/>
             <p:cNvSpPr/>
             <p:nvPr/>
           </p:nvSpPr>
@@ -19492,7 +19488,7 @@
         </p:sp>
         <p:sp>
           <p:nvSpPr>
-            <p:cNvPr id="142" name="Freeform 142"/>
+            <p:cNvPr id="139" name="Freeform 139"/>
             <p:cNvSpPr/>
             <p:nvPr/>
           </p:nvSpPr>
@@ -19558,7 +19554,7 @@
         </p:sp>
         <p:sp>
           <p:nvSpPr>
-            <p:cNvPr id="143" name="Freeform 143"/>
+            <p:cNvPr id="140" name="Freeform 140"/>
             <p:cNvSpPr/>
             <p:nvPr/>
           </p:nvSpPr>
@@ -19627,7 +19623,7 @@
         </p:sp>
         <p:sp>
           <p:nvSpPr>
-            <p:cNvPr id="144" name="Freeform 144"/>
+            <p:cNvPr id="141" name="Freeform 141"/>
             <p:cNvSpPr/>
             <p:nvPr/>
           </p:nvSpPr>
@@ -19687,7 +19683,7 @@
         </p:sp>
         <p:sp>
           <p:nvSpPr>
-            <p:cNvPr id="145" name="Freeform 145"/>
+            <p:cNvPr id="142" name="Freeform 142"/>
             <p:cNvSpPr/>
             <p:nvPr/>
           </p:nvSpPr>
@@ -19756,7 +19752,7 @@
         </p:sp>
         <p:sp>
           <p:nvSpPr>
-            <p:cNvPr id="146" name="Freeform 146"/>
+            <p:cNvPr id="143" name="Freeform 143"/>
             <p:cNvSpPr/>
             <p:nvPr/>
           </p:nvSpPr>
@@ -19816,7 +19812,7 @@
         </p:sp>
         <p:sp>
           <p:nvSpPr>
-            <p:cNvPr id="147" name="Freeform 147"/>
+            <p:cNvPr id="144" name="Freeform 144"/>
             <p:cNvSpPr/>
             <p:nvPr/>
           </p:nvSpPr>
@@ -19882,7 +19878,7 @@
         </p:sp>
         <p:sp>
           <p:nvSpPr>
-            <p:cNvPr id="148" name="Freeform 148"/>
+            <p:cNvPr id="145" name="Freeform 145"/>
             <p:cNvSpPr/>
             <p:nvPr/>
           </p:nvSpPr>
@@ -19942,7 +19938,7 @@
         </p:sp>
         <p:sp>
           <p:nvSpPr>
-            <p:cNvPr id="149" name="Freeform 149"/>
+            <p:cNvPr id="146" name="Freeform 146"/>
             <p:cNvSpPr/>
             <p:nvPr/>
           </p:nvSpPr>
@@ -19980,7 +19976,7 @@
         </p:sp>
         <p:sp>
           <p:nvSpPr>
-            <p:cNvPr id="150" name="Ellipse 150"/>
+            <p:cNvPr id="147" name="Ellipse 147"/>
             <p:cNvSpPr/>
             <p:nvPr/>
           </p:nvSpPr>
@@ -20002,7 +19998,7 @@
         </p:sp>
         <p:sp>
           <p:nvSpPr>
-            <p:cNvPr id="151" name="Ellipse 151"/>
+            <p:cNvPr id="148" name="Ellipse 148"/>
             <p:cNvSpPr/>
             <p:nvPr/>
           </p:nvSpPr>
@@ -20024,7 +20020,7 @@
         </p:sp>
         <p:sp>
           <p:nvSpPr>
-            <p:cNvPr id="152" name="TextBox 152"/>
+            <p:cNvPr id="149" name="TextBox 149"/>
             <p:cNvSpPr txBox="1"/>
             <p:nvPr/>
           </p:nvSpPr>
@@ -20064,7 +20060,7 @@
         </p:sp>
         <p:sp>
           <p:nvSpPr>
-            <p:cNvPr id="153" name="Ellipse 153"/>
+            <p:cNvPr id="150" name="Ellipse 150"/>
             <p:cNvSpPr/>
             <p:nvPr/>
           </p:nvSpPr>
@@ -20086,7 +20082,7 @@
         </p:sp>
         <p:sp>
           <p:nvSpPr>
-            <p:cNvPr id="154" name="Ellipse 154"/>
+            <p:cNvPr id="151" name="Ellipse 151"/>
             <p:cNvSpPr/>
             <p:nvPr/>
           </p:nvSpPr>
@@ -20108,7 +20104,7 @@
         </p:sp>
         <p:sp>
           <p:nvSpPr>
-            <p:cNvPr id="155" name="TextBox 155"/>
+            <p:cNvPr id="152" name="TextBox 152"/>
             <p:cNvSpPr txBox="1"/>
             <p:nvPr/>
           </p:nvSpPr>
@@ -21902,7 +21898,7 @@
           <p:spPr>
             <a:xfrm>
               <a:off x="7344156" y="5784850"/>
-              <a:ext cx="3168396" cy="352044"/>
+              <a:ext cx="2441448" cy="352044"/>
             </a:xfrm>
             <a:prstGeom prst="rect">
               <a:avLst/>
@@ -21928,7 +21924,7 @@
                   <a:ea typeface="+mn-ea"/>
                   <a:cs typeface="+mn-cs"/>
                 </a:rPr>
-                <a:t>宿舍不一定抽得到，先找房子</a:t>
+                <a:t>宿舍很難抽，早點找房</a:t>
               </a:r>
             </a:p>
           </p:txBody>
@@ -22250,16 +22246,16 @@
       </p:grpSp>
       <p:grpSp>
         <p:nvGrpSpPr>
-          <p:cNvPr id="15" name="claim"/>
+          <p:cNvPr id="14" name="claim"/>
           <p:cNvGrpSpPr/>
           <p:nvPr/>
         </p:nvGrpSpPr>
         <p:grpSpPr>
           <a:xfrm>
-            <a:off x="441960" y="1346200"/>
-            <a:ext cx="6088380" cy="606425"/>
-            <a:chOff x="441960" y="1346200"/>
-            <a:chExt cx="6088380" cy="606425"/>
+            <a:off x="440436" y="1231900"/>
+            <a:ext cx="4031742" cy="645414"/>
+            <a:chOff x="440436" y="1231900"/>
+            <a:chExt cx="4031742" cy="645414"/>
           </a:xfrm>
         </p:grpSpPr>
         <p:sp>
@@ -22270,8 +22266,8 @@
           </p:nvSpPr>
           <p:spPr>
             <a:xfrm>
-              <a:off x="441960" y="1346200"/>
-              <a:ext cx="6088380" cy="586740"/>
+              <a:off x="440436" y="1231900"/>
+              <a:ext cx="4031742" cy="645414"/>
             </a:xfrm>
             <a:prstGeom prst="rect">
               <a:avLst/>
@@ -22289,7 +22285,7 @@
             <a:p>
               <a:pPr algn="l"/>
               <a:r>
-                <a:rPr lang="zh-TW" sz="3000" b="1" dirty="0">
+                <a:rPr lang="zh-TW" sz="3300" b="1" dirty="0">
                   <a:solidFill>
                     <a:srgbClr val="0A1138"/>
                   </a:solidFill>
@@ -22297,21 +22293,36 @@
                   <a:ea typeface="+mn-ea"/>
                   <a:cs typeface="+mn-cs"/>
                 </a:rPr>
-                <a:t>工程的缺最多，合規的缺最沒人補</a:t>
+                <a:t>合規的缺，沒人去投</a:t>
               </a:r>
             </a:p>
           </p:txBody>
         </p:sp>
-        <p:sp>
-          <p:nvSpPr>
-            <p:cNvPr id="14" name="Rectangle 14"/>
+      </p:grpSp>
+      <p:grpSp>
+        <p:nvGrpSpPr>
+          <p:cNvPr id="20" name="legend"/>
+          <p:cNvGrpSpPr/>
+          <p:nvPr/>
+        </p:nvGrpSpPr>
+        <p:grpSpPr>
+          <a:xfrm>
+            <a:off x="457200" y="1898650"/>
+            <a:ext cx="5286756" cy="278702"/>
+            <a:chOff x="457200" y="1898650"/>
+            <a:chExt cx="5286756" cy="278702"/>
+          </a:xfrm>
+        </p:grpSpPr>
+        <p:sp>
+          <p:nvSpPr>
+            <p:cNvPr id="15" name="Rectangle 15"/>
             <p:cNvSpPr/>
             <p:nvPr/>
           </p:nvSpPr>
           <p:spPr>
             <a:xfrm>
-              <a:off x="457200" y="1905000"/>
-              <a:ext cx="914400" cy="47625"/>
+              <a:off x="457200" y="1943100"/>
+              <a:ext cx="171450" cy="171450"/>
             </a:xfrm>
             <a:prstGeom prst="rect">
               <a:avLst/>
@@ -22324,21 +22335,6 @@
             </a:ln>
           </p:spPr>
         </p:sp>
-      </p:grpSp>
-      <p:grpSp>
-        <p:nvGrpSpPr>
-          <p:cNvPr id="17" name="axis"/>
-          <p:cNvGrpSpPr/>
-          <p:nvPr/>
-        </p:nvGrpSpPr>
-        <p:grpSpPr>
-          <a:xfrm>
-            <a:off x="450723" y="1981200"/>
-            <a:ext cx="2597658" cy="250317"/>
-            <a:chOff x="450723" y="1981200"/>
-            <a:chExt cx="2597658" cy="250317"/>
-          </a:xfrm>
-        </p:grpSpPr>
         <p:sp>
           <p:nvSpPr>
             <p:cNvPr id="16" name="TextBox 16"/>
@@ -22347,8 +22343,8 @@
           </p:nvSpPr>
           <p:spPr>
             <a:xfrm>
-              <a:off x="450723" y="1981200"/>
-              <a:ext cx="2597658" cy="250317"/>
+              <a:off x="716661" y="1898650"/>
+              <a:ext cx="396799" cy="278702"/>
             </a:xfrm>
             <a:prstGeom prst="rect">
               <a:avLst/>
@@ -22366,34 +22362,41 @@
             <a:p>
               <a:pPr algn="l"/>
               <a:r>
-                <a:rPr lang="zh-TW" sz="1280" dirty="0">
+                <a:rPr lang="zh-TW" sz="1420" b="1" dirty="0">
                   <a:solidFill>
-                    <a:srgbClr val="6B6B6B"/>
+                    <a:srgbClr val="0A1138"/>
                   </a:solidFill>
                   <a:latin typeface="+mn-lt"/>
                   <a:ea typeface="+mn-ea"/>
                   <a:cs typeface="+mn-cs"/>
                 </a:rPr>
-                <a:t>占平台全部職缺／全部應徵的比例</a:t>
+                <a:t>職缺</a:t>
               </a:r>
             </a:p>
           </p:txBody>
         </p:sp>
-      </p:grpSp>
-      <p:grpSp>
-        <p:nvGrpSpPr>
-          <p:cNvPr id="45" name="bars"/>
-          <p:cNvGrpSpPr/>
-          <p:nvPr/>
-        </p:nvGrpSpPr>
-        <p:grpSpPr>
-          <a:xfrm>
-            <a:off x="448437" y="2127250"/>
-            <a:ext cx="5497241" cy="3928301"/>
-            <a:chOff x="448437" y="2127250"/>
-            <a:chExt cx="5497241" cy="3928301"/>
-          </a:xfrm>
-        </p:grpSpPr>
+        <p:sp>
+          <p:nvSpPr>
+            <p:cNvPr id="17" name="Rectangle 17"/>
+            <p:cNvSpPr/>
+            <p:nvPr/>
+          </p:nvSpPr>
+          <p:spPr>
+            <a:xfrm>
+              <a:off x="2266950" y="1943100"/>
+              <a:ext cx="171450" cy="171450"/>
+            </a:xfrm>
+            <a:prstGeom prst="rect">
+              <a:avLst/>
+            </a:prstGeom>
+            <a:solidFill>
+              <a:srgbClr val="0A1138"/>
+            </a:solidFill>
+            <a:ln>
+              <a:noFill/>
+            </a:ln>
+          </p:spPr>
+        </p:sp>
         <p:sp>
           <p:nvSpPr>
             <p:cNvPr id="18" name="TextBox 18"/>
@@ -22402,8 +22405,8 @@
           </p:nvSpPr>
           <p:spPr>
             <a:xfrm>
-              <a:off x="448437" y="2127250"/>
-              <a:ext cx="1869897" cy="337376"/>
+              <a:off x="2526411" y="1898650"/>
+              <a:ext cx="396799" cy="278702"/>
             </a:xfrm>
             <a:prstGeom prst="rect">
               <a:avLst/>
@@ -22421,7 +22424,7 @@
             <a:p>
               <a:pPr algn="l"/>
               <a:r>
-                <a:rPr lang="ja-JP" sz="1720" b="1" dirty="0">
+                <a:rPr lang="zh-TW" sz="1420" b="1" dirty="0">
                   <a:solidFill>
                     <a:srgbClr val="0A1138"/>
                   </a:solidFill>
@@ -22429,7 +22432,7 @@
                   <a:ea typeface="+mn-ea"/>
                   <a:cs typeface="+mn-cs"/>
                 </a:rPr>
-                <a:t>合規・法務・風控</a:t>
+                <a:t>應徵</a:t>
               </a:r>
             </a:p>
           </p:txBody>
@@ -22442,8 +22445,8 @@
           </p:nvSpPr>
           <p:spPr>
             <a:xfrm>
-              <a:off x="451104" y="2590800"/>
-              <a:ext cx="335280" cy="234696"/>
+              <a:off x="3308604" y="1924050"/>
+              <a:ext cx="2435352" cy="234696"/>
             </a:xfrm>
             <a:prstGeom prst="rect">
               <a:avLst/>
@@ -22469,45 +22472,284 @@
                   <a:ea typeface="+mn-ea"/>
                   <a:cs typeface="+mn-cs"/>
                 </a:rPr>
-                <a:t>職缺</a:t>
+                <a:t>占平台全部職缺／全部應徵的比例</a:t>
               </a:r>
             </a:p>
           </p:txBody>
         </p:sp>
-        <p:sp>
-          <p:nvSpPr>
-            <p:cNvPr id="20" name="Rectangle 20"/>
+      </p:grpSp>
+      <p:grpSp>
+        <p:nvGrpSpPr>
+          <p:cNvPr id="44" name="chart"/>
+          <p:cNvGrpSpPr/>
+          <p:nvPr/>
+        </p:nvGrpSpPr>
+        <p:grpSpPr>
+          <a:xfrm>
+            <a:off x="488457" y="2374900"/>
+            <a:ext cx="6179043" cy="3725291"/>
+            <a:chOff x="488457" y="2374900"/>
+            <a:chExt cx="6179043" cy="3725291"/>
+          </a:xfrm>
+        </p:grpSpPr>
+        <p:sp>
+          <p:nvSpPr>
+            <p:cNvPr id="21" name="Rectangle 21"/>
             <p:cNvSpPr/>
             <p:nvPr/>
           </p:nvSpPr>
           <p:spPr>
             <a:xfrm>
-              <a:off x="990600" y="2571750"/>
-              <a:ext cx="4095750" cy="228600"/>
+              <a:off x="876300" y="5657850"/>
+              <a:ext cx="5791200" cy="28575"/>
             </a:xfrm>
             <a:prstGeom prst="rect">
               <a:avLst/>
             </a:prstGeom>
             <a:solidFill>
-              <a:srgbClr val="FFFFFF"/>
+              <a:srgbClr val="0A1138"/>
             </a:solidFill>
-            <a:ln w="28575">
-              <a:solidFill>
-                <a:srgbClr val="0A1138"/>
-              </a:solidFill>
-            </a:ln>
-          </p:spPr>
-        </p:sp>
-        <p:sp>
-          <p:nvSpPr>
-            <p:cNvPr id="21" name="Rectangle 21"/>
+            <a:ln>
+              <a:noFill/>
+            </a:ln>
+          </p:spPr>
+        </p:sp>
+        <p:sp>
+          <p:nvSpPr>
+            <p:cNvPr id="22" name="TextBox 22"/>
+            <p:cNvSpPr txBox="1"/>
+            <p:nvPr/>
+          </p:nvSpPr>
+          <p:spPr>
+            <a:xfrm>
+              <a:off x="571383" y="5575300"/>
+              <a:ext cx="177282" cy="220028"/>
+            </a:xfrm>
+            <a:prstGeom prst="rect">
+              <a:avLst/>
+            </a:prstGeom>
+            <a:noFill/>
+            <a:ln>
+              <a:noFill/>
+            </a:ln>
+          </p:spPr>
+          <p:txBody>
+            <a:bodyPr wrap="none" lIns="0" tIns="0" rIns="0" bIns="0" anchor="t" anchorCtr="0">
+              <a:spAutoFit/>
+            </a:bodyPr>
+            <a:lstStyle/>
+            <a:p>
+              <a:pPr algn="r"/>
+              <a:r>
+                <a:rPr lang="zh-TW" sz="1120" dirty="0">
+                  <a:solidFill>
+                    <a:srgbClr val="6B6B6B"/>
+                  </a:solidFill>
+                  <a:latin typeface="Consolas"/>
+                  <a:ea typeface="Consolas"/>
+                  <a:cs typeface="Consolas"/>
+                </a:rPr>
+                <a:t>0%</a:t>
+              </a:r>
+            </a:p>
+          </p:txBody>
+        </p:sp>
+        <p:sp>
+          <p:nvSpPr>
+            <p:cNvPr id="23" name="Rectangle 23"/>
             <p:cNvSpPr/>
             <p:nvPr/>
           </p:nvSpPr>
           <p:spPr>
             <a:xfrm>
-              <a:off x="1019175" y="2600325"/>
-              <a:ext cx="1009650" cy="171450"/>
+              <a:off x="876300" y="4591050"/>
+              <a:ext cx="5791200" cy="19050"/>
+            </a:xfrm>
+            <a:prstGeom prst="rect">
+              <a:avLst/>
+            </a:prstGeom>
+            <a:solidFill>
+              <a:srgbClr val="C7CEE4"/>
+            </a:solidFill>
+            <a:ln>
+              <a:noFill/>
+            </a:ln>
+          </p:spPr>
+        </p:sp>
+        <p:sp>
+          <p:nvSpPr>
+            <p:cNvPr id="24" name="TextBox 24"/>
+            <p:cNvSpPr txBox="1"/>
+            <p:nvPr/>
+          </p:nvSpPr>
+          <p:spPr>
+            <a:xfrm>
+              <a:off x="488457" y="4508500"/>
+              <a:ext cx="260208" cy="220028"/>
+            </a:xfrm>
+            <a:prstGeom prst="rect">
+              <a:avLst/>
+            </a:prstGeom>
+            <a:noFill/>
+            <a:ln>
+              <a:noFill/>
+            </a:ln>
+          </p:spPr>
+          <p:txBody>
+            <a:bodyPr wrap="none" lIns="0" tIns="0" rIns="0" bIns="0" anchor="t" anchorCtr="0">
+              <a:spAutoFit/>
+            </a:bodyPr>
+            <a:lstStyle/>
+            <a:p>
+              <a:pPr algn="r"/>
+              <a:r>
+                <a:rPr lang="zh-TW" sz="1120" dirty="0">
+                  <a:solidFill>
+                    <a:srgbClr val="6B6B6B"/>
+                  </a:solidFill>
+                  <a:latin typeface="Consolas"/>
+                  <a:ea typeface="Consolas"/>
+                  <a:cs typeface="Consolas"/>
+                </a:rPr>
+                <a:t>10%</a:t>
+              </a:r>
+            </a:p>
+          </p:txBody>
+        </p:sp>
+        <p:sp>
+          <p:nvSpPr>
+            <p:cNvPr id="25" name="Rectangle 25"/>
+            <p:cNvSpPr/>
+            <p:nvPr/>
+          </p:nvSpPr>
+          <p:spPr>
+            <a:xfrm>
+              <a:off x="876300" y="3524250"/>
+              <a:ext cx="5791200" cy="19050"/>
+            </a:xfrm>
+            <a:prstGeom prst="rect">
+              <a:avLst/>
+            </a:prstGeom>
+            <a:solidFill>
+              <a:srgbClr val="C7CEE4"/>
+            </a:solidFill>
+            <a:ln>
+              <a:noFill/>
+            </a:ln>
+          </p:spPr>
+        </p:sp>
+        <p:sp>
+          <p:nvSpPr>
+            <p:cNvPr id="26" name="TextBox 26"/>
+            <p:cNvSpPr txBox="1"/>
+            <p:nvPr/>
+          </p:nvSpPr>
+          <p:spPr>
+            <a:xfrm>
+              <a:off x="488457" y="3441700"/>
+              <a:ext cx="260208" cy="220028"/>
+            </a:xfrm>
+            <a:prstGeom prst="rect">
+              <a:avLst/>
+            </a:prstGeom>
+            <a:noFill/>
+            <a:ln>
+              <a:noFill/>
+            </a:ln>
+          </p:spPr>
+          <p:txBody>
+            <a:bodyPr wrap="none" lIns="0" tIns="0" rIns="0" bIns="0" anchor="t" anchorCtr="0">
+              <a:spAutoFit/>
+            </a:bodyPr>
+            <a:lstStyle/>
+            <a:p>
+              <a:pPr algn="r"/>
+              <a:r>
+                <a:rPr lang="zh-TW" sz="1120" dirty="0">
+                  <a:solidFill>
+                    <a:srgbClr val="6B6B6B"/>
+                  </a:solidFill>
+                  <a:latin typeface="Consolas"/>
+                  <a:ea typeface="Consolas"/>
+                  <a:cs typeface="Consolas"/>
+                </a:rPr>
+                <a:t>20%</a:t>
+              </a:r>
+            </a:p>
+          </p:txBody>
+        </p:sp>
+        <p:sp>
+          <p:nvSpPr>
+            <p:cNvPr id="27" name="Rectangle 27"/>
+            <p:cNvSpPr/>
+            <p:nvPr/>
+          </p:nvSpPr>
+          <p:spPr>
+            <a:xfrm>
+              <a:off x="876300" y="2457450"/>
+              <a:ext cx="5791200" cy="19050"/>
+            </a:xfrm>
+            <a:prstGeom prst="rect">
+              <a:avLst/>
+            </a:prstGeom>
+            <a:solidFill>
+              <a:srgbClr val="C7CEE4"/>
+            </a:solidFill>
+            <a:ln>
+              <a:noFill/>
+            </a:ln>
+          </p:spPr>
+        </p:sp>
+        <p:sp>
+          <p:nvSpPr>
+            <p:cNvPr id="28" name="TextBox 28"/>
+            <p:cNvSpPr txBox="1"/>
+            <p:nvPr/>
+          </p:nvSpPr>
+          <p:spPr>
+            <a:xfrm>
+              <a:off x="488457" y="2374900"/>
+              <a:ext cx="260208" cy="220028"/>
+            </a:xfrm>
+            <a:prstGeom prst="rect">
+              <a:avLst/>
+            </a:prstGeom>
+            <a:noFill/>
+            <a:ln>
+              <a:noFill/>
+            </a:ln>
+          </p:spPr>
+          <p:txBody>
+            <a:bodyPr wrap="none" lIns="0" tIns="0" rIns="0" bIns="0" anchor="t" anchorCtr="0">
+              <a:spAutoFit/>
+            </a:bodyPr>
+            <a:lstStyle/>
+            <a:p>
+              <a:pPr algn="r"/>
+              <a:r>
+                <a:rPr lang="zh-TW" sz="1120" dirty="0">
+                  <a:solidFill>
+                    <a:srgbClr val="6B6B6B"/>
+                  </a:solidFill>
+                  <a:latin typeface="Consolas"/>
+                  <a:ea typeface="Consolas"/>
+                  <a:cs typeface="Consolas"/>
+                </a:rPr>
+                <a:t>30%</a:t>
+              </a:r>
+            </a:p>
+          </p:txBody>
+        </p:sp>
+        <p:sp>
+          <p:nvSpPr>
+            <p:cNvPr id="29" name="Rectangle 29"/>
+            <p:cNvSpPr/>
+            <p:nvPr/>
+          </p:nvSpPr>
+          <p:spPr>
+            <a:xfrm>
+              <a:off x="1369187" y="4924425"/>
+              <a:ext cx="424688" cy="733425"/>
             </a:xfrm>
             <a:prstGeom prst="rect">
               <a:avLst/>
@@ -22522,14 +22764,14 @@
         </p:sp>
         <p:sp>
           <p:nvSpPr>
-            <p:cNvPr id="22" name="TextBox 22"/>
+            <p:cNvPr id="30" name="TextBox 30"/>
             <p:cNvSpPr txBox="1"/>
             <p:nvPr/>
           </p:nvSpPr>
           <p:spPr>
             <a:xfrm>
-              <a:off x="5210937" y="2536825"/>
-              <a:ext cx="601023" cy="337376"/>
+              <a:off x="1305529" y="4600575"/>
+              <a:ext cx="552005" cy="308991"/>
             </a:xfrm>
             <a:prstGeom prst="rect">
               <a:avLst/>
@@ -22545,9 +22787,9 @@
             </a:bodyPr>
             <a:lstStyle/>
             <a:p>
-              <a:pPr algn="l"/>
+              <a:pPr algn="ctr"/>
               <a:r>
-                <a:rPr lang="zh-TW" sz="1720" b="1" dirty="0">
+                <a:rPr lang="zh-TW" sz="1580" b="1" dirty="0">
                   <a:solidFill>
                     <a:srgbClr val="D21540"/>
                   </a:solidFill>
@@ -22562,14 +22804,36 @@
         </p:sp>
         <p:sp>
           <p:nvSpPr>
-            <p:cNvPr id="23" name="TextBox 23"/>
+            <p:cNvPr id="31" name="Rectangle 31"/>
+            <p:cNvSpPr/>
+            <p:nvPr/>
+          </p:nvSpPr>
+          <p:spPr>
+            <a:xfrm>
+              <a:off x="1889125" y="5432933"/>
+              <a:ext cx="424688" cy="224917"/>
+            </a:xfrm>
+            <a:prstGeom prst="rect">
+              <a:avLst/>
+            </a:prstGeom>
+            <a:solidFill>
+              <a:srgbClr val="0A1138"/>
+            </a:solidFill>
+            <a:ln>
+              <a:noFill/>
+            </a:ln>
+          </p:spPr>
+        </p:sp>
+        <p:sp>
+          <p:nvSpPr>
+            <p:cNvPr id="32" name="TextBox 32"/>
             <p:cNvSpPr txBox="1"/>
             <p:nvPr/>
           </p:nvSpPr>
           <p:spPr>
             <a:xfrm>
-              <a:off x="451104" y="2990850"/>
-              <a:ext cx="335280" cy="234696"/>
+              <a:off x="1825467" y="5109083"/>
+              <a:ext cx="552005" cy="308991"/>
             </a:xfrm>
             <a:prstGeom prst="rect">
               <a:avLst/>
@@ -22585,97 +22849,11 @@
             </a:bodyPr>
             <a:lstStyle/>
             <a:p>
-              <a:pPr algn="l"/>
+              <a:pPr algn="ctr"/>
               <a:r>
-                <a:rPr lang="zh-TW" sz="1200" dirty="0">
+                <a:rPr lang="zh-TW" sz="1580" b="1" dirty="0">
                   <a:solidFill>
-                    <a:srgbClr val="6B6B6B"/>
-                  </a:solidFill>
-                  <a:latin typeface="+mn-lt"/>
-                  <a:ea typeface="+mn-ea"/>
-                  <a:cs typeface="+mn-cs"/>
-                </a:rPr>
-                <a:t>應徵</a:t>
-              </a:r>
-            </a:p>
-          </p:txBody>
-        </p:sp>
-        <p:sp>
-          <p:nvSpPr>
-            <p:cNvPr id="24" name="Rectangle 24"/>
-            <p:cNvSpPr/>
-            <p:nvPr/>
-          </p:nvSpPr>
-          <p:spPr>
-            <a:xfrm>
-              <a:off x="990600" y="2971800"/>
-              <a:ext cx="4095750" cy="228600"/>
-            </a:xfrm>
-            <a:prstGeom prst="rect">
-              <a:avLst/>
-            </a:prstGeom>
-            <a:solidFill>
-              <a:srgbClr val="FFFFFF"/>
-            </a:solidFill>
-            <a:ln w="28575">
-              <a:solidFill>
-                <a:srgbClr val="0A1138"/>
-              </a:solidFill>
-            </a:ln>
-          </p:spPr>
-        </p:sp>
-        <p:sp>
-          <p:nvSpPr>
-            <p:cNvPr id="25" name="Rectangle 25"/>
-            <p:cNvSpPr/>
-            <p:nvPr/>
-          </p:nvSpPr>
-          <p:spPr>
-            <a:xfrm>
-              <a:off x="1019175" y="3000375"/>
-              <a:ext cx="314325" cy="171450"/>
-            </a:xfrm>
-            <a:prstGeom prst="rect">
-              <a:avLst/>
-            </a:prstGeom>
-            <a:solidFill>
-              <a:srgbClr val="93A0C9"/>
-            </a:solidFill>
-            <a:ln>
-              <a:noFill/>
-            </a:ln>
-          </p:spPr>
-        </p:sp>
-        <p:sp>
-          <p:nvSpPr>
-            <p:cNvPr id="26" name="TextBox 26"/>
-            <p:cNvSpPr txBox="1"/>
-            <p:nvPr/>
-          </p:nvSpPr>
-          <p:spPr>
-            <a:xfrm>
-              <a:off x="5210937" y="2936875"/>
-              <a:ext cx="601023" cy="337376"/>
-            </a:xfrm>
-            <a:prstGeom prst="rect">
-              <a:avLst/>
-            </a:prstGeom>
-            <a:noFill/>
-            <a:ln>
-              <a:noFill/>
-            </a:ln>
-          </p:spPr>
-          <p:txBody>
-            <a:bodyPr wrap="none" lIns="0" tIns="0" rIns="0" bIns="0" anchor="t" anchorCtr="0">
-              <a:spAutoFit/>
-            </a:bodyPr>
-            <a:lstStyle/>
-            <a:p>
-              <a:pPr algn="l"/>
-              <a:r>
-                <a:rPr lang="zh-TW" sz="1720" b="1" dirty="0">
-                  <a:solidFill>
-                    <a:srgbClr val="5A6AA8"/>
+                    <a:srgbClr val="0A1138"/>
                   </a:solidFill>
                   <a:latin typeface="+mn-lt"/>
                   <a:ea typeface="+mn-ea"/>
@@ -22688,14 +22866,14 @@
         </p:sp>
         <p:sp>
           <p:nvSpPr>
-            <p:cNvPr id="27" name="TextBox 27"/>
+            <p:cNvPr id="33" name="TextBox 33"/>
             <p:cNvSpPr txBox="1"/>
             <p:nvPr/>
           </p:nvSpPr>
           <p:spPr>
             <a:xfrm>
-              <a:off x="448437" y="3517900"/>
-              <a:ext cx="480619" cy="337376"/>
+              <a:off x="982701" y="5791200"/>
+              <a:ext cx="1717599" cy="308991"/>
             </a:xfrm>
             <a:prstGeom prst="rect">
               <a:avLst/>
@@ -22711,9 +22889,173 @@
             </a:bodyPr>
             <a:lstStyle/>
             <a:p>
-              <a:pPr algn="l"/>
+              <a:pPr algn="ctr"/>
               <a:r>
-                <a:rPr lang="zh-TW" sz="1720" b="1" dirty="0">
+                <a:rPr lang="ja-JP" sz="1580" b="1" dirty="0">
+                  <a:solidFill>
+                    <a:srgbClr val="0A1138"/>
+                  </a:solidFill>
+                  <a:latin typeface="+mn-lt"/>
+                  <a:ea typeface="+mn-ea"/>
+                  <a:cs typeface="+mn-cs"/>
+                </a:rPr>
+                <a:t>合規・法務・風控</a:t>
+              </a:r>
+            </a:p>
+          </p:txBody>
+        </p:sp>
+        <p:sp>
+          <p:nvSpPr>
+            <p:cNvPr id="34" name="Rectangle 34"/>
+            <p:cNvSpPr/>
+            <p:nvPr/>
+          </p:nvSpPr>
+          <p:spPr>
+            <a:xfrm>
+              <a:off x="3299587" y="2997962"/>
+              <a:ext cx="424688" cy="2659888"/>
+            </a:xfrm>
+            <a:prstGeom prst="rect">
+              <a:avLst/>
+            </a:prstGeom>
+            <a:solidFill>
+              <a:srgbClr val="D21540"/>
+            </a:solidFill>
+            <a:ln>
+              <a:noFill/>
+            </a:ln>
+          </p:spPr>
+        </p:sp>
+        <p:sp>
+          <p:nvSpPr>
+            <p:cNvPr id="35" name="TextBox 35"/>
+            <p:cNvSpPr txBox="1"/>
+            <p:nvPr/>
+          </p:nvSpPr>
+          <p:spPr>
+            <a:xfrm>
+              <a:off x="3174511" y="2674112"/>
+              <a:ext cx="674839" cy="308991"/>
+            </a:xfrm>
+            <a:prstGeom prst="rect">
+              <a:avLst/>
+            </a:prstGeom>
+            <a:noFill/>
+            <a:ln>
+              <a:noFill/>
+            </a:ln>
+          </p:spPr>
+          <p:txBody>
+            <a:bodyPr wrap="none" lIns="0" tIns="0" rIns="0" bIns="0" anchor="t" anchorCtr="0">
+              <a:spAutoFit/>
+            </a:bodyPr>
+            <a:lstStyle/>
+            <a:p>
+              <a:pPr algn="ctr"/>
+              <a:r>
+                <a:rPr lang="zh-TW" sz="1580" b="1" dirty="0">
+                  <a:solidFill>
+                    <a:srgbClr val="D21540"/>
+                  </a:solidFill>
+                  <a:latin typeface="+mn-lt"/>
+                  <a:ea typeface="+mn-ea"/>
+                  <a:cs typeface="+mn-cs"/>
+                </a:rPr>
+                <a:t>27.2%</a:t>
+              </a:r>
+            </a:p>
+          </p:txBody>
+        </p:sp>
+        <p:sp>
+          <p:nvSpPr>
+            <p:cNvPr id="36" name="Rectangle 36"/>
+            <p:cNvSpPr/>
+            <p:nvPr/>
+          </p:nvSpPr>
+          <p:spPr>
+            <a:xfrm>
+              <a:off x="3819525" y="3467354"/>
+              <a:ext cx="424688" cy="2190496"/>
+            </a:xfrm>
+            <a:prstGeom prst="rect">
+              <a:avLst/>
+            </a:prstGeom>
+            <a:solidFill>
+              <a:srgbClr val="0A1138"/>
+            </a:solidFill>
+            <a:ln>
+              <a:noFill/>
+            </a:ln>
+          </p:spPr>
+        </p:sp>
+        <p:sp>
+          <p:nvSpPr>
+            <p:cNvPr id="37" name="TextBox 37"/>
+            <p:cNvSpPr txBox="1"/>
+            <p:nvPr/>
+          </p:nvSpPr>
+          <p:spPr>
+            <a:xfrm>
+              <a:off x="3694449" y="3143504"/>
+              <a:ext cx="674839" cy="308991"/>
+            </a:xfrm>
+            <a:prstGeom prst="rect">
+              <a:avLst/>
+            </a:prstGeom>
+            <a:noFill/>
+            <a:ln>
+              <a:noFill/>
+            </a:ln>
+          </p:spPr>
+          <p:txBody>
+            <a:bodyPr wrap="none" lIns="0" tIns="0" rIns="0" bIns="0" anchor="t" anchorCtr="0">
+              <a:spAutoFit/>
+            </a:bodyPr>
+            <a:lstStyle/>
+            <a:p>
+              <a:pPr algn="ctr"/>
+              <a:r>
+                <a:rPr lang="zh-TW" sz="1580" b="1" dirty="0">
+                  <a:solidFill>
+                    <a:srgbClr val="0A1138"/>
+                  </a:solidFill>
+                  <a:latin typeface="+mn-lt"/>
+                  <a:ea typeface="+mn-ea"/>
+                  <a:cs typeface="+mn-cs"/>
+                </a:rPr>
+                <a:t>22.4%</a:t>
+              </a:r>
+            </a:p>
+          </p:txBody>
+        </p:sp>
+        <p:sp>
+          <p:nvSpPr>
+            <p:cNvPr id="38" name="TextBox 38"/>
+            <p:cNvSpPr txBox="1"/>
+            <p:nvPr/>
+          </p:nvSpPr>
+          <p:spPr>
+            <a:xfrm>
+              <a:off x="3551199" y="5791200"/>
+              <a:ext cx="441401" cy="308991"/>
+            </a:xfrm>
+            <a:prstGeom prst="rect">
+              <a:avLst/>
+            </a:prstGeom>
+            <a:noFill/>
+            <a:ln>
+              <a:noFill/>
+            </a:ln>
+          </p:spPr>
+          <p:txBody>
+            <a:bodyPr wrap="none" lIns="0" tIns="0" rIns="0" bIns="0" anchor="t" anchorCtr="0">
+              <a:spAutoFit/>
+            </a:bodyPr>
+            <a:lstStyle/>
+            <a:p>
+              <a:pPr algn="ctr"/>
+              <a:r>
+                <a:rPr lang="zh-TW" sz="1580" b="1" dirty="0">
                   <a:solidFill>
                     <a:srgbClr val="0A1138"/>
                   </a:solidFill>
@@ -22728,14 +23070,36 @@
         </p:sp>
         <p:sp>
           <p:nvSpPr>
-            <p:cNvPr id="28" name="TextBox 28"/>
+            <p:cNvPr id="39" name="Rectangle 39"/>
+            <p:cNvSpPr/>
+            <p:nvPr/>
+          </p:nvSpPr>
+          <p:spPr>
+            <a:xfrm>
+              <a:off x="5229987" y="4885309"/>
+              <a:ext cx="424688" cy="772541"/>
+            </a:xfrm>
+            <a:prstGeom prst="rect">
+              <a:avLst/>
+            </a:prstGeom>
+            <a:solidFill>
+              <a:srgbClr val="D21540"/>
+            </a:solidFill>
+            <a:ln>
+              <a:noFill/>
+            </a:ln>
+          </p:spPr>
+        </p:sp>
+        <p:sp>
+          <p:nvSpPr>
+            <p:cNvPr id="40" name="TextBox 40"/>
             <p:cNvSpPr txBox="1"/>
             <p:nvPr/>
           </p:nvSpPr>
           <p:spPr>
             <a:xfrm>
-              <a:off x="451104" y="3981450"/>
-              <a:ext cx="335280" cy="234696"/>
+              <a:off x="5166329" y="4561459"/>
+              <a:ext cx="552005" cy="308991"/>
             </a:xfrm>
             <a:prstGeom prst="rect">
               <a:avLst/>
@@ -22751,61 +23115,37 @@
             </a:bodyPr>
             <a:lstStyle/>
             <a:p>
-              <a:pPr algn="l"/>
+              <a:pPr algn="ctr"/>
               <a:r>
-                <a:rPr lang="zh-TW" sz="1200" dirty="0">
+                <a:rPr lang="zh-TW" sz="1580" b="1" dirty="0">
                   <a:solidFill>
-                    <a:srgbClr val="6B6B6B"/>
+                    <a:srgbClr val="D21540"/>
                   </a:solidFill>
                   <a:latin typeface="+mn-lt"/>
                   <a:ea typeface="+mn-ea"/>
                   <a:cs typeface="+mn-cs"/>
                 </a:rPr>
-                <a:t>職缺</a:t>
+                <a:t>7.9%</a:t>
               </a:r>
             </a:p>
           </p:txBody>
         </p:sp>
         <p:sp>
           <p:nvSpPr>
-            <p:cNvPr id="29" name="Rectangle 29"/>
+            <p:cNvPr id="41" name="Rectangle 41"/>
             <p:cNvSpPr/>
             <p:nvPr/>
           </p:nvSpPr>
           <p:spPr>
             <a:xfrm>
-              <a:off x="990600" y="3962400"/>
-              <a:ext cx="4095750" cy="228600"/>
+              <a:off x="5749925" y="3623818"/>
+              <a:ext cx="424688" cy="2034032"/>
             </a:xfrm>
             <a:prstGeom prst="rect">
               <a:avLst/>
             </a:prstGeom>
             <a:solidFill>
-              <a:srgbClr val="FFFFFF"/>
-            </a:solidFill>
-            <a:ln w="28575">
-              <a:solidFill>
-                <a:srgbClr val="0A1138"/>
-              </a:solidFill>
-            </a:ln>
-          </p:spPr>
-        </p:sp>
-        <p:sp>
-          <p:nvSpPr>
-            <p:cNvPr id="30" name="Rectangle 30"/>
-            <p:cNvSpPr/>
-            <p:nvPr/>
-          </p:nvSpPr>
-          <p:spPr>
-            <a:xfrm>
-              <a:off x="1019175" y="3990975"/>
-              <a:ext cx="3657600" cy="171450"/>
-            </a:xfrm>
-            <a:prstGeom prst="rect">
-              <a:avLst/>
-            </a:prstGeom>
-            <a:solidFill>
-              <a:srgbClr val="2B4BB8"/>
+              <a:srgbClr val="0A1138"/>
             </a:solidFill>
             <a:ln>
               <a:noFill/>
@@ -22814,14 +23154,14 @@
         </p:sp>
         <p:sp>
           <p:nvSpPr>
-            <p:cNvPr id="31" name="TextBox 31"/>
+            <p:cNvPr id="42" name="TextBox 42"/>
             <p:cNvSpPr txBox="1"/>
             <p:nvPr/>
           </p:nvSpPr>
           <p:spPr>
             <a:xfrm>
-              <a:off x="5210937" y="3927475"/>
-              <a:ext cx="734741" cy="337376"/>
+              <a:off x="5624849" y="3299968"/>
+              <a:ext cx="674839" cy="308991"/>
             </a:xfrm>
             <a:prstGeom prst="rect">
               <a:avLst/>
@@ -22837,31 +23177,31 @@
             </a:bodyPr>
             <a:lstStyle/>
             <a:p>
-              <a:pPr algn="l"/>
+              <a:pPr algn="ctr"/>
               <a:r>
-                <a:rPr lang="zh-TW" sz="1720" b="1" dirty="0">
+                <a:rPr lang="zh-TW" sz="1580" b="1" dirty="0">
                   <a:solidFill>
-                    <a:srgbClr val="2B4BB8"/>
+                    <a:srgbClr val="0A1138"/>
                   </a:solidFill>
                   <a:latin typeface="+mn-lt"/>
                   <a:ea typeface="+mn-ea"/>
                   <a:cs typeface="+mn-cs"/>
                 </a:rPr>
-                <a:t>27.2%</a:t>
+                <a:t>20.8%</a:t>
               </a:r>
             </a:p>
           </p:txBody>
         </p:sp>
         <p:sp>
           <p:nvSpPr>
-            <p:cNvPr id="32" name="TextBox 32"/>
+            <p:cNvPr id="43" name="TextBox 43"/>
             <p:cNvSpPr txBox="1"/>
             <p:nvPr/>
           </p:nvSpPr>
           <p:spPr>
             <a:xfrm>
-              <a:off x="451104" y="4381500"/>
-              <a:ext cx="335280" cy="234696"/>
+              <a:off x="5162550" y="5791200"/>
+              <a:ext cx="1079500" cy="308991"/>
             </a:xfrm>
             <a:prstGeom prst="rect">
               <a:avLst/>
@@ -22877,135 +23217,9 @@
             </a:bodyPr>
             <a:lstStyle/>
             <a:p>
-              <a:pPr algn="l"/>
+              <a:pPr algn="ctr"/>
               <a:r>
-                <a:rPr lang="zh-TW" sz="1200" dirty="0">
-                  <a:solidFill>
-                    <a:srgbClr val="6B6B6B"/>
-                  </a:solidFill>
-                  <a:latin typeface="+mn-lt"/>
-                  <a:ea typeface="+mn-ea"/>
-                  <a:cs typeface="+mn-cs"/>
-                </a:rPr>
-                <a:t>應徵</a:t>
-              </a:r>
-            </a:p>
-          </p:txBody>
-        </p:sp>
-        <p:sp>
-          <p:nvSpPr>
-            <p:cNvPr id="33" name="Rectangle 33"/>
-            <p:cNvSpPr/>
-            <p:nvPr/>
-          </p:nvSpPr>
-          <p:spPr>
-            <a:xfrm>
-              <a:off x="990600" y="4362450"/>
-              <a:ext cx="4095750" cy="228600"/>
-            </a:xfrm>
-            <a:prstGeom prst="rect">
-              <a:avLst/>
-            </a:prstGeom>
-            <a:solidFill>
-              <a:srgbClr val="FFFFFF"/>
-            </a:solidFill>
-            <a:ln w="28575">
-              <a:solidFill>
-                <a:srgbClr val="0A1138"/>
-              </a:solidFill>
-            </a:ln>
-          </p:spPr>
-        </p:sp>
-        <p:sp>
-          <p:nvSpPr>
-            <p:cNvPr id="34" name="Rectangle 34"/>
-            <p:cNvSpPr/>
-            <p:nvPr/>
-          </p:nvSpPr>
-          <p:spPr>
-            <a:xfrm>
-              <a:off x="1019175" y="4391025"/>
-              <a:ext cx="3019425" cy="171450"/>
-            </a:xfrm>
-            <a:prstGeom prst="rect">
-              <a:avLst/>
-            </a:prstGeom>
-            <a:solidFill>
-              <a:srgbClr val="93A0C9"/>
-            </a:solidFill>
-            <a:ln>
-              <a:noFill/>
-            </a:ln>
-          </p:spPr>
-        </p:sp>
-        <p:sp>
-          <p:nvSpPr>
-            <p:cNvPr id="35" name="TextBox 35"/>
-            <p:cNvSpPr txBox="1"/>
-            <p:nvPr/>
-          </p:nvSpPr>
-          <p:spPr>
-            <a:xfrm>
-              <a:off x="5210937" y="4327525"/>
-              <a:ext cx="734741" cy="337376"/>
-            </a:xfrm>
-            <a:prstGeom prst="rect">
-              <a:avLst/>
-            </a:prstGeom>
-            <a:noFill/>
-            <a:ln>
-              <a:noFill/>
-            </a:ln>
-          </p:spPr>
-          <p:txBody>
-            <a:bodyPr wrap="none" lIns="0" tIns="0" rIns="0" bIns="0" anchor="t" anchorCtr="0">
-              <a:spAutoFit/>
-            </a:bodyPr>
-            <a:lstStyle/>
-            <a:p>
-              <a:pPr algn="l"/>
-              <a:r>
-                <a:rPr lang="zh-TW" sz="1720" b="1" dirty="0">
-                  <a:solidFill>
-                    <a:srgbClr val="5A6AA8"/>
-                  </a:solidFill>
-                  <a:latin typeface="+mn-lt"/>
-                  <a:ea typeface="+mn-ea"/>
-                  <a:cs typeface="+mn-cs"/>
-                </a:rPr>
-                <a:t>22.4%</a:t>
-              </a:r>
-            </a:p>
-          </p:txBody>
-        </p:sp>
-        <p:sp>
-          <p:nvSpPr>
-            <p:cNvPr id="36" name="TextBox 36"/>
-            <p:cNvSpPr txBox="1"/>
-            <p:nvPr/>
-          </p:nvSpPr>
-          <p:spPr>
-            <a:xfrm>
-              <a:off x="448437" y="4908550"/>
-              <a:ext cx="1175258" cy="337376"/>
-            </a:xfrm>
-            <a:prstGeom prst="rect">
-              <a:avLst/>
-            </a:prstGeom>
-            <a:noFill/>
-            <a:ln>
-              <a:noFill/>
-            </a:ln>
-          </p:spPr>
-          <p:txBody>
-            <a:bodyPr wrap="none" lIns="0" tIns="0" rIns="0" bIns="0" anchor="t" anchorCtr="0">
-              <a:spAutoFit/>
-            </a:bodyPr>
-            <a:lstStyle/>
-            <a:p>
-              <a:pPr algn="l"/>
-              <a:r>
-                <a:rPr lang="ja-JP" sz="1720" b="1" dirty="0">
+                <a:rPr lang="ja-JP" sz="1580" b="1" dirty="0">
                   <a:solidFill>
                     <a:srgbClr val="0A1138"/>
                   </a:solidFill>
@@ -23018,16 +23232,31 @@
             </a:p>
           </p:txBody>
         </p:sp>
-        <p:sp>
-          <p:nvSpPr>
-            <p:cNvPr id="37" name="TextBox 37"/>
+      </p:grpSp>
+      <p:grpSp>
+        <p:nvGrpSpPr>
+          <p:cNvPr id="46" name="source"/>
+          <p:cNvGrpSpPr/>
+          <p:nvPr/>
+        </p:nvGrpSpPr>
+        <p:grpSpPr>
+          <a:xfrm>
+            <a:off x="451485" y="6432550"/>
+            <a:ext cx="3816046" cy="220028"/>
+            <a:chOff x="451485" y="6432550"/>
+            <a:chExt cx="3816046" cy="220028"/>
+          </a:xfrm>
+        </p:grpSpPr>
+        <p:sp>
+          <p:nvSpPr>
+            <p:cNvPr id="45" name="TextBox 45"/>
             <p:cNvSpPr txBox="1"/>
             <p:nvPr/>
           </p:nvSpPr>
           <p:spPr>
             <a:xfrm>
-              <a:off x="451104" y="5372100"/>
-              <a:ext cx="335280" cy="234696"/>
+              <a:off x="451485" y="6432550"/>
+              <a:ext cx="3816046" cy="220028"/>
             </a:xfrm>
             <a:prstGeom prst="rect">
               <a:avLst/>
@@ -23045,7 +23274,7 @@
             <a:p>
               <a:pPr algn="l"/>
               <a:r>
-                <a:rPr lang="zh-TW" sz="1200" dirty="0">
+                <a:rPr lang="zh-TW" sz="1120" dirty="0">
                   <a:solidFill>
                     <a:srgbClr val="6B6B6B"/>
                   </a:solidFill>
@@ -23053,227 +23282,15 @@
                   <a:ea typeface="+mn-ea"/>
                   <a:cs typeface="+mn-cs"/>
                 </a:rPr>
-                <a:t>職缺</a:t>
+                <a:t>資料：MoleDAO, Web3 Hiring Market Report Q3 2026</a:t>
               </a:r>
             </a:p>
           </p:txBody>
         </p:sp>
-        <p:sp>
-          <p:nvSpPr>
-            <p:cNvPr id="38" name="Rectangle 38"/>
-            <p:cNvSpPr/>
-            <p:nvPr/>
-          </p:nvSpPr>
-          <p:spPr>
-            <a:xfrm>
-              <a:off x="990600" y="5353050"/>
-              <a:ext cx="4095750" cy="228600"/>
-            </a:xfrm>
-            <a:prstGeom prst="rect">
-              <a:avLst/>
-            </a:prstGeom>
-            <a:solidFill>
-              <a:srgbClr val="FFFFFF"/>
-            </a:solidFill>
-            <a:ln w="28575">
-              <a:solidFill>
-                <a:srgbClr val="0A1138"/>
-              </a:solidFill>
-            </a:ln>
-          </p:spPr>
-        </p:sp>
-        <p:sp>
-          <p:nvSpPr>
-            <p:cNvPr id="39" name="Rectangle 39"/>
-            <p:cNvSpPr/>
-            <p:nvPr/>
-          </p:nvSpPr>
-          <p:spPr>
-            <a:xfrm>
-              <a:off x="1019175" y="5381625"/>
-              <a:ext cx="1066800" cy="171450"/>
-            </a:xfrm>
-            <a:prstGeom prst="rect">
-              <a:avLst/>
-            </a:prstGeom>
-            <a:solidFill>
-              <a:srgbClr val="C97B10"/>
-            </a:solidFill>
-            <a:ln>
-              <a:noFill/>
-            </a:ln>
-          </p:spPr>
-        </p:sp>
-        <p:sp>
-          <p:nvSpPr>
-            <p:cNvPr id="40" name="TextBox 40"/>
-            <p:cNvSpPr txBox="1"/>
-            <p:nvPr/>
-          </p:nvSpPr>
-          <p:spPr>
-            <a:xfrm>
-              <a:off x="5210937" y="5318125"/>
-              <a:ext cx="601023" cy="337376"/>
-            </a:xfrm>
-            <a:prstGeom prst="rect">
-              <a:avLst/>
-            </a:prstGeom>
-            <a:noFill/>
-            <a:ln>
-              <a:noFill/>
-            </a:ln>
-          </p:spPr>
-          <p:txBody>
-            <a:bodyPr wrap="none" lIns="0" tIns="0" rIns="0" bIns="0" anchor="t" anchorCtr="0">
-              <a:spAutoFit/>
-            </a:bodyPr>
-            <a:lstStyle/>
-            <a:p>
-              <a:pPr algn="l"/>
-              <a:r>
-                <a:rPr lang="zh-TW" sz="1720" b="1" dirty="0">
-                  <a:solidFill>
-                    <a:srgbClr val="C97B10"/>
-                  </a:solidFill>
-                  <a:latin typeface="+mn-lt"/>
-                  <a:ea typeface="+mn-ea"/>
-                  <a:cs typeface="+mn-cs"/>
-                </a:rPr>
-                <a:t>7.9%</a:t>
-              </a:r>
-            </a:p>
-          </p:txBody>
-        </p:sp>
-        <p:sp>
-          <p:nvSpPr>
-            <p:cNvPr id="41" name="TextBox 41"/>
-            <p:cNvSpPr txBox="1"/>
-            <p:nvPr/>
-          </p:nvSpPr>
-          <p:spPr>
-            <a:xfrm>
-              <a:off x="451104" y="5772150"/>
-              <a:ext cx="335280" cy="234696"/>
-            </a:xfrm>
-            <a:prstGeom prst="rect">
-              <a:avLst/>
-            </a:prstGeom>
-            <a:noFill/>
-            <a:ln>
-              <a:noFill/>
-            </a:ln>
-          </p:spPr>
-          <p:txBody>
-            <a:bodyPr wrap="none" lIns="0" tIns="0" rIns="0" bIns="0" anchor="t" anchorCtr="0">
-              <a:spAutoFit/>
-            </a:bodyPr>
-            <a:lstStyle/>
-            <a:p>
-              <a:pPr algn="l"/>
-              <a:r>
-                <a:rPr lang="zh-TW" sz="1200" dirty="0">
-                  <a:solidFill>
-                    <a:srgbClr val="6B6B6B"/>
-                  </a:solidFill>
-                  <a:latin typeface="+mn-lt"/>
-                  <a:ea typeface="+mn-ea"/>
-                  <a:cs typeface="+mn-cs"/>
-                </a:rPr>
-                <a:t>應徵</a:t>
-              </a:r>
-            </a:p>
-          </p:txBody>
-        </p:sp>
-        <p:sp>
-          <p:nvSpPr>
-            <p:cNvPr id="42" name="Rectangle 42"/>
-            <p:cNvSpPr/>
-            <p:nvPr/>
-          </p:nvSpPr>
-          <p:spPr>
-            <a:xfrm>
-              <a:off x="990600" y="5753100"/>
-              <a:ext cx="4095750" cy="228600"/>
-            </a:xfrm>
-            <a:prstGeom prst="rect">
-              <a:avLst/>
-            </a:prstGeom>
-            <a:solidFill>
-              <a:srgbClr val="FFFFFF"/>
-            </a:solidFill>
-            <a:ln w="28575">
-              <a:solidFill>
-                <a:srgbClr val="0A1138"/>
-              </a:solidFill>
-            </a:ln>
-          </p:spPr>
-        </p:sp>
-        <p:sp>
-          <p:nvSpPr>
-            <p:cNvPr id="43" name="Rectangle 43"/>
-            <p:cNvSpPr/>
-            <p:nvPr/>
-          </p:nvSpPr>
-          <p:spPr>
-            <a:xfrm>
-              <a:off x="1019175" y="5781675"/>
-              <a:ext cx="2800350" cy="171450"/>
-            </a:xfrm>
-            <a:prstGeom prst="rect">
-              <a:avLst/>
-            </a:prstGeom>
-            <a:solidFill>
-              <a:srgbClr val="93A0C9"/>
-            </a:solidFill>
-            <a:ln>
-              <a:noFill/>
-            </a:ln>
-          </p:spPr>
-        </p:sp>
-        <p:sp>
-          <p:nvSpPr>
-            <p:cNvPr id="44" name="TextBox 44"/>
-            <p:cNvSpPr txBox="1"/>
-            <p:nvPr/>
-          </p:nvSpPr>
-          <p:spPr>
-            <a:xfrm>
-              <a:off x="5210937" y="5718175"/>
-              <a:ext cx="734741" cy="337376"/>
-            </a:xfrm>
-            <a:prstGeom prst="rect">
-              <a:avLst/>
-            </a:prstGeom>
-            <a:noFill/>
-            <a:ln>
-              <a:noFill/>
-            </a:ln>
-          </p:spPr>
-          <p:txBody>
-            <a:bodyPr wrap="none" lIns="0" tIns="0" rIns="0" bIns="0" anchor="t" anchorCtr="0">
-              <a:spAutoFit/>
-            </a:bodyPr>
-            <a:lstStyle/>
-            <a:p>
-              <a:pPr algn="l"/>
-              <a:r>
-                <a:rPr lang="zh-TW" sz="1720" b="1" dirty="0">
-                  <a:solidFill>
-                    <a:srgbClr val="5A6AA8"/>
-                  </a:solidFill>
-                  <a:latin typeface="+mn-lt"/>
-                  <a:ea typeface="+mn-ea"/>
-                  <a:cs typeface="+mn-cs"/>
-                </a:rPr>
-                <a:t>20.8%</a:t>
-              </a:r>
-            </a:p>
-          </p:txBody>
-        </p:sp>
       </p:grpSp>
       <p:grpSp>
         <p:nvGrpSpPr>
-          <p:cNvPr id="47" name="divider"/>
+          <p:cNvPr id="48" name="divider"/>
           <p:cNvGrpSpPr/>
           <p:nvPr/>
         </p:nvGrpSpPr>
@@ -23287,7 +23304,7 @@
         </p:grpSpPr>
         <p:sp>
           <p:nvSpPr>
-            <p:cNvPr id="46" name="Rectangle 46"/>
+            <p:cNvPr id="47" name="Rectangle 47"/>
             <p:cNvSpPr/>
             <p:nvPr/>
           </p:nvSpPr>
@@ -23310,28 +23327,28 @@
       </p:grpSp>
       <p:grpSp>
         <p:nvGrpSpPr>
-          <p:cNvPr id="59" name="facts"/>
+          <p:cNvPr id="61" name="policy"/>
           <p:cNvGrpSpPr/>
           <p:nvPr/>
         </p:nvGrpSpPr>
         <p:grpSpPr>
           <a:xfrm>
-            <a:off x="7571994" y="2178050"/>
-            <a:ext cx="4162806" cy="3961702"/>
-            <a:chOff x="7571994" y="2178050"/>
-            <a:chExt cx="4162806" cy="3961702"/>
+            <a:off x="7572375" y="1631950"/>
+            <a:ext cx="4162425" cy="4793552"/>
+            <a:chOff x="7572375" y="1631950"/>
+            <a:chExt cx="4162425" cy="4793552"/>
           </a:xfrm>
         </p:grpSpPr>
         <p:sp>
           <p:nvSpPr>
-            <p:cNvPr id="48" name="TextBox 48"/>
+            <p:cNvPr id="49" name="TextBox 49"/>
             <p:cNvSpPr txBox="1"/>
             <p:nvPr/>
           </p:nvSpPr>
           <p:spPr>
             <a:xfrm>
-              <a:off x="7571994" y="2178050"/>
-              <a:ext cx="2255415" cy="381381"/>
+              <a:off x="7576185" y="1631950"/>
+              <a:ext cx="1066851" cy="220028"/>
             </a:xfrm>
             <a:prstGeom prst="rect">
               <a:avLst/>
@@ -23349,7 +23366,47 @@
             <a:p>
               <a:pPr algn="l"/>
               <a:r>
-                <a:rPr lang="en-US" sz="1950" b="1" dirty="0">
+                <a:rPr lang="zh-TW" sz="1120" b="1" dirty="0">
+                  <a:solidFill>
+                    <a:srgbClr val="6B6B6B"/>
+                  </a:solidFill>
+                  <a:latin typeface="+mn-lt"/>
+                  <a:ea typeface="+mn-ea"/>
+                  <a:cs typeface="+mn-cs"/>
+                </a:rPr>
+                <a:t>新加坡正在推的</a:t>
+              </a:r>
+            </a:p>
+          </p:txBody>
+        </p:sp>
+        <p:sp>
+          <p:nvSpPr>
+            <p:cNvPr id="50" name="TextBox 50"/>
+            <p:cNvSpPr txBox="1"/>
+            <p:nvPr/>
+          </p:nvSpPr>
+          <p:spPr>
+            <a:xfrm>
+              <a:off x="7572375" y="2571750"/>
+              <a:ext cx="2174401" cy="367665"/>
+            </a:xfrm>
+            <a:prstGeom prst="rect">
+              <a:avLst/>
+            </a:prstGeom>
+            <a:noFill/>
+            <a:ln>
+              <a:noFill/>
+            </a:ln>
+          </p:spPr>
+          <p:txBody>
+            <a:bodyPr wrap="none" lIns="0" tIns="0" rIns="0" bIns="0" anchor="t" anchorCtr="0">
+              <a:spAutoFit/>
+            </a:bodyPr>
+            <a:lstStyle/>
+            <a:p>
+              <a:pPr algn="l"/>
+              <a:r>
+                <a:rPr lang="en-US" sz="1880" b="1" dirty="0">
                   <a:solidFill>
                     <a:srgbClr val="0A1138"/>
                   </a:solidFill>
@@ -23364,14 +23421,14 @@
         </p:sp>
         <p:sp>
           <p:nvSpPr>
-            <p:cNvPr id="49" name="TextBox 49"/>
+            <p:cNvPr id="51" name="TextBox 51"/>
             <p:cNvSpPr txBox="1"/>
             <p:nvPr/>
           </p:nvSpPr>
           <p:spPr>
             <a:xfrm>
-              <a:off x="7574661" y="2603500"/>
-              <a:ext cx="2169180" cy="278702"/>
+              <a:off x="7574661" y="2965450"/>
+              <a:ext cx="1543761" cy="278702"/>
             </a:xfrm>
             <a:prstGeom prst="rect">
               <a:avLst/>
@@ -23397,20 +23454,20 @@
                   <a:ea typeface="+mn-ea"/>
                   <a:cs typeface="+mn-cs"/>
                 </a:rPr>
-                <a:t>MAS 的資產代幣化計畫，</a:t>
+                <a:t>資產代幣化試點，</a:t>
               </a:r>
             </a:p>
           </p:txBody>
         </p:sp>
         <p:sp>
           <p:nvSpPr>
-            <p:cNvPr id="50" name="TextBox 50"/>
+            <p:cNvPr id="52" name="TextBox 52"/>
             <p:cNvSpPr txBox="1"/>
             <p:nvPr/>
           </p:nvSpPr>
           <p:spPr>
             <a:xfrm>
-              <a:off x="7574661" y="2889250"/>
+              <a:off x="7574661" y="3251200"/>
               <a:ext cx="1811386" cy="278702"/>
             </a:xfrm>
             <a:prstGeom prst="rect">
@@ -23444,13 +23501,13 @@
         </p:sp>
         <p:sp>
           <p:nvSpPr>
-            <p:cNvPr id="51" name="Rectangle 51"/>
+            <p:cNvPr id="53" name="Rectangle 53"/>
             <p:cNvSpPr/>
             <p:nvPr/>
           </p:nvSpPr>
           <p:spPr>
             <a:xfrm>
-              <a:off x="7581900" y="3295650"/>
+              <a:off x="7581900" y="3657600"/>
               <a:ext cx="4152900" cy="19050"/>
             </a:xfrm>
             <a:prstGeom prst="rect">
@@ -23466,14 +23523,14 @@
         </p:sp>
         <p:sp>
           <p:nvSpPr>
-            <p:cNvPr id="52" name="TextBox 52"/>
+            <p:cNvPr id="54" name="TextBox 54"/>
             <p:cNvSpPr txBox="1"/>
             <p:nvPr/>
           </p:nvSpPr>
           <p:spPr>
             <a:xfrm>
-              <a:off x="7571994" y="3663950"/>
-              <a:ext cx="1857375" cy="381381"/>
+              <a:off x="7572375" y="4019550"/>
+              <a:ext cx="2170755" cy="367665"/>
             </a:xfrm>
             <a:prstGeom prst="rect">
               <a:avLst/>
@@ -23491,7 +23548,7 @@
             <a:p>
               <a:pPr algn="l"/>
               <a:r>
-                <a:rPr lang="zh-TW" sz="1950" b="1" dirty="0">
+                <a:rPr lang="en-US" sz="1880" b="1" dirty="0">
                   <a:solidFill>
                     <a:srgbClr val="0A1138"/>
                   </a:solidFill>
@@ -23499,21 +23556,21 @@
                   <a:ea typeface="+mn-ea"/>
                   <a:cs typeface="+mn-cs"/>
                 </a:rPr>
-                <a:t>穩定幣監管框架</a:t>
+                <a:t>Global Layer One</a:t>
               </a:r>
             </a:p>
           </p:txBody>
         </p:sp>
         <p:sp>
           <p:nvSpPr>
-            <p:cNvPr id="53" name="TextBox 53"/>
+            <p:cNvPr id="55" name="TextBox 55"/>
             <p:cNvSpPr txBox="1"/>
             <p:nvPr/>
           </p:nvSpPr>
           <p:spPr>
             <a:xfrm>
-              <a:off x="7574661" y="4089400"/>
-              <a:ext cx="2360341" cy="278702"/>
+              <a:off x="7574661" y="4413250"/>
+              <a:ext cx="1352601" cy="278702"/>
             </a:xfrm>
             <a:prstGeom prst="rect">
               <a:avLst/>
@@ -23539,21 +23596,21 @@
                   <a:ea typeface="+mn-ea"/>
                   <a:cs typeface="+mn-cs"/>
                 </a:rPr>
-                <a:t>MAS 已就修法諮詢：儲備、</a:t>
+                <a:t>金融機構共建的</a:t>
               </a:r>
             </a:p>
           </p:txBody>
         </p:sp>
         <p:sp>
           <p:nvSpPr>
-            <p:cNvPr id="54" name="TextBox 54"/>
+            <p:cNvPr id="56" name="TextBox 56"/>
             <p:cNvSpPr txBox="1"/>
             <p:nvPr/>
           </p:nvSpPr>
           <p:spPr>
             <a:xfrm>
-              <a:off x="7574661" y="4375150"/>
-              <a:ext cx="1926082" cy="278702"/>
+              <a:off x="7574661" y="4699000"/>
+              <a:ext cx="1543761" cy="278702"/>
             </a:xfrm>
             <a:prstGeom prst="rect">
               <a:avLst/>
@@ -23579,20 +23636,20 @@
                   <a:ea typeface="+mn-ea"/>
                   <a:cs typeface="+mn-cs"/>
                 </a:rPr>
-                <a:t>資本、贖回與資訊揭露</a:t>
+                <a:t>共享帳本基礎設施</a:t>
               </a:r>
             </a:p>
           </p:txBody>
         </p:sp>
         <p:sp>
           <p:nvSpPr>
-            <p:cNvPr id="55" name="Rectangle 55"/>
+            <p:cNvPr id="57" name="Rectangle 57"/>
             <p:cNvSpPr/>
             <p:nvPr/>
           </p:nvSpPr>
           <p:spPr>
             <a:xfrm>
-              <a:off x="7581900" y="4781550"/>
+              <a:off x="7581900" y="5105400"/>
               <a:ext cx="4152900" cy="19050"/>
             </a:xfrm>
             <a:prstGeom prst="rect">
@@ -23608,14 +23665,14 @@
         </p:sp>
         <p:sp>
           <p:nvSpPr>
-            <p:cNvPr id="56" name="TextBox 56"/>
+            <p:cNvPr id="58" name="TextBox 58"/>
             <p:cNvSpPr txBox="1"/>
             <p:nvPr/>
           </p:nvSpPr>
           <p:spPr>
             <a:xfrm>
-              <a:off x="7571994" y="5149850"/>
-              <a:ext cx="2243263" cy="381381"/>
+              <a:off x="7572375" y="5467350"/>
+              <a:ext cx="1790649" cy="367665"/>
             </a:xfrm>
             <a:prstGeom prst="rect">
               <a:avLst/>
@@ -23633,7 +23690,7 @@
             <a:p>
               <a:pPr algn="l"/>
               <a:r>
-                <a:rPr lang="zh-TW" sz="1950" b="1" dirty="0">
+                <a:rPr lang="zh-TW" sz="1880" b="1" dirty="0">
                   <a:solidFill>
                     <a:srgbClr val="0A1138"/>
                   </a:solidFill>
@@ -23641,21 +23698,21 @@
                   <a:ea typeface="+mn-ea"/>
                   <a:cs typeface="+mn-cs"/>
                 </a:rPr>
-                <a:t>60 個職缺要求中文</a:t>
+                <a:t>穩定幣監管框架</a:t>
               </a:r>
             </a:p>
           </p:txBody>
         </p:sp>
         <p:sp>
           <p:nvSpPr>
-            <p:cNvPr id="57" name="TextBox 57"/>
+            <p:cNvPr id="59" name="TextBox 59"/>
             <p:cNvSpPr txBox="1"/>
             <p:nvPr/>
           </p:nvSpPr>
           <p:spPr>
             <a:xfrm>
-              <a:off x="7574661" y="5575300"/>
-              <a:ext cx="2184149" cy="278702"/>
+              <a:off x="7574661" y="5861050"/>
+              <a:ext cx="1543761" cy="278702"/>
             </a:xfrm>
             <a:prstGeom prst="rect">
               <a:avLst/>
@@ -23681,21 +23738,21 @@
                   <a:ea typeface="+mn-ea"/>
                   <a:cs typeface="+mn-cs"/>
                 </a:rPr>
-                <a:t>追蹤的 1,104 個職缺中，</a:t>
+                <a:t>單一貨幣穩定幣的</a:t>
               </a:r>
             </a:p>
           </p:txBody>
         </p:sp>
         <p:sp>
           <p:nvSpPr>
-            <p:cNvPr id="58" name="TextBox 58"/>
+            <p:cNvPr id="60" name="TextBox 60"/>
             <p:cNvSpPr txBox="1"/>
             <p:nvPr/>
           </p:nvSpPr>
           <p:spPr>
             <a:xfrm>
-              <a:off x="7574661" y="5861050"/>
-              <a:ext cx="2308403" cy="278702"/>
+              <a:off x="7574661" y="6146800"/>
+              <a:ext cx="1352601" cy="278702"/>
             </a:xfrm>
             <a:prstGeom prst="rect">
               <a:avLst/>
@@ -23721,62 +23778,7 @@
                   <a:ea typeface="+mn-ea"/>
                   <a:cs typeface="+mn-cs"/>
                 </a:rPr>
-                <a:t>主要在香港、新加坡、台灣</a:t>
-              </a:r>
-            </a:p>
-          </p:txBody>
-        </p:sp>
-      </p:grpSp>
-      <p:grpSp>
-        <p:nvGrpSpPr>
-          <p:cNvPr id="61" name="source"/>
-          <p:cNvGrpSpPr/>
-          <p:nvPr/>
-        </p:nvGrpSpPr>
-        <p:grpSpPr>
-          <a:xfrm>
-            <a:off x="451485" y="6451600"/>
-            <a:ext cx="3816046" cy="220028"/>
-            <a:chOff x="451485" y="6451600"/>
-            <a:chExt cx="3816046" cy="220028"/>
-          </a:xfrm>
-        </p:grpSpPr>
-        <p:sp>
-          <p:nvSpPr>
-            <p:cNvPr id="60" name="TextBox 60"/>
-            <p:cNvSpPr txBox="1"/>
-            <p:nvPr/>
-          </p:nvSpPr>
-          <p:spPr>
-            <a:xfrm>
-              <a:off x="451485" y="6451600"/>
-              <a:ext cx="3816046" cy="220028"/>
-            </a:xfrm>
-            <a:prstGeom prst="rect">
-              <a:avLst/>
-            </a:prstGeom>
-            <a:noFill/>
-            <a:ln>
-              <a:noFill/>
-            </a:ln>
-          </p:spPr>
-          <p:txBody>
-            <a:bodyPr wrap="none" lIns="0" tIns="0" rIns="0" bIns="0" anchor="t" anchorCtr="0">
-              <a:spAutoFit/>
-            </a:bodyPr>
-            <a:lstStyle/>
-            <a:p>
-              <a:pPr algn="l"/>
-              <a:r>
-                <a:rPr lang="zh-TW" sz="1120" dirty="0">
-                  <a:solidFill>
-                    <a:srgbClr val="6B6B6B"/>
-                  </a:solidFill>
-                  <a:latin typeface="+mn-lt"/>
-                  <a:ea typeface="+mn-ea"/>
-                  <a:cs typeface="+mn-cs"/>
-                </a:rPr>
-                <a:t>資料：MoleDAO, Web3 Hiring Market Report Q3 2026</a:t>
+                <a:t>發行與儲備規範</a:t>
               </a:r>
             </a:p>
           </p:txBody>
@@ -24098,16 +24100,16 @@
       </p:grpSp>
       <p:grpSp>
         <p:nvGrpSpPr>
-          <p:cNvPr id="15" name="claim"/>
+          <p:cNvPr id="14" name="claim"/>
           <p:cNvGrpSpPr/>
           <p:nvPr/>
         </p:nvGrpSpPr>
         <p:grpSpPr>
           <a:xfrm>
             <a:off x="441960" y="1231900"/>
-            <a:ext cx="6088380" cy="606425"/>
+            <a:ext cx="4472940" cy="586740"/>
             <a:chOff x="441960" y="1231900"/>
-            <a:chExt cx="6088380" cy="606425"/>
+            <a:chExt cx="4472940" cy="586740"/>
           </a:xfrm>
         </p:grpSpPr>
         <p:sp>
@@ -24119,7 +24121,7 @@
           <p:spPr>
             <a:xfrm>
               <a:off x="441960" y="1231900"/>
-              <a:ext cx="6088380" cy="586740"/>
+              <a:ext cx="4472940" cy="586740"/>
             </a:xfrm>
             <a:prstGeom prst="rect">
               <a:avLst/>
@@ -24145,37 +24147,15 @@
                   <a:ea typeface="+mn-ea"/>
                   <a:cs typeface="+mn-cs"/>
                 </a:rPr>
-                <a:t>必修打底，選修決定你變成什麼人</a:t>
+                <a:t>必修都一樣，差別在選修</a:t>
               </a:r>
             </a:p>
           </p:txBody>
         </p:sp>
-        <p:sp>
-          <p:nvSpPr>
-            <p:cNvPr id="14" name="Rectangle 14"/>
-            <p:cNvSpPr/>
-            <p:nvPr/>
-          </p:nvSpPr>
-          <p:spPr>
-            <a:xfrm>
-              <a:off x="457200" y="1790700"/>
-              <a:ext cx="914400" cy="47625"/>
-            </a:xfrm>
-            <a:prstGeom prst="rect">
-              <a:avLst/>
-            </a:prstGeom>
-            <a:solidFill>
-              <a:srgbClr val="D21540"/>
-            </a:solidFill>
-            <a:ln>
-              <a:noFill/>
-            </a:ln>
-          </p:spPr>
-        </p:sp>
       </p:grpSp>
       <p:grpSp>
         <p:nvGrpSpPr>
-          <p:cNvPr id="79" name="columns"/>
+          <p:cNvPr id="78" name="columns"/>
           <p:cNvGrpSpPr/>
           <p:nvPr/>
         </p:nvGrpSpPr>
@@ -24189,7 +24169,7 @@
         </p:grpSpPr>
         <p:sp>
           <p:nvSpPr>
-            <p:cNvPr id="16" name="Rectangle 16"/>
+            <p:cNvPr id="15" name="Rectangle 15"/>
             <p:cNvSpPr/>
             <p:nvPr/>
           </p:nvSpPr>
@@ -24211,7 +24191,7 @@
         </p:sp>
         <p:sp>
           <p:nvSpPr>
-            <p:cNvPr id="17" name="Rectangle 17"/>
+            <p:cNvPr id="16" name="Rectangle 16"/>
             <p:cNvSpPr/>
             <p:nvPr/>
           </p:nvSpPr>
@@ -24233,7 +24213,7 @@
         </p:sp>
         <p:sp>
           <p:nvSpPr>
-            <p:cNvPr id="18" name="TextBox 18"/>
+            <p:cNvPr id="17" name="TextBox 17"/>
             <p:cNvSpPr txBox="1"/>
             <p:nvPr/>
           </p:nvSpPr>
@@ -24273,7 +24253,7 @@
         </p:sp>
         <p:sp>
           <p:nvSpPr>
-            <p:cNvPr id="19" name="Rectangle 19"/>
+            <p:cNvPr id="18" name="Rectangle 18"/>
             <p:cNvSpPr/>
             <p:nvPr/>
           </p:nvSpPr>
@@ -24295,7 +24275,7 @@
         </p:sp>
         <p:sp>
           <p:nvSpPr>
-            <p:cNvPr id="20" name="TextBox 20"/>
+            <p:cNvPr id="19" name="TextBox 19"/>
             <p:cNvSpPr txBox="1"/>
             <p:nvPr/>
           </p:nvSpPr>
@@ -24335,7 +24315,7 @@
         </p:sp>
         <p:sp>
           <p:nvSpPr>
-            <p:cNvPr id="21" name="TextBox 21"/>
+            <p:cNvPr id="20" name="TextBox 20"/>
             <p:cNvSpPr txBox="1"/>
             <p:nvPr/>
           </p:nvSpPr>
@@ -24375,7 +24355,7 @@
         </p:sp>
         <p:sp>
           <p:nvSpPr>
-            <p:cNvPr id="22" name="TextBox 22"/>
+            <p:cNvPr id="21" name="TextBox 21"/>
             <p:cNvSpPr txBox="1"/>
             <p:nvPr/>
           </p:nvSpPr>
@@ -24415,7 +24395,7 @@
         </p:sp>
         <p:sp>
           <p:nvSpPr>
-            <p:cNvPr id="23" name="TextBox 23"/>
+            <p:cNvPr id="22" name="TextBox 22"/>
             <p:cNvSpPr txBox="1"/>
             <p:nvPr/>
           </p:nvSpPr>
@@ -24455,7 +24435,7 @@
         </p:sp>
         <p:sp>
           <p:nvSpPr>
-            <p:cNvPr id="24" name="TextBox 24"/>
+            <p:cNvPr id="23" name="TextBox 23"/>
             <p:cNvSpPr txBox="1"/>
             <p:nvPr/>
           </p:nvSpPr>
@@ -24495,7 +24475,7 @@
         </p:sp>
         <p:sp>
           <p:nvSpPr>
-            <p:cNvPr id="25" name="TextBox 25"/>
+            <p:cNvPr id="24" name="TextBox 24"/>
             <p:cNvSpPr txBox="1"/>
             <p:nvPr/>
           </p:nvSpPr>
@@ -24535,7 +24515,7 @@
         </p:sp>
         <p:sp>
           <p:nvSpPr>
-            <p:cNvPr id="26" name="TextBox 26"/>
+            <p:cNvPr id="25" name="TextBox 25"/>
             <p:cNvSpPr txBox="1"/>
             <p:nvPr/>
           </p:nvSpPr>
@@ -24575,7 +24555,7 @@
         </p:sp>
         <p:sp>
           <p:nvSpPr>
-            <p:cNvPr id="27" name="TextBox 27"/>
+            <p:cNvPr id="26" name="TextBox 26"/>
             <p:cNvSpPr txBox="1"/>
             <p:nvPr/>
           </p:nvSpPr>
@@ -24615,7 +24595,7 @@
         </p:sp>
         <p:sp>
           <p:nvSpPr>
-            <p:cNvPr id="28" name="TextBox 28"/>
+            <p:cNvPr id="27" name="TextBox 27"/>
             <p:cNvSpPr txBox="1"/>
             <p:nvPr/>
           </p:nvSpPr>
@@ -24655,7 +24635,7 @@
         </p:sp>
         <p:sp>
           <p:nvSpPr>
-            <p:cNvPr id="29" name="TextBox 29"/>
+            <p:cNvPr id="28" name="TextBox 28"/>
             <p:cNvSpPr txBox="1"/>
             <p:nvPr/>
           </p:nvSpPr>
@@ -24695,7 +24675,7 @@
         </p:sp>
         <p:sp>
           <p:nvSpPr>
-            <p:cNvPr id="30" name="TextBox 30"/>
+            <p:cNvPr id="29" name="TextBox 29"/>
             <p:cNvSpPr txBox="1"/>
             <p:nvPr/>
           </p:nvSpPr>
@@ -24735,7 +24715,7 @@
         </p:sp>
         <p:sp>
           <p:nvSpPr>
-            <p:cNvPr id="31" name="TextBox 31"/>
+            <p:cNvPr id="30" name="TextBox 30"/>
             <p:cNvSpPr txBox="1"/>
             <p:nvPr/>
           </p:nvSpPr>
@@ -24775,7 +24755,7 @@
         </p:sp>
         <p:sp>
           <p:nvSpPr>
-            <p:cNvPr id="32" name="TextBox 32"/>
+            <p:cNvPr id="31" name="TextBox 31"/>
             <p:cNvSpPr txBox="1"/>
             <p:nvPr/>
           </p:nvSpPr>
@@ -24815,7 +24795,7 @@
         </p:sp>
         <p:sp>
           <p:nvSpPr>
-            <p:cNvPr id="33" name="TextBox 33"/>
+            <p:cNvPr id="32" name="TextBox 32"/>
             <p:cNvSpPr txBox="1"/>
             <p:nvPr/>
           </p:nvSpPr>
@@ -24855,7 +24835,7 @@
         </p:sp>
         <p:sp>
           <p:nvSpPr>
-            <p:cNvPr id="34" name="TextBox 34"/>
+            <p:cNvPr id="33" name="TextBox 33"/>
             <p:cNvSpPr txBox="1"/>
             <p:nvPr/>
           </p:nvSpPr>
@@ -24895,7 +24875,7 @@
         </p:sp>
         <p:sp>
           <p:nvSpPr>
-            <p:cNvPr id="35" name="TextBox 35"/>
+            <p:cNvPr id="34" name="TextBox 34"/>
             <p:cNvSpPr txBox="1"/>
             <p:nvPr/>
           </p:nvSpPr>
@@ -24935,7 +24915,7 @@
         </p:sp>
         <p:sp>
           <p:nvSpPr>
-            <p:cNvPr id="36" name="TextBox 36"/>
+            <p:cNvPr id="35" name="TextBox 35"/>
             <p:cNvSpPr txBox="1"/>
             <p:nvPr/>
           </p:nvSpPr>
@@ -24975,7 +24955,7 @@
         </p:sp>
         <p:sp>
           <p:nvSpPr>
-            <p:cNvPr id="37" name="TextBox 37"/>
+            <p:cNvPr id="36" name="TextBox 36"/>
             <p:cNvSpPr txBox="1"/>
             <p:nvPr/>
           </p:nvSpPr>
@@ -25015,7 +24995,7 @@
         </p:sp>
         <p:sp>
           <p:nvSpPr>
-            <p:cNvPr id="38" name="TextBox 38"/>
+            <p:cNvPr id="37" name="TextBox 37"/>
             <p:cNvSpPr txBox="1"/>
             <p:nvPr/>
           </p:nvSpPr>
@@ -25055,7 +25035,7 @@
         </p:sp>
         <p:sp>
           <p:nvSpPr>
-            <p:cNvPr id="39" name="Rectangle 39"/>
+            <p:cNvPr id="38" name="Rectangle 38"/>
             <p:cNvSpPr/>
             <p:nvPr/>
           </p:nvSpPr>
@@ -25077,7 +25057,7 @@
         </p:sp>
         <p:sp>
           <p:nvSpPr>
-            <p:cNvPr id="40" name="Rectangle 40"/>
+            <p:cNvPr id="39" name="Rectangle 39"/>
             <p:cNvSpPr/>
             <p:nvPr/>
           </p:nvSpPr>
@@ -25099,7 +25079,7 @@
         </p:sp>
         <p:sp>
           <p:nvSpPr>
-            <p:cNvPr id="41" name="TextBox 41"/>
+            <p:cNvPr id="40" name="TextBox 40"/>
             <p:cNvSpPr txBox="1"/>
             <p:nvPr/>
           </p:nvSpPr>
@@ -25139,7 +25119,7 @@
         </p:sp>
         <p:sp>
           <p:nvSpPr>
-            <p:cNvPr id="42" name="Rectangle 42"/>
+            <p:cNvPr id="41" name="Rectangle 41"/>
             <p:cNvSpPr/>
             <p:nvPr/>
           </p:nvSpPr>
@@ -25161,7 +25141,7 @@
         </p:sp>
         <p:sp>
           <p:nvSpPr>
-            <p:cNvPr id="43" name="TextBox 43"/>
+            <p:cNvPr id="42" name="TextBox 42"/>
             <p:cNvSpPr txBox="1"/>
             <p:nvPr/>
           </p:nvSpPr>
@@ -25201,7 +25181,7 @@
         </p:sp>
         <p:sp>
           <p:nvSpPr>
-            <p:cNvPr id="44" name="TextBox 44"/>
+            <p:cNvPr id="43" name="TextBox 43"/>
             <p:cNvSpPr txBox="1"/>
             <p:nvPr/>
           </p:nvSpPr>
@@ -25241,7 +25221,7 @@
         </p:sp>
         <p:sp>
           <p:nvSpPr>
-            <p:cNvPr id="45" name="TextBox 45"/>
+            <p:cNvPr id="44" name="TextBox 44"/>
             <p:cNvSpPr txBox="1"/>
             <p:nvPr/>
           </p:nvSpPr>
@@ -25281,7 +25261,7 @@
         </p:sp>
         <p:sp>
           <p:nvSpPr>
-            <p:cNvPr id="46" name="TextBox 46"/>
+            <p:cNvPr id="45" name="TextBox 45"/>
             <p:cNvSpPr txBox="1"/>
             <p:nvPr/>
           </p:nvSpPr>
@@ -25321,7 +25301,7 @@
         </p:sp>
         <p:sp>
           <p:nvSpPr>
-            <p:cNvPr id="47" name="TextBox 47"/>
+            <p:cNvPr id="46" name="TextBox 46"/>
             <p:cNvSpPr txBox="1"/>
             <p:nvPr/>
           </p:nvSpPr>
@@ -25361,7 +25341,7 @@
         </p:sp>
         <p:sp>
           <p:nvSpPr>
-            <p:cNvPr id="48" name="TextBox 48"/>
+            <p:cNvPr id="47" name="TextBox 47"/>
             <p:cNvSpPr txBox="1"/>
             <p:nvPr/>
           </p:nvSpPr>
@@ -25401,7 +25381,7 @@
         </p:sp>
         <p:sp>
           <p:nvSpPr>
-            <p:cNvPr id="49" name="TextBox 49"/>
+            <p:cNvPr id="48" name="TextBox 48"/>
             <p:cNvSpPr txBox="1"/>
             <p:nvPr/>
           </p:nvSpPr>
@@ -25441,7 +25421,7 @@
         </p:sp>
         <p:sp>
           <p:nvSpPr>
-            <p:cNvPr id="50" name="TextBox 50"/>
+            <p:cNvPr id="49" name="TextBox 49"/>
             <p:cNvSpPr txBox="1"/>
             <p:nvPr/>
           </p:nvSpPr>
@@ -25481,7 +25461,7 @@
         </p:sp>
         <p:sp>
           <p:nvSpPr>
-            <p:cNvPr id="51" name="TextBox 51"/>
+            <p:cNvPr id="50" name="TextBox 50"/>
             <p:cNvSpPr txBox="1"/>
             <p:nvPr/>
           </p:nvSpPr>
@@ -25521,7 +25501,7 @@
         </p:sp>
         <p:sp>
           <p:nvSpPr>
-            <p:cNvPr id="52" name="TextBox 52"/>
+            <p:cNvPr id="51" name="TextBox 51"/>
             <p:cNvSpPr txBox="1"/>
             <p:nvPr/>
           </p:nvSpPr>
@@ -25561,7 +25541,7 @@
         </p:sp>
         <p:sp>
           <p:nvSpPr>
-            <p:cNvPr id="53" name="TextBox 53"/>
+            <p:cNvPr id="52" name="TextBox 52"/>
             <p:cNvSpPr txBox="1"/>
             <p:nvPr/>
           </p:nvSpPr>
@@ -25601,7 +25581,7 @@
         </p:sp>
         <p:sp>
           <p:nvSpPr>
-            <p:cNvPr id="54" name="TextBox 54"/>
+            <p:cNvPr id="53" name="TextBox 53"/>
             <p:cNvSpPr txBox="1"/>
             <p:nvPr/>
           </p:nvSpPr>
@@ -25641,7 +25621,7 @@
         </p:sp>
         <p:sp>
           <p:nvSpPr>
-            <p:cNvPr id="55" name="TextBox 55"/>
+            <p:cNvPr id="54" name="TextBox 54"/>
             <p:cNvSpPr txBox="1"/>
             <p:nvPr/>
           </p:nvSpPr>
@@ -25681,7 +25661,7 @@
         </p:sp>
         <p:sp>
           <p:nvSpPr>
-            <p:cNvPr id="56" name="TextBox 56"/>
+            <p:cNvPr id="55" name="TextBox 55"/>
             <p:cNvSpPr txBox="1"/>
             <p:nvPr/>
           </p:nvSpPr>
@@ -25721,7 +25701,7 @@
         </p:sp>
         <p:sp>
           <p:nvSpPr>
-            <p:cNvPr id="57" name="TextBox 57"/>
+            <p:cNvPr id="56" name="TextBox 56"/>
             <p:cNvSpPr txBox="1"/>
             <p:nvPr/>
           </p:nvSpPr>
@@ -25761,7 +25741,7 @@
         </p:sp>
         <p:sp>
           <p:nvSpPr>
-            <p:cNvPr id="58" name="TextBox 58"/>
+            <p:cNvPr id="57" name="TextBox 57"/>
             <p:cNvSpPr txBox="1"/>
             <p:nvPr/>
           </p:nvSpPr>
@@ -25801,7 +25781,7 @@
         </p:sp>
         <p:sp>
           <p:nvSpPr>
-            <p:cNvPr id="59" name="TextBox 59"/>
+            <p:cNvPr id="58" name="TextBox 58"/>
             <p:cNvSpPr txBox="1"/>
             <p:nvPr/>
           </p:nvSpPr>
@@ -25841,7 +25821,7 @@
         </p:sp>
         <p:sp>
           <p:nvSpPr>
-            <p:cNvPr id="60" name="Rectangle 60"/>
+            <p:cNvPr id="59" name="Rectangle 59"/>
             <p:cNvSpPr/>
             <p:nvPr/>
           </p:nvSpPr>
@@ -25863,7 +25843,7 @@
         </p:sp>
         <p:sp>
           <p:nvSpPr>
-            <p:cNvPr id="61" name="Rectangle 61"/>
+            <p:cNvPr id="60" name="Rectangle 60"/>
             <p:cNvSpPr/>
             <p:nvPr/>
           </p:nvSpPr>
@@ -25885,7 +25865,7 @@
         </p:sp>
         <p:sp>
           <p:nvSpPr>
-            <p:cNvPr id="62" name="TextBox 62"/>
+            <p:cNvPr id="61" name="TextBox 61"/>
             <p:cNvSpPr txBox="1"/>
             <p:nvPr/>
           </p:nvSpPr>
@@ -25925,7 +25905,7 @@
         </p:sp>
         <p:sp>
           <p:nvSpPr>
-            <p:cNvPr id="63" name="Rectangle 63"/>
+            <p:cNvPr id="62" name="Rectangle 62"/>
             <p:cNvSpPr/>
             <p:nvPr/>
           </p:nvSpPr>
@@ -25947,7 +25927,7 @@
         </p:sp>
         <p:sp>
           <p:nvSpPr>
-            <p:cNvPr id="64" name="TextBox 64"/>
+            <p:cNvPr id="63" name="TextBox 63"/>
             <p:cNvSpPr txBox="1"/>
             <p:nvPr/>
           </p:nvSpPr>
@@ -25987,7 +25967,7 @@
         </p:sp>
         <p:sp>
           <p:nvSpPr>
-            <p:cNvPr id="65" name="TextBox 65"/>
+            <p:cNvPr id="64" name="TextBox 64"/>
             <p:cNvSpPr txBox="1"/>
             <p:nvPr/>
           </p:nvSpPr>
@@ -26027,7 +26007,7 @@
         </p:sp>
         <p:sp>
           <p:nvSpPr>
-            <p:cNvPr id="66" name="TextBox 66"/>
+            <p:cNvPr id="65" name="TextBox 65"/>
             <p:cNvSpPr txBox="1"/>
             <p:nvPr/>
           </p:nvSpPr>
@@ -26067,7 +26047,7 @@
         </p:sp>
         <p:sp>
           <p:nvSpPr>
-            <p:cNvPr id="67" name="TextBox 67"/>
+            <p:cNvPr id="66" name="TextBox 66"/>
             <p:cNvSpPr txBox="1"/>
             <p:nvPr/>
           </p:nvSpPr>
@@ -26107,7 +26087,7 @@
         </p:sp>
         <p:sp>
           <p:nvSpPr>
-            <p:cNvPr id="68" name="TextBox 68"/>
+            <p:cNvPr id="67" name="TextBox 67"/>
             <p:cNvSpPr txBox="1"/>
             <p:nvPr/>
           </p:nvSpPr>
@@ -26147,7 +26127,7 @@
         </p:sp>
         <p:sp>
           <p:nvSpPr>
-            <p:cNvPr id="69" name="TextBox 69"/>
+            <p:cNvPr id="68" name="TextBox 68"/>
             <p:cNvSpPr txBox="1"/>
             <p:nvPr/>
           </p:nvSpPr>
@@ -26187,7 +26167,7 @@
         </p:sp>
         <p:sp>
           <p:nvSpPr>
-            <p:cNvPr id="70" name="TextBox 70"/>
+            <p:cNvPr id="69" name="TextBox 69"/>
             <p:cNvSpPr txBox="1"/>
             <p:nvPr/>
           </p:nvSpPr>
@@ -26227,7 +26207,7 @@
         </p:sp>
         <p:sp>
           <p:nvSpPr>
-            <p:cNvPr id="71" name="TextBox 71"/>
+            <p:cNvPr id="70" name="TextBox 70"/>
             <p:cNvSpPr txBox="1"/>
             <p:nvPr/>
           </p:nvSpPr>
@@ -26267,7 +26247,7 @@
         </p:sp>
         <p:sp>
           <p:nvSpPr>
-            <p:cNvPr id="72" name="TextBox 72"/>
+            <p:cNvPr id="71" name="TextBox 71"/>
             <p:cNvSpPr txBox="1"/>
             <p:nvPr/>
           </p:nvSpPr>
@@ -26307,7 +26287,7 @@
         </p:sp>
         <p:sp>
           <p:nvSpPr>
-            <p:cNvPr id="73" name="TextBox 73"/>
+            <p:cNvPr id="72" name="TextBox 72"/>
             <p:cNvSpPr txBox="1"/>
             <p:nvPr/>
           </p:nvSpPr>
@@ -26347,7 +26327,7 @@
         </p:sp>
         <p:sp>
           <p:nvSpPr>
-            <p:cNvPr id="74" name="TextBox 74"/>
+            <p:cNvPr id="73" name="TextBox 73"/>
             <p:cNvSpPr txBox="1"/>
             <p:nvPr/>
           </p:nvSpPr>
@@ -26387,7 +26367,7 @@
         </p:sp>
         <p:sp>
           <p:nvSpPr>
-            <p:cNvPr id="75" name="TextBox 75"/>
+            <p:cNvPr id="74" name="TextBox 74"/>
             <p:cNvSpPr txBox="1"/>
             <p:nvPr/>
           </p:nvSpPr>
@@ -26427,7 +26407,7 @@
         </p:sp>
         <p:sp>
           <p:nvSpPr>
-            <p:cNvPr id="76" name="TextBox 76"/>
+            <p:cNvPr id="75" name="TextBox 75"/>
             <p:cNvSpPr txBox="1"/>
             <p:nvPr/>
           </p:nvSpPr>
@@ -26467,7 +26447,7 @@
         </p:sp>
         <p:sp>
           <p:nvSpPr>
-            <p:cNvPr id="77" name="Rectangle 77"/>
+            <p:cNvPr id="76" name="Rectangle 76"/>
             <p:cNvSpPr/>
             <p:nvPr/>
           </p:nvSpPr>
@@ -26491,7 +26471,7 @@
         </p:sp>
         <p:pic>
           <p:nvPicPr>
-            <p:cNvPr id="78" name="Image 78"/>
+            <p:cNvPr id="77" name="Image 77"/>
             <p:cNvPicPr>
               <a:picLocks noChangeAspect="1"/>
             </p:cNvPicPr>
@@ -26561,80 +26541,86 @@
       </p:grpSpPr>
       <p:grpSp>
         <p:nvGrpSpPr>
-          <p:cNvPr id="33" name="Group 33"/>
+          <p:cNvPr id="104" name="row"/>
           <p:cNvGrpSpPr/>
           <p:nvPr/>
         </p:nvGrpSpPr>
         <p:grpSpPr>
           <a:xfrm>
-            <a:off x="8652954" y="3362599"/>
-            <a:ext cx="4497246" cy="5012181"/>
-            <a:chOff x="8652954" y="3362599"/>
-            <a:chExt cx="4497246" cy="5012181"/>
+            <a:off x="0" y="4305300"/>
+            <a:ext cx="12192000" cy="2552700"/>
+            <a:chOff x="0" y="4305300"/>
+            <a:chExt cx="12192000" cy="2552700"/>
           </a:xfrm>
         </p:grpSpPr>
         <p:sp>
           <p:nvSpPr>
-            <p:cNvPr id="2" name="Freeform 2"/>
+            <p:cNvPr id="2" name="Rectangle 2"/>
             <p:cNvSpPr/>
             <p:nvPr/>
           </p:nvSpPr>
           <p:spPr>
             <a:xfrm>
-              <a:off x="9987648" y="3594106"/>
-              <a:ext cx="2812161" cy="4780674"/>
-            </a:xfrm>
-            <a:custGeom>
-              <a:avLst/>
-              <a:gdLst/>
-              <a:ahLst/>
-              <a:cxnLst/>
-              <a:rect l="l" t="t" r="r" b="b"/>
-              <a:pathLst>
-                <a:path w="2812161" h="4780674">
-                  <a:moveTo>
-                    <a:pt x="0" y="4780674"/>
-                  </a:moveTo>
-                  <a:cubicBezTo>
-                    <a:pt x="281216" y="2952769"/>
-                    <a:pt x="1124864" y="1406080"/>
-                    <a:pt x="2812161" y="0"/>
-                  </a:cubicBezTo>
-                </a:path>
-              </a:pathLst>
-            </a:custGeom>
-            <a:noFill/>
-            <a:ln w="28122" cap="rnd">
-              <a:solidFill>
-                <a:srgbClr val="93A0C9"/>
-              </a:solidFill>
+              <a:off x="0" y="4305300"/>
+              <a:ext cx="12192000" cy="28575"/>
+            </a:xfrm>
+            <a:prstGeom prst="rect">
+              <a:avLst/>
+            </a:prstGeom>
+            <a:solidFill>
+              <a:srgbClr val="0A1138"/>
+            </a:solidFill>
+            <a:ln>
+              <a:noFill/>
+            </a:ln>
+          </p:spPr>
+        </p:sp>
+        <p:sp>
+          <p:nvSpPr>
+            <p:cNvPr id="3" name="Rectangle 3"/>
+            <p:cNvSpPr/>
+            <p:nvPr/>
+          </p:nvSpPr>
+          <p:spPr>
+            <a:xfrm>
+              <a:off x="0" y="4305300"/>
+              <a:ext cx="4067175" cy="2552700"/>
+            </a:xfrm>
+            <a:prstGeom prst="rect">
+              <a:avLst/>
+            </a:prstGeom>
+            <a:solidFill>
+              <a:srgbClr val="CBE0EC"/>
+            </a:solidFill>
+            <a:ln>
+              <a:noFill/>
             </a:ln>
           </p:spPr>
         </p:sp>
         <p:grpSp>
           <p:nvGrpSpPr>
-            <p:cNvPr id="10" name="Group 10"/>
+            <p:cNvPr id="35" name="Group 35"/>
             <p:cNvGrpSpPr/>
             <p:nvPr/>
           </p:nvGrpSpPr>
           <p:grpSpPr>
             <a:xfrm>
-              <a:off x="10106693" y="5429688"/>
-              <a:ext cx="1521597" cy="1280123"/>
-              <a:chOff x="10106693" y="5429688"/>
-              <a:chExt cx="1521597" cy="1280123"/>
+              <a:off x="946552" y="4824892"/>
+              <a:ext cx="1624699" cy="1810728"/>
+              <a:chOff x="946552" y="4824892"/>
+              <a:chExt cx="1624699" cy="1810728"/>
             </a:xfrm>
           </p:grpSpPr>
           <p:sp>
             <p:nvSpPr>
-              <p:cNvPr id="3" name="Freeform 3"/>
+              <p:cNvPr id="4" name="Freeform 4"/>
               <p:cNvSpPr/>
               <p:nvPr/>
             </p:nvSpPr>
             <p:spPr>
               <a:xfrm>
-                <a:off x="10250959" y="5478389"/>
-                <a:ext cx="589611" cy="586200"/>
+                <a:off x="1428731" y="4908528"/>
+                <a:ext cx="1015937" cy="1727092"/>
               </a:xfrm>
               <a:custGeom>
                 <a:avLst/>
@@ -26643,45 +26629,1248 @@
                 <a:cxnLst/>
                 <a:rect l="l" t="t" r="r" b="b"/>
                 <a:pathLst>
-                  <a:path w="589611" h="586200">
+                  <a:path w="1015937" h="1727092">
                     <a:moveTo>
-                      <a:pt x="483318" y="586200"/>
+                      <a:pt x="0" y="1727092"/>
                     </a:moveTo>
                     <a:cubicBezTo>
-                      <a:pt x="205650" y="569034"/>
-                      <a:pt x="0" y="239925"/>
-                      <a:pt x="140568" y="37685"/>
+                      <a:pt x="101594" y="1066733"/>
+                      <a:pt x="406375" y="507968"/>
+                      <a:pt x="1015937" y="0"/>
                     </a:cubicBezTo>
-                    <a:cubicBezTo>
-                      <a:pt x="383960" y="0"/>
-                      <a:pt x="589611" y="329109"/>
-                      <a:pt x="483318" y="586200"/>
-                    </a:cubicBezTo>
-                    <a:close/>
                   </a:path>
                 </a:pathLst>
               </a:custGeom>
-              <a:solidFill>
-                <a:srgbClr val="FFFFFF"/>
-              </a:solidFill>
-              <a:ln w="19685">
+              <a:noFill/>
+              <a:ln w="10159" cap="rnd">
                 <a:solidFill>
-                  <a:srgbClr val="93A0C9"/>
+                  <a:srgbClr val="5A6AA8"/>
                 </a:solidFill>
-                <a:round/>
               </a:ln>
             </p:spPr>
           </p:sp>
+          <p:grpSp>
+            <p:nvGrpSpPr>
+              <p:cNvPr id="12" name="Group 12"/>
+              <p:cNvGrpSpPr/>
+              <p:nvPr/>
+            </p:nvGrpSpPr>
+            <p:grpSpPr>
+              <a:xfrm>
+                <a:off x="1471738" y="5571660"/>
+                <a:ext cx="549700" cy="462464"/>
+                <a:chOff x="1471738" y="5571660"/>
+                <a:chExt cx="549700" cy="462464"/>
+              </a:xfrm>
+            </p:grpSpPr>
+            <p:sp>
+              <p:nvSpPr>
+                <p:cNvPr id="5" name="Freeform 5"/>
+                <p:cNvSpPr/>
+                <p:nvPr/>
+              </p:nvSpPr>
+              <p:spPr>
+                <a:xfrm>
+                  <a:off x="1523856" y="5589254"/>
+                  <a:ext cx="213006" cy="211774"/>
+                </a:xfrm>
+                <a:custGeom>
+                  <a:avLst/>
+                  <a:gdLst/>
+                  <a:ahLst/>
+                  <a:cxnLst/>
+                  <a:rect l="l" t="t" r="r" b="b"/>
+                  <a:pathLst>
+                    <a:path w="213006" h="211774">
+                      <a:moveTo>
+                        <a:pt x="174606" y="211774"/>
+                      </a:moveTo>
+                      <a:cubicBezTo>
+                        <a:pt x="74294" y="205572"/>
+                        <a:pt x="0" y="86677"/>
+                        <a:pt x="50782" y="13614"/>
+                      </a:cubicBezTo>
+                      <a:cubicBezTo>
+                        <a:pt x="138712" y="0"/>
+                        <a:pt x="213006" y="118896"/>
+                        <a:pt x="174606" y="211774"/>
+                      </a:cubicBezTo>
+                      <a:close/>
+                    </a:path>
+                  </a:pathLst>
+                </a:custGeom>
+                <a:solidFill>
+                  <a:srgbClr val="FFFFFF"/>
+                </a:solidFill>
+                <a:ln w="7112">
+                  <a:solidFill>
+                    <a:srgbClr val="5A6AA8"/>
+                  </a:solidFill>
+                  <a:round/>
+                </a:ln>
+              </p:spPr>
+            </p:sp>
+            <p:sp>
+              <p:nvSpPr>
+                <p:cNvPr id="6" name="Freeform 6"/>
+                <p:cNvSpPr/>
+                <p:nvPr/>
+              </p:nvSpPr>
+              <p:spPr>
+                <a:xfrm>
+                  <a:off x="1673362" y="5596311"/>
+                  <a:ext cx="215417" cy="212537"/>
+                </a:xfrm>
+                <a:custGeom>
+                  <a:avLst/>
+                  <a:gdLst/>
+                  <a:ahLst/>
+                  <a:cxnLst/>
+                  <a:rect l="l" t="t" r="r" b="b"/>
+                  <a:pathLst>
+                    <a:path w="215417" h="212537">
+                      <a:moveTo>
+                        <a:pt x="25100" y="204717"/>
+                      </a:moveTo>
+                      <a:cubicBezTo>
+                        <a:pt x="0" y="107399"/>
+                        <a:pt x="90118" y="0"/>
+                        <a:pt x="175297" y="25719"/>
+                      </a:cubicBezTo>
+                      <a:cubicBezTo>
+                        <a:pt x="215417" y="105138"/>
+                        <a:pt x="125299" y="212537"/>
+                        <a:pt x="25100" y="204717"/>
+                      </a:cubicBezTo>
+                      <a:close/>
+                    </a:path>
+                  </a:pathLst>
+                </a:custGeom>
+                <a:solidFill>
+                  <a:srgbClr val="FFFFFF"/>
+                </a:solidFill>
+                <a:ln w="7112">
+                  <a:solidFill>
+                    <a:srgbClr val="5A6AA8"/>
+                  </a:solidFill>
+                  <a:round/>
+                </a:ln>
+              </p:spPr>
+            </p:sp>
+            <p:sp>
+              <p:nvSpPr>
+                <p:cNvPr id="7" name="Freeform 7"/>
+                <p:cNvSpPr/>
+                <p:nvPr/>
+              </p:nvSpPr>
+              <p:spPr>
+                <a:xfrm>
+                  <a:off x="1698462" y="5747083"/>
+                  <a:ext cx="216651" cy="204175"/>
+                </a:xfrm>
+                <a:custGeom>
+                  <a:avLst/>
+                  <a:gdLst/>
+                  <a:ahLst/>
+                  <a:cxnLst/>
+                  <a:rect l="l" t="t" r="r" b="b"/>
+                  <a:pathLst>
+                    <a:path w="216651" h="204175">
+                      <a:moveTo>
+                        <a:pt x="0" y="53945"/>
+                      </a:moveTo>
+                      <a:cubicBezTo>
+                        <a:pt x="84799" y="0"/>
+                        <a:pt x="214790" y="52520"/>
+                        <a:pt x="216651" y="141477"/>
+                      </a:cubicBezTo>
+                      <a:cubicBezTo>
+                        <a:pt x="153517" y="204175"/>
+                        <a:pt x="23526" y="151656"/>
+                        <a:pt x="0" y="53945"/>
+                      </a:cubicBezTo>
+                      <a:close/>
+                    </a:path>
+                  </a:pathLst>
+                </a:custGeom>
+                <a:solidFill>
+                  <a:srgbClr val="FFFFFF"/>
+                </a:solidFill>
+                <a:ln w="7112">
+                  <a:solidFill>
+                    <a:srgbClr val="5A6AA8"/>
+                  </a:solidFill>
+                  <a:round/>
+                </a:ln>
+              </p:spPr>
+            </p:sp>
+            <p:sp>
+              <p:nvSpPr>
+                <p:cNvPr id="8" name="Freeform 8"/>
+                <p:cNvSpPr/>
+                <p:nvPr/>
+              </p:nvSpPr>
+              <p:spPr>
+                <a:xfrm>
+                  <a:off x="1603024" y="5801028"/>
+                  <a:ext cx="172947" cy="233096"/>
+                </a:xfrm>
+                <a:custGeom>
+                  <a:avLst/>
+                  <a:gdLst/>
+                  <a:ahLst/>
+                  <a:cxnLst/>
+                  <a:rect l="l" t="t" r="r" b="b"/>
+                  <a:pathLst>
+                    <a:path w="172947" h="233096">
+                      <a:moveTo>
+                        <a:pt x="95438" y="0"/>
+                      </a:moveTo>
+                      <a:cubicBezTo>
+                        <a:pt x="172947" y="63979"/>
+                        <a:pt x="163167" y="203837"/>
+                        <a:pt x="79139" y="233096"/>
+                      </a:cubicBezTo>
+                      <a:cubicBezTo>
+                        <a:pt x="0" y="192427"/>
+                        <a:pt x="9780" y="52569"/>
+                        <a:pt x="95438" y="0"/>
+                      </a:cubicBezTo>
+                      <a:close/>
+                    </a:path>
+                  </a:pathLst>
+                </a:custGeom>
+                <a:solidFill>
+                  <a:srgbClr val="FFFFFF"/>
+                </a:solidFill>
+                <a:ln w="7112">
+                  <a:solidFill>
+                    <a:srgbClr val="5A6AA8"/>
+                  </a:solidFill>
+                  <a:round/>
+                </a:ln>
+              </p:spPr>
+            </p:sp>
+            <p:sp>
+              <p:nvSpPr>
+                <p:cNvPr id="9" name="Freeform 9"/>
+                <p:cNvSpPr/>
+                <p:nvPr/>
+              </p:nvSpPr>
+              <p:spPr>
+                <a:xfrm>
+                  <a:off x="1471738" y="5735807"/>
+                  <a:ext cx="226725" cy="192624"/>
+                </a:xfrm>
+                <a:custGeom>
+                  <a:avLst/>
+                  <a:gdLst/>
+                  <a:ahLst/>
+                  <a:cxnLst/>
+                  <a:rect l="l" t="t" r="r" b="b"/>
+                  <a:pathLst>
+                    <a:path w="226725" h="192624">
+                      <a:moveTo>
+                        <a:pt x="226725" y="65221"/>
+                      </a:moveTo>
+                      <a:cubicBezTo>
+                        <a:pt x="189828" y="158707"/>
+                        <a:pt x="53794" y="192624"/>
+                        <a:pt x="0" y="121750"/>
+                      </a:cubicBezTo>
+                      <a:cubicBezTo>
+                        <a:pt x="14224" y="33917"/>
+                        <a:pt x="150258" y="0"/>
+                        <a:pt x="226725" y="65221"/>
+                      </a:cubicBezTo>
+                      <a:close/>
+                    </a:path>
+                  </a:pathLst>
+                </a:custGeom>
+                <a:solidFill>
+                  <a:srgbClr val="FFFFFF"/>
+                </a:solidFill>
+                <a:ln w="7112">
+                  <a:solidFill>
+                    <a:srgbClr val="5A6AA8"/>
+                  </a:solidFill>
+                  <a:round/>
+                </a:ln>
+              </p:spPr>
+            </p:sp>
+            <p:sp>
+              <p:nvSpPr>
+                <p:cNvPr id="10" name="Freeform 10"/>
+                <p:cNvSpPr/>
+                <p:nvPr/>
+              </p:nvSpPr>
+              <p:spPr>
+                <a:xfrm>
+                  <a:off x="1698462" y="5571660"/>
+                  <a:ext cx="322976" cy="342791"/>
+                </a:xfrm>
+                <a:custGeom>
+                  <a:avLst/>
+                  <a:gdLst/>
+                  <a:ahLst/>
+                  <a:cxnLst/>
+                  <a:rect l="l" t="t" r="r" b="b"/>
+                  <a:pathLst>
+                    <a:path w="322976" h="342791">
+                      <a:moveTo>
+                        <a:pt x="0" y="229368"/>
+                      </a:moveTo>
+                      <a:cubicBezTo>
+                        <a:pt x="56773" y="70722"/>
+                        <a:pt x="243836" y="0"/>
+                        <a:pt x="249397" y="167186"/>
+                      </a:cubicBezTo>
+                      <a:cubicBezTo>
+                        <a:pt x="322976" y="317414"/>
+                        <a:pt x="124607" y="342791"/>
+                        <a:pt x="0" y="229368"/>
+                      </a:cubicBezTo>
+                      <a:close/>
+                    </a:path>
+                  </a:pathLst>
+                </a:custGeom>
+                <a:solidFill>
+                  <a:srgbClr val="FFFFFF"/>
+                </a:solidFill>
+                <a:ln w="7112">
+                  <a:solidFill>
+                    <a:srgbClr val="5A6AA8"/>
+                  </a:solidFill>
+                  <a:round/>
+                </a:ln>
+              </p:spPr>
+            </p:sp>
+            <p:sp>
+              <p:nvSpPr>
+                <p:cNvPr id="11" name="Ellipse 11"/>
+                <p:cNvSpPr/>
+                <p:nvPr/>
+              </p:nvSpPr>
+              <p:spPr>
+                <a:xfrm rot="-7320000">
+                  <a:off x="1673064" y="5775630"/>
+                  <a:ext cx="50797" cy="50797"/>
+                </a:xfrm>
+                <a:prstGeom prst="ellipse">
+                  <a:avLst/>
+                </a:prstGeom>
+                <a:solidFill>
+                  <a:srgbClr val="5A6AA8"/>
+                </a:solidFill>
+                <a:ln>
+                  <a:noFill/>
+                </a:ln>
+              </p:spPr>
+            </p:sp>
+          </p:grpSp>
+          <p:grpSp>
+            <p:nvGrpSpPr>
+              <p:cNvPr id="20" name="Group 20"/>
+              <p:cNvGrpSpPr/>
+              <p:nvPr/>
+            </p:nvGrpSpPr>
+            <p:grpSpPr>
+              <a:xfrm>
+                <a:off x="1777469" y="5195515"/>
+                <a:ext cx="453676" cy="377271"/>
+                <a:chOff x="1777469" y="5195515"/>
+                <a:chExt cx="453676" cy="377271"/>
+              </a:xfrm>
+            </p:grpSpPr>
+            <p:sp>
+              <p:nvSpPr>
+                <p:cNvPr id="13" name="Freeform 13"/>
+                <p:cNvSpPr/>
+                <p:nvPr/>
+              </p:nvSpPr>
+              <p:spPr>
+                <a:xfrm>
+                  <a:off x="1850406" y="5195515"/>
+                  <a:ext cx="172536" cy="185424"/>
+                </a:xfrm>
+                <a:custGeom>
+                  <a:avLst/>
+                  <a:gdLst/>
+                  <a:ahLst/>
+                  <a:cxnLst/>
+                  <a:rect l="l" t="t" r="r" b="b"/>
+                  <a:pathLst>
+                    <a:path w="172536" h="185424">
+                      <a:moveTo>
+                        <a:pt x="125407" y="185424"/>
+                      </a:moveTo>
+                      <a:cubicBezTo>
+                        <a:pt x="42597" y="163889"/>
+                        <a:pt x="0" y="52919"/>
+                        <a:pt x="54229" y="0"/>
+                      </a:cubicBezTo>
+                      <a:cubicBezTo>
+                        <a:pt x="129939" y="3040"/>
+                        <a:pt x="172536" y="114010"/>
+                        <a:pt x="125407" y="185424"/>
+                      </a:cubicBezTo>
+                      <a:close/>
+                    </a:path>
+                  </a:pathLst>
+                </a:custGeom>
+                <a:solidFill>
+                  <a:srgbClr val="FFFFFF"/>
+                </a:solidFill>
+                <a:ln w="7112">
+                  <a:solidFill>
+                    <a:srgbClr val="5A6AA8"/>
+                  </a:solidFill>
+                  <a:round/>
+                </a:ln>
+              </p:spPr>
+            </p:sp>
+            <p:sp>
+              <p:nvSpPr>
+                <p:cNvPr id="14" name="Freeform 14"/>
+                <p:cNvSpPr/>
+                <p:nvPr/>
+              </p:nvSpPr>
+              <p:spPr>
+                <a:xfrm>
+                  <a:off x="1970704" y="5220723"/>
+                  <a:ext cx="179966" cy="182970"/>
+                </a:xfrm>
+                <a:custGeom>
+                  <a:avLst/>
+                  <a:gdLst/>
+                  <a:ahLst/>
+                  <a:cxnLst/>
+                  <a:rect l="l" t="t" r="r" b="b"/>
+                  <a:pathLst>
+                    <a:path w="179966" h="182970">
+                      <a:moveTo>
+                        <a:pt x="5108" y="160215"/>
+                      </a:moveTo>
+                      <a:cubicBezTo>
+                        <a:pt x="0" y="74804"/>
+                        <a:pt x="92375" y="0"/>
+                        <a:pt x="159462" y="35222"/>
+                      </a:cubicBezTo>
+                      <a:cubicBezTo>
+                        <a:pt x="179966" y="108166"/>
+                        <a:pt x="87591" y="182970"/>
+                        <a:pt x="5108" y="160215"/>
+                      </a:cubicBezTo>
+                      <a:close/>
+                    </a:path>
+                  </a:pathLst>
+                </a:custGeom>
+                <a:solidFill>
+                  <a:srgbClr val="FFFFFF"/>
+                </a:solidFill>
+                <a:ln w="7112">
+                  <a:solidFill>
+                    <a:srgbClr val="5A6AA8"/>
+                  </a:solidFill>
+                  <a:round/>
+                </a:ln>
+              </p:spPr>
+            </p:sp>
+            <p:sp>
+              <p:nvSpPr>
+                <p:cNvPr id="15" name="Freeform 15"/>
+                <p:cNvSpPr/>
+                <p:nvPr/>
+              </p:nvSpPr>
+              <p:spPr>
+                <a:xfrm>
+                  <a:off x="1975813" y="5349686"/>
+                  <a:ext cx="179340" cy="181467"/>
+                </a:xfrm>
+                <a:custGeom>
+                  <a:avLst/>
+                  <a:gdLst/>
+                  <a:ahLst/>
+                  <a:cxnLst/>
+                  <a:rect l="l" t="t" r="r" b="b"/>
+                  <a:pathLst>
+                    <a:path w="179340" h="181467">
+                      <a:moveTo>
+                        <a:pt x="0" y="31252"/>
+                      </a:moveTo>
+                      <a:cubicBezTo>
+                        <a:pt x="79652" y="0"/>
+                        <a:pt x="179340" y="64738"/>
+                        <a:pt x="166573" y="139426"/>
+                      </a:cubicBezTo>
+                      <a:cubicBezTo>
+                        <a:pt x="103536" y="181467"/>
+                        <a:pt x="3847" y="116729"/>
+                        <a:pt x="0" y="31252"/>
+                      </a:cubicBezTo>
+                      <a:close/>
+                    </a:path>
+                  </a:pathLst>
+                </a:custGeom>
+                <a:solidFill>
+                  <a:srgbClr val="FFFFFF"/>
+                </a:solidFill>
+                <a:ln w="7112">
+                  <a:solidFill>
+                    <a:srgbClr val="5A6AA8"/>
+                  </a:solidFill>
+                  <a:round/>
+                </a:ln>
+              </p:spPr>
+            </p:sp>
+            <p:sp>
+              <p:nvSpPr>
+                <p:cNvPr id="16" name="Freeform 16"/>
+                <p:cNvSpPr/>
+                <p:nvPr/>
+              </p:nvSpPr>
+              <p:spPr>
+                <a:xfrm>
+                  <a:off x="1864944" y="5380938"/>
+                  <a:ext cx="165205" cy="191848"/>
+                </a:xfrm>
+                <a:custGeom>
+                  <a:avLst/>
+                  <a:gdLst/>
+                  <a:ahLst/>
+                  <a:cxnLst/>
+                  <a:rect l="l" t="t" r="r" b="b"/>
+                  <a:pathLst>
+                    <a:path w="165205" h="191848">
+                      <a:moveTo>
+                        <a:pt x="110869" y="0"/>
+                      </a:moveTo>
+                      <a:cubicBezTo>
+                        <a:pt x="165205" y="66096"/>
+                        <a:pt x="134441" y="180911"/>
+                        <a:pt x="59464" y="191848"/>
+                      </a:cubicBezTo>
+                      <a:cubicBezTo>
+                        <a:pt x="0" y="144887"/>
+                        <a:pt x="30764" y="30073"/>
+                        <a:pt x="110869" y="0"/>
+                      </a:cubicBezTo>
+                      <a:close/>
+                    </a:path>
+                  </a:pathLst>
+                </a:custGeom>
+                <a:solidFill>
+                  <a:srgbClr val="FFFFFF"/>
+                </a:solidFill>
+                <a:ln w="7112">
+                  <a:solidFill>
+                    <a:srgbClr val="5A6AA8"/>
+                  </a:solidFill>
+                  <a:round/>
+                </a:ln>
+              </p:spPr>
+            </p:sp>
+            <p:sp>
+              <p:nvSpPr>
+                <p:cNvPr id="17" name="Freeform 17"/>
+                <p:cNvSpPr/>
+                <p:nvPr/>
+              </p:nvSpPr>
+              <p:spPr>
+                <a:xfrm>
+                  <a:off x="1777469" y="5314047"/>
+                  <a:ext cx="198343" cy="145213"/>
+                </a:xfrm>
+                <a:custGeom>
+                  <a:avLst/>
+                  <a:gdLst/>
+                  <a:ahLst/>
+                  <a:cxnLst/>
+                  <a:rect l="l" t="t" r="r" b="b"/>
+                  <a:pathLst>
+                    <a:path w="198343" h="145213">
+                      <a:moveTo>
+                        <a:pt x="198343" y="66891"/>
+                      </a:moveTo>
+                      <a:cubicBezTo>
+                        <a:pt x="152273" y="138993"/>
+                        <a:pt x="33571" y="145213"/>
+                        <a:pt x="0" y="77286"/>
+                      </a:cubicBezTo>
+                      <a:cubicBezTo>
+                        <a:pt x="26287" y="6221"/>
+                        <a:pt x="144989" y="0"/>
+                        <a:pt x="198343" y="66891"/>
+                      </a:cubicBezTo>
+                      <a:close/>
+                    </a:path>
+                  </a:pathLst>
+                </a:custGeom>
+                <a:solidFill>
+                  <a:srgbClr val="FFFFFF"/>
+                </a:solidFill>
+                <a:ln w="7112">
+                  <a:solidFill>
+                    <a:srgbClr val="5A6AA8"/>
+                  </a:solidFill>
+                  <a:round/>
+                </a:ln>
+              </p:spPr>
+            </p:sp>
+            <p:sp>
+              <p:nvSpPr>
+                <p:cNvPr id="18" name="Freeform 18"/>
+                <p:cNvSpPr/>
+                <p:nvPr/>
+              </p:nvSpPr>
+              <p:spPr>
+                <a:xfrm>
+                  <a:off x="1975813" y="5229098"/>
+                  <a:ext cx="255332" cy="277681"/>
+                </a:xfrm>
+                <a:custGeom>
+                  <a:avLst/>
+                  <a:gdLst/>
+                  <a:ahLst/>
+                  <a:cxnLst/>
+                  <a:rect l="l" t="t" r="r" b="b"/>
+                  <a:pathLst>
+                    <a:path w="255332" h="277681">
+                      <a:moveTo>
+                        <a:pt x="0" y="151840"/>
+                      </a:moveTo>
+                      <a:cubicBezTo>
+                        <a:pt x="73101" y="28677"/>
+                        <a:pt x="240780" y="0"/>
+                        <a:pt x="218127" y="140409"/>
+                      </a:cubicBezTo>
+                      <a:cubicBezTo>
+                        <a:pt x="255332" y="277681"/>
+                        <a:pt x="85574" y="266689"/>
+                        <a:pt x="0" y="151840"/>
+                      </a:cubicBezTo>
+                      <a:close/>
+                    </a:path>
+                  </a:pathLst>
+                </a:custGeom>
+                <a:solidFill>
+                  <a:srgbClr val="FFFFFF"/>
+                </a:solidFill>
+                <a:ln w="7112">
+                  <a:solidFill>
+                    <a:srgbClr val="5A6AA8"/>
+                  </a:solidFill>
+                  <a:round/>
+                </a:ln>
+              </p:spPr>
+            </p:sp>
+            <p:sp>
+              <p:nvSpPr>
+                <p:cNvPr id="19" name="Ellipse 19"/>
+                <p:cNvSpPr/>
+                <p:nvPr/>
+              </p:nvSpPr>
+              <p:spPr>
+                <a:xfrm rot="-6660000">
+                  <a:off x="1950414" y="5355540"/>
+                  <a:ext cx="50797" cy="50797"/>
+                </a:xfrm>
+                <a:prstGeom prst="ellipse">
+                  <a:avLst/>
+                </a:prstGeom>
+                <a:solidFill>
+                  <a:srgbClr val="5A6AA8"/>
+                </a:solidFill>
+                <a:ln>
+                  <a:noFill/>
+                </a:ln>
+              </p:spPr>
+            </p:sp>
+          </p:grpSp>
+          <p:grpSp>
+            <p:nvGrpSpPr>
+              <p:cNvPr id="28" name="Group 28"/>
+              <p:cNvGrpSpPr/>
+              <p:nvPr/>
+            </p:nvGrpSpPr>
+            <p:grpSpPr>
+              <a:xfrm>
+                <a:off x="2192783" y="4824892"/>
+                <a:ext cx="378468" cy="310784"/>
+                <a:chOff x="2192783" y="4824892"/>
+                <a:chExt cx="378468" cy="310784"/>
+              </a:xfrm>
+            </p:grpSpPr>
+            <p:sp>
+              <p:nvSpPr>
+                <p:cNvPr id="21" name="Freeform 21"/>
+                <p:cNvSpPr/>
+                <p:nvPr/>
+              </p:nvSpPr>
+              <p:spPr>
+                <a:xfrm>
+                  <a:off x="2271486" y="4824892"/>
+                  <a:ext cx="132014" cy="160339"/>
+                </a:xfrm>
+                <a:custGeom>
+                  <a:avLst/>
+                  <a:gdLst/>
+                  <a:ahLst/>
+                  <a:cxnLst/>
+                  <a:rect l="l" t="t" r="r" b="b"/>
+                  <a:pathLst>
+                    <a:path w="132014" h="160339">
+                      <a:moveTo>
+                        <a:pt x="83779" y="160339"/>
+                      </a:moveTo>
+                      <a:cubicBezTo>
+                        <a:pt x="19478" y="131849"/>
+                        <a:pt x="0" y="35247"/>
+                        <a:pt x="51449" y="0"/>
+                      </a:cubicBezTo>
+                      <a:cubicBezTo>
+                        <a:pt x="112536" y="12556"/>
+                        <a:pt x="132014" y="109157"/>
+                        <a:pt x="83779" y="160339"/>
+                      </a:cubicBezTo>
+                      <a:close/>
+                    </a:path>
+                  </a:pathLst>
+                </a:custGeom>
+                <a:solidFill>
+                  <a:srgbClr val="FFFFFF"/>
+                </a:solidFill>
+                <a:ln w="7112">
+                  <a:solidFill>
+                    <a:srgbClr val="5A6AA8"/>
+                  </a:solidFill>
+                  <a:round/>
+                </a:ln>
+              </p:spPr>
+            </p:sp>
+            <p:sp>
+              <p:nvSpPr>
+                <p:cNvPr id="22" name="Freeform 22"/>
+                <p:cNvSpPr/>
+                <p:nvPr/>
+              </p:nvSpPr>
+              <p:spPr>
+                <a:xfrm>
+                  <a:off x="2355265" y="4866897"/>
+                  <a:ext cx="149436" cy="148393"/>
+                </a:xfrm>
+                <a:custGeom>
+                  <a:avLst/>
+                  <a:gdLst/>
+                  <a:ahLst/>
+                  <a:cxnLst/>
+                  <a:rect l="l" t="t" r="r" b="b"/>
+                  <a:pathLst>
+                    <a:path w="149436" h="148393">
+                      <a:moveTo>
+                        <a:pt x="0" y="118334"/>
+                      </a:moveTo>
+                      <a:cubicBezTo>
+                        <a:pt x="7226" y="48377"/>
+                        <a:pt x="93080" y="0"/>
+                        <a:pt x="142501" y="38039"/>
+                      </a:cubicBezTo>
+                      <a:cubicBezTo>
+                        <a:pt x="149436" y="100016"/>
+                        <a:pt x="63582" y="148393"/>
+                        <a:pt x="0" y="118334"/>
+                      </a:cubicBezTo>
+                      <a:close/>
+                    </a:path>
+                  </a:pathLst>
+                </a:custGeom>
+                <a:solidFill>
+                  <a:srgbClr val="FFFFFF"/>
+                </a:solidFill>
+                <a:ln w="7112">
+                  <a:solidFill>
+                    <a:srgbClr val="5A6AA8"/>
+                  </a:solidFill>
+                  <a:round/>
+                </a:ln>
+              </p:spPr>
+            </p:sp>
+            <p:sp>
+              <p:nvSpPr>
+                <p:cNvPr id="23" name="Freeform 23"/>
+                <p:cNvSpPr/>
+                <p:nvPr/>
+              </p:nvSpPr>
+              <p:spPr>
+                <a:xfrm>
+                  <a:off x="2346325" y="4970485"/>
+                  <a:ext cx="150245" cy="151208"/>
+                </a:xfrm>
+                <a:custGeom>
+                  <a:avLst/>
+                  <a:gdLst/>
+                  <a:ahLst/>
+                  <a:cxnLst/>
+                  <a:rect l="l" t="t" r="r" b="b"/>
+                  <a:pathLst>
+                    <a:path w="150245" h="151208">
+                      <a:moveTo>
+                        <a:pt x="8940" y="14746"/>
+                      </a:moveTo>
+                      <a:cubicBezTo>
+                        <a:pt x="77706" y="0"/>
+                        <a:pt x="150245" y="66703"/>
+                        <a:pt x="129340" y="125459"/>
+                      </a:cubicBezTo>
+                      <a:cubicBezTo>
+                        <a:pt x="72539" y="151208"/>
+                        <a:pt x="0" y="84505"/>
+                        <a:pt x="8940" y="14746"/>
+                      </a:cubicBezTo>
+                      <a:close/>
+                    </a:path>
+                  </a:pathLst>
+                </a:custGeom>
+                <a:solidFill>
+                  <a:srgbClr val="FFFFFF"/>
+                </a:solidFill>
+                <a:ln w="7112">
+                  <a:solidFill>
+                    <a:srgbClr val="5A6AA8"/>
+                  </a:solidFill>
+                  <a:round/>
+                </a:ln>
+              </p:spPr>
+            </p:sp>
+            <p:sp>
+              <p:nvSpPr>
+                <p:cNvPr id="24" name="Freeform 24"/>
+                <p:cNvSpPr/>
+                <p:nvPr/>
+              </p:nvSpPr>
+              <p:spPr>
+                <a:xfrm>
+                  <a:off x="2245135" y="4985231"/>
+                  <a:ext cx="145404" cy="150445"/>
+                </a:xfrm>
+                <a:custGeom>
+                  <a:avLst/>
+                  <a:gdLst/>
+                  <a:ahLst/>
+                  <a:cxnLst/>
+                  <a:rect l="l" t="t" r="r" b="b"/>
+                  <a:pathLst>
+                    <a:path w="145404" h="150445">
+                      <a:moveTo>
+                        <a:pt x="110130" y="0"/>
+                      </a:moveTo>
+                      <a:cubicBezTo>
+                        <a:pt x="145404" y="60844"/>
+                        <a:pt x="104381" y="150445"/>
+                        <a:pt x="42041" y="148720"/>
+                      </a:cubicBezTo>
+                      <a:cubicBezTo>
+                        <a:pt x="0" y="102656"/>
+                        <a:pt x="41023" y="13054"/>
+                        <a:pt x="110130" y="0"/>
+                      </a:cubicBezTo>
+                      <a:close/>
+                    </a:path>
+                  </a:pathLst>
+                </a:custGeom>
+                <a:solidFill>
+                  <a:srgbClr val="FFFFFF"/>
+                </a:solidFill>
+                <a:ln w="7112">
+                  <a:solidFill>
+                    <a:srgbClr val="5A6AA8"/>
+                  </a:solidFill>
+                  <a:round/>
+                </a:ln>
+              </p:spPr>
+            </p:sp>
+            <p:sp>
+              <p:nvSpPr>
+                <p:cNvPr id="25" name="Freeform 25"/>
+                <p:cNvSpPr/>
+                <p:nvPr/>
+              </p:nvSpPr>
+              <p:spPr>
+                <a:xfrm>
+                  <a:off x="2192783" y="4912214"/>
+                  <a:ext cx="162482" cy="125367"/>
+                </a:xfrm>
+                <a:custGeom>
+                  <a:avLst/>
+                  <a:gdLst/>
+                  <a:ahLst/>
+                  <a:cxnLst/>
+                  <a:rect l="l" t="t" r="r" b="b"/>
+                  <a:pathLst>
+                    <a:path w="162482" h="125367">
+                      <a:moveTo>
+                        <a:pt x="162482" y="73017"/>
+                      </a:moveTo>
+                      <a:cubicBezTo>
+                        <a:pt x="115516" y="125367"/>
+                        <a:pt x="17623" y="114040"/>
+                        <a:pt x="0" y="54218"/>
+                      </a:cubicBezTo>
+                      <a:cubicBezTo>
+                        <a:pt x="30818" y="0"/>
+                        <a:pt x="128711" y="11327"/>
+                        <a:pt x="162482" y="73017"/>
+                      </a:cubicBezTo>
+                      <a:close/>
+                    </a:path>
+                  </a:pathLst>
+                </a:custGeom>
+                <a:solidFill>
+                  <a:srgbClr val="FFFFFF"/>
+                </a:solidFill>
+                <a:ln w="7112">
+                  <a:solidFill>
+                    <a:srgbClr val="5A6AA8"/>
+                  </a:solidFill>
+                  <a:round/>
+                </a:ln>
+              </p:spPr>
+            </p:sp>
+            <p:sp>
+              <p:nvSpPr>
+                <p:cNvPr id="26" name="Freeform 26"/>
+                <p:cNvSpPr/>
+                <p:nvPr/>
+              </p:nvSpPr>
+              <p:spPr>
+                <a:xfrm>
+                  <a:off x="2355265" y="4895166"/>
+                  <a:ext cx="215986" cy="227071"/>
+                </a:xfrm>
+                <a:custGeom>
+                  <a:avLst/>
+                  <a:gdLst/>
+                  <a:ahLst/>
+                  <a:cxnLst/>
+                  <a:rect l="l" t="t" r="r" b="b"/>
+                  <a:pathLst>
+                    <a:path w="215986" h="227071">
+                      <a:moveTo>
+                        <a:pt x="0" y="90065"/>
+                      </a:moveTo>
+                      <a:cubicBezTo>
+                        <a:pt x="76362" y="208"/>
+                        <a:pt x="215986" y="0"/>
+                        <a:pt x="178730" y="110745"/>
+                      </a:cubicBezTo>
+                      <a:cubicBezTo>
+                        <a:pt x="189713" y="227071"/>
+                        <a:pt x="53825" y="194985"/>
+                        <a:pt x="0" y="90065"/>
+                      </a:cubicBezTo>
+                      <a:close/>
+                    </a:path>
+                  </a:pathLst>
+                </a:custGeom>
+                <a:solidFill>
+                  <a:srgbClr val="FFFFFF"/>
+                </a:solidFill>
+                <a:ln w="7112">
+                  <a:solidFill>
+                    <a:srgbClr val="5A6AA8"/>
+                  </a:solidFill>
+                  <a:round/>
+                </a:ln>
+              </p:spPr>
+            </p:sp>
+            <p:sp>
+              <p:nvSpPr>
+                <p:cNvPr id="27" name="Ellipse 27"/>
+                <p:cNvSpPr/>
+                <p:nvPr/>
+              </p:nvSpPr>
+              <p:spPr>
+                <a:xfrm rot="-6084000">
+                  <a:off x="2329867" y="4959833"/>
+                  <a:ext cx="50797" cy="50797"/>
+                </a:xfrm>
+                <a:prstGeom prst="ellipse">
+                  <a:avLst/>
+                </a:prstGeom>
+                <a:solidFill>
+                  <a:srgbClr val="5A6AA8"/>
+                </a:solidFill>
+                <a:ln>
+                  <a:noFill/>
+                </a:ln>
+              </p:spPr>
+            </p:sp>
+          </p:grpSp>
+          <p:grpSp>
+            <p:nvGrpSpPr>
+              <p:cNvPr id="31" name="Group 31"/>
+              <p:cNvGrpSpPr/>
+              <p:nvPr/>
+            </p:nvGrpSpPr>
+            <p:grpSpPr>
+              <a:xfrm>
+                <a:off x="946552" y="6097173"/>
+                <a:ext cx="527896" cy="304781"/>
+                <a:chOff x="946552" y="6097173"/>
+                <a:chExt cx="527896" cy="304781"/>
+              </a:xfrm>
+            </p:grpSpPr>
+            <p:sp>
+              <p:nvSpPr>
+                <p:cNvPr id="29" name="Freeform 29"/>
+                <p:cNvSpPr/>
+                <p:nvPr/>
+              </p:nvSpPr>
+              <p:spPr>
+                <a:xfrm>
+                  <a:off x="946552" y="6097173"/>
+                  <a:ext cx="527896" cy="304781"/>
+                </a:xfrm>
+                <a:custGeom>
+                  <a:avLst/>
+                  <a:gdLst/>
+                  <a:ahLst/>
+                  <a:cxnLst/>
+                  <a:rect l="l" t="t" r="r" b="b"/>
+                  <a:pathLst>
+                    <a:path w="527896" h="304781">
+                      <a:moveTo>
+                        <a:pt x="527896" y="304781"/>
+                      </a:moveTo>
+                      <a:cubicBezTo>
+                        <a:pt x="333969" y="274935"/>
+                        <a:pt x="122811" y="153022"/>
+                        <a:pt x="0" y="0"/>
+                      </a:cubicBezTo>
+                      <a:cubicBezTo>
+                        <a:pt x="193927" y="29846"/>
+                        <a:pt x="405085" y="151759"/>
+                        <a:pt x="527896" y="304781"/>
+                      </a:cubicBezTo>
+                      <a:close/>
+                    </a:path>
+                  </a:pathLst>
+                </a:custGeom>
+                <a:solidFill>
+                  <a:srgbClr val="FFFFFF"/>
+                </a:solidFill>
+                <a:ln w="7112">
+                  <a:solidFill>
+                    <a:srgbClr val="5A6AA8"/>
+                  </a:solidFill>
+                  <a:round/>
+                </a:ln>
+              </p:spPr>
+            </p:sp>
+            <p:sp>
+              <p:nvSpPr>
+                <p:cNvPr id="30" name="Freeform 30"/>
+                <p:cNvSpPr/>
+                <p:nvPr/>
+              </p:nvSpPr>
+              <p:spPr>
+                <a:xfrm>
+                  <a:off x="1025736" y="6142891"/>
+                  <a:ext cx="406480" cy="234681"/>
+                </a:xfrm>
+                <a:custGeom>
+                  <a:avLst/>
+                  <a:gdLst/>
+                  <a:ahLst/>
+                  <a:cxnLst/>
+                  <a:rect l="l" t="t" r="r" b="b"/>
+                  <a:pathLst>
+                    <a:path w="406480" h="234681">
+                      <a:moveTo>
+                        <a:pt x="406480" y="234681"/>
+                      </a:moveTo>
+                      <a:lnTo>
+                        <a:pt x="0" y="0"/>
+                      </a:lnTo>
+                    </a:path>
+                  </a:pathLst>
+                </a:custGeom>
+                <a:noFill/>
+                <a:ln w="4064">
+                  <a:solidFill>
+                    <a:srgbClr val="C7CEE4"/>
+                  </a:solidFill>
+                </a:ln>
+              </p:spPr>
+            </p:sp>
+          </p:grpSp>
+          <p:grpSp>
+            <p:nvGrpSpPr>
+              <p:cNvPr id="34" name="Group 34"/>
+              <p:cNvGrpSpPr/>
+              <p:nvPr/>
+            </p:nvGrpSpPr>
+            <p:grpSpPr>
+              <a:xfrm>
+                <a:off x="1526261" y="5909225"/>
+                <a:ext cx="527896" cy="304781"/>
+                <a:chOff x="1526261" y="5909225"/>
+                <a:chExt cx="527896" cy="304781"/>
+              </a:xfrm>
+            </p:grpSpPr>
+            <p:sp>
+              <p:nvSpPr>
+                <p:cNvPr id="32" name="Freeform 32"/>
+                <p:cNvSpPr/>
+                <p:nvPr/>
+              </p:nvSpPr>
+              <p:spPr>
+                <a:xfrm>
+                  <a:off x="1526261" y="5909225"/>
+                  <a:ext cx="527896" cy="304781"/>
+                </a:xfrm>
+                <a:custGeom>
+                  <a:avLst/>
+                  <a:gdLst/>
+                  <a:ahLst/>
+                  <a:cxnLst/>
+                  <a:rect l="l" t="t" r="r" b="b"/>
+                  <a:pathLst>
+                    <a:path w="527896" h="304781">
+                      <a:moveTo>
+                        <a:pt x="0" y="304781"/>
+                      </a:moveTo>
+                      <a:cubicBezTo>
+                        <a:pt x="122811" y="151759"/>
+                        <a:pt x="333969" y="29846"/>
+                        <a:pt x="527896" y="0"/>
+                      </a:cubicBezTo>
+                      <a:cubicBezTo>
+                        <a:pt x="405085" y="153022"/>
+                        <a:pt x="193927" y="274935"/>
+                        <a:pt x="0" y="304781"/>
+                      </a:cubicBezTo>
+                      <a:close/>
+                    </a:path>
+                  </a:pathLst>
+                </a:custGeom>
+                <a:solidFill>
+                  <a:srgbClr val="FFFFFF"/>
+                </a:solidFill>
+                <a:ln w="7112">
+                  <a:solidFill>
+                    <a:srgbClr val="5A6AA8"/>
+                  </a:solidFill>
+                  <a:round/>
+                </a:ln>
+              </p:spPr>
+            </p:sp>
+            <p:sp>
+              <p:nvSpPr>
+                <p:cNvPr id="33" name="Freeform 33"/>
+                <p:cNvSpPr/>
+                <p:nvPr/>
+              </p:nvSpPr>
+              <p:spPr>
+                <a:xfrm>
+                  <a:off x="1568493" y="5954942"/>
+                  <a:ext cx="406480" cy="234681"/>
+                </a:xfrm>
+                <a:custGeom>
+                  <a:avLst/>
+                  <a:gdLst/>
+                  <a:ahLst/>
+                  <a:cxnLst/>
+                  <a:rect l="l" t="t" r="r" b="b"/>
+                  <a:pathLst>
+                    <a:path w="406480" h="234681">
+                      <a:moveTo>
+                        <a:pt x="0" y="234681"/>
+                      </a:moveTo>
+                      <a:lnTo>
+                        <a:pt x="406480" y="0"/>
+                      </a:lnTo>
+                    </a:path>
+                  </a:pathLst>
+                </a:custGeom>
+                <a:noFill/>
+                <a:ln w="4064">
+                  <a:solidFill>
+                    <a:srgbClr val="C7CEE4"/>
+                  </a:solidFill>
+                </a:ln>
+              </p:spPr>
+            </p:sp>
+          </p:grpSp>
+        </p:grpSp>
+        <p:sp>
+          <p:nvSpPr>
+            <p:cNvPr id="36" name="Rectangle 36"/>
+            <p:cNvSpPr/>
+            <p:nvPr/>
+          </p:nvSpPr>
+          <p:spPr>
+            <a:xfrm>
+              <a:off x="4067175" y="4305300"/>
+              <a:ext cx="4067175" cy="2552700"/>
+            </a:xfrm>
+            <a:prstGeom prst="rect">
+              <a:avLst/>
+            </a:prstGeom>
+            <a:solidFill>
+              <a:srgbClr val="FFFFFF"/>
+            </a:solidFill>
+            <a:ln>
+              <a:noFill/>
+            </a:ln>
+          </p:spPr>
+        </p:sp>
+        <p:sp>
+          <p:nvSpPr>
+            <p:cNvPr id="37" name="Rectangle 37"/>
+            <p:cNvSpPr/>
+            <p:nvPr/>
+          </p:nvSpPr>
+          <p:spPr>
+            <a:xfrm>
+              <a:off x="4067175" y="4305300"/>
+              <a:ext cx="28575" cy="2552700"/>
+            </a:xfrm>
+            <a:prstGeom prst="rect">
+              <a:avLst/>
+            </a:prstGeom>
+            <a:solidFill>
+              <a:srgbClr val="0A1138"/>
+            </a:solidFill>
+            <a:ln>
+              <a:noFill/>
+            </a:ln>
+          </p:spPr>
+        </p:sp>
+        <p:grpSp>
+          <p:nvGrpSpPr>
+            <p:cNvPr id="69" name="Group 69"/>
+            <p:cNvGrpSpPr/>
+            <p:nvPr/>
+          </p:nvGrpSpPr>
+          <p:grpSpPr>
+            <a:xfrm>
+              <a:off x="5013727" y="4824892"/>
+              <a:ext cx="1624699" cy="1810728"/>
+              <a:chOff x="5013727" y="4824892"/>
+              <a:chExt cx="1624699" cy="1810728"/>
+            </a:xfrm>
+          </p:grpSpPr>
           <p:sp>
             <p:nvSpPr>
-              <p:cNvPr id="4" name="Freeform 4"/>
+              <p:cNvPr id="38" name="Freeform 38"/>
               <p:cNvSpPr/>
               <p:nvPr/>
             </p:nvSpPr>
             <p:spPr>
               <a:xfrm>
-                <a:off x="10664799" y="5497922"/>
-                <a:ext cx="596285" cy="588312"/>
+                <a:off x="5495906" y="4908528"/>
+                <a:ext cx="1015936" cy="1727092"/>
               </a:xfrm>
               <a:custGeom>
                 <a:avLst/>
@@ -26690,45 +27879,1248 @@
                 <a:cxnLst/>
                 <a:rect l="l" t="t" r="r" b="b"/>
                 <a:pathLst>
-                  <a:path w="596285" h="588312">
+                  <a:path w="1015936" h="1727092">
                     <a:moveTo>
-                      <a:pt x="69478" y="566668"/>
+                      <a:pt x="0" y="1727092"/>
                     </a:moveTo>
                     <a:cubicBezTo>
-                      <a:pt x="0" y="297285"/>
-                      <a:pt x="249452" y="0"/>
-                      <a:pt x="485231" y="71192"/>
+                      <a:pt x="101594" y="1066733"/>
+                      <a:pt x="406375" y="507968"/>
+                      <a:pt x="1015936" y="0"/>
                     </a:cubicBezTo>
-                    <a:cubicBezTo>
-                      <a:pt x="596285" y="291027"/>
-                      <a:pt x="346833" y="588312"/>
-                      <a:pt x="69478" y="566668"/>
-                    </a:cubicBezTo>
-                    <a:close/>
                   </a:path>
                 </a:pathLst>
               </a:custGeom>
-              <a:solidFill>
-                <a:srgbClr val="FFFFFF"/>
-              </a:solidFill>
-              <a:ln w="19685">
+              <a:noFill/>
+              <a:ln w="10159" cap="rnd">
                 <a:solidFill>
-                  <a:srgbClr val="93A0C9"/>
+                  <a:srgbClr val="5A6AA8"/>
                 </a:solidFill>
-                <a:round/>
               </a:ln>
             </p:spPr>
           </p:sp>
+          <p:grpSp>
+            <p:nvGrpSpPr>
+              <p:cNvPr id="46" name="Group 46"/>
+              <p:cNvGrpSpPr/>
+              <p:nvPr/>
+            </p:nvGrpSpPr>
+            <p:grpSpPr>
+              <a:xfrm>
+                <a:off x="5538913" y="5571660"/>
+                <a:ext cx="549700" cy="462464"/>
+                <a:chOff x="5538913" y="5571660"/>
+                <a:chExt cx="549700" cy="462464"/>
+              </a:xfrm>
+            </p:grpSpPr>
+            <p:sp>
+              <p:nvSpPr>
+                <p:cNvPr id="39" name="Freeform 39"/>
+                <p:cNvSpPr/>
+                <p:nvPr/>
+              </p:nvSpPr>
+              <p:spPr>
+                <a:xfrm>
+                  <a:off x="5591031" y="5589254"/>
+                  <a:ext cx="213006" cy="211774"/>
+                </a:xfrm>
+                <a:custGeom>
+                  <a:avLst/>
+                  <a:gdLst/>
+                  <a:ahLst/>
+                  <a:cxnLst/>
+                  <a:rect l="l" t="t" r="r" b="b"/>
+                  <a:pathLst>
+                    <a:path w="213006" h="211774">
+                      <a:moveTo>
+                        <a:pt x="174606" y="211774"/>
+                      </a:moveTo>
+                      <a:cubicBezTo>
+                        <a:pt x="74294" y="205572"/>
+                        <a:pt x="0" y="86677"/>
+                        <a:pt x="50782" y="13614"/>
+                      </a:cubicBezTo>
+                      <a:cubicBezTo>
+                        <a:pt x="138712" y="0"/>
+                        <a:pt x="213006" y="118896"/>
+                        <a:pt x="174606" y="211774"/>
+                      </a:cubicBezTo>
+                      <a:close/>
+                    </a:path>
+                  </a:pathLst>
+                </a:custGeom>
+                <a:solidFill>
+                  <a:srgbClr val="FFFFFF"/>
+                </a:solidFill>
+                <a:ln w="7112">
+                  <a:solidFill>
+                    <a:srgbClr val="5A6AA8"/>
+                  </a:solidFill>
+                  <a:round/>
+                </a:ln>
+              </p:spPr>
+            </p:sp>
+            <p:sp>
+              <p:nvSpPr>
+                <p:cNvPr id="40" name="Freeform 40"/>
+                <p:cNvSpPr/>
+                <p:nvPr/>
+              </p:nvSpPr>
+              <p:spPr>
+                <a:xfrm>
+                  <a:off x="5740537" y="5596311"/>
+                  <a:ext cx="215417" cy="212537"/>
+                </a:xfrm>
+                <a:custGeom>
+                  <a:avLst/>
+                  <a:gdLst/>
+                  <a:ahLst/>
+                  <a:cxnLst/>
+                  <a:rect l="l" t="t" r="r" b="b"/>
+                  <a:pathLst>
+                    <a:path w="215417" h="212537">
+                      <a:moveTo>
+                        <a:pt x="25100" y="204717"/>
+                      </a:moveTo>
+                      <a:cubicBezTo>
+                        <a:pt x="0" y="107399"/>
+                        <a:pt x="90118" y="0"/>
+                        <a:pt x="175297" y="25719"/>
+                      </a:cubicBezTo>
+                      <a:cubicBezTo>
+                        <a:pt x="215417" y="105138"/>
+                        <a:pt x="125299" y="212537"/>
+                        <a:pt x="25100" y="204717"/>
+                      </a:cubicBezTo>
+                      <a:close/>
+                    </a:path>
+                  </a:pathLst>
+                </a:custGeom>
+                <a:solidFill>
+                  <a:srgbClr val="FFFFFF"/>
+                </a:solidFill>
+                <a:ln w="7112">
+                  <a:solidFill>
+                    <a:srgbClr val="5A6AA8"/>
+                  </a:solidFill>
+                  <a:round/>
+                </a:ln>
+              </p:spPr>
+            </p:sp>
+            <p:sp>
+              <p:nvSpPr>
+                <p:cNvPr id="41" name="Freeform 41"/>
+                <p:cNvSpPr/>
+                <p:nvPr/>
+              </p:nvSpPr>
+              <p:spPr>
+                <a:xfrm>
+                  <a:off x="5765637" y="5747083"/>
+                  <a:ext cx="216651" cy="204175"/>
+                </a:xfrm>
+                <a:custGeom>
+                  <a:avLst/>
+                  <a:gdLst/>
+                  <a:ahLst/>
+                  <a:cxnLst/>
+                  <a:rect l="l" t="t" r="r" b="b"/>
+                  <a:pathLst>
+                    <a:path w="216651" h="204175">
+                      <a:moveTo>
+                        <a:pt x="0" y="53945"/>
+                      </a:moveTo>
+                      <a:cubicBezTo>
+                        <a:pt x="84799" y="0"/>
+                        <a:pt x="214790" y="52520"/>
+                        <a:pt x="216651" y="141477"/>
+                      </a:cubicBezTo>
+                      <a:cubicBezTo>
+                        <a:pt x="153517" y="204175"/>
+                        <a:pt x="23526" y="151656"/>
+                        <a:pt x="0" y="53945"/>
+                      </a:cubicBezTo>
+                      <a:close/>
+                    </a:path>
+                  </a:pathLst>
+                </a:custGeom>
+                <a:solidFill>
+                  <a:srgbClr val="FFFFFF"/>
+                </a:solidFill>
+                <a:ln w="7112">
+                  <a:solidFill>
+                    <a:srgbClr val="5A6AA8"/>
+                  </a:solidFill>
+                  <a:round/>
+                </a:ln>
+              </p:spPr>
+            </p:sp>
+            <p:sp>
+              <p:nvSpPr>
+                <p:cNvPr id="42" name="Freeform 42"/>
+                <p:cNvSpPr/>
+                <p:nvPr/>
+              </p:nvSpPr>
+              <p:spPr>
+                <a:xfrm>
+                  <a:off x="5670199" y="5801028"/>
+                  <a:ext cx="172947" cy="233096"/>
+                </a:xfrm>
+                <a:custGeom>
+                  <a:avLst/>
+                  <a:gdLst/>
+                  <a:ahLst/>
+                  <a:cxnLst/>
+                  <a:rect l="l" t="t" r="r" b="b"/>
+                  <a:pathLst>
+                    <a:path w="172947" h="233096">
+                      <a:moveTo>
+                        <a:pt x="95438" y="0"/>
+                      </a:moveTo>
+                      <a:cubicBezTo>
+                        <a:pt x="172947" y="63979"/>
+                        <a:pt x="163167" y="203837"/>
+                        <a:pt x="79139" y="233096"/>
+                      </a:cubicBezTo>
+                      <a:cubicBezTo>
+                        <a:pt x="0" y="192427"/>
+                        <a:pt x="9780" y="52569"/>
+                        <a:pt x="95438" y="0"/>
+                      </a:cubicBezTo>
+                      <a:close/>
+                    </a:path>
+                  </a:pathLst>
+                </a:custGeom>
+                <a:solidFill>
+                  <a:srgbClr val="FFFFFF"/>
+                </a:solidFill>
+                <a:ln w="7112">
+                  <a:solidFill>
+                    <a:srgbClr val="5A6AA8"/>
+                  </a:solidFill>
+                  <a:round/>
+                </a:ln>
+              </p:spPr>
+            </p:sp>
+            <p:sp>
+              <p:nvSpPr>
+                <p:cNvPr id="43" name="Freeform 43"/>
+                <p:cNvSpPr/>
+                <p:nvPr/>
+              </p:nvSpPr>
+              <p:spPr>
+                <a:xfrm>
+                  <a:off x="5538913" y="5735807"/>
+                  <a:ext cx="226725" cy="192624"/>
+                </a:xfrm>
+                <a:custGeom>
+                  <a:avLst/>
+                  <a:gdLst/>
+                  <a:ahLst/>
+                  <a:cxnLst/>
+                  <a:rect l="l" t="t" r="r" b="b"/>
+                  <a:pathLst>
+                    <a:path w="226725" h="192624">
+                      <a:moveTo>
+                        <a:pt x="226725" y="65221"/>
+                      </a:moveTo>
+                      <a:cubicBezTo>
+                        <a:pt x="189828" y="158707"/>
+                        <a:pt x="53794" y="192624"/>
+                        <a:pt x="0" y="121750"/>
+                      </a:cubicBezTo>
+                      <a:cubicBezTo>
+                        <a:pt x="14224" y="33917"/>
+                        <a:pt x="150258" y="0"/>
+                        <a:pt x="226725" y="65221"/>
+                      </a:cubicBezTo>
+                      <a:close/>
+                    </a:path>
+                  </a:pathLst>
+                </a:custGeom>
+                <a:solidFill>
+                  <a:srgbClr val="FFFFFF"/>
+                </a:solidFill>
+                <a:ln w="7112">
+                  <a:solidFill>
+                    <a:srgbClr val="5A6AA8"/>
+                  </a:solidFill>
+                  <a:round/>
+                </a:ln>
+              </p:spPr>
+            </p:sp>
+            <p:sp>
+              <p:nvSpPr>
+                <p:cNvPr id="44" name="Freeform 44"/>
+                <p:cNvSpPr/>
+                <p:nvPr/>
+              </p:nvSpPr>
+              <p:spPr>
+                <a:xfrm>
+                  <a:off x="5765637" y="5571660"/>
+                  <a:ext cx="322976" cy="342791"/>
+                </a:xfrm>
+                <a:custGeom>
+                  <a:avLst/>
+                  <a:gdLst/>
+                  <a:ahLst/>
+                  <a:cxnLst/>
+                  <a:rect l="l" t="t" r="r" b="b"/>
+                  <a:pathLst>
+                    <a:path w="322976" h="342791">
+                      <a:moveTo>
+                        <a:pt x="0" y="229368"/>
+                      </a:moveTo>
+                      <a:cubicBezTo>
+                        <a:pt x="56773" y="70722"/>
+                        <a:pt x="243836" y="0"/>
+                        <a:pt x="249397" y="167186"/>
+                      </a:cubicBezTo>
+                      <a:cubicBezTo>
+                        <a:pt x="322976" y="317414"/>
+                        <a:pt x="124607" y="342791"/>
+                        <a:pt x="0" y="229368"/>
+                      </a:cubicBezTo>
+                      <a:close/>
+                    </a:path>
+                  </a:pathLst>
+                </a:custGeom>
+                <a:solidFill>
+                  <a:srgbClr val="CBE0EC"/>
+                </a:solidFill>
+                <a:ln w="7112">
+                  <a:solidFill>
+                    <a:srgbClr val="5A6AA8"/>
+                  </a:solidFill>
+                  <a:round/>
+                </a:ln>
+              </p:spPr>
+            </p:sp>
+            <p:sp>
+              <p:nvSpPr>
+                <p:cNvPr id="45" name="Ellipse 45"/>
+                <p:cNvSpPr/>
+                <p:nvPr/>
+              </p:nvSpPr>
+              <p:spPr>
+                <a:xfrm rot="-7320000">
+                  <a:off x="5740239" y="5775630"/>
+                  <a:ext cx="50797" cy="50797"/>
+                </a:xfrm>
+                <a:prstGeom prst="ellipse">
+                  <a:avLst/>
+                </a:prstGeom>
+                <a:solidFill>
+                  <a:srgbClr val="5A6AA8"/>
+                </a:solidFill>
+                <a:ln>
+                  <a:noFill/>
+                </a:ln>
+              </p:spPr>
+            </p:sp>
+          </p:grpSp>
+          <p:grpSp>
+            <p:nvGrpSpPr>
+              <p:cNvPr id="54" name="Group 54"/>
+              <p:cNvGrpSpPr/>
+              <p:nvPr/>
+            </p:nvGrpSpPr>
+            <p:grpSpPr>
+              <a:xfrm>
+                <a:off x="5844644" y="5195515"/>
+                <a:ext cx="453676" cy="377271"/>
+                <a:chOff x="5844644" y="5195515"/>
+                <a:chExt cx="453676" cy="377271"/>
+              </a:xfrm>
+            </p:grpSpPr>
+            <p:sp>
+              <p:nvSpPr>
+                <p:cNvPr id="47" name="Freeform 47"/>
+                <p:cNvSpPr/>
+                <p:nvPr/>
+              </p:nvSpPr>
+              <p:spPr>
+                <a:xfrm>
+                  <a:off x="5917581" y="5195515"/>
+                  <a:ext cx="172536" cy="185424"/>
+                </a:xfrm>
+                <a:custGeom>
+                  <a:avLst/>
+                  <a:gdLst/>
+                  <a:ahLst/>
+                  <a:cxnLst/>
+                  <a:rect l="l" t="t" r="r" b="b"/>
+                  <a:pathLst>
+                    <a:path w="172536" h="185424">
+                      <a:moveTo>
+                        <a:pt x="125407" y="185424"/>
+                      </a:moveTo>
+                      <a:cubicBezTo>
+                        <a:pt x="42597" y="163889"/>
+                        <a:pt x="0" y="52919"/>
+                        <a:pt x="54229" y="0"/>
+                      </a:cubicBezTo>
+                      <a:cubicBezTo>
+                        <a:pt x="129939" y="3040"/>
+                        <a:pt x="172536" y="114010"/>
+                        <a:pt x="125407" y="185424"/>
+                      </a:cubicBezTo>
+                      <a:close/>
+                    </a:path>
+                  </a:pathLst>
+                </a:custGeom>
+                <a:solidFill>
+                  <a:srgbClr val="FFFFFF"/>
+                </a:solidFill>
+                <a:ln w="7112">
+                  <a:solidFill>
+                    <a:srgbClr val="5A6AA8"/>
+                  </a:solidFill>
+                  <a:round/>
+                </a:ln>
+              </p:spPr>
+            </p:sp>
+            <p:sp>
+              <p:nvSpPr>
+                <p:cNvPr id="48" name="Freeform 48"/>
+                <p:cNvSpPr/>
+                <p:nvPr/>
+              </p:nvSpPr>
+              <p:spPr>
+                <a:xfrm>
+                  <a:off x="6037879" y="5220723"/>
+                  <a:ext cx="179966" cy="182970"/>
+                </a:xfrm>
+                <a:custGeom>
+                  <a:avLst/>
+                  <a:gdLst/>
+                  <a:ahLst/>
+                  <a:cxnLst/>
+                  <a:rect l="l" t="t" r="r" b="b"/>
+                  <a:pathLst>
+                    <a:path w="179966" h="182970">
+                      <a:moveTo>
+                        <a:pt x="5108" y="160215"/>
+                      </a:moveTo>
+                      <a:cubicBezTo>
+                        <a:pt x="0" y="74804"/>
+                        <a:pt x="92375" y="0"/>
+                        <a:pt x="159462" y="35222"/>
+                      </a:cubicBezTo>
+                      <a:cubicBezTo>
+                        <a:pt x="179966" y="108166"/>
+                        <a:pt x="87591" y="182970"/>
+                        <a:pt x="5108" y="160215"/>
+                      </a:cubicBezTo>
+                      <a:close/>
+                    </a:path>
+                  </a:pathLst>
+                </a:custGeom>
+                <a:solidFill>
+                  <a:srgbClr val="FFFFFF"/>
+                </a:solidFill>
+                <a:ln w="7112">
+                  <a:solidFill>
+                    <a:srgbClr val="5A6AA8"/>
+                  </a:solidFill>
+                  <a:round/>
+                </a:ln>
+              </p:spPr>
+            </p:sp>
+            <p:sp>
+              <p:nvSpPr>
+                <p:cNvPr id="49" name="Freeform 49"/>
+                <p:cNvSpPr/>
+                <p:nvPr/>
+              </p:nvSpPr>
+              <p:spPr>
+                <a:xfrm>
+                  <a:off x="6042988" y="5349686"/>
+                  <a:ext cx="179340" cy="181467"/>
+                </a:xfrm>
+                <a:custGeom>
+                  <a:avLst/>
+                  <a:gdLst/>
+                  <a:ahLst/>
+                  <a:cxnLst/>
+                  <a:rect l="l" t="t" r="r" b="b"/>
+                  <a:pathLst>
+                    <a:path w="179340" h="181467">
+                      <a:moveTo>
+                        <a:pt x="0" y="31252"/>
+                      </a:moveTo>
+                      <a:cubicBezTo>
+                        <a:pt x="79652" y="0"/>
+                        <a:pt x="179340" y="64738"/>
+                        <a:pt x="166573" y="139426"/>
+                      </a:cubicBezTo>
+                      <a:cubicBezTo>
+                        <a:pt x="103536" y="181467"/>
+                        <a:pt x="3847" y="116729"/>
+                        <a:pt x="0" y="31252"/>
+                      </a:cubicBezTo>
+                      <a:close/>
+                    </a:path>
+                  </a:pathLst>
+                </a:custGeom>
+                <a:solidFill>
+                  <a:srgbClr val="FFFFFF"/>
+                </a:solidFill>
+                <a:ln w="7112">
+                  <a:solidFill>
+                    <a:srgbClr val="5A6AA8"/>
+                  </a:solidFill>
+                  <a:round/>
+                </a:ln>
+              </p:spPr>
+            </p:sp>
+            <p:sp>
+              <p:nvSpPr>
+                <p:cNvPr id="50" name="Freeform 50"/>
+                <p:cNvSpPr/>
+                <p:nvPr/>
+              </p:nvSpPr>
+              <p:spPr>
+                <a:xfrm>
+                  <a:off x="5932119" y="5380938"/>
+                  <a:ext cx="165205" cy="191848"/>
+                </a:xfrm>
+                <a:custGeom>
+                  <a:avLst/>
+                  <a:gdLst/>
+                  <a:ahLst/>
+                  <a:cxnLst/>
+                  <a:rect l="l" t="t" r="r" b="b"/>
+                  <a:pathLst>
+                    <a:path w="165205" h="191848">
+                      <a:moveTo>
+                        <a:pt x="110869" y="0"/>
+                      </a:moveTo>
+                      <a:cubicBezTo>
+                        <a:pt x="165205" y="66096"/>
+                        <a:pt x="134441" y="180911"/>
+                        <a:pt x="59464" y="191848"/>
+                      </a:cubicBezTo>
+                      <a:cubicBezTo>
+                        <a:pt x="0" y="144887"/>
+                        <a:pt x="30764" y="30073"/>
+                        <a:pt x="110869" y="0"/>
+                      </a:cubicBezTo>
+                      <a:close/>
+                    </a:path>
+                  </a:pathLst>
+                </a:custGeom>
+                <a:solidFill>
+                  <a:srgbClr val="FFFFFF"/>
+                </a:solidFill>
+                <a:ln w="7112">
+                  <a:solidFill>
+                    <a:srgbClr val="5A6AA8"/>
+                  </a:solidFill>
+                  <a:round/>
+                </a:ln>
+              </p:spPr>
+            </p:sp>
+            <p:sp>
+              <p:nvSpPr>
+                <p:cNvPr id="51" name="Freeform 51"/>
+                <p:cNvSpPr/>
+                <p:nvPr/>
+              </p:nvSpPr>
+              <p:spPr>
+                <a:xfrm>
+                  <a:off x="5844644" y="5314047"/>
+                  <a:ext cx="198343" cy="145213"/>
+                </a:xfrm>
+                <a:custGeom>
+                  <a:avLst/>
+                  <a:gdLst/>
+                  <a:ahLst/>
+                  <a:cxnLst/>
+                  <a:rect l="l" t="t" r="r" b="b"/>
+                  <a:pathLst>
+                    <a:path w="198343" h="145213">
+                      <a:moveTo>
+                        <a:pt x="198343" y="66891"/>
+                      </a:moveTo>
+                      <a:cubicBezTo>
+                        <a:pt x="152273" y="138993"/>
+                        <a:pt x="33571" y="145213"/>
+                        <a:pt x="0" y="77286"/>
+                      </a:cubicBezTo>
+                      <a:cubicBezTo>
+                        <a:pt x="26287" y="6221"/>
+                        <a:pt x="144989" y="0"/>
+                        <a:pt x="198343" y="66891"/>
+                      </a:cubicBezTo>
+                      <a:close/>
+                    </a:path>
+                  </a:pathLst>
+                </a:custGeom>
+                <a:solidFill>
+                  <a:srgbClr val="FFFFFF"/>
+                </a:solidFill>
+                <a:ln w="7112">
+                  <a:solidFill>
+                    <a:srgbClr val="5A6AA8"/>
+                  </a:solidFill>
+                  <a:round/>
+                </a:ln>
+              </p:spPr>
+            </p:sp>
+            <p:sp>
+              <p:nvSpPr>
+                <p:cNvPr id="52" name="Freeform 52"/>
+                <p:cNvSpPr/>
+                <p:nvPr/>
+              </p:nvSpPr>
+              <p:spPr>
+                <a:xfrm>
+                  <a:off x="6042988" y="5229098"/>
+                  <a:ext cx="255332" cy="277681"/>
+                </a:xfrm>
+                <a:custGeom>
+                  <a:avLst/>
+                  <a:gdLst/>
+                  <a:ahLst/>
+                  <a:cxnLst/>
+                  <a:rect l="l" t="t" r="r" b="b"/>
+                  <a:pathLst>
+                    <a:path w="255332" h="277681">
+                      <a:moveTo>
+                        <a:pt x="0" y="151840"/>
+                      </a:moveTo>
+                      <a:cubicBezTo>
+                        <a:pt x="73101" y="28677"/>
+                        <a:pt x="240780" y="0"/>
+                        <a:pt x="218127" y="140409"/>
+                      </a:cubicBezTo>
+                      <a:cubicBezTo>
+                        <a:pt x="255332" y="277681"/>
+                        <a:pt x="85574" y="266689"/>
+                        <a:pt x="0" y="151840"/>
+                      </a:cubicBezTo>
+                      <a:close/>
+                    </a:path>
+                  </a:pathLst>
+                </a:custGeom>
+                <a:solidFill>
+                  <a:srgbClr val="CBE0EC"/>
+                </a:solidFill>
+                <a:ln w="7112">
+                  <a:solidFill>
+                    <a:srgbClr val="5A6AA8"/>
+                  </a:solidFill>
+                  <a:round/>
+                </a:ln>
+              </p:spPr>
+            </p:sp>
+            <p:sp>
+              <p:nvSpPr>
+                <p:cNvPr id="53" name="Ellipse 53"/>
+                <p:cNvSpPr/>
+                <p:nvPr/>
+              </p:nvSpPr>
+              <p:spPr>
+                <a:xfrm rot="-6660000">
+                  <a:off x="6017589" y="5355540"/>
+                  <a:ext cx="50797" cy="50797"/>
+                </a:xfrm>
+                <a:prstGeom prst="ellipse">
+                  <a:avLst/>
+                </a:prstGeom>
+                <a:solidFill>
+                  <a:srgbClr val="5A6AA8"/>
+                </a:solidFill>
+                <a:ln>
+                  <a:noFill/>
+                </a:ln>
+              </p:spPr>
+            </p:sp>
+          </p:grpSp>
+          <p:grpSp>
+            <p:nvGrpSpPr>
+              <p:cNvPr id="62" name="Group 62"/>
+              <p:cNvGrpSpPr/>
+              <p:nvPr/>
+            </p:nvGrpSpPr>
+            <p:grpSpPr>
+              <a:xfrm>
+                <a:off x="6259958" y="4824892"/>
+                <a:ext cx="378468" cy="310784"/>
+                <a:chOff x="6259958" y="4824892"/>
+                <a:chExt cx="378468" cy="310784"/>
+              </a:xfrm>
+            </p:grpSpPr>
+            <p:sp>
+              <p:nvSpPr>
+                <p:cNvPr id="55" name="Freeform 55"/>
+                <p:cNvSpPr/>
+                <p:nvPr/>
+              </p:nvSpPr>
+              <p:spPr>
+                <a:xfrm>
+                  <a:off x="6338661" y="4824892"/>
+                  <a:ext cx="132014" cy="160339"/>
+                </a:xfrm>
+                <a:custGeom>
+                  <a:avLst/>
+                  <a:gdLst/>
+                  <a:ahLst/>
+                  <a:cxnLst/>
+                  <a:rect l="l" t="t" r="r" b="b"/>
+                  <a:pathLst>
+                    <a:path w="132014" h="160339">
+                      <a:moveTo>
+                        <a:pt x="83779" y="160339"/>
+                      </a:moveTo>
+                      <a:cubicBezTo>
+                        <a:pt x="19478" y="131849"/>
+                        <a:pt x="0" y="35247"/>
+                        <a:pt x="51449" y="0"/>
+                      </a:cubicBezTo>
+                      <a:cubicBezTo>
+                        <a:pt x="112536" y="12556"/>
+                        <a:pt x="132014" y="109157"/>
+                        <a:pt x="83779" y="160339"/>
+                      </a:cubicBezTo>
+                      <a:close/>
+                    </a:path>
+                  </a:pathLst>
+                </a:custGeom>
+                <a:solidFill>
+                  <a:srgbClr val="FFFFFF"/>
+                </a:solidFill>
+                <a:ln w="7112">
+                  <a:solidFill>
+                    <a:srgbClr val="5A6AA8"/>
+                  </a:solidFill>
+                  <a:round/>
+                </a:ln>
+              </p:spPr>
+            </p:sp>
+            <p:sp>
+              <p:nvSpPr>
+                <p:cNvPr id="56" name="Freeform 56"/>
+                <p:cNvSpPr/>
+                <p:nvPr/>
+              </p:nvSpPr>
+              <p:spPr>
+                <a:xfrm>
+                  <a:off x="6422440" y="4866897"/>
+                  <a:ext cx="149436" cy="148393"/>
+                </a:xfrm>
+                <a:custGeom>
+                  <a:avLst/>
+                  <a:gdLst/>
+                  <a:ahLst/>
+                  <a:cxnLst/>
+                  <a:rect l="l" t="t" r="r" b="b"/>
+                  <a:pathLst>
+                    <a:path w="149436" h="148393">
+                      <a:moveTo>
+                        <a:pt x="0" y="118334"/>
+                      </a:moveTo>
+                      <a:cubicBezTo>
+                        <a:pt x="7226" y="48377"/>
+                        <a:pt x="93080" y="0"/>
+                        <a:pt x="142501" y="38039"/>
+                      </a:cubicBezTo>
+                      <a:cubicBezTo>
+                        <a:pt x="149436" y="100016"/>
+                        <a:pt x="63582" y="148393"/>
+                        <a:pt x="0" y="118334"/>
+                      </a:cubicBezTo>
+                      <a:close/>
+                    </a:path>
+                  </a:pathLst>
+                </a:custGeom>
+                <a:solidFill>
+                  <a:srgbClr val="FFFFFF"/>
+                </a:solidFill>
+                <a:ln w="7112">
+                  <a:solidFill>
+                    <a:srgbClr val="5A6AA8"/>
+                  </a:solidFill>
+                  <a:round/>
+                </a:ln>
+              </p:spPr>
+            </p:sp>
+            <p:sp>
+              <p:nvSpPr>
+                <p:cNvPr id="57" name="Freeform 57"/>
+                <p:cNvSpPr/>
+                <p:nvPr/>
+              </p:nvSpPr>
+              <p:spPr>
+                <a:xfrm>
+                  <a:off x="6413500" y="4970485"/>
+                  <a:ext cx="150245" cy="151208"/>
+                </a:xfrm>
+                <a:custGeom>
+                  <a:avLst/>
+                  <a:gdLst/>
+                  <a:ahLst/>
+                  <a:cxnLst/>
+                  <a:rect l="l" t="t" r="r" b="b"/>
+                  <a:pathLst>
+                    <a:path w="150245" h="151208">
+                      <a:moveTo>
+                        <a:pt x="8940" y="14746"/>
+                      </a:moveTo>
+                      <a:cubicBezTo>
+                        <a:pt x="77706" y="0"/>
+                        <a:pt x="150245" y="66703"/>
+                        <a:pt x="129340" y="125459"/>
+                      </a:cubicBezTo>
+                      <a:cubicBezTo>
+                        <a:pt x="72539" y="151208"/>
+                        <a:pt x="0" y="84505"/>
+                        <a:pt x="8940" y="14746"/>
+                      </a:cubicBezTo>
+                      <a:close/>
+                    </a:path>
+                  </a:pathLst>
+                </a:custGeom>
+                <a:solidFill>
+                  <a:srgbClr val="FFFFFF"/>
+                </a:solidFill>
+                <a:ln w="7112">
+                  <a:solidFill>
+                    <a:srgbClr val="5A6AA8"/>
+                  </a:solidFill>
+                  <a:round/>
+                </a:ln>
+              </p:spPr>
+            </p:sp>
+            <p:sp>
+              <p:nvSpPr>
+                <p:cNvPr id="58" name="Freeform 58"/>
+                <p:cNvSpPr/>
+                <p:nvPr/>
+              </p:nvSpPr>
+              <p:spPr>
+                <a:xfrm>
+                  <a:off x="6312310" y="4985231"/>
+                  <a:ext cx="145404" cy="150445"/>
+                </a:xfrm>
+                <a:custGeom>
+                  <a:avLst/>
+                  <a:gdLst/>
+                  <a:ahLst/>
+                  <a:cxnLst/>
+                  <a:rect l="l" t="t" r="r" b="b"/>
+                  <a:pathLst>
+                    <a:path w="145404" h="150445">
+                      <a:moveTo>
+                        <a:pt x="110130" y="0"/>
+                      </a:moveTo>
+                      <a:cubicBezTo>
+                        <a:pt x="145404" y="60844"/>
+                        <a:pt x="104381" y="150445"/>
+                        <a:pt x="42041" y="148720"/>
+                      </a:cubicBezTo>
+                      <a:cubicBezTo>
+                        <a:pt x="0" y="102656"/>
+                        <a:pt x="41023" y="13054"/>
+                        <a:pt x="110130" y="0"/>
+                      </a:cubicBezTo>
+                      <a:close/>
+                    </a:path>
+                  </a:pathLst>
+                </a:custGeom>
+                <a:solidFill>
+                  <a:srgbClr val="FFFFFF"/>
+                </a:solidFill>
+                <a:ln w="7112">
+                  <a:solidFill>
+                    <a:srgbClr val="5A6AA8"/>
+                  </a:solidFill>
+                  <a:round/>
+                </a:ln>
+              </p:spPr>
+            </p:sp>
+            <p:sp>
+              <p:nvSpPr>
+                <p:cNvPr id="59" name="Freeform 59"/>
+                <p:cNvSpPr/>
+                <p:nvPr/>
+              </p:nvSpPr>
+              <p:spPr>
+                <a:xfrm>
+                  <a:off x="6259958" y="4912214"/>
+                  <a:ext cx="162482" cy="125367"/>
+                </a:xfrm>
+                <a:custGeom>
+                  <a:avLst/>
+                  <a:gdLst/>
+                  <a:ahLst/>
+                  <a:cxnLst/>
+                  <a:rect l="l" t="t" r="r" b="b"/>
+                  <a:pathLst>
+                    <a:path w="162482" h="125367">
+                      <a:moveTo>
+                        <a:pt x="162482" y="73017"/>
+                      </a:moveTo>
+                      <a:cubicBezTo>
+                        <a:pt x="115516" y="125367"/>
+                        <a:pt x="17623" y="114040"/>
+                        <a:pt x="0" y="54218"/>
+                      </a:cubicBezTo>
+                      <a:cubicBezTo>
+                        <a:pt x="30818" y="0"/>
+                        <a:pt x="128711" y="11327"/>
+                        <a:pt x="162482" y="73017"/>
+                      </a:cubicBezTo>
+                      <a:close/>
+                    </a:path>
+                  </a:pathLst>
+                </a:custGeom>
+                <a:solidFill>
+                  <a:srgbClr val="FFFFFF"/>
+                </a:solidFill>
+                <a:ln w="7112">
+                  <a:solidFill>
+                    <a:srgbClr val="5A6AA8"/>
+                  </a:solidFill>
+                  <a:round/>
+                </a:ln>
+              </p:spPr>
+            </p:sp>
+            <p:sp>
+              <p:nvSpPr>
+                <p:cNvPr id="60" name="Freeform 60"/>
+                <p:cNvSpPr/>
+                <p:nvPr/>
+              </p:nvSpPr>
+              <p:spPr>
+                <a:xfrm>
+                  <a:off x="6422440" y="4895166"/>
+                  <a:ext cx="215986" cy="227071"/>
+                </a:xfrm>
+                <a:custGeom>
+                  <a:avLst/>
+                  <a:gdLst/>
+                  <a:ahLst/>
+                  <a:cxnLst/>
+                  <a:rect l="l" t="t" r="r" b="b"/>
+                  <a:pathLst>
+                    <a:path w="215986" h="227071">
+                      <a:moveTo>
+                        <a:pt x="0" y="90065"/>
+                      </a:moveTo>
+                      <a:cubicBezTo>
+                        <a:pt x="76362" y="208"/>
+                        <a:pt x="215986" y="0"/>
+                        <a:pt x="178730" y="110745"/>
+                      </a:cubicBezTo>
+                      <a:cubicBezTo>
+                        <a:pt x="189713" y="227071"/>
+                        <a:pt x="53825" y="194985"/>
+                        <a:pt x="0" y="90065"/>
+                      </a:cubicBezTo>
+                      <a:close/>
+                    </a:path>
+                  </a:pathLst>
+                </a:custGeom>
+                <a:solidFill>
+                  <a:srgbClr val="CBE0EC"/>
+                </a:solidFill>
+                <a:ln w="7112">
+                  <a:solidFill>
+                    <a:srgbClr val="5A6AA8"/>
+                  </a:solidFill>
+                  <a:round/>
+                </a:ln>
+              </p:spPr>
+            </p:sp>
+            <p:sp>
+              <p:nvSpPr>
+                <p:cNvPr id="61" name="Ellipse 61"/>
+                <p:cNvSpPr/>
+                <p:nvPr/>
+              </p:nvSpPr>
+              <p:spPr>
+                <a:xfrm rot="-6084000">
+                  <a:off x="6397042" y="4959833"/>
+                  <a:ext cx="50797" cy="50797"/>
+                </a:xfrm>
+                <a:prstGeom prst="ellipse">
+                  <a:avLst/>
+                </a:prstGeom>
+                <a:solidFill>
+                  <a:srgbClr val="5A6AA8"/>
+                </a:solidFill>
+                <a:ln>
+                  <a:noFill/>
+                </a:ln>
+              </p:spPr>
+            </p:sp>
+          </p:grpSp>
+          <p:grpSp>
+            <p:nvGrpSpPr>
+              <p:cNvPr id="65" name="Group 65"/>
+              <p:cNvGrpSpPr/>
+              <p:nvPr/>
+            </p:nvGrpSpPr>
+            <p:grpSpPr>
+              <a:xfrm>
+                <a:off x="5013727" y="6097173"/>
+                <a:ext cx="527896" cy="304781"/>
+                <a:chOff x="5013727" y="6097173"/>
+                <a:chExt cx="527896" cy="304781"/>
+              </a:xfrm>
+            </p:grpSpPr>
+            <p:sp>
+              <p:nvSpPr>
+                <p:cNvPr id="63" name="Freeform 63"/>
+                <p:cNvSpPr/>
+                <p:nvPr/>
+              </p:nvSpPr>
+              <p:spPr>
+                <a:xfrm>
+                  <a:off x="5013727" y="6097173"/>
+                  <a:ext cx="527896" cy="304781"/>
+                </a:xfrm>
+                <a:custGeom>
+                  <a:avLst/>
+                  <a:gdLst/>
+                  <a:ahLst/>
+                  <a:cxnLst/>
+                  <a:rect l="l" t="t" r="r" b="b"/>
+                  <a:pathLst>
+                    <a:path w="527896" h="304781">
+                      <a:moveTo>
+                        <a:pt x="527896" y="304781"/>
+                      </a:moveTo>
+                      <a:cubicBezTo>
+                        <a:pt x="333969" y="274935"/>
+                        <a:pt x="122811" y="153022"/>
+                        <a:pt x="0" y="0"/>
+                      </a:cubicBezTo>
+                      <a:cubicBezTo>
+                        <a:pt x="193927" y="29846"/>
+                        <a:pt x="405085" y="151759"/>
+                        <a:pt x="527896" y="304781"/>
+                      </a:cubicBezTo>
+                      <a:close/>
+                    </a:path>
+                  </a:pathLst>
+                </a:custGeom>
+                <a:solidFill>
+                  <a:srgbClr val="FFFFFF"/>
+                </a:solidFill>
+                <a:ln w="7112">
+                  <a:solidFill>
+                    <a:srgbClr val="5A6AA8"/>
+                  </a:solidFill>
+                  <a:round/>
+                </a:ln>
+              </p:spPr>
+            </p:sp>
+            <p:sp>
+              <p:nvSpPr>
+                <p:cNvPr id="64" name="Freeform 64"/>
+                <p:cNvSpPr/>
+                <p:nvPr/>
+              </p:nvSpPr>
+              <p:spPr>
+                <a:xfrm>
+                  <a:off x="5092911" y="6142891"/>
+                  <a:ext cx="406480" cy="234681"/>
+                </a:xfrm>
+                <a:custGeom>
+                  <a:avLst/>
+                  <a:gdLst/>
+                  <a:ahLst/>
+                  <a:cxnLst/>
+                  <a:rect l="l" t="t" r="r" b="b"/>
+                  <a:pathLst>
+                    <a:path w="406480" h="234681">
+                      <a:moveTo>
+                        <a:pt x="406480" y="234681"/>
+                      </a:moveTo>
+                      <a:lnTo>
+                        <a:pt x="0" y="0"/>
+                      </a:lnTo>
+                    </a:path>
+                  </a:pathLst>
+                </a:custGeom>
+                <a:noFill/>
+                <a:ln w="4064">
+                  <a:solidFill>
+                    <a:srgbClr val="C7CEE4"/>
+                  </a:solidFill>
+                </a:ln>
+              </p:spPr>
+            </p:sp>
+          </p:grpSp>
+          <p:grpSp>
+            <p:nvGrpSpPr>
+              <p:cNvPr id="68" name="Group 68"/>
+              <p:cNvGrpSpPr/>
+              <p:nvPr/>
+            </p:nvGrpSpPr>
+            <p:grpSpPr>
+              <a:xfrm>
+                <a:off x="5593436" y="5909225"/>
+                <a:ext cx="527896" cy="304781"/>
+                <a:chOff x="5593436" y="5909225"/>
+                <a:chExt cx="527896" cy="304781"/>
+              </a:xfrm>
+            </p:grpSpPr>
+            <p:sp>
+              <p:nvSpPr>
+                <p:cNvPr id="66" name="Freeform 66"/>
+                <p:cNvSpPr/>
+                <p:nvPr/>
+              </p:nvSpPr>
+              <p:spPr>
+                <a:xfrm>
+                  <a:off x="5593436" y="5909225"/>
+                  <a:ext cx="527896" cy="304781"/>
+                </a:xfrm>
+                <a:custGeom>
+                  <a:avLst/>
+                  <a:gdLst/>
+                  <a:ahLst/>
+                  <a:cxnLst/>
+                  <a:rect l="l" t="t" r="r" b="b"/>
+                  <a:pathLst>
+                    <a:path w="527896" h="304781">
+                      <a:moveTo>
+                        <a:pt x="0" y="304781"/>
+                      </a:moveTo>
+                      <a:cubicBezTo>
+                        <a:pt x="122811" y="151759"/>
+                        <a:pt x="333969" y="29846"/>
+                        <a:pt x="527896" y="0"/>
+                      </a:cubicBezTo>
+                      <a:cubicBezTo>
+                        <a:pt x="405085" y="153022"/>
+                        <a:pt x="193927" y="274935"/>
+                        <a:pt x="0" y="304781"/>
+                      </a:cubicBezTo>
+                      <a:close/>
+                    </a:path>
+                  </a:pathLst>
+                </a:custGeom>
+                <a:solidFill>
+                  <a:srgbClr val="FFFFFF"/>
+                </a:solidFill>
+                <a:ln w="7112">
+                  <a:solidFill>
+                    <a:srgbClr val="5A6AA8"/>
+                  </a:solidFill>
+                  <a:round/>
+                </a:ln>
+              </p:spPr>
+            </p:sp>
+            <p:sp>
+              <p:nvSpPr>
+                <p:cNvPr id="67" name="Freeform 67"/>
+                <p:cNvSpPr/>
+                <p:nvPr/>
+              </p:nvSpPr>
+              <p:spPr>
+                <a:xfrm>
+                  <a:off x="5635668" y="5954942"/>
+                  <a:ext cx="406480" cy="234681"/>
+                </a:xfrm>
+                <a:custGeom>
+                  <a:avLst/>
+                  <a:gdLst/>
+                  <a:ahLst/>
+                  <a:cxnLst/>
+                  <a:rect l="l" t="t" r="r" b="b"/>
+                  <a:pathLst>
+                    <a:path w="406480" h="234681">
+                      <a:moveTo>
+                        <a:pt x="0" y="234681"/>
+                      </a:moveTo>
+                      <a:lnTo>
+                        <a:pt x="406480" y="0"/>
+                      </a:lnTo>
+                    </a:path>
+                  </a:pathLst>
+                </a:custGeom>
+                <a:noFill/>
+                <a:ln w="4064">
+                  <a:solidFill>
+                    <a:srgbClr val="C7CEE4"/>
+                  </a:solidFill>
+                </a:ln>
+              </p:spPr>
+            </p:sp>
+          </p:grpSp>
+        </p:grpSp>
+        <p:sp>
+          <p:nvSpPr>
+            <p:cNvPr id="70" name="Rectangle 70"/>
+            <p:cNvSpPr/>
+            <p:nvPr/>
+          </p:nvSpPr>
+          <p:spPr>
+            <a:xfrm>
+              <a:off x="8134350" y="4305300"/>
+              <a:ext cx="4057650" cy="2552700"/>
+            </a:xfrm>
+            <a:prstGeom prst="rect">
+              <a:avLst/>
+            </a:prstGeom>
+            <a:solidFill>
+              <a:srgbClr val="F7E9D9"/>
+            </a:solidFill>
+            <a:ln>
+              <a:noFill/>
+            </a:ln>
+          </p:spPr>
+        </p:sp>
+        <p:sp>
+          <p:nvSpPr>
+            <p:cNvPr id="71" name="Rectangle 71"/>
+            <p:cNvSpPr/>
+            <p:nvPr/>
+          </p:nvSpPr>
+          <p:spPr>
+            <a:xfrm>
+              <a:off x="8134350" y="4305300"/>
+              <a:ext cx="28575" cy="2552700"/>
+            </a:xfrm>
+            <a:prstGeom prst="rect">
+              <a:avLst/>
+            </a:prstGeom>
+            <a:solidFill>
+              <a:srgbClr val="0A1138"/>
+            </a:solidFill>
+            <a:ln>
+              <a:noFill/>
+            </a:ln>
+          </p:spPr>
+        </p:sp>
+        <p:grpSp>
+          <p:nvGrpSpPr>
+            <p:cNvPr id="103" name="Group 103"/>
+            <p:cNvGrpSpPr/>
+            <p:nvPr/>
+          </p:nvGrpSpPr>
+          <p:grpSpPr>
+            <a:xfrm>
+              <a:off x="9080902" y="4824892"/>
+              <a:ext cx="1624699" cy="1810728"/>
+              <a:chOff x="9080902" y="4824892"/>
+              <a:chExt cx="1624699" cy="1810728"/>
+            </a:xfrm>
+          </p:grpSpPr>
           <p:sp>
             <p:nvSpPr>
-              <p:cNvPr id="5" name="Freeform 5"/>
+              <p:cNvPr id="72" name="Freeform 72"/>
               <p:cNvSpPr/>
               <p:nvPr/>
             </p:nvSpPr>
             <p:spPr>
               <a:xfrm>
-                <a:off x="10734277" y="5915268"/>
-                <a:ext cx="599700" cy="565166"/>
+                <a:off x="9563081" y="4908528"/>
+                <a:ext cx="1015936" cy="1727092"/>
               </a:xfrm>
               <a:custGeom>
                 <a:avLst/>
@@ -26737,1058 +29129,1205 @@
                 <a:cxnLst/>
                 <a:rect l="l" t="t" r="r" b="b"/>
                 <a:pathLst>
-                  <a:path w="599700" h="565166">
+                  <a:path w="1015936" h="1727092">
                     <a:moveTo>
-                      <a:pt x="0" y="149321"/>
+                      <a:pt x="0" y="1727092"/>
                     </a:moveTo>
                     <a:cubicBezTo>
-                      <a:pt x="234728" y="0"/>
-                      <a:pt x="594548" y="145377"/>
-                      <a:pt x="599700" y="391616"/>
+                      <a:pt x="101594" y="1066733"/>
+                      <a:pt x="406375" y="507968"/>
+                      <a:pt x="1015936" y="0"/>
                     </a:cubicBezTo>
-                    <a:cubicBezTo>
-                      <a:pt x="424942" y="565166"/>
-                      <a:pt x="65122" y="419790"/>
-                      <a:pt x="0" y="149321"/>
-                    </a:cubicBezTo>
-                    <a:close/>
-                  </a:path>
-                </a:pathLst>
-              </a:custGeom>
-              <a:solidFill>
-                <a:srgbClr val="FFFFFF"/>
-              </a:solidFill>
-              <a:ln w="19685">
-                <a:solidFill>
-                  <a:srgbClr val="93A0C9"/>
-                </a:solidFill>
-                <a:round/>
-              </a:ln>
-            </p:spPr>
-          </p:sp>
-          <p:sp>
-            <p:nvSpPr>
-              <p:cNvPr id="6" name="Freeform 6"/>
-              <p:cNvSpPr/>
-              <p:nvPr/>
-            </p:nvSpPr>
-            <p:spPr>
-              <a:xfrm>
-                <a:off x="10470099" y="6064590"/>
-                <a:ext cx="478726" cy="645221"/>
-              </a:xfrm>
-              <a:custGeom>
-                <a:avLst/>
-                <a:gdLst/>
-                <a:ahLst/>
-                <a:cxnLst/>
-                <a:rect l="l" t="t" r="r" b="b"/>
-                <a:pathLst>
-                  <a:path w="478726" h="645221">
-                    <a:moveTo>
-                      <a:pt x="264178" y="0"/>
-                    </a:moveTo>
-                    <a:cubicBezTo>
-                      <a:pt x="478726" y="177097"/>
-                      <a:pt x="451655" y="564230"/>
-                      <a:pt x="219060" y="645221"/>
-                    </a:cubicBezTo>
-                    <a:cubicBezTo>
-                      <a:pt x="0" y="532647"/>
-                      <a:pt x="27071" y="145514"/>
-                      <a:pt x="264178" y="0"/>
-                    </a:cubicBezTo>
-                    <a:close/>
-                  </a:path>
-                </a:pathLst>
-              </a:custGeom>
-              <a:solidFill>
-                <a:srgbClr val="FFFFFF"/>
-              </a:solidFill>
-              <a:ln w="19685">
-                <a:solidFill>
-                  <a:srgbClr val="93A0C9"/>
-                </a:solidFill>
-                <a:round/>
-              </a:ln>
-            </p:spPr>
-          </p:sp>
-          <p:sp>
-            <p:nvSpPr>
-              <p:cNvPr id="7" name="Freeform 7"/>
-              <p:cNvSpPr/>
-              <p:nvPr/>
-            </p:nvSpPr>
-            <p:spPr>
-              <a:xfrm>
-                <a:off x="10106693" y="5884054"/>
-                <a:ext cx="627584" cy="533194"/>
-              </a:xfrm>
-              <a:custGeom>
-                <a:avLst/>
-                <a:gdLst/>
-                <a:ahLst/>
-                <a:cxnLst/>
-                <a:rect l="l" t="t" r="r" b="b"/>
-                <a:pathLst>
-                  <a:path w="627584" h="533194">
-                    <a:moveTo>
-                      <a:pt x="627584" y="180536"/>
-                    </a:moveTo>
-                    <a:cubicBezTo>
-                      <a:pt x="525454" y="439309"/>
-                      <a:pt x="148904" y="533194"/>
-                      <a:pt x="0" y="337010"/>
-                    </a:cubicBezTo>
-                    <a:cubicBezTo>
-                      <a:pt x="39372" y="93885"/>
-                      <a:pt x="415922" y="0"/>
-                      <a:pt x="627584" y="180536"/>
-                    </a:cubicBezTo>
-                    <a:close/>
-                  </a:path>
-                </a:pathLst>
-              </a:custGeom>
-              <a:solidFill>
-                <a:srgbClr val="FFFFFF"/>
-              </a:solidFill>
-              <a:ln w="19685">
-                <a:solidFill>
-                  <a:srgbClr val="93A0C9"/>
-                </a:solidFill>
-                <a:round/>
-              </a:ln>
-            </p:spPr>
-          </p:sp>
-          <p:sp>
-            <p:nvSpPr>
-              <p:cNvPr id="8" name="Freeform 8"/>
-              <p:cNvSpPr/>
-              <p:nvPr/>
-            </p:nvSpPr>
-            <p:spPr>
-              <a:xfrm>
-                <a:off x="10734277" y="5429688"/>
-                <a:ext cx="894013" cy="948863"/>
-              </a:xfrm>
-              <a:custGeom>
-                <a:avLst/>
-                <a:gdLst/>
-                <a:ahLst/>
-                <a:cxnLst/>
-                <a:rect l="l" t="t" r="r" b="b"/>
-                <a:pathLst>
-                  <a:path w="894013" h="948863">
-                    <a:moveTo>
-                      <a:pt x="0" y="634902"/>
-                    </a:moveTo>
-                    <a:cubicBezTo>
-                      <a:pt x="157149" y="195762"/>
-                      <a:pt x="674948" y="0"/>
-                      <a:pt x="690343" y="462780"/>
-                    </a:cubicBezTo>
-                    <a:cubicBezTo>
-                      <a:pt x="894013" y="878618"/>
-                      <a:pt x="344918" y="948863"/>
-                      <a:pt x="0" y="634902"/>
-                    </a:cubicBezTo>
-                    <a:close/>
-                  </a:path>
-                </a:pathLst>
-              </a:custGeom>
-              <a:solidFill>
-                <a:srgbClr val="CBE0EC"/>
-              </a:solidFill>
-              <a:ln w="19685">
-                <a:solidFill>
-                  <a:srgbClr val="93A0C9"/>
-                </a:solidFill>
-                <a:round/>
-              </a:ln>
-            </p:spPr>
-          </p:sp>
-          <p:sp>
-            <p:nvSpPr>
-              <p:cNvPr id="9" name="Ellipse 9"/>
-              <p:cNvSpPr/>
-              <p:nvPr/>
-            </p:nvSpPr>
-            <p:spPr>
-              <a:xfrm rot="-7320000">
-                <a:off x="10663973" y="5994286"/>
-                <a:ext cx="140608" cy="140608"/>
-              </a:xfrm>
-              <a:prstGeom prst="ellipse">
-                <a:avLst/>
-              </a:prstGeom>
-              <a:solidFill>
-                <a:srgbClr val="93A0C9"/>
-              </a:solidFill>
-              <a:ln>
-                <a:noFill/>
-              </a:ln>
-            </p:spPr>
-          </p:sp>
-        </p:grpSp>
-        <p:grpSp>
-          <p:nvGrpSpPr>
-            <p:cNvPr id="18" name="Group 18"/>
-            <p:cNvGrpSpPr/>
-            <p:nvPr/>
-          </p:nvGrpSpPr>
-          <p:grpSpPr>
-            <a:xfrm>
-              <a:off x="10952973" y="4388500"/>
-              <a:ext cx="1255796" cy="1044305"/>
-              <a:chOff x="10952973" y="4388500"/>
-              <a:chExt cx="1255796" cy="1044305"/>
-            </a:xfrm>
-          </p:grpSpPr>
-          <p:sp>
-            <p:nvSpPr>
-              <p:cNvPr id="11" name="Freeform 11"/>
-              <p:cNvSpPr/>
-              <p:nvPr/>
-            </p:nvSpPr>
-            <p:spPr>
-              <a:xfrm>
-                <a:off x="11154866" y="4388500"/>
-                <a:ext cx="477588" cy="513261"/>
-              </a:xfrm>
-              <a:custGeom>
-                <a:avLst/>
-                <a:gdLst/>
-                <a:ahLst/>
-                <a:cxnLst/>
-                <a:rect l="l" t="t" r="r" b="b"/>
-                <a:pathLst>
-                  <a:path w="477588" h="513261">
-                    <a:moveTo>
-                      <a:pt x="347131" y="513261"/>
-                    </a:moveTo>
-                    <a:cubicBezTo>
-                      <a:pt x="117911" y="453651"/>
-                      <a:pt x="0" y="146482"/>
-                      <a:pt x="150109" y="0"/>
-                    </a:cubicBezTo>
-                    <a:cubicBezTo>
-                      <a:pt x="359677" y="8415"/>
-                      <a:pt x="477588" y="315584"/>
-                      <a:pt x="347131" y="513261"/>
-                    </a:cubicBezTo>
-                    <a:close/>
-                  </a:path>
-                </a:pathLst>
-              </a:custGeom>
-              <a:solidFill>
-                <a:srgbClr val="FFFFFF"/>
-              </a:solidFill>
-              <a:ln w="19685">
-                <a:solidFill>
-                  <a:srgbClr val="93A0C9"/>
-                </a:solidFill>
-                <a:round/>
-              </a:ln>
-            </p:spPr>
-          </p:sp>
-          <p:sp>
-            <p:nvSpPr>
-              <p:cNvPr id="12" name="Freeform 12"/>
-              <p:cNvSpPr/>
-              <p:nvPr/>
-            </p:nvSpPr>
-            <p:spPr>
-              <a:xfrm>
-                <a:off x="11487857" y="4458279"/>
-                <a:ext cx="498155" cy="506469"/>
-              </a:xfrm>
-              <a:custGeom>
-                <a:avLst/>
-                <a:gdLst/>
-                <a:ahLst/>
-                <a:cxnLst/>
-                <a:rect l="l" t="t" r="r" b="b"/>
-                <a:pathLst>
-                  <a:path w="498155" h="506469">
-                    <a:moveTo>
-                      <a:pt x="14140" y="443483"/>
-                    </a:moveTo>
-                    <a:cubicBezTo>
-                      <a:pt x="0" y="207061"/>
-                      <a:pt x="255699" y="0"/>
-                      <a:pt x="441398" y="97496"/>
-                    </a:cubicBezTo>
-                    <a:cubicBezTo>
-                      <a:pt x="498155" y="299408"/>
-                      <a:pt x="242456" y="506469"/>
-                      <a:pt x="14140" y="443483"/>
-                    </a:cubicBezTo>
-                    <a:close/>
-                  </a:path>
-                </a:pathLst>
-              </a:custGeom>
-              <a:solidFill>
-                <a:srgbClr val="FFFFFF"/>
-              </a:solidFill>
-              <a:ln w="19685">
-                <a:solidFill>
-                  <a:srgbClr val="93A0C9"/>
-                </a:solidFill>
-                <a:round/>
-              </a:ln>
-            </p:spPr>
-          </p:sp>
-          <p:sp>
-            <p:nvSpPr>
-              <p:cNvPr id="13" name="Freeform 13"/>
-              <p:cNvSpPr/>
-              <p:nvPr/>
-            </p:nvSpPr>
-            <p:spPr>
-              <a:xfrm>
-                <a:off x="11501997" y="4815255"/>
-                <a:ext cx="496423" cy="502310"/>
-              </a:xfrm>
-              <a:custGeom>
-                <a:avLst/>
-                <a:gdLst/>
-                <a:ahLst/>
-                <a:cxnLst/>
-                <a:rect l="l" t="t" r="r" b="b"/>
-                <a:pathLst>
-                  <a:path w="496423" h="502310">
-                    <a:moveTo>
-                      <a:pt x="0" y="86507"/>
-                    </a:moveTo>
-                    <a:cubicBezTo>
-                      <a:pt x="220481" y="0"/>
-                      <a:pt x="496423" y="179199"/>
-                      <a:pt x="461082" y="385937"/>
-                    </a:cubicBezTo>
-                    <a:cubicBezTo>
-                      <a:pt x="286592" y="502310"/>
-                      <a:pt x="10650" y="323111"/>
-                      <a:pt x="0" y="86507"/>
-                    </a:cubicBezTo>
-                    <a:close/>
-                  </a:path>
-                </a:pathLst>
-              </a:custGeom>
-              <a:solidFill>
-                <a:srgbClr val="FFFFFF"/>
-              </a:solidFill>
-              <a:ln w="19685">
-                <a:solidFill>
-                  <a:srgbClr val="93A0C9"/>
-                </a:solidFill>
-                <a:round/>
-              </a:ln>
-            </p:spPr>
-          </p:sp>
-          <p:sp>
-            <p:nvSpPr>
-              <p:cNvPr id="14" name="Freeform 14"/>
-              <p:cNvSpPr/>
-              <p:nvPr/>
-            </p:nvSpPr>
-            <p:spPr>
-              <a:xfrm>
-                <a:off x="11195106" y="4901761"/>
-                <a:ext cx="457296" cy="531044"/>
-              </a:xfrm>
-              <a:custGeom>
-                <a:avLst/>
-                <a:gdLst/>
-                <a:ahLst/>
-                <a:cxnLst/>
-                <a:rect l="l" t="t" r="r" b="b"/>
-                <a:pathLst>
-                  <a:path w="457296" h="531044">
-                    <a:moveTo>
-                      <a:pt x="306891" y="0"/>
-                    </a:moveTo>
-                    <a:cubicBezTo>
-                      <a:pt x="457296" y="182958"/>
-                      <a:pt x="372138" y="500769"/>
-                      <a:pt x="164598" y="531044"/>
-                    </a:cubicBezTo>
-                    <a:cubicBezTo>
-                      <a:pt x="0" y="401055"/>
-                      <a:pt x="85157" y="83244"/>
-                      <a:pt x="306891" y="0"/>
-                    </a:cubicBezTo>
-                    <a:close/>
-                  </a:path>
-                </a:pathLst>
-              </a:custGeom>
-              <a:solidFill>
-                <a:srgbClr val="FFFFFF"/>
-              </a:solidFill>
-              <a:ln w="19685">
-                <a:solidFill>
-                  <a:srgbClr val="93A0C9"/>
-                </a:solidFill>
-                <a:round/>
-              </a:ln>
-            </p:spPr>
-          </p:sp>
-          <p:sp>
-            <p:nvSpPr>
-              <p:cNvPr id="15" name="Freeform 15"/>
-              <p:cNvSpPr/>
-              <p:nvPr/>
-            </p:nvSpPr>
-            <p:spPr>
-              <a:xfrm>
-                <a:off x="10952973" y="4716604"/>
-                <a:ext cx="549024" cy="401958"/>
-              </a:xfrm>
-              <a:custGeom>
-                <a:avLst/>
-                <a:gdLst/>
-                <a:ahLst/>
-                <a:cxnLst/>
-                <a:rect l="l" t="t" r="r" b="b"/>
-                <a:pathLst>
-                  <a:path w="549024" h="401958">
-                    <a:moveTo>
-                      <a:pt x="549024" y="185157"/>
-                    </a:moveTo>
-                    <a:cubicBezTo>
-                      <a:pt x="421499" y="384738"/>
-                      <a:pt x="92927" y="401958"/>
-                      <a:pt x="0" y="213930"/>
-                    </a:cubicBezTo>
-                    <a:cubicBezTo>
-                      <a:pt x="72763" y="17220"/>
-                      <a:pt x="401335" y="0"/>
-                      <a:pt x="549024" y="185157"/>
-                    </a:cubicBezTo>
-                    <a:close/>
-                  </a:path>
-                </a:pathLst>
-              </a:custGeom>
-              <a:solidFill>
-                <a:srgbClr val="FFFFFF"/>
-              </a:solidFill>
-              <a:ln w="19685">
-                <a:solidFill>
-                  <a:srgbClr val="93A0C9"/>
-                </a:solidFill>
-                <a:round/>
-              </a:ln>
-            </p:spPr>
-          </p:sp>
-          <p:sp>
-            <p:nvSpPr>
-              <p:cNvPr id="16" name="Freeform 16"/>
-              <p:cNvSpPr/>
-              <p:nvPr/>
-            </p:nvSpPr>
-            <p:spPr>
-              <a:xfrm>
-                <a:off x="11501997" y="4481460"/>
-                <a:ext cx="706772" cy="768634"/>
-              </a:xfrm>
-              <a:custGeom>
-                <a:avLst/>
-                <a:gdLst/>
-                <a:ahLst/>
-                <a:cxnLst/>
-                <a:rect l="l" t="t" r="r" b="b"/>
-                <a:pathLst>
-                  <a:path w="706772" h="768634">
-                    <a:moveTo>
-                      <a:pt x="0" y="420302"/>
-                    </a:moveTo>
-                    <a:cubicBezTo>
-                      <a:pt x="202346" y="79378"/>
-                      <a:pt x="666490" y="0"/>
-                      <a:pt x="603786" y="388659"/>
-                    </a:cubicBezTo>
-                    <a:cubicBezTo>
-                      <a:pt x="706772" y="768634"/>
-                      <a:pt x="236873" y="738207"/>
-                      <a:pt x="0" y="420302"/>
-                    </a:cubicBezTo>
-                    <a:close/>
-                  </a:path>
-                </a:pathLst>
-              </a:custGeom>
-              <a:solidFill>
-                <a:srgbClr val="CBE0EC"/>
-              </a:solidFill>
-              <a:ln w="19685">
-                <a:solidFill>
-                  <a:srgbClr val="93A0C9"/>
-                </a:solidFill>
-                <a:round/>
-              </a:ln>
-            </p:spPr>
-          </p:sp>
-          <p:sp>
-            <p:nvSpPr>
-              <p:cNvPr id="17" name="Ellipse 17"/>
-              <p:cNvSpPr/>
-              <p:nvPr/>
-            </p:nvSpPr>
-            <p:spPr>
-              <a:xfrm rot="-6660000">
-                <a:off x="11431693" y="4831457"/>
-                <a:ext cx="140608" cy="140608"/>
-              </a:xfrm>
-              <a:prstGeom prst="ellipse">
-                <a:avLst/>
-              </a:prstGeom>
-              <a:solidFill>
-                <a:srgbClr val="93A0C9"/>
-              </a:solidFill>
-              <a:ln>
-                <a:noFill/>
-              </a:ln>
-            </p:spPr>
-          </p:sp>
-        </p:grpSp>
-        <p:grpSp>
-          <p:nvGrpSpPr>
-            <p:cNvPr id="26" name="Group 26"/>
-            <p:cNvGrpSpPr/>
-            <p:nvPr/>
-          </p:nvGrpSpPr>
-          <p:grpSpPr>
-            <a:xfrm>
-              <a:off x="12102582" y="3362599"/>
-              <a:ext cx="1047618" cy="860265"/>
-              <a:chOff x="12102582" y="3362599"/>
-              <a:chExt cx="1047618" cy="860265"/>
-            </a:xfrm>
-          </p:grpSpPr>
-          <p:sp>
-            <p:nvSpPr>
-              <p:cNvPr id="19" name="Freeform 19"/>
-              <p:cNvSpPr/>
-              <p:nvPr/>
-            </p:nvSpPr>
-            <p:spPr>
-              <a:xfrm>
-                <a:off x="12320436" y="3362599"/>
-                <a:ext cx="365422" cy="443826"/>
-              </a:xfrm>
-              <a:custGeom>
-                <a:avLst/>
-                <a:gdLst/>
-                <a:ahLst/>
-                <a:cxnLst/>
-                <a:rect l="l" t="t" r="r" b="b"/>
-                <a:pathLst>
-                  <a:path w="365422" h="443826">
-                    <a:moveTo>
-                      <a:pt x="231903" y="443826"/>
-                    </a:moveTo>
-                    <a:cubicBezTo>
-                      <a:pt x="53917" y="364964"/>
-                      <a:pt x="0" y="97566"/>
-                      <a:pt x="142412" y="0"/>
-                    </a:cubicBezTo>
-                    <a:cubicBezTo>
-                      <a:pt x="311505" y="34755"/>
-                      <a:pt x="365422" y="302153"/>
-                      <a:pt x="231903" y="443826"/>
-                    </a:cubicBezTo>
-                    <a:close/>
-                  </a:path>
-                </a:pathLst>
-              </a:custGeom>
-              <a:solidFill>
-                <a:srgbClr val="FFFFFF"/>
-              </a:solidFill>
-              <a:ln w="19685">
-                <a:solidFill>
-                  <a:srgbClr val="93A0C9"/>
-                </a:solidFill>
-                <a:round/>
-              </a:ln>
-            </p:spPr>
-          </p:sp>
-          <p:sp>
-            <p:nvSpPr>
-              <p:cNvPr id="20" name="Freeform 20"/>
-              <p:cNvSpPr/>
-              <p:nvPr/>
-            </p:nvSpPr>
-            <p:spPr>
-              <a:xfrm>
-                <a:off x="12552339" y="3478871"/>
-                <a:ext cx="413647" cy="410758"/>
-              </a:xfrm>
-              <a:custGeom>
-                <a:avLst/>
-                <a:gdLst/>
-                <a:ahLst/>
-                <a:cxnLst/>
-                <a:rect l="l" t="t" r="r" b="b"/>
-                <a:pathLst>
-                  <a:path w="413647" h="410758">
-                    <a:moveTo>
-                      <a:pt x="0" y="327553"/>
-                    </a:moveTo>
-                    <a:cubicBezTo>
-                      <a:pt x="20001" y="133909"/>
-                      <a:pt x="257651" y="0"/>
-                      <a:pt x="394449" y="105293"/>
-                    </a:cubicBezTo>
-                    <a:cubicBezTo>
-                      <a:pt x="413647" y="276849"/>
-                      <a:pt x="175998" y="410758"/>
-                      <a:pt x="0" y="327553"/>
-                    </a:cubicBezTo>
-                    <a:close/>
-                  </a:path>
-                </a:pathLst>
-              </a:custGeom>
-              <a:solidFill>
-                <a:srgbClr val="FFFFFF"/>
-              </a:solidFill>
-              <a:ln w="19685">
-                <a:solidFill>
-                  <a:srgbClr val="93A0C9"/>
-                </a:solidFill>
-                <a:round/>
-              </a:ln>
-            </p:spPr>
-          </p:sp>
-          <p:sp>
-            <p:nvSpPr>
-              <p:cNvPr id="21" name="Freeform 21"/>
-              <p:cNvSpPr/>
-              <p:nvPr/>
-            </p:nvSpPr>
-            <p:spPr>
-              <a:xfrm>
-                <a:off x="12527593" y="3765608"/>
-                <a:ext cx="415886" cy="418551"/>
-              </a:xfrm>
-              <a:custGeom>
-                <a:avLst/>
-                <a:gdLst/>
-                <a:ahLst/>
-                <a:cxnLst/>
-                <a:rect l="l" t="t" r="r" b="b"/>
-                <a:pathLst>
-                  <a:path w="415886" h="418551">
-                    <a:moveTo>
-                      <a:pt x="24746" y="40817"/>
-                    </a:moveTo>
-                    <a:cubicBezTo>
-                      <a:pt x="215094" y="0"/>
-                      <a:pt x="415886" y="184638"/>
-                      <a:pt x="358020" y="347278"/>
-                    </a:cubicBezTo>
-                    <a:cubicBezTo>
-                      <a:pt x="200792" y="418551"/>
-                      <a:pt x="0" y="233913"/>
-                      <a:pt x="24746" y="40817"/>
-                    </a:cubicBezTo>
-                    <a:close/>
-                  </a:path>
-                </a:pathLst>
-              </a:custGeom>
-              <a:solidFill>
-                <a:srgbClr val="FFFFFF"/>
-              </a:solidFill>
-              <a:ln w="19685">
-                <a:solidFill>
-                  <a:srgbClr val="93A0C9"/>
-                </a:solidFill>
-                <a:round/>
-              </a:ln>
-            </p:spPr>
-          </p:sp>
-          <p:sp>
-            <p:nvSpPr>
-              <p:cNvPr id="22" name="Freeform 22"/>
-              <p:cNvSpPr/>
-              <p:nvPr/>
-            </p:nvSpPr>
-            <p:spPr>
-              <a:xfrm>
-                <a:off x="12247494" y="3806425"/>
-                <a:ext cx="402485" cy="416439"/>
-              </a:xfrm>
-              <a:custGeom>
-                <a:avLst/>
-                <a:gdLst/>
-                <a:ahLst/>
-                <a:cxnLst/>
-                <a:rect l="l" t="t" r="r" b="b"/>
-                <a:pathLst>
-                  <a:path w="402485" h="416439">
-                    <a:moveTo>
-                      <a:pt x="304845" y="0"/>
-                    </a:moveTo>
-                    <a:cubicBezTo>
-                      <a:pt x="402485" y="168418"/>
-                      <a:pt x="288932" y="416439"/>
-                      <a:pt x="116370" y="411664"/>
-                    </a:cubicBezTo>
-                    <a:cubicBezTo>
-                      <a:pt x="0" y="284156"/>
-                      <a:pt x="113553" y="36135"/>
-                      <a:pt x="304845" y="0"/>
-                    </a:cubicBezTo>
-                    <a:close/>
-                  </a:path>
-                </a:pathLst>
-              </a:custGeom>
-              <a:solidFill>
-                <a:srgbClr val="FFFFFF"/>
-              </a:solidFill>
-              <a:ln w="19685">
-                <a:solidFill>
-                  <a:srgbClr val="93A0C9"/>
-                </a:solidFill>
-                <a:round/>
-              </a:ln>
-            </p:spPr>
-          </p:sp>
-          <p:sp>
-            <p:nvSpPr>
-              <p:cNvPr id="23" name="Freeform 23"/>
-              <p:cNvSpPr/>
-              <p:nvPr/>
-            </p:nvSpPr>
-            <p:spPr>
-              <a:xfrm>
-                <a:off x="12102582" y="3604309"/>
-                <a:ext cx="449757" cy="347021"/>
-              </a:xfrm>
-              <a:custGeom>
-                <a:avLst/>
-                <a:gdLst/>
-                <a:ahLst/>
-                <a:cxnLst/>
-                <a:rect l="l" t="t" r="r" b="b"/>
-                <a:pathLst>
-                  <a:path w="449757" h="347021">
-                    <a:moveTo>
-                      <a:pt x="449757" y="202115"/>
-                    </a:moveTo>
-                    <a:cubicBezTo>
-                      <a:pt x="319754" y="347021"/>
-                      <a:pt x="48783" y="315668"/>
-                      <a:pt x="0" y="150077"/>
-                    </a:cubicBezTo>
-                    <a:cubicBezTo>
-                      <a:pt x="85307" y="0"/>
-                      <a:pt x="356278" y="31353"/>
-                      <a:pt x="449757" y="202115"/>
-                    </a:cubicBezTo>
-                    <a:close/>
-                  </a:path>
-                </a:pathLst>
-              </a:custGeom>
-              <a:solidFill>
-                <a:srgbClr val="FFFFFF"/>
-              </a:solidFill>
-              <a:ln w="19685">
-                <a:solidFill>
-                  <a:srgbClr val="93A0C9"/>
-                </a:solidFill>
-                <a:round/>
-              </a:ln>
-            </p:spPr>
-          </p:sp>
-          <p:sp>
-            <p:nvSpPr>
-              <p:cNvPr id="24" name="Freeform 24"/>
-              <p:cNvSpPr/>
-              <p:nvPr/>
-            </p:nvSpPr>
-            <p:spPr>
-              <a:xfrm>
-                <a:off x="12552339" y="3557121"/>
-                <a:ext cx="597861" cy="628543"/>
-              </a:xfrm>
-              <a:custGeom>
-                <a:avLst/>
-                <a:gdLst/>
-                <a:ahLst/>
-                <a:cxnLst/>
-                <a:rect l="l" t="t" r="r" b="b"/>
-                <a:pathLst>
-                  <a:path w="597861" h="628543">
-                    <a:moveTo>
-                      <a:pt x="0" y="249304"/>
-                    </a:moveTo>
-                    <a:cubicBezTo>
-                      <a:pt x="211373" y="577"/>
-                      <a:pt x="597861" y="0"/>
-                      <a:pt x="494733" y="306546"/>
-                    </a:cubicBezTo>
-                    <a:cubicBezTo>
-                      <a:pt x="525136" y="628543"/>
-                      <a:pt x="148991" y="539727"/>
-                      <a:pt x="0" y="249304"/>
-                    </a:cubicBezTo>
-                    <a:close/>
-                  </a:path>
-                </a:pathLst>
-              </a:custGeom>
-              <a:solidFill>
-                <a:srgbClr val="CBE0EC"/>
-              </a:solidFill>
-              <a:ln w="19685">
-                <a:solidFill>
-                  <a:srgbClr val="93A0C9"/>
-                </a:solidFill>
-                <a:round/>
-              </a:ln>
-            </p:spPr>
-          </p:sp>
-          <p:sp>
-            <p:nvSpPr>
-              <p:cNvPr id="25" name="Ellipse 25"/>
-              <p:cNvSpPr/>
-              <p:nvPr/>
-            </p:nvSpPr>
-            <p:spPr>
-              <a:xfrm rot="-6084000">
-                <a:off x="12482035" y="3736120"/>
-                <a:ext cx="140608" cy="140608"/>
-              </a:xfrm>
-              <a:prstGeom prst="ellipse">
-                <a:avLst/>
-              </a:prstGeom>
-              <a:solidFill>
-                <a:srgbClr val="93A0C9"/>
-              </a:solidFill>
-              <a:ln>
-                <a:noFill/>
-              </a:ln>
-            </p:spPr>
-          </p:sp>
-        </p:grpSp>
-        <p:grpSp>
-          <p:nvGrpSpPr>
-            <p:cNvPr id="29" name="Group 29"/>
-            <p:cNvGrpSpPr/>
-            <p:nvPr/>
-          </p:nvGrpSpPr>
-          <p:grpSpPr>
-            <a:xfrm>
-              <a:off x="8652954" y="6884335"/>
-              <a:ext cx="1461242" cy="843648"/>
-              <a:chOff x="8652954" y="6884335"/>
-              <a:chExt cx="1461242" cy="843648"/>
-            </a:xfrm>
-          </p:grpSpPr>
-          <p:sp>
-            <p:nvSpPr>
-              <p:cNvPr id="27" name="Freeform 27"/>
-              <p:cNvSpPr/>
-              <p:nvPr/>
-            </p:nvSpPr>
-            <p:spPr>
-              <a:xfrm>
-                <a:off x="8652954" y="6884335"/>
-                <a:ext cx="1461242" cy="843648"/>
-              </a:xfrm>
-              <a:custGeom>
-                <a:avLst/>
-                <a:gdLst/>
-                <a:ahLst/>
-                <a:cxnLst/>
-                <a:rect l="l" t="t" r="r" b="b"/>
-                <a:pathLst>
-                  <a:path w="1461242" h="843648">
-                    <a:moveTo>
-                      <a:pt x="1461242" y="843648"/>
-                    </a:moveTo>
-                    <a:cubicBezTo>
-                      <a:pt x="924444" y="761032"/>
-                      <a:pt x="339947" y="423573"/>
-                      <a:pt x="0" y="0"/>
-                    </a:cubicBezTo>
-                    <a:cubicBezTo>
-                      <a:pt x="536798" y="82616"/>
-                      <a:pt x="1121295" y="420076"/>
-                      <a:pt x="1461242" y="843648"/>
-                    </a:cubicBezTo>
-                    <a:close/>
-                  </a:path>
-                </a:pathLst>
-              </a:custGeom>
-              <a:solidFill>
-                <a:srgbClr val="FFFFFF"/>
-              </a:solidFill>
-              <a:ln w="19685">
-                <a:solidFill>
-                  <a:srgbClr val="93A0C9"/>
-                </a:solidFill>
-                <a:round/>
-              </a:ln>
-            </p:spPr>
-          </p:sp>
-          <p:sp>
-            <p:nvSpPr>
-              <p:cNvPr id="28" name="Freeform 28"/>
-              <p:cNvSpPr/>
-              <p:nvPr/>
-            </p:nvSpPr>
-            <p:spPr>
-              <a:xfrm>
-                <a:off x="8872140" y="7010882"/>
-                <a:ext cx="1125156" cy="649609"/>
-              </a:xfrm>
-              <a:custGeom>
-                <a:avLst/>
-                <a:gdLst/>
-                <a:ahLst/>
-                <a:cxnLst/>
-                <a:rect l="l" t="t" r="r" b="b"/>
-                <a:pathLst>
-                  <a:path w="1125156" h="649609">
-                    <a:moveTo>
-                      <a:pt x="1125156" y="649609"/>
-                    </a:moveTo>
-                    <a:lnTo>
-                      <a:pt x="0" y="0"/>
-                    </a:lnTo>
                   </a:path>
                 </a:pathLst>
               </a:custGeom>
               <a:noFill/>
-              <a:ln w="11249">
+              <a:ln w="10159" cap="rnd">
                 <a:solidFill>
-                  <a:srgbClr val="C7CEE4"/>
+                  <a:srgbClr val="5A6AA8"/>
                 </a:solidFill>
               </a:ln>
             </p:spPr>
           </p:sp>
-        </p:grpSp>
-        <p:grpSp>
-          <p:nvGrpSpPr>
-            <p:cNvPr id="32" name="Group 32"/>
-            <p:cNvGrpSpPr/>
-            <p:nvPr/>
-          </p:nvGrpSpPr>
-          <p:grpSpPr>
-            <a:xfrm>
-              <a:off x="10257616" y="6364085"/>
-              <a:ext cx="1461242" cy="843648"/>
-              <a:chOff x="10257616" y="6364085"/>
-              <a:chExt cx="1461242" cy="843648"/>
-            </a:xfrm>
-          </p:grpSpPr>
-          <p:sp>
-            <p:nvSpPr>
-              <p:cNvPr id="30" name="Freeform 30"/>
-              <p:cNvSpPr/>
+          <p:grpSp>
+            <p:nvGrpSpPr>
+              <p:cNvPr id="80" name="Group 80"/>
+              <p:cNvGrpSpPr/>
               <p:nvPr/>
-            </p:nvSpPr>
-            <p:spPr>
+            </p:nvGrpSpPr>
+            <p:grpSpPr>
               <a:xfrm>
-                <a:off x="10257616" y="6364085"/>
-                <a:ext cx="1461242" cy="843648"/>
+                <a:off x="9606088" y="5571660"/>
+                <a:ext cx="549700" cy="462464"/>
+                <a:chOff x="9606088" y="5571660"/>
+                <a:chExt cx="549700" cy="462464"/>
               </a:xfrm>
-              <a:custGeom>
-                <a:avLst/>
-                <a:gdLst/>
-                <a:ahLst/>
-                <a:cxnLst/>
-                <a:rect l="l" t="t" r="r" b="b"/>
-                <a:pathLst>
-                  <a:path w="1461242" h="843648">
-                    <a:moveTo>
-                      <a:pt x="0" y="843648"/>
-                    </a:moveTo>
-                    <a:cubicBezTo>
-                      <a:pt x="339947" y="420076"/>
-                      <a:pt x="924444" y="82616"/>
-                      <a:pt x="1461242" y="0"/>
-                    </a:cubicBezTo>
-                    <a:cubicBezTo>
-                      <a:pt x="1121295" y="423573"/>
-                      <a:pt x="536798" y="761032"/>
-                      <a:pt x="0" y="843648"/>
-                    </a:cubicBezTo>
-                    <a:close/>
-                  </a:path>
-                </a:pathLst>
-              </a:custGeom>
-              <a:solidFill>
-                <a:srgbClr val="FFFFFF"/>
-              </a:solidFill>
-              <a:ln w="19685">
+            </p:grpSpPr>
+            <p:sp>
+              <p:nvSpPr>
+                <p:cNvPr id="73" name="Freeform 73"/>
+                <p:cNvSpPr/>
+                <p:nvPr/>
+              </p:nvSpPr>
+              <p:spPr>
+                <a:xfrm>
+                  <a:off x="9658206" y="5589254"/>
+                  <a:ext cx="213006" cy="211774"/>
+                </a:xfrm>
+                <a:custGeom>
+                  <a:avLst/>
+                  <a:gdLst/>
+                  <a:ahLst/>
+                  <a:cxnLst/>
+                  <a:rect l="l" t="t" r="r" b="b"/>
+                  <a:pathLst>
+                    <a:path w="213006" h="211774">
+                      <a:moveTo>
+                        <a:pt x="174606" y="211774"/>
+                      </a:moveTo>
+                      <a:cubicBezTo>
+                        <a:pt x="74294" y="205572"/>
+                        <a:pt x="0" y="86677"/>
+                        <a:pt x="50782" y="13614"/>
+                      </a:cubicBezTo>
+                      <a:cubicBezTo>
+                        <a:pt x="138712" y="0"/>
+                        <a:pt x="213006" y="118896"/>
+                        <a:pt x="174606" y="211774"/>
+                      </a:cubicBezTo>
+                      <a:close/>
+                    </a:path>
+                  </a:pathLst>
+                </a:custGeom>
                 <a:solidFill>
-                  <a:srgbClr val="93A0C9"/>
+                  <a:srgbClr val="FFFFFF"/>
                 </a:solidFill>
-                <a:round/>
-              </a:ln>
-            </p:spPr>
-          </p:sp>
-          <p:sp>
-            <p:nvSpPr>
-              <p:cNvPr id="31" name="Freeform 31"/>
-              <p:cNvSpPr/>
+                <a:ln w="7112">
+                  <a:solidFill>
+                    <a:srgbClr val="5A6AA8"/>
+                  </a:solidFill>
+                  <a:round/>
+                </a:ln>
+              </p:spPr>
+            </p:sp>
+            <p:sp>
+              <p:nvSpPr>
+                <p:cNvPr id="74" name="Freeform 74"/>
+                <p:cNvSpPr/>
+                <p:nvPr/>
+              </p:nvSpPr>
+              <p:spPr>
+                <a:xfrm>
+                  <a:off x="9807712" y="5596311"/>
+                  <a:ext cx="215417" cy="212537"/>
+                </a:xfrm>
+                <a:custGeom>
+                  <a:avLst/>
+                  <a:gdLst/>
+                  <a:ahLst/>
+                  <a:cxnLst/>
+                  <a:rect l="l" t="t" r="r" b="b"/>
+                  <a:pathLst>
+                    <a:path w="215417" h="212537">
+                      <a:moveTo>
+                        <a:pt x="25100" y="204717"/>
+                      </a:moveTo>
+                      <a:cubicBezTo>
+                        <a:pt x="0" y="107399"/>
+                        <a:pt x="90118" y="0"/>
+                        <a:pt x="175297" y="25719"/>
+                      </a:cubicBezTo>
+                      <a:cubicBezTo>
+                        <a:pt x="215417" y="105138"/>
+                        <a:pt x="125299" y="212537"/>
+                        <a:pt x="25100" y="204717"/>
+                      </a:cubicBezTo>
+                      <a:close/>
+                    </a:path>
+                  </a:pathLst>
+                </a:custGeom>
+                <a:solidFill>
+                  <a:srgbClr val="FFFFFF"/>
+                </a:solidFill>
+                <a:ln w="7112">
+                  <a:solidFill>
+                    <a:srgbClr val="5A6AA8"/>
+                  </a:solidFill>
+                  <a:round/>
+                </a:ln>
+              </p:spPr>
+            </p:sp>
+            <p:sp>
+              <p:nvSpPr>
+                <p:cNvPr id="75" name="Freeform 75"/>
+                <p:cNvSpPr/>
+                <p:nvPr/>
+              </p:nvSpPr>
+              <p:spPr>
+                <a:xfrm>
+                  <a:off x="9832812" y="5747083"/>
+                  <a:ext cx="216651" cy="204175"/>
+                </a:xfrm>
+                <a:custGeom>
+                  <a:avLst/>
+                  <a:gdLst/>
+                  <a:ahLst/>
+                  <a:cxnLst/>
+                  <a:rect l="l" t="t" r="r" b="b"/>
+                  <a:pathLst>
+                    <a:path w="216651" h="204175">
+                      <a:moveTo>
+                        <a:pt x="0" y="53945"/>
+                      </a:moveTo>
+                      <a:cubicBezTo>
+                        <a:pt x="84799" y="0"/>
+                        <a:pt x="214790" y="52520"/>
+                        <a:pt x="216651" y="141477"/>
+                      </a:cubicBezTo>
+                      <a:cubicBezTo>
+                        <a:pt x="153517" y="204175"/>
+                        <a:pt x="23526" y="151656"/>
+                        <a:pt x="0" y="53945"/>
+                      </a:cubicBezTo>
+                      <a:close/>
+                    </a:path>
+                  </a:pathLst>
+                </a:custGeom>
+                <a:solidFill>
+                  <a:srgbClr val="FFFFFF"/>
+                </a:solidFill>
+                <a:ln w="7112">
+                  <a:solidFill>
+                    <a:srgbClr val="5A6AA8"/>
+                  </a:solidFill>
+                  <a:round/>
+                </a:ln>
+              </p:spPr>
+            </p:sp>
+            <p:sp>
+              <p:nvSpPr>
+                <p:cNvPr id="76" name="Freeform 76"/>
+                <p:cNvSpPr/>
+                <p:nvPr/>
+              </p:nvSpPr>
+              <p:spPr>
+                <a:xfrm>
+                  <a:off x="9737374" y="5801028"/>
+                  <a:ext cx="172947" cy="233096"/>
+                </a:xfrm>
+                <a:custGeom>
+                  <a:avLst/>
+                  <a:gdLst/>
+                  <a:ahLst/>
+                  <a:cxnLst/>
+                  <a:rect l="l" t="t" r="r" b="b"/>
+                  <a:pathLst>
+                    <a:path w="172947" h="233096">
+                      <a:moveTo>
+                        <a:pt x="95438" y="0"/>
+                      </a:moveTo>
+                      <a:cubicBezTo>
+                        <a:pt x="172947" y="63979"/>
+                        <a:pt x="163167" y="203837"/>
+                        <a:pt x="79139" y="233096"/>
+                      </a:cubicBezTo>
+                      <a:cubicBezTo>
+                        <a:pt x="0" y="192427"/>
+                        <a:pt x="9780" y="52569"/>
+                        <a:pt x="95438" y="0"/>
+                      </a:cubicBezTo>
+                      <a:close/>
+                    </a:path>
+                  </a:pathLst>
+                </a:custGeom>
+                <a:solidFill>
+                  <a:srgbClr val="FFFFFF"/>
+                </a:solidFill>
+                <a:ln w="7112">
+                  <a:solidFill>
+                    <a:srgbClr val="5A6AA8"/>
+                  </a:solidFill>
+                  <a:round/>
+                </a:ln>
+              </p:spPr>
+            </p:sp>
+            <p:sp>
+              <p:nvSpPr>
+                <p:cNvPr id="77" name="Freeform 77"/>
+                <p:cNvSpPr/>
+                <p:nvPr/>
+              </p:nvSpPr>
+              <p:spPr>
+                <a:xfrm>
+                  <a:off x="9606088" y="5735807"/>
+                  <a:ext cx="226725" cy="192624"/>
+                </a:xfrm>
+                <a:custGeom>
+                  <a:avLst/>
+                  <a:gdLst/>
+                  <a:ahLst/>
+                  <a:cxnLst/>
+                  <a:rect l="l" t="t" r="r" b="b"/>
+                  <a:pathLst>
+                    <a:path w="226725" h="192624">
+                      <a:moveTo>
+                        <a:pt x="226725" y="65221"/>
+                      </a:moveTo>
+                      <a:cubicBezTo>
+                        <a:pt x="189828" y="158707"/>
+                        <a:pt x="53794" y="192624"/>
+                        <a:pt x="0" y="121750"/>
+                      </a:cubicBezTo>
+                      <a:cubicBezTo>
+                        <a:pt x="14224" y="33917"/>
+                        <a:pt x="150258" y="0"/>
+                        <a:pt x="226725" y="65221"/>
+                      </a:cubicBezTo>
+                      <a:close/>
+                    </a:path>
+                  </a:pathLst>
+                </a:custGeom>
+                <a:solidFill>
+                  <a:srgbClr val="FFFFFF"/>
+                </a:solidFill>
+                <a:ln w="7112">
+                  <a:solidFill>
+                    <a:srgbClr val="5A6AA8"/>
+                  </a:solidFill>
+                  <a:round/>
+                </a:ln>
+              </p:spPr>
+            </p:sp>
+            <p:sp>
+              <p:nvSpPr>
+                <p:cNvPr id="78" name="Freeform 78"/>
+                <p:cNvSpPr/>
+                <p:nvPr/>
+              </p:nvSpPr>
+              <p:spPr>
+                <a:xfrm>
+                  <a:off x="9832812" y="5571660"/>
+                  <a:ext cx="322976" cy="342791"/>
+                </a:xfrm>
+                <a:custGeom>
+                  <a:avLst/>
+                  <a:gdLst/>
+                  <a:ahLst/>
+                  <a:cxnLst/>
+                  <a:rect l="l" t="t" r="r" b="b"/>
+                  <a:pathLst>
+                    <a:path w="322976" h="342791">
+                      <a:moveTo>
+                        <a:pt x="0" y="229368"/>
+                      </a:moveTo>
+                      <a:cubicBezTo>
+                        <a:pt x="56773" y="70722"/>
+                        <a:pt x="243836" y="0"/>
+                        <a:pt x="249397" y="167186"/>
+                      </a:cubicBezTo>
+                      <a:cubicBezTo>
+                        <a:pt x="322976" y="317414"/>
+                        <a:pt x="124607" y="342791"/>
+                        <a:pt x="0" y="229368"/>
+                      </a:cubicBezTo>
+                      <a:close/>
+                    </a:path>
+                  </a:pathLst>
+                </a:custGeom>
+                <a:solidFill>
+                  <a:srgbClr val="CBE0EC"/>
+                </a:solidFill>
+                <a:ln w="7112">
+                  <a:solidFill>
+                    <a:srgbClr val="5A6AA8"/>
+                  </a:solidFill>
+                  <a:round/>
+                </a:ln>
+              </p:spPr>
+            </p:sp>
+            <p:sp>
+              <p:nvSpPr>
+                <p:cNvPr id="79" name="Ellipse 79"/>
+                <p:cNvSpPr/>
+                <p:nvPr/>
+              </p:nvSpPr>
+              <p:spPr>
+                <a:xfrm rot="-7320000">
+                  <a:off x="9807414" y="5775630"/>
+                  <a:ext cx="50797" cy="50797"/>
+                </a:xfrm>
+                <a:prstGeom prst="ellipse">
+                  <a:avLst/>
+                </a:prstGeom>
+                <a:solidFill>
+                  <a:srgbClr val="5A6AA8"/>
+                </a:solidFill>
+                <a:ln>
+                  <a:noFill/>
+                </a:ln>
+              </p:spPr>
+            </p:sp>
+          </p:grpSp>
+          <p:grpSp>
+            <p:nvGrpSpPr>
+              <p:cNvPr id="88" name="Group 88"/>
+              <p:cNvGrpSpPr/>
               <p:nvPr/>
-            </p:nvSpPr>
-            <p:spPr>
+            </p:nvGrpSpPr>
+            <p:grpSpPr>
               <a:xfrm>
-                <a:off x="10374515" y="6490632"/>
-                <a:ext cx="1125156" cy="649609"/>
+                <a:off x="9911819" y="5195515"/>
+                <a:ext cx="453676" cy="377271"/>
+                <a:chOff x="9911819" y="5195515"/>
+                <a:chExt cx="453676" cy="377271"/>
               </a:xfrm>
-              <a:custGeom>
-                <a:avLst/>
-                <a:gdLst/>
-                <a:ahLst/>
-                <a:cxnLst/>
-                <a:rect l="l" t="t" r="r" b="b"/>
-                <a:pathLst>
-                  <a:path w="1125156" h="649609">
-                    <a:moveTo>
-                      <a:pt x="0" y="649609"/>
-                    </a:moveTo>
-                    <a:lnTo>
-                      <a:pt x="1125156" y="0"/>
-                    </a:lnTo>
-                  </a:path>
-                </a:pathLst>
-              </a:custGeom>
-              <a:noFill/>
-              <a:ln w="11249">
+            </p:grpSpPr>
+            <p:sp>
+              <p:nvSpPr>
+                <p:cNvPr id="81" name="Freeform 81"/>
+                <p:cNvSpPr/>
+                <p:nvPr/>
+              </p:nvSpPr>
+              <p:spPr>
+                <a:xfrm>
+                  <a:off x="9984756" y="5195515"/>
+                  <a:ext cx="172536" cy="185424"/>
+                </a:xfrm>
+                <a:custGeom>
+                  <a:avLst/>
+                  <a:gdLst/>
+                  <a:ahLst/>
+                  <a:cxnLst/>
+                  <a:rect l="l" t="t" r="r" b="b"/>
+                  <a:pathLst>
+                    <a:path w="172536" h="185424">
+                      <a:moveTo>
+                        <a:pt x="125407" y="185424"/>
+                      </a:moveTo>
+                      <a:cubicBezTo>
+                        <a:pt x="42597" y="163889"/>
+                        <a:pt x="0" y="52919"/>
+                        <a:pt x="54229" y="0"/>
+                      </a:cubicBezTo>
+                      <a:cubicBezTo>
+                        <a:pt x="129939" y="3040"/>
+                        <a:pt x="172536" y="114010"/>
+                        <a:pt x="125407" y="185424"/>
+                      </a:cubicBezTo>
+                      <a:close/>
+                    </a:path>
+                  </a:pathLst>
+                </a:custGeom>
                 <a:solidFill>
-                  <a:srgbClr val="C7CEE4"/>
+                  <a:srgbClr val="FFFFFF"/>
                 </a:solidFill>
-              </a:ln>
-            </p:spPr>
-          </p:sp>
+                <a:ln w="7112">
+                  <a:solidFill>
+                    <a:srgbClr val="5A6AA8"/>
+                  </a:solidFill>
+                  <a:round/>
+                </a:ln>
+              </p:spPr>
+            </p:sp>
+            <p:sp>
+              <p:nvSpPr>
+                <p:cNvPr id="82" name="Freeform 82"/>
+                <p:cNvSpPr/>
+                <p:nvPr/>
+              </p:nvSpPr>
+              <p:spPr>
+                <a:xfrm>
+                  <a:off x="10105054" y="5220723"/>
+                  <a:ext cx="179966" cy="182970"/>
+                </a:xfrm>
+                <a:custGeom>
+                  <a:avLst/>
+                  <a:gdLst/>
+                  <a:ahLst/>
+                  <a:cxnLst/>
+                  <a:rect l="l" t="t" r="r" b="b"/>
+                  <a:pathLst>
+                    <a:path w="179966" h="182970">
+                      <a:moveTo>
+                        <a:pt x="5108" y="160215"/>
+                      </a:moveTo>
+                      <a:cubicBezTo>
+                        <a:pt x="0" y="74804"/>
+                        <a:pt x="92375" y="0"/>
+                        <a:pt x="159462" y="35222"/>
+                      </a:cubicBezTo>
+                      <a:cubicBezTo>
+                        <a:pt x="179966" y="108166"/>
+                        <a:pt x="87591" y="182970"/>
+                        <a:pt x="5108" y="160215"/>
+                      </a:cubicBezTo>
+                      <a:close/>
+                    </a:path>
+                  </a:pathLst>
+                </a:custGeom>
+                <a:solidFill>
+                  <a:srgbClr val="FFFFFF"/>
+                </a:solidFill>
+                <a:ln w="7112">
+                  <a:solidFill>
+                    <a:srgbClr val="5A6AA8"/>
+                  </a:solidFill>
+                  <a:round/>
+                </a:ln>
+              </p:spPr>
+            </p:sp>
+            <p:sp>
+              <p:nvSpPr>
+                <p:cNvPr id="83" name="Freeform 83"/>
+                <p:cNvSpPr/>
+                <p:nvPr/>
+              </p:nvSpPr>
+              <p:spPr>
+                <a:xfrm>
+                  <a:off x="10110163" y="5349686"/>
+                  <a:ext cx="179340" cy="181467"/>
+                </a:xfrm>
+                <a:custGeom>
+                  <a:avLst/>
+                  <a:gdLst/>
+                  <a:ahLst/>
+                  <a:cxnLst/>
+                  <a:rect l="l" t="t" r="r" b="b"/>
+                  <a:pathLst>
+                    <a:path w="179340" h="181467">
+                      <a:moveTo>
+                        <a:pt x="0" y="31252"/>
+                      </a:moveTo>
+                      <a:cubicBezTo>
+                        <a:pt x="79652" y="0"/>
+                        <a:pt x="179340" y="64738"/>
+                        <a:pt x="166573" y="139426"/>
+                      </a:cubicBezTo>
+                      <a:cubicBezTo>
+                        <a:pt x="103536" y="181467"/>
+                        <a:pt x="3847" y="116729"/>
+                        <a:pt x="0" y="31252"/>
+                      </a:cubicBezTo>
+                      <a:close/>
+                    </a:path>
+                  </a:pathLst>
+                </a:custGeom>
+                <a:solidFill>
+                  <a:srgbClr val="FFFFFF"/>
+                </a:solidFill>
+                <a:ln w="7112">
+                  <a:solidFill>
+                    <a:srgbClr val="5A6AA8"/>
+                  </a:solidFill>
+                  <a:round/>
+                </a:ln>
+              </p:spPr>
+            </p:sp>
+            <p:sp>
+              <p:nvSpPr>
+                <p:cNvPr id="84" name="Freeform 84"/>
+                <p:cNvSpPr/>
+                <p:nvPr/>
+              </p:nvSpPr>
+              <p:spPr>
+                <a:xfrm>
+                  <a:off x="9999294" y="5380938"/>
+                  <a:ext cx="165205" cy="191848"/>
+                </a:xfrm>
+                <a:custGeom>
+                  <a:avLst/>
+                  <a:gdLst/>
+                  <a:ahLst/>
+                  <a:cxnLst/>
+                  <a:rect l="l" t="t" r="r" b="b"/>
+                  <a:pathLst>
+                    <a:path w="165205" h="191848">
+                      <a:moveTo>
+                        <a:pt x="110869" y="0"/>
+                      </a:moveTo>
+                      <a:cubicBezTo>
+                        <a:pt x="165205" y="66096"/>
+                        <a:pt x="134441" y="180911"/>
+                        <a:pt x="59464" y="191848"/>
+                      </a:cubicBezTo>
+                      <a:cubicBezTo>
+                        <a:pt x="0" y="144887"/>
+                        <a:pt x="30764" y="30073"/>
+                        <a:pt x="110869" y="0"/>
+                      </a:cubicBezTo>
+                      <a:close/>
+                    </a:path>
+                  </a:pathLst>
+                </a:custGeom>
+                <a:solidFill>
+                  <a:srgbClr val="FFFFFF"/>
+                </a:solidFill>
+                <a:ln w="7112">
+                  <a:solidFill>
+                    <a:srgbClr val="5A6AA8"/>
+                  </a:solidFill>
+                  <a:round/>
+                </a:ln>
+              </p:spPr>
+            </p:sp>
+            <p:sp>
+              <p:nvSpPr>
+                <p:cNvPr id="85" name="Freeform 85"/>
+                <p:cNvSpPr/>
+                <p:nvPr/>
+              </p:nvSpPr>
+              <p:spPr>
+                <a:xfrm>
+                  <a:off x="9911819" y="5314047"/>
+                  <a:ext cx="198343" cy="145213"/>
+                </a:xfrm>
+                <a:custGeom>
+                  <a:avLst/>
+                  <a:gdLst/>
+                  <a:ahLst/>
+                  <a:cxnLst/>
+                  <a:rect l="l" t="t" r="r" b="b"/>
+                  <a:pathLst>
+                    <a:path w="198343" h="145213">
+                      <a:moveTo>
+                        <a:pt x="198343" y="66891"/>
+                      </a:moveTo>
+                      <a:cubicBezTo>
+                        <a:pt x="152273" y="138993"/>
+                        <a:pt x="33571" y="145213"/>
+                        <a:pt x="0" y="77286"/>
+                      </a:cubicBezTo>
+                      <a:cubicBezTo>
+                        <a:pt x="26287" y="6221"/>
+                        <a:pt x="144989" y="0"/>
+                        <a:pt x="198343" y="66891"/>
+                      </a:cubicBezTo>
+                      <a:close/>
+                    </a:path>
+                  </a:pathLst>
+                </a:custGeom>
+                <a:solidFill>
+                  <a:srgbClr val="FFFFFF"/>
+                </a:solidFill>
+                <a:ln w="7112">
+                  <a:solidFill>
+                    <a:srgbClr val="5A6AA8"/>
+                  </a:solidFill>
+                  <a:round/>
+                </a:ln>
+              </p:spPr>
+            </p:sp>
+            <p:sp>
+              <p:nvSpPr>
+                <p:cNvPr id="86" name="Freeform 86"/>
+                <p:cNvSpPr/>
+                <p:nvPr/>
+              </p:nvSpPr>
+              <p:spPr>
+                <a:xfrm>
+                  <a:off x="10110163" y="5229098"/>
+                  <a:ext cx="255332" cy="277681"/>
+                </a:xfrm>
+                <a:custGeom>
+                  <a:avLst/>
+                  <a:gdLst/>
+                  <a:ahLst/>
+                  <a:cxnLst/>
+                  <a:rect l="l" t="t" r="r" b="b"/>
+                  <a:pathLst>
+                    <a:path w="255332" h="277681">
+                      <a:moveTo>
+                        <a:pt x="0" y="151840"/>
+                      </a:moveTo>
+                      <a:cubicBezTo>
+                        <a:pt x="73101" y="28677"/>
+                        <a:pt x="240780" y="0"/>
+                        <a:pt x="218127" y="140409"/>
+                      </a:cubicBezTo>
+                      <a:cubicBezTo>
+                        <a:pt x="255332" y="277681"/>
+                        <a:pt x="85574" y="266689"/>
+                        <a:pt x="0" y="151840"/>
+                      </a:cubicBezTo>
+                      <a:close/>
+                    </a:path>
+                  </a:pathLst>
+                </a:custGeom>
+                <a:solidFill>
+                  <a:srgbClr val="CBE0EC"/>
+                </a:solidFill>
+                <a:ln w="7112">
+                  <a:solidFill>
+                    <a:srgbClr val="5A6AA8"/>
+                  </a:solidFill>
+                  <a:round/>
+                </a:ln>
+              </p:spPr>
+            </p:sp>
+            <p:sp>
+              <p:nvSpPr>
+                <p:cNvPr id="87" name="Ellipse 87"/>
+                <p:cNvSpPr/>
+                <p:nvPr/>
+              </p:nvSpPr>
+              <p:spPr>
+                <a:xfrm rot="-6660000">
+                  <a:off x="10084764" y="5355540"/>
+                  <a:ext cx="50797" cy="50797"/>
+                </a:xfrm>
+                <a:prstGeom prst="ellipse">
+                  <a:avLst/>
+                </a:prstGeom>
+                <a:solidFill>
+                  <a:srgbClr val="5A6AA8"/>
+                </a:solidFill>
+                <a:ln>
+                  <a:noFill/>
+                </a:ln>
+              </p:spPr>
+            </p:sp>
+          </p:grpSp>
+          <p:grpSp>
+            <p:nvGrpSpPr>
+              <p:cNvPr id="96" name="Group 96"/>
+              <p:cNvGrpSpPr/>
+              <p:nvPr/>
+            </p:nvGrpSpPr>
+            <p:grpSpPr>
+              <a:xfrm>
+                <a:off x="10327133" y="4824892"/>
+                <a:ext cx="378468" cy="310784"/>
+                <a:chOff x="10327133" y="4824892"/>
+                <a:chExt cx="378468" cy="310784"/>
+              </a:xfrm>
+            </p:grpSpPr>
+            <p:sp>
+              <p:nvSpPr>
+                <p:cNvPr id="89" name="Freeform 89"/>
+                <p:cNvSpPr/>
+                <p:nvPr/>
+              </p:nvSpPr>
+              <p:spPr>
+                <a:xfrm>
+                  <a:off x="10405836" y="4824892"/>
+                  <a:ext cx="132014" cy="160339"/>
+                </a:xfrm>
+                <a:custGeom>
+                  <a:avLst/>
+                  <a:gdLst/>
+                  <a:ahLst/>
+                  <a:cxnLst/>
+                  <a:rect l="l" t="t" r="r" b="b"/>
+                  <a:pathLst>
+                    <a:path w="132014" h="160339">
+                      <a:moveTo>
+                        <a:pt x="83779" y="160339"/>
+                      </a:moveTo>
+                      <a:cubicBezTo>
+                        <a:pt x="19478" y="131849"/>
+                        <a:pt x="0" y="35247"/>
+                        <a:pt x="51449" y="0"/>
+                      </a:cubicBezTo>
+                      <a:cubicBezTo>
+                        <a:pt x="112536" y="12556"/>
+                        <a:pt x="132014" y="109157"/>
+                        <a:pt x="83779" y="160339"/>
+                      </a:cubicBezTo>
+                      <a:close/>
+                    </a:path>
+                  </a:pathLst>
+                </a:custGeom>
+                <a:solidFill>
+                  <a:srgbClr val="FFFFFF"/>
+                </a:solidFill>
+                <a:ln w="7112">
+                  <a:solidFill>
+                    <a:srgbClr val="5A6AA8"/>
+                  </a:solidFill>
+                  <a:round/>
+                </a:ln>
+              </p:spPr>
+            </p:sp>
+            <p:sp>
+              <p:nvSpPr>
+                <p:cNvPr id="90" name="Freeform 90"/>
+                <p:cNvSpPr/>
+                <p:nvPr/>
+              </p:nvSpPr>
+              <p:spPr>
+                <a:xfrm>
+                  <a:off x="10489615" y="4866897"/>
+                  <a:ext cx="149436" cy="148393"/>
+                </a:xfrm>
+                <a:custGeom>
+                  <a:avLst/>
+                  <a:gdLst/>
+                  <a:ahLst/>
+                  <a:cxnLst/>
+                  <a:rect l="l" t="t" r="r" b="b"/>
+                  <a:pathLst>
+                    <a:path w="149436" h="148393">
+                      <a:moveTo>
+                        <a:pt x="0" y="118334"/>
+                      </a:moveTo>
+                      <a:cubicBezTo>
+                        <a:pt x="7226" y="48377"/>
+                        <a:pt x="93080" y="0"/>
+                        <a:pt x="142501" y="38039"/>
+                      </a:cubicBezTo>
+                      <a:cubicBezTo>
+                        <a:pt x="149436" y="100016"/>
+                        <a:pt x="63582" y="148393"/>
+                        <a:pt x="0" y="118334"/>
+                      </a:cubicBezTo>
+                      <a:close/>
+                    </a:path>
+                  </a:pathLst>
+                </a:custGeom>
+                <a:solidFill>
+                  <a:srgbClr val="FFFFFF"/>
+                </a:solidFill>
+                <a:ln w="7112">
+                  <a:solidFill>
+                    <a:srgbClr val="5A6AA8"/>
+                  </a:solidFill>
+                  <a:round/>
+                </a:ln>
+              </p:spPr>
+            </p:sp>
+            <p:sp>
+              <p:nvSpPr>
+                <p:cNvPr id="91" name="Freeform 91"/>
+                <p:cNvSpPr/>
+                <p:nvPr/>
+              </p:nvSpPr>
+              <p:spPr>
+                <a:xfrm>
+                  <a:off x="10480675" y="4970485"/>
+                  <a:ext cx="150245" cy="151208"/>
+                </a:xfrm>
+                <a:custGeom>
+                  <a:avLst/>
+                  <a:gdLst/>
+                  <a:ahLst/>
+                  <a:cxnLst/>
+                  <a:rect l="l" t="t" r="r" b="b"/>
+                  <a:pathLst>
+                    <a:path w="150245" h="151208">
+                      <a:moveTo>
+                        <a:pt x="8940" y="14746"/>
+                      </a:moveTo>
+                      <a:cubicBezTo>
+                        <a:pt x="77706" y="0"/>
+                        <a:pt x="150245" y="66703"/>
+                        <a:pt x="129340" y="125459"/>
+                      </a:cubicBezTo>
+                      <a:cubicBezTo>
+                        <a:pt x="72539" y="151208"/>
+                        <a:pt x="0" y="84505"/>
+                        <a:pt x="8940" y="14746"/>
+                      </a:cubicBezTo>
+                      <a:close/>
+                    </a:path>
+                  </a:pathLst>
+                </a:custGeom>
+                <a:solidFill>
+                  <a:srgbClr val="FFFFFF"/>
+                </a:solidFill>
+                <a:ln w="7112">
+                  <a:solidFill>
+                    <a:srgbClr val="5A6AA8"/>
+                  </a:solidFill>
+                  <a:round/>
+                </a:ln>
+              </p:spPr>
+            </p:sp>
+            <p:sp>
+              <p:nvSpPr>
+                <p:cNvPr id="92" name="Freeform 92"/>
+                <p:cNvSpPr/>
+                <p:nvPr/>
+              </p:nvSpPr>
+              <p:spPr>
+                <a:xfrm>
+                  <a:off x="10379485" y="4985231"/>
+                  <a:ext cx="145404" cy="150445"/>
+                </a:xfrm>
+                <a:custGeom>
+                  <a:avLst/>
+                  <a:gdLst/>
+                  <a:ahLst/>
+                  <a:cxnLst/>
+                  <a:rect l="l" t="t" r="r" b="b"/>
+                  <a:pathLst>
+                    <a:path w="145404" h="150445">
+                      <a:moveTo>
+                        <a:pt x="110130" y="0"/>
+                      </a:moveTo>
+                      <a:cubicBezTo>
+                        <a:pt x="145404" y="60844"/>
+                        <a:pt x="104381" y="150445"/>
+                        <a:pt x="42041" y="148720"/>
+                      </a:cubicBezTo>
+                      <a:cubicBezTo>
+                        <a:pt x="0" y="102656"/>
+                        <a:pt x="41023" y="13054"/>
+                        <a:pt x="110130" y="0"/>
+                      </a:cubicBezTo>
+                      <a:close/>
+                    </a:path>
+                  </a:pathLst>
+                </a:custGeom>
+                <a:solidFill>
+                  <a:srgbClr val="FFFFFF"/>
+                </a:solidFill>
+                <a:ln w="7112">
+                  <a:solidFill>
+                    <a:srgbClr val="5A6AA8"/>
+                  </a:solidFill>
+                  <a:round/>
+                </a:ln>
+              </p:spPr>
+            </p:sp>
+            <p:sp>
+              <p:nvSpPr>
+                <p:cNvPr id="93" name="Freeform 93"/>
+                <p:cNvSpPr/>
+                <p:nvPr/>
+              </p:nvSpPr>
+              <p:spPr>
+                <a:xfrm>
+                  <a:off x="10327133" y="4912214"/>
+                  <a:ext cx="162482" cy="125367"/>
+                </a:xfrm>
+                <a:custGeom>
+                  <a:avLst/>
+                  <a:gdLst/>
+                  <a:ahLst/>
+                  <a:cxnLst/>
+                  <a:rect l="l" t="t" r="r" b="b"/>
+                  <a:pathLst>
+                    <a:path w="162482" h="125367">
+                      <a:moveTo>
+                        <a:pt x="162482" y="73017"/>
+                      </a:moveTo>
+                      <a:cubicBezTo>
+                        <a:pt x="115516" y="125367"/>
+                        <a:pt x="17623" y="114040"/>
+                        <a:pt x="0" y="54218"/>
+                      </a:cubicBezTo>
+                      <a:cubicBezTo>
+                        <a:pt x="30818" y="0"/>
+                        <a:pt x="128711" y="11327"/>
+                        <a:pt x="162482" y="73017"/>
+                      </a:cubicBezTo>
+                      <a:close/>
+                    </a:path>
+                  </a:pathLst>
+                </a:custGeom>
+                <a:solidFill>
+                  <a:srgbClr val="FFFFFF"/>
+                </a:solidFill>
+                <a:ln w="7112">
+                  <a:solidFill>
+                    <a:srgbClr val="5A6AA8"/>
+                  </a:solidFill>
+                  <a:round/>
+                </a:ln>
+              </p:spPr>
+            </p:sp>
+            <p:sp>
+              <p:nvSpPr>
+                <p:cNvPr id="94" name="Freeform 94"/>
+                <p:cNvSpPr/>
+                <p:nvPr/>
+              </p:nvSpPr>
+              <p:spPr>
+                <a:xfrm>
+                  <a:off x="10489615" y="4895166"/>
+                  <a:ext cx="215986" cy="227071"/>
+                </a:xfrm>
+                <a:custGeom>
+                  <a:avLst/>
+                  <a:gdLst/>
+                  <a:ahLst/>
+                  <a:cxnLst/>
+                  <a:rect l="l" t="t" r="r" b="b"/>
+                  <a:pathLst>
+                    <a:path w="215986" h="227071">
+                      <a:moveTo>
+                        <a:pt x="0" y="90065"/>
+                      </a:moveTo>
+                      <a:cubicBezTo>
+                        <a:pt x="76362" y="208"/>
+                        <a:pt x="215986" y="0"/>
+                        <a:pt x="178730" y="110745"/>
+                      </a:cubicBezTo>
+                      <a:cubicBezTo>
+                        <a:pt x="189713" y="227071"/>
+                        <a:pt x="53825" y="194985"/>
+                        <a:pt x="0" y="90065"/>
+                      </a:cubicBezTo>
+                      <a:close/>
+                    </a:path>
+                  </a:pathLst>
+                </a:custGeom>
+                <a:solidFill>
+                  <a:srgbClr val="CBE0EC"/>
+                </a:solidFill>
+                <a:ln w="7112">
+                  <a:solidFill>
+                    <a:srgbClr val="5A6AA8"/>
+                  </a:solidFill>
+                  <a:round/>
+                </a:ln>
+              </p:spPr>
+            </p:sp>
+            <p:sp>
+              <p:nvSpPr>
+                <p:cNvPr id="95" name="Ellipse 95"/>
+                <p:cNvSpPr/>
+                <p:nvPr/>
+              </p:nvSpPr>
+              <p:spPr>
+                <a:xfrm rot="-6084000">
+                  <a:off x="10464217" y="4959833"/>
+                  <a:ext cx="50797" cy="50797"/>
+                </a:xfrm>
+                <a:prstGeom prst="ellipse">
+                  <a:avLst/>
+                </a:prstGeom>
+                <a:solidFill>
+                  <a:srgbClr val="5A6AA8"/>
+                </a:solidFill>
+                <a:ln>
+                  <a:noFill/>
+                </a:ln>
+              </p:spPr>
+            </p:sp>
+          </p:grpSp>
+          <p:grpSp>
+            <p:nvGrpSpPr>
+              <p:cNvPr id="99" name="Group 99"/>
+              <p:cNvGrpSpPr/>
+              <p:nvPr/>
+            </p:nvGrpSpPr>
+            <p:grpSpPr>
+              <a:xfrm>
+                <a:off x="9080902" y="6097173"/>
+                <a:ext cx="527896" cy="304781"/>
+                <a:chOff x="9080902" y="6097173"/>
+                <a:chExt cx="527896" cy="304781"/>
+              </a:xfrm>
+            </p:grpSpPr>
+            <p:sp>
+              <p:nvSpPr>
+                <p:cNvPr id="97" name="Freeform 97"/>
+                <p:cNvSpPr/>
+                <p:nvPr/>
+              </p:nvSpPr>
+              <p:spPr>
+                <a:xfrm>
+                  <a:off x="9080902" y="6097173"/>
+                  <a:ext cx="527896" cy="304781"/>
+                </a:xfrm>
+                <a:custGeom>
+                  <a:avLst/>
+                  <a:gdLst/>
+                  <a:ahLst/>
+                  <a:cxnLst/>
+                  <a:rect l="l" t="t" r="r" b="b"/>
+                  <a:pathLst>
+                    <a:path w="527896" h="304781">
+                      <a:moveTo>
+                        <a:pt x="527896" y="304781"/>
+                      </a:moveTo>
+                      <a:cubicBezTo>
+                        <a:pt x="333969" y="274935"/>
+                        <a:pt x="122811" y="153022"/>
+                        <a:pt x="0" y="0"/>
+                      </a:cubicBezTo>
+                      <a:cubicBezTo>
+                        <a:pt x="193927" y="29846"/>
+                        <a:pt x="405085" y="151759"/>
+                        <a:pt x="527896" y="304781"/>
+                      </a:cubicBezTo>
+                      <a:close/>
+                    </a:path>
+                  </a:pathLst>
+                </a:custGeom>
+                <a:solidFill>
+                  <a:srgbClr val="FFFFFF"/>
+                </a:solidFill>
+                <a:ln w="7112">
+                  <a:solidFill>
+                    <a:srgbClr val="5A6AA8"/>
+                  </a:solidFill>
+                  <a:round/>
+                </a:ln>
+              </p:spPr>
+            </p:sp>
+            <p:sp>
+              <p:nvSpPr>
+                <p:cNvPr id="98" name="Freeform 98"/>
+                <p:cNvSpPr/>
+                <p:nvPr/>
+              </p:nvSpPr>
+              <p:spPr>
+                <a:xfrm>
+                  <a:off x="9160086" y="6142891"/>
+                  <a:ext cx="406480" cy="234681"/>
+                </a:xfrm>
+                <a:custGeom>
+                  <a:avLst/>
+                  <a:gdLst/>
+                  <a:ahLst/>
+                  <a:cxnLst/>
+                  <a:rect l="l" t="t" r="r" b="b"/>
+                  <a:pathLst>
+                    <a:path w="406480" h="234681">
+                      <a:moveTo>
+                        <a:pt x="406480" y="234681"/>
+                      </a:moveTo>
+                      <a:lnTo>
+                        <a:pt x="0" y="0"/>
+                      </a:lnTo>
+                    </a:path>
+                  </a:pathLst>
+                </a:custGeom>
+                <a:noFill/>
+                <a:ln w="4064">
+                  <a:solidFill>
+                    <a:srgbClr val="C7CEE4"/>
+                  </a:solidFill>
+                </a:ln>
+              </p:spPr>
+            </p:sp>
+          </p:grpSp>
+          <p:grpSp>
+            <p:nvGrpSpPr>
+              <p:cNvPr id="102" name="Group 102"/>
+              <p:cNvGrpSpPr/>
+              <p:nvPr/>
+            </p:nvGrpSpPr>
+            <p:grpSpPr>
+              <a:xfrm>
+                <a:off x="9660611" y="5909225"/>
+                <a:ext cx="527896" cy="304781"/>
+                <a:chOff x="9660611" y="5909225"/>
+                <a:chExt cx="527896" cy="304781"/>
+              </a:xfrm>
+            </p:grpSpPr>
+            <p:sp>
+              <p:nvSpPr>
+                <p:cNvPr id="100" name="Freeform 100"/>
+                <p:cNvSpPr/>
+                <p:nvPr/>
+              </p:nvSpPr>
+              <p:spPr>
+                <a:xfrm>
+                  <a:off x="9660611" y="5909225"/>
+                  <a:ext cx="527896" cy="304781"/>
+                </a:xfrm>
+                <a:custGeom>
+                  <a:avLst/>
+                  <a:gdLst/>
+                  <a:ahLst/>
+                  <a:cxnLst/>
+                  <a:rect l="l" t="t" r="r" b="b"/>
+                  <a:pathLst>
+                    <a:path w="527896" h="304781">
+                      <a:moveTo>
+                        <a:pt x="0" y="304781"/>
+                      </a:moveTo>
+                      <a:cubicBezTo>
+                        <a:pt x="122811" y="151759"/>
+                        <a:pt x="333969" y="29846"/>
+                        <a:pt x="527896" y="0"/>
+                      </a:cubicBezTo>
+                      <a:cubicBezTo>
+                        <a:pt x="405085" y="153022"/>
+                        <a:pt x="193927" y="274935"/>
+                        <a:pt x="0" y="304781"/>
+                      </a:cubicBezTo>
+                      <a:close/>
+                    </a:path>
+                  </a:pathLst>
+                </a:custGeom>
+                <a:solidFill>
+                  <a:srgbClr val="FFFFFF"/>
+                </a:solidFill>
+                <a:ln w="7112">
+                  <a:solidFill>
+                    <a:srgbClr val="5A6AA8"/>
+                  </a:solidFill>
+                  <a:round/>
+                </a:ln>
+              </p:spPr>
+            </p:sp>
+            <p:sp>
+              <p:nvSpPr>
+                <p:cNvPr id="101" name="Freeform 101"/>
+                <p:cNvSpPr/>
+                <p:nvPr/>
+              </p:nvSpPr>
+              <p:spPr>
+                <a:xfrm>
+                  <a:off x="9702843" y="5954942"/>
+                  <a:ext cx="406480" cy="234681"/>
+                </a:xfrm>
+                <a:custGeom>
+                  <a:avLst/>
+                  <a:gdLst/>
+                  <a:ahLst/>
+                  <a:cxnLst/>
+                  <a:rect l="l" t="t" r="r" b="b"/>
+                  <a:pathLst>
+                    <a:path w="406480" h="234681">
+                      <a:moveTo>
+                        <a:pt x="0" y="234681"/>
+                      </a:moveTo>
+                      <a:lnTo>
+                        <a:pt x="406480" y="0"/>
+                      </a:lnTo>
+                    </a:path>
+                  </a:pathLst>
+                </a:custGeom>
+                <a:noFill/>
+                <a:ln w="4064">
+                  <a:solidFill>
+                    <a:srgbClr val="C7CEE4"/>
+                  </a:solidFill>
+                </a:ln>
+              </p:spPr>
+            </p:sp>
+          </p:grpSp>
         </p:grpSp>
       </p:grpSp>
       <p:grpSp>
         <p:nvGrpSpPr>
-          <p:cNvPr id="36" name="word"/>
+          <p:cNvPr id="106" name="word"/>
           <p:cNvGrpSpPr/>
           <p:nvPr/>
         </p:nvGrpSpPr>
         <p:grpSpPr>
           <a:xfrm>
-            <a:off x="4744212" y="3086100"/>
-            <a:ext cx="2703576" cy="1905000"/>
-            <a:chOff x="4744212" y="3086100"/>
-            <a:chExt cx="2703576" cy="1905000"/>
+            <a:off x="4784598" y="2552700"/>
+            <a:ext cx="2622804" cy="1847850"/>
+            <a:chOff x="4784598" y="2552700"/>
+            <a:chExt cx="2622804" cy="1847850"/>
           </a:xfrm>
         </p:grpSpPr>
         <p:sp>
           <p:nvSpPr>
-            <p:cNvPr id="34" name="TextBox 34"/>
+            <p:cNvPr id="105" name="TextBox 105"/>
             <p:cNvSpPr txBox="1"/>
             <p:nvPr/>
           </p:nvSpPr>
           <p:spPr>
             <a:xfrm>
-              <a:off x="4744212" y="3086100"/>
-              <a:ext cx="2703576" cy="1905000"/>
+              <a:off x="4784598" y="2552700"/>
+              <a:ext cx="2622804" cy="1847850"/>
             </a:xfrm>
             <a:prstGeom prst="rect">
               <a:avLst/>
@@ -27806,7 +30345,7 @@
             <a:p>
               <a:pPr algn="ctr"/>
               <a:r>
-                <a:rPr lang="zh-TW" sz="9900" b="1" dirty="0">
+                <a:rPr lang="zh-TW" sz="9600" b="1" dirty="0">
                   <a:solidFill>
                     <a:srgbClr val="0A1138"/>
                   </a:solidFill>
@@ -27818,28 +30357,6 @@
               </a:r>
             </a:p>
           </p:txBody>
-        </p:sp>
-        <p:sp>
-          <p:nvSpPr>
-            <p:cNvPr id="35" name="Rectangle 35"/>
-            <p:cNvSpPr/>
-            <p:nvPr/>
-          </p:nvSpPr>
-          <p:spPr>
-            <a:xfrm>
-              <a:off x="5581650" y="4762500"/>
-              <a:ext cx="1028700" cy="57150"/>
-            </a:xfrm>
-            <a:prstGeom prst="rect">
-              <a:avLst/>
-            </a:prstGeom>
-            <a:solidFill>
-              <a:srgbClr val="D21540"/>
-            </a:solidFill>
-            <a:ln>
-              <a:noFill/>
-            </a:ln>
-          </p:spPr>
         </p:sp>
       </p:grpSp>
     </p:spTree>
@@ -27914,7 +30431,7 @@
       </p:pic>
       <p:grpSp>
         <p:nvGrpSpPr>
-          <p:cNvPr id="17" name="panel"/>
+          <p:cNvPr id="19" name="panel"/>
           <p:cNvGrpSpPr/>
           <p:nvPr/>
         </p:nvGrpSpPr>
@@ -27970,31 +30487,9 @@
             </a:ln>
           </p:spPr>
         </p:sp>
-        <p:sp>
-          <p:nvSpPr>
-            <p:cNvPr id="5" name="Rectangle 5"/>
-            <p:cNvSpPr/>
-            <p:nvPr/>
-          </p:nvSpPr>
-          <p:spPr>
-            <a:xfrm>
-              <a:off x="457200" y="457200"/>
-              <a:ext cx="2933700" cy="701626"/>
-            </a:xfrm>
-            <a:prstGeom prst="rect">
-              <a:avLst/>
-            </a:prstGeom>
-            <a:solidFill>
-              <a:srgbClr val="0A1138"/>
-            </a:solidFill>
-            <a:ln>
-              <a:noFill/>
-            </a:ln>
-          </p:spPr>
-        </p:sp>
         <p:pic>
           <p:nvPicPr>
-            <p:cNvPr id="6" name="Image 6"/>
+            <p:cNvPr id="5" name="Image 5"/>
             <p:cNvPicPr>
               <a:picLocks noChangeAspect="1"/>
             </p:cNvPicPr>
@@ -28008,8 +30503,8 @@
           </p:blipFill>
           <p:spPr>
             <a:xfrm>
-              <a:off x="590550" y="590550"/>
-              <a:ext cx="2667000" cy="434926"/>
+              <a:off x="457200" y="495300"/>
+              <a:ext cx="1395412" cy="514350"/>
             </a:xfrm>
             <a:prstGeom prst="rect">
               <a:avLst/>
@@ -28018,7 +30513,149 @@
         </p:pic>
         <p:sp>
           <p:nvSpPr>
+            <p:cNvPr id="6" name="Rectangle 6"/>
+            <p:cNvSpPr/>
+            <p:nvPr/>
+          </p:nvSpPr>
+          <p:spPr>
+            <a:xfrm>
+              <a:off x="2062162" y="514350"/>
+              <a:ext cx="19050" cy="476250"/>
+            </a:xfrm>
+            <a:prstGeom prst="rect">
+              <a:avLst/>
+            </a:prstGeom>
+            <a:solidFill>
+              <a:srgbClr val="93A0C9"/>
+            </a:solidFill>
+            <a:ln>
+              <a:noFill/>
+            </a:ln>
+          </p:spPr>
+        </p:sp>
+        <p:sp>
+          <p:nvSpPr>
             <p:cNvPr id="7" name="TextBox 7"/>
+            <p:cNvSpPr txBox="1"/>
+            <p:nvPr/>
+          </p:nvSpPr>
+          <p:spPr>
+            <a:xfrm>
+              <a:off x="2266760" y="594614"/>
+              <a:ext cx="1909040" cy="191643"/>
+            </a:xfrm>
+            <a:prstGeom prst="rect">
+              <a:avLst/>
+            </a:prstGeom>
+            <a:noFill/>
+            <a:ln>
+              <a:noFill/>
+            </a:ln>
+          </p:spPr>
+          <p:txBody>
+            <a:bodyPr wrap="none" lIns="0" tIns="0" rIns="0" bIns="0" anchor="t" anchorCtr="0">
+              <a:spAutoFit/>
+            </a:bodyPr>
+            <a:lstStyle/>
+            <a:p>
+              <a:pPr algn="l"/>
+              <a:r>
+                <a:rPr lang="en-US" sz="980" b="1" dirty="0">
+                  <a:solidFill>
+                    <a:srgbClr val="0A1138"/>
+                  </a:solidFill>
+                  <a:latin typeface="+mn-lt"/>
+                  <a:ea typeface="+mn-ea"/>
+                  <a:cs typeface="+mn-cs"/>
+                </a:rPr>
+                <a:t>NTU Centre in Computational</a:t>
+              </a:r>
+            </a:p>
+          </p:txBody>
+        </p:sp>
+        <p:sp>
+          <p:nvSpPr>
+            <p:cNvPr id="8" name="TextBox 8"/>
+            <p:cNvSpPr txBox="1"/>
+            <p:nvPr/>
+          </p:nvSpPr>
+          <p:spPr>
+            <a:xfrm>
+              <a:off x="2266760" y="756539"/>
+              <a:ext cx="1673786" cy="191643"/>
+            </a:xfrm>
+            <a:prstGeom prst="rect">
+              <a:avLst/>
+            </a:prstGeom>
+            <a:noFill/>
+            <a:ln>
+              <a:noFill/>
+            </a:ln>
+          </p:spPr>
+          <p:txBody>
+            <a:bodyPr wrap="none" lIns="0" tIns="0" rIns="0" bIns="0" anchor="t" anchorCtr="0">
+              <a:spAutoFit/>
+            </a:bodyPr>
+            <a:lstStyle/>
+            <a:p>
+              <a:pPr algn="l"/>
+              <a:r>
+                <a:rPr lang="en-US" sz="980" b="1" dirty="0">
+                  <a:solidFill>
+                    <a:srgbClr val="0A1138"/>
+                  </a:solidFill>
+                  <a:latin typeface="+mn-lt"/>
+                  <a:ea typeface="+mn-ea"/>
+                  <a:cs typeface="+mn-cs"/>
+                </a:rPr>
+                <a:t>Technologies for Finance</a:t>
+              </a:r>
+            </a:p>
+          </p:txBody>
+        </p:sp>
+        <p:sp>
+          <p:nvSpPr>
+            <p:cNvPr id="9" name="TextBox 9"/>
+            <p:cNvSpPr txBox="1"/>
+            <p:nvPr/>
+          </p:nvSpPr>
+          <p:spPr>
+            <a:xfrm>
+              <a:off x="2266950" y="975614"/>
+              <a:ext cx="869372" cy="147638"/>
+            </a:xfrm>
+            <a:prstGeom prst="rect">
+              <a:avLst/>
+            </a:prstGeom>
+            <a:noFill/>
+            <a:ln>
+              <a:noFill/>
+            </a:ln>
+          </p:spPr>
+          <p:txBody>
+            <a:bodyPr wrap="none" lIns="0" tIns="0" rIns="0" bIns="0" anchor="t" anchorCtr="0">
+              <a:spAutoFit/>
+            </a:bodyPr>
+            <a:lstStyle/>
+            <a:p>
+              <a:pPr algn="l"/>
+              <a:r>
+                <a:rPr lang="en-US" sz="750" b="1" dirty="0">
+                  <a:solidFill>
+                    <a:srgbClr val="6B6B6B"/>
+                  </a:solidFill>
+                  <a:latin typeface="+mn-lt"/>
+                  <a:ea typeface="+mn-ea"/>
+                  <a:cs typeface="+mn-cs"/>
+                </a:rPr>
+                <a:t>Graduate College</a:t>
+              </a:r>
+            </a:p>
+          </p:txBody>
+        </p:sp>
+        <p:sp>
+          <p:nvSpPr>
+            <p:cNvPr id="10" name="TextBox 10"/>
             <p:cNvSpPr txBox="1"/>
             <p:nvPr/>
           </p:nvSpPr>
@@ -28058,29 +30695,7 @@
         </p:sp>
         <p:sp>
           <p:nvSpPr>
-            <p:cNvPr id="8" name="Rectangle 8"/>
-            <p:cNvSpPr/>
-            <p:nvPr/>
-          </p:nvSpPr>
-          <p:spPr>
-            <a:xfrm>
-              <a:off x="457200" y="2552700"/>
-              <a:ext cx="914400" cy="47625"/>
-            </a:xfrm>
-            <a:prstGeom prst="rect">
-              <a:avLst/>
-            </a:prstGeom>
-            <a:solidFill>
-              <a:srgbClr val="D21540"/>
-            </a:solidFill>
-            <a:ln>
-              <a:noFill/>
-            </a:ln>
-          </p:spPr>
-        </p:sp>
-        <p:sp>
-          <p:nvSpPr>
-            <p:cNvPr id="9" name="TextBox 9"/>
+            <p:cNvPr id="11" name="TextBox 11"/>
             <p:cNvSpPr txBox="1"/>
             <p:nvPr/>
           </p:nvSpPr>
@@ -28120,7 +30735,7 @@
         </p:sp>
         <p:sp>
           <p:nvSpPr>
-            <p:cNvPr id="10" name="Rectangle 10"/>
+            <p:cNvPr id="12" name="Rectangle 12"/>
             <p:cNvSpPr/>
             <p:nvPr/>
           </p:nvSpPr>
@@ -28144,7 +30759,7 @@
         </p:sp>
         <p:pic>
           <p:nvPicPr>
-            <p:cNvPr id="11" name="Image 11"/>
+            <p:cNvPr id="13" name="Image 13"/>
             <p:cNvPicPr>
               <a:picLocks noChangeAspect="1"/>
             </p:cNvPicPr>
@@ -28168,7 +30783,7 @@
         </p:pic>
         <p:sp>
           <p:nvSpPr>
-            <p:cNvPr id="12" name="TextBox 12"/>
+            <p:cNvPr id="14" name="TextBox 14"/>
             <p:cNvSpPr txBox="1"/>
             <p:nvPr/>
           </p:nvSpPr>
@@ -28208,7 +30823,7 @@
         </p:sp>
         <p:sp>
           <p:nvSpPr>
-            <p:cNvPr id="13" name="Rectangle 13"/>
+            <p:cNvPr id="15" name="Rectangle 15"/>
             <p:cNvSpPr/>
             <p:nvPr/>
           </p:nvSpPr>
@@ -28232,7 +30847,7 @@
         </p:sp>
         <p:pic>
           <p:nvPicPr>
-            <p:cNvPr id="14" name="Image 14"/>
+            <p:cNvPr id="16" name="Image 16"/>
             <p:cNvPicPr>
               <a:picLocks noChangeAspect="1"/>
             </p:cNvPicPr>
@@ -28256,7 +30871,7 @@
         </p:pic>
         <p:sp>
           <p:nvSpPr>
-            <p:cNvPr id="15" name="TextBox 15"/>
+            <p:cNvPr id="17" name="TextBox 17"/>
             <p:cNvSpPr txBox="1"/>
             <p:nvPr/>
           </p:nvSpPr>
@@ -28296,7 +30911,7 @@
         </p:sp>
         <p:sp>
           <p:nvSpPr>
-            <p:cNvPr id="16" name="TextBox 16"/>
+            <p:cNvPr id="18" name="TextBox 18"/>
             <p:cNvSpPr txBox="1"/>
             <p:nvPr/>
           </p:nvSpPr>

--- a/decks/ntu-taiwan-info-session/ntu-taiwan-info-session.pptx
+++ b/decks/ntu-taiwan-info-session/ntu-taiwan-info-session.pptx
@@ -12,7 +12,6 @@
     <p:sldId id="260" r:id="rId11"/>
     <p:sldId id="261" r:id="rId12"/>
     <p:sldId id="262" r:id="rId13"/>
-    <p:sldId id="263" r:id="rId14"/>
   </p:sldIdLst>
   <p:sldSz cx="12192000" cy="6858000" type="screen16x9"/>
   <p:notesSz cx="6858000" cy="9144000"/>
@@ -1281,7 +1280,7 @@
       </p:grpSpPr>
       <p:grpSp>
         <p:nvGrpSpPr>
-          <p:cNvPr id="12" name="header"/>
+          <p:cNvPr id="11" name="header"/>
           <p:cNvGrpSpPr/>
           <p:nvPr/>
         </p:nvGrpSpPr>
@@ -1341,7 +1340,7 @@
           </p:nvSpPr>
           <p:spPr>
             <a:xfrm>
-              <a:off x="10420350" y="438150"/>
+              <a:off x="10591800" y="438150"/>
               <a:ext cx="114300" cy="114300"/>
             </a:xfrm>
             <a:prstGeom prst="rect">
@@ -1365,7 +1364,7 @@
           </p:nvSpPr>
           <p:spPr>
             <a:xfrm>
-              <a:off x="10591800" y="438150"/>
+              <a:off x="10763250" y="438150"/>
               <a:ext cx="114300" cy="114300"/>
             </a:xfrm>
             <a:prstGeom prst="rect">
@@ -1389,7 +1388,7 @@
           </p:nvSpPr>
           <p:spPr>
             <a:xfrm>
-              <a:off x="10763250" y="438150"/>
+              <a:off x="10934700" y="438150"/>
               <a:ext cx="114300" cy="114300"/>
             </a:xfrm>
             <a:prstGeom prst="rect">
@@ -1413,7 +1412,7 @@
           </p:nvSpPr>
           <p:spPr>
             <a:xfrm>
-              <a:off x="10934700" y="438150"/>
+              <a:off x="11106150" y="438150"/>
               <a:ext cx="114300" cy="114300"/>
             </a:xfrm>
             <a:prstGeom prst="rect">
@@ -1437,7 +1436,7 @@
           </p:nvSpPr>
           <p:spPr>
             <a:xfrm>
-              <a:off x="11106150" y="438150"/>
+              <a:off x="11277600" y="438150"/>
               <a:ext cx="114300" cy="114300"/>
             </a:xfrm>
             <a:prstGeom prst="rect">
@@ -1461,7 +1460,7 @@
           </p:nvSpPr>
           <p:spPr>
             <a:xfrm>
-              <a:off x="11277600" y="438150"/>
+              <a:off x="11449050" y="438150"/>
               <a:ext cx="114300" cy="114300"/>
             </a:xfrm>
             <a:prstGeom prst="rect">
@@ -1485,7 +1484,7 @@
           </p:nvSpPr>
           <p:spPr>
             <a:xfrm>
-              <a:off x="11449050" y="438150"/>
+              <a:off x="11620500" y="438150"/>
               <a:ext cx="114300" cy="114300"/>
             </a:xfrm>
             <a:prstGeom prst="rect">
@@ -1509,30 +1508,6 @@
           </p:nvSpPr>
           <p:spPr>
             <a:xfrm>
-              <a:off x="11620500" y="438150"/>
-              <a:ext cx="114300" cy="114300"/>
-            </a:xfrm>
-            <a:prstGeom prst="rect">
-              <a:avLst/>
-            </a:prstGeom>
-            <a:solidFill>
-              <a:srgbClr val="FFFFFF"/>
-            </a:solidFill>
-            <a:ln w="19050">
-              <a:solidFill>
-                <a:srgbClr val="0A1138"/>
-              </a:solidFill>
-            </a:ln>
-          </p:spPr>
-        </p:sp>
-        <p:sp>
-          <p:nvSpPr>
-            <p:cNvPr id="11" name="Rectangle 11"/>
-            <p:cNvSpPr/>
-            <p:nvPr/>
-          </p:nvSpPr>
-          <p:spPr>
-            <a:xfrm>
               <a:off x="457200" y="857250"/>
               <a:ext cx="11277600" cy="28575"/>
             </a:xfrm>
@@ -1550,7 +1525,7 @@
       </p:grpSp>
       <p:grpSp>
         <p:nvGrpSpPr>
-          <p:cNvPr id="14" name="name"/>
+          <p:cNvPr id="13" name="name"/>
           <p:cNvGrpSpPr/>
           <p:nvPr/>
         </p:nvGrpSpPr>
@@ -1564,7 +1539,7 @@
         </p:grpSpPr>
         <p:sp>
           <p:nvSpPr>
-            <p:cNvPr id="13" name="TextBox 13"/>
+            <p:cNvPr id="12" name="TextBox 12"/>
             <p:cNvSpPr txBox="1"/>
             <p:nvPr/>
           </p:nvSpPr>
@@ -1605,7 +1580,7 @@
       </p:grpSp>
       <p:grpSp>
         <p:nvGrpSpPr>
-          <p:cNvPr id="19" name="rows"/>
+          <p:cNvPr id="18" name="rows"/>
           <p:cNvGrpSpPr/>
           <p:nvPr/>
         </p:nvGrpSpPr>
@@ -1619,7 +1594,7 @@
         </p:grpSpPr>
         <p:sp>
           <p:nvSpPr>
-            <p:cNvPr id="15" name="TextBox 15"/>
+            <p:cNvPr id="14" name="TextBox 14"/>
             <p:cNvSpPr txBox="1"/>
             <p:nvPr/>
           </p:nvSpPr>
@@ -1659,7 +1634,7 @@
         </p:sp>
         <p:sp>
           <p:nvSpPr>
-            <p:cNvPr id="16" name="TextBox 16"/>
+            <p:cNvPr id="15" name="TextBox 15"/>
             <p:cNvSpPr txBox="1"/>
             <p:nvPr/>
           </p:nvSpPr>
@@ -1699,7 +1674,7 @@
         </p:sp>
         <p:sp>
           <p:nvSpPr>
-            <p:cNvPr id="17" name="TextBox 17"/>
+            <p:cNvPr id="16" name="TextBox 16"/>
             <p:cNvSpPr txBox="1"/>
             <p:nvPr/>
           </p:nvSpPr>
@@ -1739,7 +1714,7 @@
         </p:sp>
         <p:sp>
           <p:nvSpPr>
-            <p:cNvPr id="18" name="TextBox 18"/>
+            <p:cNvPr id="17" name="TextBox 17"/>
             <p:cNvSpPr txBox="1"/>
             <p:nvPr/>
           </p:nvSpPr>
@@ -1780,7 +1755,7 @@
       </p:grpSp>
       <p:grpSp>
         <p:nvGrpSpPr>
-          <p:cNvPr id="23" name="portrait"/>
+          <p:cNvPr id="24" name="portrait"/>
           <p:cNvGrpSpPr/>
           <p:nvPr/>
         </p:nvGrpSpPr>
@@ -1794,7 +1769,7 @@
         </p:grpSpPr>
         <p:sp>
           <p:nvSpPr>
-            <p:cNvPr id="20" name="Rectangle 20"/>
+            <p:cNvPr id="19" name="Rectangle 19"/>
             <p:cNvSpPr/>
             <p:nvPr/>
           </p:nvSpPr>
@@ -1816,7 +1791,7 @@
         </p:sp>
         <p:sp>
           <p:nvSpPr>
-            <p:cNvPr id="21" name="Rectangle 21"/>
+            <p:cNvPr id="20" name="Rectangle 20"/>
             <p:cNvSpPr/>
             <p:nvPr/>
           </p:nvSpPr>
@@ -1840,7 +1815,7 @@
         </p:sp>
         <p:pic>
           <p:nvPicPr>
-            <p:cNvPr id="22" name="Image 22"/>
+            <p:cNvPr id="21" name="Image 21"/>
             <p:cNvPicPr>
               <a:picLocks noChangeAspect="1"/>
             </p:cNvPicPr>
@@ -1848,21 +1823,268 @@
           </p:nvPicPr>
           <p:blipFill>
             <a:blip r:embed="rId2"/>
-            <a:srcRect l="0" t="211" r="0" b="211"/>
             <a:stretch>
               <a:fillRect/>
             </a:stretch>
           </p:blipFill>
           <p:spPr>
             <a:xfrm>
-              <a:off x="7105650" y="1295400"/>
-              <a:ext cx="4514850" cy="4495800"/>
+              <a:off x="7105650" y="1436838"/>
+              <a:ext cx="4514850" cy="4212924"/>
             </a:xfrm>
             <a:prstGeom prst="rect">
               <a:avLst/>
             </a:prstGeom>
           </p:spPr>
         </p:pic>
+        <p:sp>
+          <p:nvSpPr>
+            <p:cNvPr id="22" name="Freeform 22"/>
+            <p:cNvSpPr/>
+            <p:nvPr/>
+          </p:nvSpPr>
+          <p:spPr>
+            <a:xfrm>
+              <a:off x="9409748" y="1935480"/>
+              <a:ext cx="1130617" cy="1301115"/>
+            </a:xfrm>
+            <a:custGeom>
+              <a:avLst/>
+              <a:gdLst/>
+              <a:ahLst/>
+              <a:cxnLst/>
+              <a:rect l="l" t="t" r="r" b="b"/>
+              <a:pathLst>
+                <a:path w="1130617" h="1301115">
+                  <a:moveTo>
+                    <a:pt x="1105853" y="657225"/>
+                  </a:moveTo>
+                  <a:lnTo>
+                    <a:pt x="1109663" y="802958"/>
+                  </a:lnTo>
+                  <a:lnTo>
+                    <a:pt x="1083945" y="920115"/>
+                  </a:lnTo>
+                  <a:lnTo>
+                    <a:pt x="989647" y="1071562"/>
+                  </a:lnTo>
+                  <a:lnTo>
+                    <a:pt x="901065" y="1151573"/>
+                  </a:lnTo>
+                  <a:lnTo>
+                    <a:pt x="814388" y="1237298"/>
+                  </a:lnTo>
+                  <a:lnTo>
+                    <a:pt x="687705" y="1285875"/>
+                  </a:lnTo>
+                  <a:lnTo>
+                    <a:pt x="559117" y="1289685"/>
+                  </a:lnTo>
+                  <a:lnTo>
+                    <a:pt x="437197" y="1301115"/>
+                  </a:lnTo>
+                  <a:lnTo>
+                    <a:pt x="312420" y="1247775"/>
+                  </a:lnTo>
+                  <a:lnTo>
+                    <a:pt x="203835" y="1144905"/>
+                  </a:lnTo>
+                  <a:lnTo>
+                    <a:pt x="107633" y="1062990"/>
+                  </a:lnTo>
+                  <a:lnTo>
+                    <a:pt x="20003" y="918210"/>
+                  </a:lnTo>
+                  <a:lnTo>
+                    <a:pt x="5715" y="798195"/>
+                  </a:lnTo>
+                  <a:lnTo>
+                    <a:pt x="0" y="669608"/>
+                  </a:lnTo>
+                  <a:lnTo>
+                    <a:pt x="27622" y="527685"/>
+                  </a:lnTo>
+                  <a:lnTo>
+                    <a:pt x="62865" y="385762"/>
+                  </a:lnTo>
+                  <a:lnTo>
+                    <a:pt x="127635" y="267653"/>
+                  </a:lnTo>
+                  <a:lnTo>
+                    <a:pt x="223838" y="133350"/>
+                  </a:lnTo>
+                  <a:lnTo>
+                    <a:pt x="293370" y="60960"/>
+                  </a:lnTo>
+                  <a:lnTo>
+                    <a:pt x="441960" y="20955"/>
+                  </a:lnTo>
+                  <a:lnTo>
+                    <a:pt x="558165" y="0"/>
+                  </a:lnTo>
+                  <a:lnTo>
+                    <a:pt x="682942" y="19050"/>
+                  </a:lnTo>
+                  <a:lnTo>
+                    <a:pt x="793433" y="75248"/>
+                  </a:lnTo>
+                  <a:lnTo>
+                    <a:pt x="901065" y="164783"/>
+                  </a:lnTo>
+                  <a:lnTo>
+                    <a:pt x="983933" y="267653"/>
+                  </a:lnTo>
+                  <a:lnTo>
+                    <a:pt x="1053465" y="393383"/>
+                  </a:lnTo>
+                  <a:lnTo>
+                    <a:pt x="1094422" y="498158"/>
+                  </a:lnTo>
+                  <a:lnTo>
+                    <a:pt x="1128713" y="673417"/>
+                  </a:lnTo>
+                  <a:lnTo>
+                    <a:pt x="1130617" y="802005"/>
+                  </a:lnTo>
+                  <a:lnTo>
+                    <a:pt x="1087755" y="924878"/>
+                  </a:lnTo>
+                </a:path>
+              </a:pathLst>
+            </a:custGeom>
+            <a:noFill/>
+            <a:ln w="38100" cap="rnd">
+              <a:solidFill>
+                <a:srgbClr val="D21540"/>
+              </a:solidFill>
+              <a:round/>
+            </a:ln>
+          </p:spPr>
+        </p:sp>
+        <p:sp>
+          <p:nvSpPr>
+            <p:cNvPr id="23" name="Freeform 23"/>
+            <p:cNvSpPr/>
+            <p:nvPr/>
+          </p:nvSpPr>
+          <p:spPr>
+            <a:xfrm>
+              <a:off x="9389745" y="1943100"/>
+              <a:ext cx="1147762" cy="1278255"/>
+            </a:xfrm>
+            <a:custGeom>
+              <a:avLst/>
+              <a:gdLst/>
+              <a:ahLst/>
+              <a:cxnLst/>
+              <a:rect l="l" t="t" r="r" b="b"/>
+              <a:pathLst>
+                <a:path w="1147762" h="1278255">
+                  <a:moveTo>
+                    <a:pt x="1147762" y="650558"/>
+                  </a:moveTo>
+                  <a:lnTo>
+                    <a:pt x="1126807" y="775335"/>
+                  </a:lnTo>
+                  <a:lnTo>
+                    <a:pt x="1112520" y="947738"/>
+                  </a:lnTo>
+                  <a:lnTo>
+                    <a:pt x="1012507" y="1062990"/>
+                  </a:lnTo>
+                  <a:lnTo>
+                    <a:pt x="926782" y="1141095"/>
+                  </a:lnTo>
+                  <a:lnTo>
+                    <a:pt x="806768" y="1241108"/>
+                  </a:lnTo>
+                  <a:lnTo>
+                    <a:pt x="708660" y="1262062"/>
+                  </a:lnTo>
+                  <a:lnTo>
+                    <a:pt x="578168" y="1278255"/>
+                  </a:lnTo>
+                  <a:lnTo>
+                    <a:pt x="461010" y="1272540"/>
+                  </a:lnTo>
+                  <a:lnTo>
+                    <a:pt x="346710" y="1249680"/>
+                  </a:lnTo>
+                  <a:lnTo>
+                    <a:pt x="217170" y="1173480"/>
+                  </a:lnTo>
+                  <a:lnTo>
+                    <a:pt x="110490" y="1035367"/>
+                  </a:lnTo>
+                  <a:lnTo>
+                    <a:pt x="51435" y="910590"/>
+                  </a:lnTo>
+                  <a:lnTo>
+                    <a:pt x="0" y="788670"/>
+                  </a:lnTo>
+                  <a:lnTo>
+                    <a:pt x="15240" y="634365"/>
+                  </a:lnTo>
+                  <a:lnTo>
+                    <a:pt x="21908" y="517208"/>
+                  </a:lnTo>
+                  <a:lnTo>
+                    <a:pt x="80010" y="383858"/>
+                  </a:lnTo>
+                  <a:lnTo>
+                    <a:pt x="164783" y="239077"/>
+                  </a:lnTo>
+                  <a:lnTo>
+                    <a:pt x="227648" y="141923"/>
+                  </a:lnTo>
+                  <a:lnTo>
+                    <a:pt x="332423" y="67627"/>
+                  </a:lnTo>
+                  <a:lnTo>
+                    <a:pt x="446723" y="20955"/>
+                  </a:lnTo>
+                  <a:lnTo>
+                    <a:pt x="590550" y="0"/>
+                  </a:lnTo>
+                  <a:lnTo>
+                    <a:pt x="700088" y="24765"/>
+                  </a:lnTo>
+                  <a:lnTo>
+                    <a:pt x="809625" y="56198"/>
+                  </a:lnTo>
+                  <a:lnTo>
+                    <a:pt x="936307" y="141923"/>
+                  </a:lnTo>
+                  <a:lnTo>
+                    <a:pt x="999173" y="224790"/>
+                  </a:lnTo>
+                  <a:lnTo>
+                    <a:pt x="1056323" y="369570"/>
+                  </a:lnTo>
+                  <a:lnTo>
+                    <a:pt x="1089660" y="507683"/>
+                  </a:lnTo>
+                  <a:lnTo>
+                    <a:pt x="1140143" y="630555"/>
+                  </a:lnTo>
+                  <a:lnTo>
+                    <a:pt x="1140143" y="790575"/>
+                  </a:lnTo>
+                  <a:lnTo>
+                    <a:pt x="1105853" y="922972"/>
+                  </a:lnTo>
+                </a:path>
+              </a:pathLst>
+            </a:custGeom>
+            <a:noFill/>
+            <a:ln w="38100" cap="rnd">
+              <a:solidFill>
+                <a:srgbClr val="D21540"/>
+              </a:solidFill>
+              <a:round/>
+            </a:ln>
+          </p:spPr>
+        </p:sp>
       </p:grpSp>
     </p:spTree>
   </p:cSld>
@@ -1911,7 +2133,7 @@
       </p:grpSpPr>
       <p:grpSp>
         <p:nvGrpSpPr>
-          <p:cNvPr id="12" name="header"/>
+          <p:cNvPr id="11" name="header"/>
           <p:cNvGrpSpPr/>
           <p:nvPr/>
         </p:nvGrpSpPr>
@@ -1971,7 +2193,7 @@
           </p:nvSpPr>
           <p:spPr>
             <a:xfrm>
-              <a:off x="10420350" y="438150"/>
+              <a:off x="10591800" y="438150"/>
               <a:ext cx="114300" cy="114300"/>
             </a:xfrm>
             <a:prstGeom prst="rect">
@@ -1995,7 +2217,7 @@
           </p:nvSpPr>
           <p:spPr>
             <a:xfrm>
-              <a:off x="10591800" y="438150"/>
+              <a:off x="10763250" y="438150"/>
               <a:ext cx="114300" cy="114300"/>
             </a:xfrm>
             <a:prstGeom prst="rect">
@@ -2019,7 +2241,7 @@
           </p:nvSpPr>
           <p:spPr>
             <a:xfrm>
-              <a:off x="10763250" y="438150"/>
+              <a:off x="10934700" y="438150"/>
               <a:ext cx="114300" cy="114300"/>
             </a:xfrm>
             <a:prstGeom prst="rect">
@@ -2043,7 +2265,7 @@
           </p:nvSpPr>
           <p:spPr>
             <a:xfrm>
-              <a:off x="10934700" y="438150"/>
+              <a:off x="11106150" y="438150"/>
               <a:ext cx="114300" cy="114300"/>
             </a:xfrm>
             <a:prstGeom prst="rect">
@@ -2067,7 +2289,7 @@
           </p:nvSpPr>
           <p:spPr>
             <a:xfrm>
-              <a:off x="11106150" y="438150"/>
+              <a:off x="11277600" y="438150"/>
               <a:ext cx="114300" cy="114300"/>
             </a:xfrm>
             <a:prstGeom prst="rect">
@@ -2091,7 +2313,7 @@
           </p:nvSpPr>
           <p:spPr>
             <a:xfrm>
-              <a:off x="11277600" y="438150"/>
+              <a:off x="11449050" y="438150"/>
               <a:ext cx="114300" cy="114300"/>
             </a:xfrm>
             <a:prstGeom prst="rect">
@@ -2115,7 +2337,7 @@
           </p:nvSpPr>
           <p:spPr>
             <a:xfrm>
-              <a:off x="11449050" y="438150"/>
+              <a:off x="11620500" y="438150"/>
               <a:ext cx="114300" cy="114300"/>
             </a:xfrm>
             <a:prstGeom prst="rect">
@@ -2139,30 +2361,6 @@
           </p:nvSpPr>
           <p:spPr>
             <a:xfrm>
-              <a:off x="11620500" y="438150"/>
-              <a:ext cx="114300" cy="114300"/>
-            </a:xfrm>
-            <a:prstGeom prst="rect">
-              <a:avLst/>
-            </a:prstGeom>
-            <a:solidFill>
-              <a:srgbClr val="FFFFFF"/>
-            </a:solidFill>
-            <a:ln w="19050">
-              <a:solidFill>
-                <a:srgbClr val="0A1138"/>
-              </a:solidFill>
-            </a:ln>
-          </p:spPr>
-        </p:sp>
-        <p:sp>
-          <p:nvSpPr>
-            <p:cNvPr id="11" name="Rectangle 11"/>
-            <p:cNvSpPr/>
-            <p:nvPr/>
-          </p:nvSpPr>
-          <p:spPr>
-            <a:xfrm>
               <a:off x="457200" y="857250"/>
               <a:ext cx="11277600" cy="28575"/>
             </a:xfrm>
@@ -2180,7 +2378,7 @@
       </p:grpSp>
       <p:grpSp>
         <p:nvGrpSpPr>
-          <p:cNvPr id="24" name="reasons"/>
+          <p:cNvPr id="23" name="reasons"/>
           <p:cNvGrpSpPr/>
           <p:nvPr/>
         </p:nvGrpSpPr>
@@ -2194,7 +2392,7 @@
         </p:grpSpPr>
         <p:sp>
           <p:nvSpPr>
-            <p:cNvPr id="13" name="TextBox 13"/>
+            <p:cNvPr id="12" name="TextBox 12"/>
             <p:cNvSpPr txBox="1"/>
             <p:nvPr/>
           </p:nvSpPr>
@@ -2234,7 +2432,7 @@
         </p:sp>
         <p:sp>
           <p:nvSpPr>
-            <p:cNvPr id="14" name="TextBox 14"/>
+            <p:cNvPr id="13" name="TextBox 13"/>
             <p:cNvSpPr txBox="1"/>
             <p:nvPr/>
           </p:nvSpPr>
@@ -2274,7 +2472,7 @@
         </p:sp>
         <p:sp>
           <p:nvSpPr>
-            <p:cNvPr id="15" name="TextBox 15"/>
+            <p:cNvPr id="14" name="TextBox 14"/>
             <p:cNvSpPr txBox="1"/>
             <p:nvPr/>
           </p:nvSpPr>
@@ -2314,7 +2512,7 @@
         </p:sp>
         <p:sp>
           <p:nvSpPr>
-            <p:cNvPr id="16" name="TextBox 16"/>
+            <p:cNvPr id="15" name="TextBox 15"/>
             <p:cNvSpPr txBox="1"/>
             <p:nvPr/>
           </p:nvSpPr>
@@ -2354,7 +2552,7 @@
         </p:sp>
         <p:sp>
           <p:nvSpPr>
-            <p:cNvPr id="17" name="Rectangle 17"/>
+            <p:cNvPr id="16" name="Rectangle 16"/>
             <p:cNvSpPr/>
             <p:nvPr/>
           </p:nvSpPr>
@@ -2376,7 +2574,7 @@
         </p:sp>
         <p:sp>
           <p:nvSpPr>
-            <p:cNvPr id="18" name="TextBox 18"/>
+            <p:cNvPr id="17" name="TextBox 17"/>
             <p:cNvSpPr txBox="1"/>
             <p:nvPr/>
           </p:nvSpPr>
@@ -2416,7 +2614,7 @@
         </p:sp>
         <p:sp>
           <p:nvSpPr>
-            <p:cNvPr id="19" name="TextBox 19"/>
+            <p:cNvPr id="18" name="TextBox 18"/>
             <p:cNvSpPr txBox="1"/>
             <p:nvPr/>
           </p:nvSpPr>
@@ -2456,7 +2654,7 @@
         </p:sp>
         <p:sp>
           <p:nvSpPr>
-            <p:cNvPr id="20" name="TextBox 20"/>
+            <p:cNvPr id="19" name="TextBox 19"/>
             <p:cNvSpPr txBox="1"/>
             <p:nvPr/>
           </p:nvSpPr>
@@ -2496,7 +2694,7 @@
         </p:sp>
         <p:sp>
           <p:nvSpPr>
-            <p:cNvPr id="21" name="Rectangle 21"/>
+            <p:cNvPr id="20" name="Rectangle 20"/>
             <p:cNvSpPr/>
             <p:nvPr/>
           </p:nvSpPr>
@@ -2518,7 +2716,7 @@
         </p:sp>
         <p:sp>
           <p:nvSpPr>
-            <p:cNvPr id="22" name="TextBox 22"/>
+            <p:cNvPr id="21" name="TextBox 21"/>
             <p:cNvSpPr txBox="1"/>
             <p:nvPr/>
           </p:nvSpPr>
@@ -2558,7 +2756,7 @@
         </p:sp>
         <p:sp>
           <p:nvSpPr>
-            <p:cNvPr id="23" name="TextBox 23"/>
+            <p:cNvPr id="22" name="TextBox 22"/>
             <p:cNvSpPr txBox="1"/>
             <p:nvPr/>
           </p:nvSpPr>
@@ -2599,7 +2797,7 @@
       </p:grpSp>
       <p:grpSp>
         <p:nvGrpSpPr>
-          <p:cNvPr id="153" name="map"/>
+          <p:cNvPr id="152" name="map"/>
           <p:cNvGrpSpPr/>
           <p:nvPr/>
         </p:nvGrpSpPr>
@@ -2613,7 +2811,7 @@
         </p:grpSpPr>
         <p:sp>
           <p:nvSpPr>
-            <p:cNvPr id="25" name="Rectangle 25"/>
+            <p:cNvPr id="24" name="Rectangle 24"/>
             <p:cNvSpPr/>
             <p:nvPr/>
           </p:nvSpPr>
@@ -2635,7 +2833,7 @@
         </p:sp>
         <p:sp>
           <p:nvSpPr>
-            <p:cNvPr id="26" name="Rectangle 26"/>
+            <p:cNvPr id="25" name="Rectangle 25"/>
             <p:cNvSpPr/>
             <p:nvPr/>
           </p:nvSpPr>
@@ -2657,7 +2855,7 @@
         </p:sp>
         <p:sp>
           <p:nvSpPr>
-            <p:cNvPr id="27" name="Rectangle 27"/>
+            <p:cNvPr id="26" name="Rectangle 26"/>
             <p:cNvSpPr/>
             <p:nvPr/>
           </p:nvSpPr>
@@ -2679,7 +2877,7 @@
         </p:sp>
         <p:sp>
           <p:nvSpPr>
-            <p:cNvPr id="28" name="Rectangle 28"/>
+            <p:cNvPr id="27" name="Rectangle 27"/>
             <p:cNvSpPr/>
             <p:nvPr/>
           </p:nvSpPr>
@@ -2701,7 +2899,7 @@
         </p:sp>
         <p:sp>
           <p:nvSpPr>
-            <p:cNvPr id="29" name="Rectangle 29"/>
+            <p:cNvPr id="28" name="Rectangle 28"/>
             <p:cNvSpPr/>
             <p:nvPr/>
           </p:nvSpPr>
@@ -2723,7 +2921,7 @@
         </p:sp>
         <p:sp>
           <p:nvSpPr>
-            <p:cNvPr id="30" name="Rectangle 30"/>
+            <p:cNvPr id="29" name="Rectangle 29"/>
             <p:cNvSpPr/>
             <p:nvPr/>
           </p:nvSpPr>
@@ -2745,7 +2943,7 @@
         </p:sp>
         <p:sp>
           <p:nvSpPr>
-            <p:cNvPr id="31" name="Rectangle 31"/>
+            <p:cNvPr id="30" name="Rectangle 30"/>
             <p:cNvSpPr/>
             <p:nvPr/>
           </p:nvSpPr>
@@ -2767,7 +2965,7 @@
         </p:sp>
         <p:sp>
           <p:nvSpPr>
-            <p:cNvPr id="32" name="Rectangle 32"/>
+            <p:cNvPr id="31" name="Rectangle 31"/>
             <p:cNvSpPr/>
             <p:nvPr/>
           </p:nvSpPr>
@@ -2789,7 +2987,7 @@
         </p:sp>
         <p:sp>
           <p:nvSpPr>
-            <p:cNvPr id="33" name="Rectangle 33"/>
+            <p:cNvPr id="32" name="Rectangle 32"/>
             <p:cNvSpPr/>
             <p:nvPr/>
           </p:nvSpPr>
@@ -2811,7 +3009,7 @@
         </p:sp>
         <p:sp>
           <p:nvSpPr>
-            <p:cNvPr id="34" name="Rectangle 34"/>
+            <p:cNvPr id="33" name="Rectangle 33"/>
             <p:cNvSpPr/>
             <p:nvPr/>
           </p:nvSpPr>
@@ -2833,7 +3031,7 @@
         </p:sp>
         <p:sp>
           <p:nvSpPr>
-            <p:cNvPr id="35" name="Rectangle 35"/>
+            <p:cNvPr id="34" name="Rectangle 34"/>
             <p:cNvSpPr/>
             <p:nvPr/>
           </p:nvSpPr>
@@ -2855,7 +3053,7 @@
         </p:sp>
         <p:sp>
           <p:nvSpPr>
-            <p:cNvPr id="36" name="Rectangle 36"/>
+            <p:cNvPr id="35" name="Rectangle 35"/>
             <p:cNvSpPr/>
             <p:nvPr/>
           </p:nvSpPr>
@@ -2877,7 +3075,7 @@
         </p:sp>
         <p:sp>
           <p:nvSpPr>
-            <p:cNvPr id="37" name="Rectangle 37"/>
+            <p:cNvPr id="36" name="Rectangle 36"/>
             <p:cNvSpPr/>
             <p:nvPr/>
           </p:nvSpPr>
@@ -2899,7 +3097,7 @@
         </p:sp>
         <p:sp>
           <p:nvSpPr>
-            <p:cNvPr id="38" name="Rectangle 38"/>
+            <p:cNvPr id="37" name="Rectangle 37"/>
             <p:cNvSpPr/>
             <p:nvPr/>
           </p:nvSpPr>
@@ -2921,7 +3119,7 @@
         </p:sp>
         <p:sp>
           <p:nvSpPr>
-            <p:cNvPr id="39" name="Rectangle 39"/>
+            <p:cNvPr id="38" name="Rectangle 38"/>
             <p:cNvSpPr/>
             <p:nvPr/>
           </p:nvSpPr>
@@ -2943,7 +3141,7 @@
         </p:sp>
         <p:sp>
           <p:nvSpPr>
-            <p:cNvPr id="40" name="Rectangle 40"/>
+            <p:cNvPr id="39" name="Rectangle 39"/>
             <p:cNvSpPr/>
             <p:nvPr/>
           </p:nvSpPr>
@@ -2965,7 +3163,7 @@
         </p:sp>
         <p:sp>
           <p:nvSpPr>
-            <p:cNvPr id="41" name="Rectangle 41"/>
+            <p:cNvPr id="40" name="Rectangle 40"/>
             <p:cNvSpPr/>
             <p:nvPr/>
           </p:nvSpPr>
@@ -2987,7 +3185,7 @@
         </p:sp>
         <p:sp>
           <p:nvSpPr>
-            <p:cNvPr id="42" name="Freeform 42"/>
+            <p:cNvPr id="41" name="Freeform 41"/>
             <p:cNvSpPr/>
             <p:nvPr/>
           </p:nvSpPr>
@@ -3323,7 +3521,7 @@
         </p:sp>
         <p:sp>
           <p:nvSpPr>
-            <p:cNvPr id="43" name="Freeform 43"/>
+            <p:cNvPr id="42" name="Freeform 42"/>
             <p:cNvSpPr/>
             <p:nvPr/>
           </p:nvSpPr>
@@ -3569,7 +3767,7 @@
         </p:sp>
         <p:sp>
           <p:nvSpPr>
-            <p:cNvPr id="44" name="Freeform 44"/>
+            <p:cNvPr id="43" name="Freeform 43"/>
             <p:cNvSpPr/>
             <p:nvPr/>
           </p:nvSpPr>
@@ -3746,7 +3944,7 @@
         </p:sp>
         <p:sp>
           <p:nvSpPr>
-            <p:cNvPr id="45" name="Freeform 45"/>
+            <p:cNvPr id="44" name="Freeform 44"/>
             <p:cNvSpPr/>
             <p:nvPr/>
           </p:nvSpPr>
@@ -3932,7 +4130,7 @@
         </p:sp>
         <p:sp>
           <p:nvSpPr>
-            <p:cNvPr id="46" name="Freeform 46"/>
+            <p:cNvPr id="45" name="Freeform 45"/>
             <p:cNvSpPr/>
             <p:nvPr/>
           </p:nvSpPr>
@@ -4121,7 +4319,7 @@
         </p:sp>
         <p:sp>
           <p:nvSpPr>
-            <p:cNvPr id="47" name="Freeform 47"/>
+            <p:cNvPr id="46" name="Freeform 46"/>
             <p:cNvSpPr/>
             <p:nvPr/>
           </p:nvSpPr>
@@ -4313,7 +4511,7 @@
         </p:sp>
         <p:sp>
           <p:nvSpPr>
-            <p:cNvPr id="48" name="Freeform 48"/>
+            <p:cNvPr id="47" name="Freeform 47"/>
             <p:cNvSpPr/>
             <p:nvPr/>
           </p:nvSpPr>
@@ -4511,7 +4709,7 @@
         </p:sp>
         <p:sp>
           <p:nvSpPr>
-            <p:cNvPr id="49" name="Freeform 49"/>
+            <p:cNvPr id="48" name="Freeform 48"/>
             <p:cNvSpPr/>
             <p:nvPr/>
           </p:nvSpPr>
@@ -4745,7 +4943,7 @@
         </p:sp>
         <p:sp>
           <p:nvSpPr>
-            <p:cNvPr id="50" name="Freeform 50"/>
+            <p:cNvPr id="49" name="Freeform 49"/>
             <p:cNvSpPr/>
             <p:nvPr/>
           </p:nvSpPr>
@@ -4871,7 +5069,7 @@
         </p:sp>
         <p:sp>
           <p:nvSpPr>
-            <p:cNvPr id="51" name="Freeform 51"/>
+            <p:cNvPr id="50" name="Freeform 50"/>
             <p:cNvSpPr/>
             <p:nvPr/>
           </p:nvSpPr>
@@ -5075,7 +5273,7 @@
         </p:sp>
         <p:sp>
           <p:nvSpPr>
-            <p:cNvPr id="52" name="Freeform 52"/>
+            <p:cNvPr id="51" name="Freeform 51"/>
             <p:cNvSpPr/>
             <p:nvPr/>
           </p:nvSpPr>
@@ -5681,7 +5879,7 @@
         </p:sp>
         <p:sp>
           <p:nvSpPr>
-            <p:cNvPr id="53" name="Freeform 53"/>
+            <p:cNvPr id="52" name="Freeform 52"/>
             <p:cNvSpPr/>
             <p:nvPr/>
           </p:nvSpPr>
@@ -6422,7 +6620,7 @@
         </p:sp>
         <p:sp>
           <p:nvSpPr>
-            <p:cNvPr id="54" name="Freeform 54"/>
+            <p:cNvPr id="53" name="Freeform 53"/>
             <p:cNvSpPr/>
             <p:nvPr/>
           </p:nvSpPr>
@@ -7484,7 +7682,7 @@
         </p:sp>
         <p:sp>
           <p:nvSpPr>
-            <p:cNvPr id="55" name="Freeform 55"/>
+            <p:cNvPr id="54" name="Freeform 54"/>
             <p:cNvSpPr/>
             <p:nvPr/>
           </p:nvSpPr>
@@ -8279,7 +8477,7 @@
         </p:sp>
         <p:sp>
           <p:nvSpPr>
-            <p:cNvPr id="56" name="Freeform 56"/>
+            <p:cNvPr id="55" name="Freeform 55"/>
             <p:cNvSpPr/>
             <p:nvPr/>
           </p:nvSpPr>
@@ -9617,7 +9815,7 @@
         </p:sp>
         <p:sp>
           <p:nvSpPr>
-            <p:cNvPr id="57" name="Freeform 57"/>
+            <p:cNvPr id="56" name="Freeform 56"/>
             <p:cNvSpPr/>
             <p:nvPr/>
           </p:nvSpPr>
@@ -9833,7 +10031,7 @@
         </p:sp>
         <p:sp>
           <p:nvSpPr>
-            <p:cNvPr id="58" name="Freeform 58"/>
+            <p:cNvPr id="57" name="Freeform 57"/>
             <p:cNvSpPr/>
             <p:nvPr/>
           </p:nvSpPr>
@@ -10088,7 +10286,7 @@
         </p:sp>
         <p:sp>
           <p:nvSpPr>
-            <p:cNvPr id="59" name="Freeform 59"/>
+            <p:cNvPr id="58" name="Freeform 58"/>
             <p:cNvSpPr/>
             <p:nvPr/>
           </p:nvSpPr>
@@ -13082,7 +13280,7 @@
         </p:sp>
         <p:sp>
           <p:nvSpPr>
-            <p:cNvPr id="60" name="Freeform 60"/>
+            <p:cNvPr id="59" name="Freeform 59"/>
             <p:cNvSpPr/>
             <p:nvPr/>
           </p:nvSpPr>
@@ -13145,7 +13343,7 @@
         </p:sp>
         <p:sp>
           <p:nvSpPr>
-            <p:cNvPr id="61" name="Freeform 61"/>
+            <p:cNvPr id="60" name="Freeform 60"/>
             <p:cNvSpPr/>
             <p:nvPr/>
           </p:nvSpPr>
@@ -13223,7 +13421,7 @@
         </p:sp>
         <p:sp>
           <p:nvSpPr>
-            <p:cNvPr id="62" name="Freeform 62"/>
+            <p:cNvPr id="61" name="Freeform 61"/>
             <p:cNvSpPr/>
             <p:nvPr/>
           </p:nvSpPr>
@@ -13280,7 +13478,7 @@
         </p:sp>
         <p:sp>
           <p:nvSpPr>
-            <p:cNvPr id="63" name="Freeform 63"/>
+            <p:cNvPr id="62" name="Freeform 62"/>
             <p:cNvSpPr/>
             <p:nvPr/>
           </p:nvSpPr>
@@ -13382,7 +13580,7 @@
         </p:sp>
         <p:sp>
           <p:nvSpPr>
-            <p:cNvPr id="64" name="Freeform 64"/>
+            <p:cNvPr id="63" name="Freeform 63"/>
             <p:cNvSpPr/>
             <p:nvPr/>
           </p:nvSpPr>
@@ -13457,7 +13655,7 @@
         </p:sp>
         <p:sp>
           <p:nvSpPr>
-            <p:cNvPr id="65" name="Freeform 65"/>
+            <p:cNvPr id="64" name="Freeform 64"/>
             <p:cNvSpPr/>
             <p:nvPr/>
           </p:nvSpPr>
@@ -13532,7 +13730,7 @@
         </p:sp>
         <p:sp>
           <p:nvSpPr>
-            <p:cNvPr id="66" name="Freeform 66"/>
+            <p:cNvPr id="65" name="Freeform 65"/>
             <p:cNvSpPr/>
             <p:nvPr/>
           </p:nvSpPr>
@@ -13664,7 +13862,7 @@
         </p:sp>
         <p:sp>
           <p:nvSpPr>
-            <p:cNvPr id="67" name="Freeform 67"/>
+            <p:cNvPr id="66" name="Freeform 66"/>
             <p:cNvSpPr/>
             <p:nvPr/>
           </p:nvSpPr>
@@ -13772,7 +13970,7 @@
         </p:sp>
         <p:sp>
           <p:nvSpPr>
-            <p:cNvPr id="68" name="Freeform 68"/>
+            <p:cNvPr id="67" name="Freeform 67"/>
             <p:cNvSpPr/>
             <p:nvPr/>
           </p:nvSpPr>
@@ -13835,7 +14033,7 @@
         </p:sp>
         <p:sp>
           <p:nvSpPr>
-            <p:cNvPr id="69" name="Freeform 69"/>
+            <p:cNvPr id="68" name="Freeform 68"/>
             <p:cNvSpPr/>
             <p:nvPr/>
           </p:nvSpPr>
@@ -13919,7 +14117,7 @@
         </p:sp>
         <p:sp>
           <p:nvSpPr>
-            <p:cNvPr id="70" name="Freeform 70"/>
+            <p:cNvPr id="69" name="Freeform 69"/>
             <p:cNvSpPr/>
             <p:nvPr/>
           </p:nvSpPr>
@@ -13994,7 +14192,7 @@
         </p:sp>
         <p:sp>
           <p:nvSpPr>
-            <p:cNvPr id="71" name="Freeform 71"/>
+            <p:cNvPr id="70" name="Freeform 70"/>
             <p:cNvSpPr/>
             <p:nvPr/>
           </p:nvSpPr>
@@ -14060,7 +14258,7 @@
         </p:sp>
         <p:sp>
           <p:nvSpPr>
-            <p:cNvPr id="72" name="Freeform 72"/>
+            <p:cNvPr id="71" name="Freeform 71"/>
             <p:cNvSpPr/>
             <p:nvPr/>
           </p:nvSpPr>
@@ -14147,7 +14345,7 @@
         </p:sp>
         <p:sp>
           <p:nvSpPr>
-            <p:cNvPr id="73" name="Freeform 73"/>
+            <p:cNvPr id="72" name="Freeform 72"/>
             <p:cNvSpPr/>
             <p:nvPr/>
           </p:nvSpPr>
@@ -14222,7 +14420,7 @@
         </p:sp>
         <p:sp>
           <p:nvSpPr>
-            <p:cNvPr id="74" name="Freeform 74"/>
+            <p:cNvPr id="73" name="Freeform 73"/>
             <p:cNvSpPr/>
             <p:nvPr/>
           </p:nvSpPr>
@@ -14297,7 +14495,7 @@
         </p:sp>
         <p:sp>
           <p:nvSpPr>
-            <p:cNvPr id="75" name="Freeform 75"/>
+            <p:cNvPr id="74" name="Freeform 74"/>
             <p:cNvSpPr/>
             <p:nvPr/>
           </p:nvSpPr>
@@ -14360,7 +14558,7 @@
         </p:sp>
         <p:sp>
           <p:nvSpPr>
-            <p:cNvPr id="76" name="Freeform 76"/>
+            <p:cNvPr id="75" name="Freeform 75"/>
             <p:cNvSpPr/>
             <p:nvPr/>
           </p:nvSpPr>
@@ -14429,7 +14627,7 @@
         </p:sp>
         <p:sp>
           <p:nvSpPr>
-            <p:cNvPr id="77" name="Freeform 77"/>
+            <p:cNvPr id="76" name="Freeform 76"/>
             <p:cNvSpPr/>
             <p:nvPr/>
           </p:nvSpPr>
@@ -14486,7 +14684,7 @@
         </p:sp>
         <p:sp>
           <p:nvSpPr>
-            <p:cNvPr id="78" name="Freeform 78"/>
+            <p:cNvPr id="77" name="Freeform 77"/>
             <p:cNvSpPr/>
             <p:nvPr/>
           </p:nvSpPr>
@@ -14606,7 +14804,7 @@
         </p:sp>
         <p:sp>
           <p:nvSpPr>
-            <p:cNvPr id="79" name="Freeform 79"/>
+            <p:cNvPr id="78" name="Freeform 78"/>
             <p:cNvSpPr/>
             <p:nvPr/>
           </p:nvSpPr>
@@ -14693,7 +14891,7 @@
         </p:sp>
         <p:sp>
           <p:nvSpPr>
-            <p:cNvPr id="80" name="Freeform 80"/>
+            <p:cNvPr id="79" name="Freeform 79"/>
             <p:cNvSpPr/>
             <p:nvPr/>
           </p:nvSpPr>
@@ -14780,7 +14978,7 @@
         </p:sp>
         <p:sp>
           <p:nvSpPr>
-            <p:cNvPr id="81" name="Freeform 81"/>
+            <p:cNvPr id="80" name="Freeform 80"/>
             <p:cNvSpPr/>
             <p:nvPr/>
           </p:nvSpPr>
@@ -14876,7 +15074,7 @@
         </p:sp>
         <p:sp>
           <p:nvSpPr>
-            <p:cNvPr id="82" name="Freeform 82"/>
+            <p:cNvPr id="81" name="Freeform 81"/>
             <p:cNvSpPr/>
             <p:nvPr/>
           </p:nvSpPr>
@@ -14945,7 +15143,7 @@
         </p:sp>
         <p:sp>
           <p:nvSpPr>
-            <p:cNvPr id="83" name="Freeform 83"/>
+            <p:cNvPr id="82" name="Freeform 82"/>
             <p:cNvSpPr/>
             <p:nvPr/>
           </p:nvSpPr>
@@ -15014,7 +15212,7 @@
         </p:sp>
         <p:sp>
           <p:nvSpPr>
-            <p:cNvPr id="84" name="Freeform 84"/>
+            <p:cNvPr id="83" name="Freeform 83"/>
             <p:cNvSpPr/>
             <p:nvPr/>
           </p:nvSpPr>
@@ -15077,7 +15275,7 @@
         </p:sp>
         <p:sp>
           <p:nvSpPr>
-            <p:cNvPr id="85" name="Freeform 85"/>
+            <p:cNvPr id="84" name="Freeform 84"/>
             <p:cNvSpPr/>
             <p:nvPr/>
           </p:nvSpPr>
@@ -15191,7 +15389,7 @@
         </p:sp>
         <p:sp>
           <p:nvSpPr>
-            <p:cNvPr id="86" name="Freeform 86"/>
+            <p:cNvPr id="85" name="Freeform 85"/>
             <p:cNvSpPr/>
             <p:nvPr/>
           </p:nvSpPr>
@@ -15275,7 +15473,7 @@
         </p:sp>
         <p:sp>
           <p:nvSpPr>
-            <p:cNvPr id="87" name="Freeform 87"/>
+            <p:cNvPr id="86" name="Freeform 86"/>
             <p:cNvSpPr/>
             <p:nvPr/>
           </p:nvSpPr>
@@ -15368,7 +15566,7 @@
         </p:sp>
         <p:sp>
           <p:nvSpPr>
-            <p:cNvPr id="88" name="Freeform 88"/>
+            <p:cNvPr id="87" name="Freeform 87"/>
             <p:cNvSpPr/>
             <p:nvPr/>
           </p:nvSpPr>
@@ -15545,7 +15743,7 @@
         </p:sp>
         <p:sp>
           <p:nvSpPr>
-            <p:cNvPr id="89" name="Freeform 89"/>
+            <p:cNvPr id="88" name="Freeform 88"/>
             <p:cNvSpPr/>
             <p:nvPr/>
           </p:nvSpPr>
@@ -15641,7 +15839,7 @@
         </p:sp>
         <p:sp>
           <p:nvSpPr>
-            <p:cNvPr id="90" name="Freeform 90"/>
+            <p:cNvPr id="89" name="Freeform 89"/>
             <p:cNvSpPr/>
             <p:nvPr/>
           </p:nvSpPr>
@@ -15716,7 +15914,7 @@
         </p:sp>
         <p:sp>
           <p:nvSpPr>
-            <p:cNvPr id="91" name="Freeform 91"/>
+            <p:cNvPr id="90" name="Freeform 90"/>
             <p:cNvSpPr/>
             <p:nvPr/>
           </p:nvSpPr>
@@ -15779,7 +15977,7 @@
         </p:sp>
         <p:sp>
           <p:nvSpPr>
-            <p:cNvPr id="92" name="Freeform 92"/>
+            <p:cNvPr id="91" name="Freeform 91"/>
             <p:cNvSpPr/>
             <p:nvPr/>
           </p:nvSpPr>
@@ -15851,7 +16049,7 @@
         </p:sp>
         <p:sp>
           <p:nvSpPr>
-            <p:cNvPr id="93" name="Freeform 93"/>
+            <p:cNvPr id="92" name="Freeform 92"/>
             <p:cNvSpPr/>
             <p:nvPr/>
           </p:nvSpPr>
@@ -15923,7 +16121,7 @@
         </p:sp>
         <p:sp>
           <p:nvSpPr>
-            <p:cNvPr id="94" name="Freeform 94"/>
+            <p:cNvPr id="93" name="Freeform 93"/>
             <p:cNvSpPr/>
             <p:nvPr/>
           </p:nvSpPr>
@@ -16025,7 +16223,7 @@
         </p:sp>
         <p:sp>
           <p:nvSpPr>
-            <p:cNvPr id="95" name="Freeform 95"/>
+            <p:cNvPr id="94" name="Freeform 94"/>
             <p:cNvSpPr/>
             <p:nvPr/>
           </p:nvSpPr>
@@ -16151,7 +16349,7 @@
         </p:sp>
         <p:sp>
           <p:nvSpPr>
-            <p:cNvPr id="96" name="Freeform 96"/>
+            <p:cNvPr id="95" name="Freeform 95"/>
             <p:cNvSpPr/>
             <p:nvPr/>
           </p:nvSpPr>
@@ -16220,7 +16418,7 @@
         </p:sp>
         <p:sp>
           <p:nvSpPr>
-            <p:cNvPr id="97" name="Freeform 97"/>
+            <p:cNvPr id="96" name="Freeform 96"/>
             <p:cNvSpPr/>
             <p:nvPr/>
           </p:nvSpPr>
@@ -16301,7 +16499,7 @@
         </p:sp>
         <p:sp>
           <p:nvSpPr>
-            <p:cNvPr id="98" name="Freeform 98"/>
+            <p:cNvPr id="97" name="Freeform 97"/>
             <p:cNvSpPr/>
             <p:nvPr/>
           </p:nvSpPr>
@@ -16370,7 +16568,7 @@
         </p:sp>
         <p:sp>
           <p:nvSpPr>
-            <p:cNvPr id="99" name="Freeform 99"/>
+            <p:cNvPr id="98" name="Freeform 98"/>
             <p:cNvSpPr/>
             <p:nvPr/>
           </p:nvSpPr>
@@ -16433,7 +16631,7 @@
         </p:sp>
         <p:sp>
           <p:nvSpPr>
-            <p:cNvPr id="100" name="Freeform 100"/>
+            <p:cNvPr id="99" name="Freeform 99"/>
             <p:cNvSpPr/>
             <p:nvPr/>
           </p:nvSpPr>
@@ -16520,7 +16718,7 @@
         </p:sp>
         <p:sp>
           <p:nvSpPr>
-            <p:cNvPr id="101" name="Freeform 101"/>
+            <p:cNvPr id="100" name="Freeform 100"/>
             <p:cNvSpPr/>
             <p:nvPr/>
           </p:nvSpPr>
@@ -16589,7 +16787,7 @@
         </p:sp>
         <p:sp>
           <p:nvSpPr>
-            <p:cNvPr id="102" name="Freeform 102"/>
+            <p:cNvPr id="101" name="Freeform 101"/>
             <p:cNvSpPr/>
             <p:nvPr/>
           </p:nvSpPr>
@@ -16676,7 +16874,7 @@
         </p:sp>
         <p:sp>
           <p:nvSpPr>
-            <p:cNvPr id="103" name="Freeform 103"/>
+            <p:cNvPr id="102" name="Freeform 102"/>
             <p:cNvSpPr/>
             <p:nvPr/>
           </p:nvSpPr>
@@ -16751,7 +16949,7 @@
         </p:sp>
         <p:sp>
           <p:nvSpPr>
-            <p:cNvPr id="104" name="Freeform 104"/>
+            <p:cNvPr id="103" name="Freeform 103"/>
             <p:cNvSpPr/>
             <p:nvPr/>
           </p:nvSpPr>
@@ -16829,7 +17027,7 @@
         </p:sp>
         <p:sp>
           <p:nvSpPr>
-            <p:cNvPr id="105" name="Freeform 105"/>
+            <p:cNvPr id="104" name="Freeform 104"/>
             <p:cNvSpPr/>
             <p:nvPr/>
           </p:nvSpPr>
@@ -16901,7 +17099,7 @@
         </p:sp>
         <p:sp>
           <p:nvSpPr>
-            <p:cNvPr id="106" name="Freeform 106"/>
+            <p:cNvPr id="105" name="Freeform 105"/>
             <p:cNvSpPr/>
             <p:nvPr/>
           </p:nvSpPr>
@@ -16988,7 +17186,7 @@
         </p:sp>
         <p:sp>
           <p:nvSpPr>
-            <p:cNvPr id="107" name="Freeform 107"/>
+            <p:cNvPr id="106" name="Freeform 106"/>
             <p:cNvSpPr/>
             <p:nvPr/>
           </p:nvSpPr>
@@ -17063,7 +17261,7 @@
         </p:sp>
         <p:sp>
           <p:nvSpPr>
-            <p:cNvPr id="108" name="Freeform 108"/>
+            <p:cNvPr id="107" name="Freeform 107"/>
             <p:cNvSpPr/>
             <p:nvPr/>
           </p:nvSpPr>
@@ -17123,7 +17321,7 @@
         </p:sp>
         <p:sp>
           <p:nvSpPr>
-            <p:cNvPr id="109" name="Freeform 109"/>
+            <p:cNvPr id="108" name="Freeform 108"/>
             <p:cNvSpPr/>
             <p:nvPr/>
           </p:nvSpPr>
@@ -17195,7 +17393,7 @@
         </p:sp>
         <p:sp>
           <p:nvSpPr>
-            <p:cNvPr id="110" name="Freeform 110"/>
+            <p:cNvPr id="109" name="Freeform 109"/>
             <p:cNvSpPr/>
             <p:nvPr/>
           </p:nvSpPr>
@@ -17294,7 +17492,7 @@
         </p:sp>
         <p:sp>
           <p:nvSpPr>
-            <p:cNvPr id="111" name="Freeform 111"/>
+            <p:cNvPr id="110" name="Freeform 110"/>
             <p:cNvSpPr/>
             <p:nvPr/>
           </p:nvSpPr>
@@ -17387,7 +17585,7 @@
         </p:sp>
         <p:sp>
           <p:nvSpPr>
-            <p:cNvPr id="112" name="Freeform 112"/>
+            <p:cNvPr id="111" name="Freeform 111"/>
             <p:cNvSpPr/>
             <p:nvPr/>
           </p:nvSpPr>
@@ -17465,7 +17663,7 @@
         </p:sp>
         <p:sp>
           <p:nvSpPr>
-            <p:cNvPr id="113" name="Freeform 113"/>
+            <p:cNvPr id="112" name="Freeform 112"/>
             <p:cNvSpPr/>
             <p:nvPr/>
           </p:nvSpPr>
@@ -17525,7 +17723,7 @@
         </p:sp>
         <p:sp>
           <p:nvSpPr>
-            <p:cNvPr id="114" name="Freeform 114"/>
+            <p:cNvPr id="113" name="Freeform 113"/>
             <p:cNvSpPr/>
             <p:nvPr/>
           </p:nvSpPr>
@@ -17642,7 +17840,7 @@
         </p:sp>
         <p:sp>
           <p:nvSpPr>
-            <p:cNvPr id="115" name="Freeform 115"/>
+            <p:cNvPr id="114" name="Freeform 114"/>
             <p:cNvSpPr/>
             <p:nvPr/>
           </p:nvSpPr>
@@ -17738,7 +17936,7 @@
         </p:sp>
         <p:sp>
           <p:nvSpPr>
-            <p:cNvPr id="116" name="Freeform 116"/>
+            <p:cNvPr id="115" name="Freeform 115"/>
             <p:cNvSpPr/>
             <p:nvPr/>
           </p:nvSpPr>
@@ -17798,7 +17996,7 @@
         </p:sp>
         <p:sp>
           <p:nvSpPr>
-            <p:cNvPr id="117" name="Freeform 117"/>
+            <p:cNvPr id="116" name="Freeform 116"/>
             <p:cNvSpPr/>
             <p:nvPr/>
           </p:nvSpPr>
@@ -17876,7 +18074,7 @@
         </p:sp>
         <p:sp>
           <p:nvSpPr>
-            <p:cNvPr id="118" name="Freeform 118"/>
+            <p:cNvPr id="117" name="Freeform 117"/>
             <p:cNvSpPr/>
             <p:nvPr/>
           </p:nvSpPr>
@@ -17942,7 +18140,7 @@
         </p:sp>
         <p:sp>
           <p:nvSpPr>
-            <p:cNvPr id="119" name="Freeform 119"/>
+            <p:cNvPr id="118" name="Freeform 118"/>
             <p:cNvSpPr/>
             <p:nvPr/>
           </p:nvSpPr>
@@ -18014,7 +18212,7 @@
         </p:sp>
         <p:sp>
           <p:nvSpPr>
-            <p:cNvPr id="120" name="Freeform 120"/>
+            <p:cNvPr id="119" name="Freeform 119"/>
             <p:cNvSpPr/>
             <p:nvPr/>
           </p:nvSpPr>
@@ -18107,7 +18305,7 @@
         </p:sp>
         <p:sp>
           <p:nvSpPr>
-            <p:cNvPr id="121" name="Freeform 121"/>
+            <p:cNvPr id="120" name="Freeform 120"/>
             <p:cNvSpPr/>
             <p:nvPr/>
           </p:nvSpPr>
@@ -18182,7 +18380,7 @@
         </p:sp>
         <p:sp>
           <p:nvSpPr>
-            <p:cNvPr id="122" name="Freeform 122"/>
+            <p:cNvPr id="121" name="Freeform 121"/>
             <p:cNvSpPr/>
             <p:nvPr/>
           </p:nvSpPr>
@@ -18242,7 +18440,7 @@
         </p:sp>
         <p:sp>
           <p:nvSpPr>
-            <p:cNvPr id="123" name="Freeform 123"/>
+            <p:cNvPr id="122" name="Freeform 122"/>
             <p:cNvSpPr/>
             <p:nvPr/>
           </p:nvSpPr>
@@ -18338,7 +18536,7 @@
         </p:sp>
         <p:sp>
           <p:nvSpPr>
-            <p:cNvPr id="124" name="Freeform 124"/>
+            <p:cNvPr id="123" name="Freeform 123"/>
             <p:cNvSpPr/>
             <p:nvPr/>
           </p:nvSpPr>
@@ -18401,7 +18599,7 @@
         </p:sp>
         <p:sp>
           <p:nvSpPr>
-            <p:cNvPr id="125" name="Freeform 125"/>
+            <p:cNvPr id="124" name="Freeform 124"/>
             <p:cNvSpPr/>
             <p:nvPr/>
           </p:nvSpPr>
@@ -18464,7 +18662,7 @@
         </p:sp>
         <p:sp>
           <p:nvSpPr>
-            <p:cNvPr id="126" name="Freeform 126"/>
+            <p:cNvPr id="125" name="Freeform 125"/>
             <p:cNvSpPr/>
             <p:nvPr/>
           </p:nvSpPr>
@@ -18530,7 +18728,7 @@
         </p:sp>
         <p:sp>
           <p:nvSpPr>
-            <p:cNvPr id="127" name="Freeform 127"/>
+            <p:cNvPr id="126" name="Freeform 126"/>
             <p:cNvSpPr/>
             <p:nvPr/>
           </p:nvSpPr>
@@ -18596,7 +18794,7 @@
         </p:sp>
         <p:sp>
           <p:nvSpPr>
-            <p:cNvPr id="128" name="Freeform 128"/>
+            <p:cNvPr id="127" name="Freeform 127"/>
             <p:cNvSpPr/>
             <p:nvPr/>
           </p:nvSpPr>
@@ -18737,7 +18935,7 @@
         </p:sp>
         <p:sp>
           <p:nvSpPr>
-            <p:cNvPr id="129" name="Freeform 129"/>
+            <p:cNvPr id="128" name="Freeform 128"/>
             <p:cNvSpPr/>
             <p:nvPr/>
           </p:nvSpPr>
@@ -18797,7 +18995,7 @@
         </p:sp>
         <p:sp>
           <p:nvSpPr>
-            <p:cNvPr id="130" name="Freeform 130"/>
+            <p:cNvPr id="129" name="Freeform 129"/>
             <p:cNvSpPr/>
             <p:nvPr/>
           </p:nvSpPr>
@@ -18896,7 +19094,7 @@
         </p:sp>
         <p:sp>
           <p:nvSpPr>
-            <p:cNvPr id="131" name="Freeform 131"/>
+            <p:cNvPr id="130" name="Freeform 130"/>
             <p:cNvSpPr/>
             <p:nvPr/>
           </p:nvSpPr>
@@ -18947,7 +19145,7 @@
         </p:sp>
         <p:sp>
           <p:nvSpPr>
-            <p:cNvPr id="132" name="Freeform 132"/>
+            <p:cNvPr id="131" name="Freeform 131"/>
             <p:cNvSpPr/>
             <p:nvPr/>
           </p:nvSpPr>
@@ -19010,7 +19208,7 @@
         </p:sp>
         <p:sp>
           <p:nvSpPr>
-            <p:cNvPr id="133" name="Freeform 133"/>
+            <p:cNvPr id="132" name="Freeform 132"/>
             <p:cNvSpPr/>
             <p:nvPr/>
           </p:nvSpPr>
@@ -19088,7 +19286,7 @@
         </p:sp>
         <p:sp>
           <p:nvSpPr>
-            <p:cNvPr id="134" name="Freeform 134"/>
+            <p:cNvPr id="133" name="Freeform 133"/>
             <p:cNvSpPr/>
             <p:nvPr/>
           </p:nvSpPr>
@@ -19157,7 +19355,7 @@
         </p:sp>
         <p:sp>
           <p:nvSpPr>
-            <p:cNvPr id="135" name="Freeform 135"/>
+            <p:cNvPr id="134" name="Freeform 134"/>
             <p:cNvSpPr/>
             <p:nvPr/>
           </p:nvSpPr>
@@ -19229,7 +19427,7 @@
         </p:sp>
         <p:sp>
           <p:nvSpPr>
-            <p:cNvPr id="136" name="Freeform 136"/>
+            <p:cNvPr id="135" name="Freeform 135"/>
             <p:cNvSpPr/>
             <p:nvPr/>
           </p:nvSpPr>
@@ -19289,7 +19487,7 @@
         </p:sp>
         <p:sp>
           <p:nvSpPr>
-            <p:cNvPr id="137" name="Freeform 137"/>
+            <p:cNvPr id="136" name="Freeform 136"/>
             <p:cNvSpPr/>
             <p:nvPr/>
           </p:nvSpPr>
@@ -19364,7 +19562,7 @@
         </p:sp>
         <p:sp>
           <p:nvSpPr>
-            <p:cNvPr id="138" name="Freeform 138"/>
+            <p:cNvPr id="137" name="Freeform 137"/>
             <p:cNvSpPr/>
             <p:nvPr/>
           </p:nvSpPr>
@@ -19433,7 +19631,7 @@
         </p:sp>
         <p:sp>
           <p:nvSpPr>
-            <p:cNvPr id="139" name="Freeform 139"/>
+            <p:cNvPr id="138" name="Freeform 138"/>
             <p:cNvSpPr/>
             <p:nvPr/>
           </p:nvSpPr>
@@ -19499,7 +19697,7 @@
         </p:sp>
         <p:sp>
           <p:nvSpPr>
-            <p:cNvPr id="140" name="Freeform 140"/>
+            <p:cNvPr id="139" name="Freeform 139"/>
             <p:cNvSpPr/>
             <p:nvPr/>
           </p:nvSpPr>
@@ -19568,7 +19766,7 @@
         </p:sp>
         <p:sp>
           <p:nvSpPr>
-            <p:cNvPr id="141" name="Freeform 141"/>
+            <p:cNvPr id="140" name="Freeform 140"/>
             <p:cNvSpPr/>
             <p:nvPr/>
           </p:nvSpPr>
@@ -19628,7 +19826,7 @@
         </p:sp>
         <p:sp>
           <p:nvSpPr>
-            <p:cNvPr id="142" name="Freeform 142"/>
+            <p:cNvPr id="141" name="Freeform 141"/>
             <p:cNvSpPr/>
             <p:nvPr/>
           </p:nvSpPr>
@@ -19697,7 +19895,7 @@
         </p:sp>
         <p:sp>
           <p:nvSpPr>
-            <p:cNvPr id="143" name="Freeform 143"/>
+            <p:cNvPr id="142" name="Freeform 142"/>
             <p:cNvSpPr/>
             <p:nvPr/>
           </p:nvSpPr>
@@ -19757,7 +19955,7 @@
         </p:sp>
         <p:sp>
           <p:nvSpPr>
-            <p:cNvPr id="144" name="Freeform 144"/>
+            <p:cNvPr id="143" name="Freeform 143"/>
             <p:cNvSpPr/>
             <p:nvPr/>
           </p:nvSpPr>
@@ -19823,7 +20021,7 @@
         </p:sp>
         <p:sp>
           <p:nvSpPr>
-            <p:cNvPr id="145" name="Freeform 145"/>
+            <p:cNvPr id="144" name="Freeform 144"/>
             <p:cNvSpPr/>
             <p:nvPr/>
           </p:nvSpPr>
@@ -19883,7 +20081,7 @@
         </p:sp>
         <p:sp>
           <p:nvSpPr>
-            <p:cNvPr id="146" name="Freeform 146"/>
+            <p:cNvPr id="145" name="Freeform 145"/>
             <p:cNvSpPr/>
             <p:nvPr/>
           </p:nvSpPr>
@@ -19921,7 +20119,7 @@
         </p:sp>
         <p:sp>
           <p:nvSpPr>
-            <p:cNvPr id="147" name="Ellipse 147"/>
+            <p:cNvPr id="146" name="Ellipse 146"/>
             <p:cNvSpPr/>
             <p:nvPr/>
           </p:nvSpPr>
@@ -19943,7 +20141,7 @@
         </p:sp>
         <p:sp>
           <p:nvSpPr>
-            <p:cNvPr id="148" name="Ellipse 148"/>
+            <p:cNvPr id="147" name="Ellipse 147"/>
             <p:cNvSpPr/>
             <p:nvPr/>
           </p:nvSpPr>
@@ -19965,7 +20163,7 @@
         </p:sp>
         <p:sp>
           <p:nvSpPr>
-            <p:cNvPr id="149" name="TextBox 149"/>
+            <p:cNvPr id="148" name="TextBox 148"/>
             <p:cNvSpPr txBox="1"/>
             <p:nvPr/>
           </p:nvSpPr>
@@ -20005,7 +20203,7 @@
         </p:sp>
         <p:sp>
           <p:nvSpPr>
-            <p:cNvPr id="150" name="Ellipse 150"/>
+            <p:cNvPr id="149" name="Ellipse 149"/>
             <p:cNvSpPr/>
             <p:nvPr/>
           </p:nvSpPr>
@@ -20027,7 +20225,7 @@
         </p:sp>
         <p:sp>
           <p:nvSpPr>
-            <p:cNvPr id="151" name="Ellipse 151"/>
+            <p:cNvPr id="150" name="Ellipse 150"/>
             <p:cNvSpPr/>
             <p:nvPr/>
           </p:nvSpPr>
@@ -20049,7 +20247,7 @@
         </p:sp>
         <p:sp>
           <p:nvSpPr>
-            <p:cNvPr id="152" name="TextBox 152"/>
+            <p:cNvPr id="151" name="TextBox 151"/>
             <p:cNvSpPr txBox="1"/>
             <p:nvPr/>
           </p:nvSpPr>
@@ -20135,7 +20333,7 @@
       </p:grpSpPr>
       <p:grpSp>
         <p:nvGrpSpPr>
-          <p:cNvPr id="12" name="header"/>
+          <p:cNvPr id="11" name="header"/>
           <p:cNvGrpSpPr/>
           <p:nvPr/>
         </p:nvGrpSpPr>
@@ -20195,7 +20393,7 @@
           </p:nvSpPr>
           <p:spPr>
             <a:xfrm>
-              <a:off x="10420350" y="438150"/>
+              <a:off x="10591800" y="438150"/>
               <a:ext cx="114300" cy="114300"/>
             </a:xfrm>
             <a:prstGeom prst="rect">
@@ -20219,7 +20417,7 @@
           </p:nvSpPr>
           <p:spPr>
             <a:xfrm>
-              <a:off x="10591800" y="438150"/>
+              <a:off x="10763250" y="438150"/>
               <a:ext cx="114300" cy="114300"/>
             </a:xfrm>
             <a:prstGeom prst="rect">
@@ -20243,7 +20441,7 @@
           </p:nvSpPr>
           <p:spPr>
             <a:xfrm>
-              <a:off x="10763250" y="438150"/>
+              <a:off x="10934700" y="438150"/>
               <a:ext cx="114300" cy="114300"/>
             </a:xfrm>
             <a:prstGeom prst="rect">
@@ -20267,7 +20465,7 @@
           </p:nvSpPr>
           <p:spPr>
             <a:xfrm>
-              <a:off x="10934700" y="438150"/>
+              <a:off x="11106150" y="438150"/>
               <a:ext cx="114300" cy="114300"/>
             </a:xfrm>
             <a:prstGeom prst="rect">
@@ -20291,7 +20489,7 @@
           </p:nvSpPr>
           <p:spPr>
             <a:xfrm>
-              <a:off x="11106150" y="438150"/>
+              <a:off x="11277600" y="438150"/>
               <a:ext cx="114300" cy="114300"/>
             </a:xfrm>
             <a:prstGeom prst="rect">
@@ -20315,7 +20513,7 @@
           </p:nvSpPr>
           <p:spPr>
             <a:xfrm>
-              <a:off x="11277600" y="438150"/>
+              <a:off x="11449050" y="438150"/>
               <a:ext cx="114300" cy="114300"/>
             </a:xfrm>
             <a:prstGeom prst="rect">
@@ -20339,7 +20537,7 @@
           </p:nvSpPr>
           <p:spPr>
             <a:xfrm>
-              <a:off x="11449050" y="438150"/>
+              <a:off x="11620500" y="438150"/>
               <a:ext cx="114300" cy="114300"/>
             </a:xfrm>
             <a:prstGeom prst="rect">
@@ -20363,30 +20561,6 @@
           </p:nvSpPr>
           <p:spPr>
             <a:xfrm>
-              <a:off x="11620500" y="438150"/>
-              <a:ext cx="114300" cy="114300"/>
-            </a:xfrm>
-            <a:prstGeom prst="rect">
-              <a:avLst/>
-            </a:prstGeom>
-            <a:solidFill>
-              <a:srgbClr val="FFFFFF"/>
-            </a:solidFill>
-            <a:ln w="19050">
-              <a:solidFill>
-                <a:srgbClr val="0A1138"/>
-              </a:solidFill>
-            </a:ln>
-          </p:spPr>
-        </p:sp>
-        <p:sp>
-          <p:nvSpPr>
-            <p:cNvPr id="11" name="Rectangle 11"/>
-            <p:cNvSpPr/>
-            <p:nvPr/>
-          </p:nvSpPr>
-          <p:spPr>
-            <a:xfrm>
               <a:off x="457200" y="857250"/>
               <a:ext cx="11277600" cy="28575"/>
             </a:xfrm>
@@ -20404,7 +20578,7 @@
       </p:grpSp>
       <p:grpSp>
         <p:nvGrpSpPr>
-          <p:cNvPr id="21" name="doughnut"/>
+          <p:cNvPr id="20" name="doughnut"/>
           <p:cNvGrpSpPr/>
           <p:nvPr/>
         </p:nvGrpSpPr>
@@ -20418,7 +20592,7 @@
         </p:grpSpPr>
         <p:sp>
           <p:nvSpPr>
-            <p:cNvPr id="13" name="Freeform 13"/>
+            <p:cNvPr id="12" name="Freeform 12"/>
             <p:cNvSpPr/>
             <p:nvPr/>
           </p:nvSpPr>
@@ -20485,7 +20659,7 @@
         </p:sp>
         <p:sp>
           <p:nvSpPr>
-            <p:cNvPr id="14" name="Freeform 14"/>
+            <p:cNvPr id="13" name="Freeform 13"/>
             <p:cNvSpPr/>
             <p:nvPr/>
           </p:nvSpPr>
@@ -20532,7 +20706,7 @@
         </p:sp>
         <p:sp>
           <p:nvSpPr>
-            <p:cNvPr id="15" name="Freeform 15"/>
+            <p:cNvPr id="14" name="Freeform 14"/>
             <p:cNvSpPr/>
             <p:nvPr/>
           </p:nvSpPr>
@@ -20579,7 +20753,7 @@
         </p:sp>
         <p:sp>
           <p:nvSpPr>
-            <p:cNvPr id="16" name="Freeform 16"/>
+            <p:cNvPr id="15" name="Freeform 15"/>
             <p:cNvSpPr/>
             <p:nvPr/>
           </p:nvSpPr>
@@ -20626,7 +20800,7 @@
         </p:sp>
         <p:sp>
           <p:nvSpPr>
-            <p:cNvPr id="17" name="Freeform 17"/>
+            <p:cNvPr id="16" name="Freeform 16"/>
             <p:cNvSpPr/>
             <p:nvPr/>
           </p:nvSpPr>
@@ -20673,7 +20847,7 @@
         </p:sp>
         <p:sp>
           <p:nvSpPr>
-            <p:cNvPr id="18" name="Freeform 18"/>
+            <p:cNvPr id="17" name="Freeform 17"/>
             <p:cNvSpPr/>
             <p:nvPr/>
           </p:nvSpPr>
@@ -20720,7 +20894,7 @@
         </p:sp>
         <p:sp>
           <p:nvSpPr>
-            <p:cNvPr id="19" name="TextBox 19"/>
+            <p:cNvPr id="18" name="TextBox 18"/>
             <p:cNvSpPr txBox="1"/>
             <p:nvPr/>
           </p:nvSpPr>
@@ -20760,7 +20934,7 @@
         </p:sp>
         <p:sp>
           <p:nvSpPr>
-            <p:cNvPr id="20" name="TextBox 20"/>
+            <p:cNvPr id="19" name="TextBox 19"/>
             <p:cNvSpPr txBox="1"/>
             <p:nvPr/>
           </p:nvSpPr>
@@ -20801,7 +20975,7 @@
       </p:grpSp>
       <p:grpSp>
         <p:nvGrpSpPr>
-          <p:cNvPr id="23" name="divider"/>
+          <p:cNvPr id="22" name="divider"/>
           <p:cNvGrpSpPr/>
           <p:nvPr/>
         </p:nvGrpSpPr>
@@ -20815,7 +20989,7 @@
         </p:grpSpPr>
         <p:sp>
           <p:nvSpPr>
-            <p:cNvPr id="22" name="Rectangle 22"/>
+            <p:cNvPr id="21" name="Rectangle 21"/>
             <p:cNvSpPr/>
             <p:nvPr/>
           </p:nvSpPr>
@@ -20838,7 +21012,7 @@
       </p:grpSp>
       <p:grpSp>
         <p:nvGrpSpPr>
-          <p:cNvPr id="48" name="legend"/>
+          <p:cNvPr id="47" name="legend"/>
           <p:cNvGrpSpPr/>
           <p:nvPr/>
         </p:nvGrpSpPr>
@@ -20852,7 +21026,7 @@
         </p:grpSpPr>
         <p:sp>
           <p:nvSpPr>
-            <p:cNvPr id="24" name="Rectangle 24"/>
+            <p:cNvPr id="23" name="Rectangle 23"/>
             <p:cNvSpPr/>
             <p:nvPr/>
           </p:nvSpPr>
@@ -20874,7 +21048,7 @@
         </p:sp>
         <p:sp>
           <p:nvSpPr>
-            <p:cNvPr id="25" name="TextBox 25"/>
+            <p:cNvPr id="24" name="TextBox 24"/>
             <p:cNvSpPr txBox="1"/>
             <p:nvPr/>
           </p:nvSpPr>
@@ -20914,7 +21088,7 @@
         </p:sp>
         <p:sp>
           <p:nvSpPr>
-            <p:cNvPr id="26" name="TextBox 26"/>
+            <p:cNvPr id="25" name="TextBox 25"/>
             <p:cNvSpPr txBox="1"/>
             <p:nvPr/>
           </p:nvSpPr>
@@ -20954,7 +21128,7 @@
         </p:sp>
         <p:sp>
           <p:nvSpPr>
-            <p:cNvPr id="27" name="TextBox 27"/>
+            <p:cNvPr id="26" name="TextBox 26"/>
             <p:cNvSpPr txBox="1"/>
             <p:nvPr/>
           </p:nvSpPr>
@@ -20994,7 +21168,7 @@
         </p:sp>
         <p:sp>
           <p:nvSpPr>
-            <p:cNvPr id="28" name="Rectangle 28"/>
+            <p:cNvPr id="27" name="Rectangle 27"/>
             <p:cNvSpPr/>
             <p:nvPr/>
           </p:nvSpPr>
@@ -21016,7 +21190,7 @@
         </p:sp>
         <p:sp>
           <p:nvSpPr>
-            <p:cNvPr id="29" name="TextBox 29"/>
+            <p:cNvPr id="28" name="TextBox 28"/>
             <p:cNvSpPr txBox="1"/>
             <p:nvPr/>
           </p:nvSpPr>
@@ -21056,7 +21230,7 @@
         </p:sp>
         <p:sp>
           <p:nvSpPr>
-            <p:cNvPr id="30" name="TextBox 30"/>
+            <p:cNvPr id="29" name="TextBox 29"/>
             <p:cNvSpPr txBox="1"/>
             <p:nvPr/>
           </p:nvSpPr>
@@ -21096,7 +21270,7 @@
         </p:sp>
         <p:sp>
           <p:nvSpPr>
-            <p:cNvPr id="31" name="TextBox 31"/>
+            <p:cNvPr id="30" name="TextBox 30"/>
             <p:cNvSpPr txBox="1"/>
             <p:nvPr/>
           </p:nvSpPr>
@@ -21136,7 +21310,7 @@
         </p:sp>
         <p:sp>
           <p:nvSpPr>
-            <p:cNvPr id="32" name="Rectangle 32"/>
+            <p:cNvPr id="31" name="Rectangle 31"/>
             <p:cNvSpPr/>
             <p:nvPr/>
           </p:nvSpPr>
@@ -21158,7 +21332,7 @@
         </p:sp>
         <p:sp>
           <p:nvSpPr>
-            <p:cNvPr id="33" name="TextBox 33"/>
+            <p:cNvPr id="32" name="TextBox 32"/>
             <p:cNvSpPr txBox="1"/>
             <p:nvPr/>
           </p:nvSpPr>
@@ -21198,7 +21372,7 @@
         </p:sp>
         <p:sp>
           <p:nvSpPr>
-            <p:cNvPr id="34" name="TextBox 34"/>
+            <p:cNvPr id="33" name="TextBox 33"/>
             <p:cNvSpPr txBox="1"/>
             <p:nvPr/>
           </p:nvSpPr>
@@ -21238,7 +21412,7 @@
         </p:sp>
         <p:sp>
           <p:nvSpPr>
-            <p:cNvPr id="35" name="TextBox 35"/>
+            <p:cNvPr id="34" name="TextBox 34"/>
             <p:cNvSpPr txBox="1"/>
             <p:nvPr/>
           </p:nvSpPr>
@@ -21278,7 +21452,7 @@
         </p:sp>
         <p:sp>
           <p:nvSpPr>
-            <p:cNvPr id="36" name="Rectangle 36"/>
+            <p:cNvPr id="35" name="Rectangle 35"/>
             <p:cNvSpPr/>
             <p:nvPr/>
           </p:nvSpPr>
@@ -21300,7 +21474,7 @@
         </p:sp>
         <p:sp>
           <p:nvSpPr>
-            <p:cNvPr id="37" name="TextBox 37"/>
+            <p:cNvPr id="36" name="TextBox 36"/>
             <p:cNvSpPr txBox="1"/>
             <p:nvPr/>
           </p:nvSpPr>
@@ -21340,7 +21514,7 @@
         </p:sp>
         <p:sp>
           <p:nvSpPr>
-            <p:cNvPr id="38" name="TextBox 38"/>
+            <p:cNvPr id="37" name="TextBox 37"/>
             <p:cNvSpPr txBox="1"/>
             <p:nvPr/>
           </p:nvSpPr>
@@ -21380,7 +21554,7 @@
         </p:sp>
         <p:sp>
           <p:nvSpPr>
-            <p:cNvPr id="39" name="TextBox 39"/>
+            <p:cNvPr id="38" name="TextBox 38"/>
             <p:cNvSpPr txBox="1"/>
             <p:nvPr/>
           </p:nvSpPr>
@@ -21420,7 +21594,7 @@
         </p:sp>
         <p:sp>
           <p:nvSpPr>
-            <p:cNvPr id="40" name="Rectangle 40"/>
+            <p:cNvPr id="39" name="Rectangle 39"/>
             <p:cNvSpPr/>
             <p:nvPr/>
           </p:nvSpPr>
@@ -21442,7 +21616,7 @@
         </p:sp>
         <p:sp>
           <p:nvSpPr>
-            <p:cNvPr id="41" name="TextBox 41"/>
+            <p:cNvPr id="40" name="TextBox 40"/>
             <p:cNvSpPr txBox="1"/>
             <p:nvPr/>
           </p:nvSpPr>
@@ -21482,7 +21656,7 @@
         </p:sp>
         <p:sp>
           <p:nvSpPr>
-            <p:cNvPr id="42" name="TextBox 42"/>
+            <p:cNvPr id="41" name="TextBox 41"/>
             <p:cNvSpPr txBox="1"/>
             <p:nvPr/>
           </p:nvSpPr>
@@ -21522,7 +21696,7 @@
         </p:sp>
         <p:sp>
           <p:nvSpPr>
-            <p:cNvPr id="43" name="TextBox 43"/>
+            <p:cNvPr id="42" name="TextBox 42"/>
             <p:cNvSpPr txBox="1"/>
             <p:nvPr/>
           </p:nvSpPr>
@@ -21562,7 +21736,7 @@
         </p:sp>
         <p:sp>
           <p:nvSpPr>
-            <p:cNvPr id="44" name="Rectangle 44"/>
+            <p:cNvPr id="43" name="Rectangle 43"/>
             <p:cNvSpPr/>
             <p:nvPr/>
           </p:nvSpPr>
@@ -21584,7 +21758,7 @@
         </p:sp>
         <p:sp>
           <p:nvSpPr>
-            <p:cNvPr id="45" name="TextBox 45"/>
+            <p:cNvPr id="44" name="TextBox 44"/>
             <p:cNvSpPr txBox="1"/>
             <p:nvPr/>
           </p:nvSpPr>
@@ -21624,7 +21798,7 @@
         </p:sp>
         <p:sp>
           <p:nvSpPr>
-            <p:cNvPr id="46" name="TextBox 46"/>
+            <p:cNvPr id="45" name="TextBox 45"/>
             <p:cNvSpPr txBox="1"/>
             <p:nvPr/>
           </p:nvSpPr>
@@ -21664,7 +21838,7 @@
         </p:sp>
         <p:sp>
           <p:nvSpPr>
-            <p:cNvPr id="47" name="TextBox 47"/>
+            <p:cNvPr id="46" name="TextBox 46"/>
             <p:cNvSpPr txBox="1"/>
             <p:nvPr/>
           </p:nvSpPr>
@@ -21705,7 +21879,7 @@
       </p:grpSp>
       <p:grpSp>
         <p:nvGrpSpPr>
-          <p:cNvPr id="51" name="fx"/>
+          <p:cNvPr id="50" name="fx"/>
           <p:cNvGrpSpPr/>
           <p:nvPr/>
         </p:nvGrpSpPr>
@@ -21719,7 +21893,7 @@
         </p:grpSpPr>
         <p:sp>
           <p:nvSpPr>
-            <p:cNvPr id="49" name="TextBox 49"/>
+            <p:cNvPr id="48" name="TextBox 48"/>
             <p:cNvSpPr txBox="1"/>
             <p:nvPr/>
           </p:nvSpPr>
@@ -21759,7 +21933,7 @@
         </p:sp>
         <p:sp>
           <p:nvSpPr>
-            <p:cNvPr id="50" name="TextBox 50"/>
+            <p:cNvPr id="49" name="TextBox 49"/>
             <p:cNvSpPr txBox="1"/>
             <p:nvPr/>
           </p:nvSpPr>
@@ -21800,7 +21974,7 @@
       </p:grpSp>
       <p:grpSp>
         <p:nvGrpSpPr>
-          <p:cNvPr id="54" name="takeaway"/>
+          <p:cNvPr id="53" name="takeaway"/>
           <p:cNvGrpSpPr/>
           <p:nvPr/>
         </p:nvGrpSpPr>
@@ -21814,7 +21988,7 @@
         </p:grpSpPr>
         <p:sp>
           <p:nvSpPr>
-            <p:cNvPr id="52" name="Rectangle 52"/>
+            <p:cNvPr id="51" name="Rectangle 51"/>
             <p:cNvSpPr/>
             <p:nvPr/>
           </p:nvSpPr>
@@ -21836,7 +22010,7 @@
         </p:sp>
         <p:sp>
           <p:nvSpPr>
-            <p:cNvPr id="53" name="TextBox 53"/>
+            <p:cNvPr id="52" name="TextBox 52"/>
             <p:cNvSpPr txBox="1"/>
             <p:nvPr/>
           </p:nvSpPr>
@@ -21922,7 +22096,7 @@
       </p:grpSpPr>
       <p:grpSp>
         <p:nvGrpSpPr>
-          <p:cNvPr id="12" name="header"/>
+          <p:cNvPr id="11" name="header"/>
           <p:cNvGrpSpPr/>
           <p:nvPr/>
         </p:nvGrpSpPr>
@@ -21982,7 +22156,7 @@
           </p:nvSpPr>
           <p:spPr>
             <a:xfrm>
-              <a:off x="10420350" y="438150"/>
+              <a:off x="10591800" y="438150"/>
               <a:ext cx="114300" cy="114300"/>
             </a:xfrm>
             <a:prstGeom prst="rect">
@@ -22006,7 +22180,7 @@
           </p:nvSpPr>
           <p:spPr>
             <a:xfrm>
-              <a:off x="10591800" y="438150"/>
+              <a:off x="10763250" y="438150"/>
               <a:ext cx="114300" cy="114300"/>
             </a:xfrm>
             <a:prstGeom prst="rect">
@@ -22030,7 +22204,7 @@
           </p:nvSpPr>
           <p:spPr>
             <a:xfrm>
-              <a:off x="10763250" y="438150"/>
+              <a:off x="10934700" y="438150"/>
               <a:ext cx="114300" cy="114300"/>
             </a:xfrm>
             <a:prstGeom prst="rect">
@@ -22054,7 +22228,7 @@
           </p:nvSpPr>
           <p:spPr>
             <a:xfrm>
-              <a:off x="10934700" y="438150"/>
+              <a:off x="11106150" y="438150"/>
               <a:ext cx="114300" cy="114300"/>
             </a:xfrm>
             <a:prstGeom prst="rect">
@@ -22078,7 +22252,7 @@
           </p:nvSpPr>
           <p:spPr>
             <a:xfrm>
-              <a:off x="11106150" y="438150"/>
+              <a:off x="11277600" y="438150"/>
               <a:ext cx="114300" cy="114300"/>
             </a:xfrm>
             <a:prstGeom prst="rect">
@@ -22102,7 +22276,7 @@
           </p:nvSpPr>
           <p:spPr>
             <a:xfrm>
-              <a:off x="11277600" y="438150"/>
+              <a:off x="11449050" y="438150"/>
               <a:ext cx="114300" cy="114300"/>
             </a:xfrm>
             <a:prstGeom prst="rect">
@@ -22126,7 +22300,7 @@
           </p:nvSpPr>
           <p:spPr>
             <a:xfrm>
-              <a:off x="11449050" y="438150"/>
+              <a:off x="11620500" y="438150"/>
               <a:ext cx="114300" cy="114300"/>
             </a:xfrm>
             <a:prstGeom prst="rect">
@@ -22150,30 +22324,6 @@
           </p:nvSpPr>
           <p:spPr>
             <a:xfrm>
-              <a:off x="11620500" y="438150"/>
-              <a:ext cx="114300" cy="114300"/>
-            </a:xfrm>
-            <a:prstGeom prst="rect">
-              <a:avLst/>
-            </a:prstGeom>
-            <a:solidFill>
-              <a:srgbClr val="FFFFFF"/>
-            </a:solidFill>
-            <a:ln w="19050">
-              <a:solidFill>
-                <a:srgbClr val="0A1138"/>
-              </a:solidFill>
-            </a:ln>
-          </p:spPr>
-        </p:sp>
-        <p:sp>
-          <p:nvSpPr>
-            <p:cNvPr id="11" name="Rectangle 11"/>
-            <p:cNvSpPr/>
-            <p:nvPr/>
-          </p:nvSpPr>
-          <p:spPr>
-            <a:xfrm>
               <a:off x="457200" y="857250"/>
               <a:ext cx="11277600" cy="28575"/>
             </a:xfrm>
@@ -22191,7 +22341,7 @@
       </p:grpSp>
       <p:grpSp>
         <p:nvGrpSpPr>
-          <p:cNvPr id="14" name="claim"/>
+          <p:cNvPr id="13" name="claim"/>
           <p:cNvGrpSpPr/>
           <p:nvPr/>
         </p:nvGrpSpPr>
@@ -22205,7 +22355,7 @@
         </p:grpSpPr>
         <p:sp>
           <p:nvSpPr>
-            <p:cNvPr id="13" name="TextBox 13"/>
+            <p:cNvPr id="12" name="TextBox 12"/>
             <p:cNvSpPr txBox="1"/>
             <p:nvPr/>
           </p:nvSpPr>
@@ -22246,7 +22396,7 @@
       </p:grpSp>
       <p:grpSp>
         <p:nvGrpSpPr>
-          <p:cNvPr id="20" name="legend"/>
+          <p:cNvPr id="19" name="legend"/>
           <p:cNvGrpSpPr/>
           <p:nvPr/>
         </p:nvGrpSpPr>
@@ -22260,7 +22410,7 @@
         </p:grpSpPr>
         <p:sp>
           <p:nvSpPr>
-            <p:cNvPr id="15" name="Rectangle 15"/>
+            <p:cNvPr id="14" name="Rectangle 14"/>
             <p:cNvSpPr/>
             <p:nvPr/>
           </p:nvSpPr>
@@ -22282,7 +22432,7 @@
         </p:sp>
         <p:sp>
           <p:nvSpPr>
-            <p:cNvPr id="16" name="TextBox 16"/>
+            <p:cNvPr id="15" name="TextBox 15"/>
             <p:cNvSpPr txBox="1"/>
             <p:nvPr/>
           </p:nvSpPr>
@@ -22322,7 +22472,7 @@
         </p:sp>
         <p:sp>
           <p:nvSpPr>
-            <p:cNvPr id="17" name="Rectangle 17"/>
+            <p:cNvPr id="16" name="Rectangle 16"/>
             <p:cNvSpPr/>
             <p:nvPr/>
           </p:nvSpPr>
@@ -22344,7 +22494,7 @@
         </p:sp>
         <p:sp>
           <p:nvSpPr>
-            <p:cNvPr id="18" name="TextBox 18"/>
+            <p:cNvPr id="17" name="TextBox 17"/>
             <p:cNvSpPr txBox="1"/>
             <p:nvPr/>
           </p:nvSpPr>
@@ -22384,7 +22534,7 @@
         </p:sp>
         <p:sp>
           <p:nvSpPr>
-            <p:cNvPr id="19" name="TextBox 19"/>
+            <p:cNvPr id="18" name="TextBox 18"/>
             <p:cNvSpPr txBox="1"/>
             <p:nvPr/>
           </p:nvSpPr>
@@ -22425,28 +22575,28 @@
       </p:grpSp>
       <p:grpSp>
         <p:nvGrpSpPr>
-          <p:cNvPr id="44" name="chart"/>
+          <p:cNvPr id="43" name="chart"/>
           <p:cNvGrpSpPr/>
           <p:nvPr/>
         </p:nvGrpSpPr>
         <p:grpSpPr>
           <a:xfrm>
             <a:off x="488457" y="2374900"/>
-            <a:ext cx="6179043" cy="3725291"/>
+            <a:ext cx="11093943" cy="3725291"/>
             <a:chOff x="488457" y="2374900"/>
-            <a:chExt cx="6179043" cy="3725291"/>
+            <a:chExt cx="11093943" cy="3725291"/>
           </a:xfrm>
         </p:grpSpPr>
         <p:sp>
           <p:nvSpPr>
-            <p:cNvPr id="21" name="Rectangle 21"/>
+            <p:cNvPr id="20" name="Rectangle 20"/>
             <p:cNvSpPr/>
             <p:nvPr/>
           </p:nvSpPr>
           <p:spPr>
             <a:xfrm>
               <a:off x="876300" y="5657850"/>
-              <a:ext cx="5791200" cy="28575"/>
+              <a:ext cx="10706100" cy="28575"/>
             </a:xfrm>
             <a:prstGeom prst="rect">
               <a:avLst/>
@@ -22461,7 +22611,7 @@
         </p:sp>
         <p:sp>
           <p:nvSpPr>
-            <p:cNvPr id="22" name="TextBox 22"/>
+            <p:cNvPr id="21" name="TextBox 21"/>
             <p:cNvSpPr txBox="1"/>
             <p:nvPr/>
           </p:nvSpPr>
@@ -22501,14 +22651,14 @@
         </p:sp>
         <p:sp>
           <p:nvSpPr>
-            <p:cNvPr id="23" name="Rectangle 23"/>
+            <p:cNvPr id="22" name="Rectangle 22"/>
             <p:cNvSpPr/>
             <p:nvPr/>
           </p:nvSpPr>
           <p:spPr>
             <a:xfrm>
               <a:off x="876300" y="4591050"/>
-              <a:ext cx="5791200" cy="19050"/>
+              <a:ext cx="10706100" cy="19050"/>
             </a:xfrm>
             <a:prstGeom prst="rect">
               <a:avLst/>
@@ -22523,7 +22673,7 @@
         </p:sp>
         <p:sp>
           <p:nvSpPr>
-            <p:cNvPr id="24" name="TextBox 24"/>
+            <p:cNvPr id="23" name="TextBox 23"/>
             <p:cNvSpPr txBox="1"/>
             <p:nvPr/>
           </p:nvSpPr>
@@ -22563,14 +22713,14 @@
         </p:sp>
         <p:sp>
           <p:nvSpPr>
-            <p:cNvPr id="25" name="Rectangle 25"/>
+            <p:cNvPr id="24" name="Rectangle 24"/>
             <p:cNvSpPr/>
             <p:nvPr/>
           </p:nvSpPr>
           <p:spPr>
             <a:xfrm>
               <a:off x="876300" y="3524250"/>
-              <a:ext cx="5791200" cy="19050"/>
+              <a:ext cx="10706100" cy="19050"/>
             </a:xfrm>
             <a:prstGeom prst="rect">
               <a:avLst/>
@@ -22585,7 +22735,7 @@
         </p:sp>
         <p:sp>
           <p:nvSpPr>
-            <p:cNvPr id="26" name="TextBox 26"/>
+            <p:cNvPr id="25" name="TextBox 25"/>
             <p:cNvSpPr txBox="1"/>
             <p:nvPr/>
           </p:nvSpPr>
@@ -22625,14 +22775,14 @@
         </p:sp>
         <p:sp>
           <p:nvSpPr>
-            <p:cNvPr id="27" name="Rectangle 27"/>
+            <p:cNvPr id="26" name="Rectangle 26"/>
             <p:cNvSpPr/>
             <p:nvPr/>
           </p:nvSpPr>
           <p:spPr>
             <a:xfrm>
               <a:off x="876300" y="2457450"/>
-              <a:ext cx="5791200" cy="19050"/>
+              <a:ext cx="10706100" cy="19050"/>
             </a:xfrm>
             <a:prstGeom prst="rect">
               <a:avLst/>
@@ -22647,7 +22797,7 @@
         </p:sp>
         <p:sp>
           <p:nvSpPr>
-            <p:cNvPr id="28" name="TextBox 28"/>
+            <p:cNvPr id="27" name="TextBox 27"/>
             <p:cNvSpPr txBox="1"/>
             <p:nvPr/>
           </p:nvSpPr>
@@ -22687,14 +22837,14 @@
         </p:sp>
         <p:sp>
           <p:nvSpPr>
-            <p:cNvPr id="29" name="Rectangle 29"/>
+            <p:cNvPr id="28" name="Rectangle 28"/>
             <p:cNvSpPr/>
             <p:nvPr/>
           </p:nvSpPr>
           <p:spPr>
             <a:xfrm>
-              <a:off x="1369187" y="4924425"/>
-              <a:ext cx="424688" cy="733425"/>
+              <a:off x="1827911" y="4924425"/>
+              <a:ext cx="785114" cy="733425"/>
             </a:xfrm>
             <a:prstGeom prst="rect">
               <a:avLst/>
@@ -22709,13 +22859,13 @@
         </p:sp>
         <p:sp>
           <p:nvSpPr>
-            <p:cNvPr id="30" name="TextBox 30"/>
+            <p:cNvPr id="29" name="TextBox 29"/>
             <p:cNvSpPr txBox="1"/>
             <p:nvPr/>
           </p:nvSpPr>
           <p:spPr>
             <a:xfrm>
-              <a:off x="1305529" y="4600575"/>
+              <a:off x="1944466" y="4600575"/>
               <a:ext cx="552005" cy="308991"/>
             </a:xfrm>
             <a:prstGeom prst="rect">
@@ -22749,14 +22899,14 @@
         </p:sp>
         <p:sp>
           <p:nvSpPr>
-            <p:cNvPr id="31" name="Rectangle 31"/>
+            <p:cNvPr id="30" name="Rectangle 30"/>
             <p:cNvSpPr/>
             <p:nvPr/>
           </p:nvSpPr>
           <p:spPr>
             <a:xfrm>
-              <a:off x="1889125" y="5432933"/>
-              <a:ext cx="424688" cy="224917"/>
+              <a:off x="2708275" y="5432933"/>
+              <a:ext cx="785114" cy="224917"/>
             </a:xfrm>
             <a:prstGeom prst="rect">
               <a:avLst/>
@@ -22771,13 +22921,13 @@
         </p:sp>
         <p:sp>
           <p:nvSpPr>
-            <p:cNvPr id="32" name="TextBox 32"/>
+            <p:cNvPr id="31" name="TextBox 31"/>
             <p:cNvSpPr txBox="1"/>
             <p:nvPr/>
           </p:nvSpPr>
           <p:spPr>
             <a:xfrm>
-              <a:off x="1825467" y="5109083"/>
+              <a:off x="2824830" y="5109083"/>
               <a:ext cx="552005" cy="308991"/>
             </a:xfrm>
             <a:prstGeom prst="rect">
@@ -22811,13 +22961,13 @@
         </p:sp>
         <p:sp>
           <p:nvSpPr>
-            <p:cNvPr id="33" name="TextBox 33"/>
+            <p:cNvPr id="32" name="TextBox 32"/>
             <p:cNvSpPr txBox="1"/>
             <p:nvPr/>
           </p:nvSpPr>
           <p:spPr>
             <a:xfrm>
-              <a:off x="982701" y="5791200"/>
+              <a:off x="1801851" y="5791200"/>
               <a:ext cx="1717599" cy="308991"/>
             </a:xfrm>
             <a:prstGeom prst="rect">
@@ -22851,14 +23001,14 @@
         </p:sp>
         <p:sp>
           <p:nvSpPr>
-            <p:cNvPr id="34" name="Rectangle 34"/>
+            <p:cNvPr id="33" name="Rectangle 33"/>
             <p:cNvSpPr/>
             <p:nvPr/>
           </p:nvSpPr>
           <p:spPr>
             <a:xfrm>
-              <a:off x="3299587" y="2997962"/>
-              <a:ext cx="424688" cy="2659888"/>
+              <a:off x="5396611" y="2997962"/>
+              <a:ext cx="785114" cy="2659888"/>
             </a:xfrm>
             <a:prstGeom prst="rect">
               <a:avLst/>
@@ -22873,13 +23023,13 @@
         </p:sp>
         <p:sp>
           <p:nvSpPr>
-            <p:cNvPr id="35" name="TextBox 35"/>
+            <p:cNvPr id="34" name="TextBox 34"/>
             <p:cNvSpPr txBox="1"/>
             <p:nvPr/>
           </p:nvSpPr>
           <p:spPr>
             <a:xfrm>
-              <a:off x="3174511" y="2674112"/>
+              <a:off x="5451748" y="2674112"/>
               <a:ext cx="674839" cy="308991"/>
             </a:xfrm>
             <a:prstGeom prst="rect">
@@ -22913,14 +23063,14 @@
         </p:sp>
         <p:sp>
           <p:nvSpPr>
-            <p:cNvPr id="36" name="Rectangle 36"/>
+            <p:cNvPr id="35" name="Rectangle 35"/>
             <p:cNvSpPr/>
             <p:nvPr/>
           </p:nvSpPr>
           <p:spPr>
             <a:xfrm>
-              <a:off x="3819525" y="3467354"/>
-              <a:ext cx="424688" cy="2190496"/>
+              <a:off x="6276975" y="3467354"/>
+              <a:ext cx="785114" cy="2190496"/>
             </a:xfrm>
             <a:prstGeom prst="rect">
               <a:avLst/>
@@ -22935,13 +23085,13 @@
         </p:sp>
         <p:sp>
           <p:nvSpPr>
-            <p:cNvPr id="37" name="TextBox 37"/>
+            <p:cNvPr id="36" name="TextBox 36"/>
             <p:cNvSpPr txBox="1"/>
             <p:nvPr/>
           </p:nvSpPr>
           <p:spPr>
             <a:xfrm>
-              <a:off x="3694449" y="3143504"/>
+              <a:off x="6332112" y="3143504"/>
               <a:ext cx="674839" cy="308991"/>
             </a:xfrm>
             <a:prstGeom prst="rect">
@@ -22975,13 +23125,13 @@
         </p:sp>
         <p:sp>
           <p:nvSpPr>
-            <p:cNvPr id="38" name="TextBox 38"/>
+            <p:cNvPr id="37" name="TextBox 37"/>
             <p:cNvSpPr txBox="1"/>
             <p:nvPr/>
           </p:nvSpPr>
           <p:spPr>
             <a:xfrm>
-              <a:off x="3551199" y="5791200"/>
+              <a:off x="6008649" y="5791200"/>
               <a:ext cx="441401" cy="308991"/>
             </a:xfrm>
             <a:prstGeom prst="rect">
@@ -23015,14 +23165,14 @@
         </p:sp>
         <p:sp>
           <p:nvSpPr>
-            <p:cNvPr id="39" name="Rectangle 39"/>
+            <p:cNvPr id="38" name="Rectangle 38"/>
             <p:cNvSpPr/>
             <p:nvPr/>
           </p:nvSpPr>
           <p:spPr>
             <a:xfrm>
-              <a:off x="5229987" y="4885309"/>
-              <a:ext cx="424688" cy="772541"/>
+              <a:off x="8965311" y="4885309"/>
+              <a:ext cx="785114" cy="772541"/>
             </a:xfrm>
             <a:prstGeom prst="rect">
               <a:avLst/>
@@ -23037,13 +23187,13 @@
         </p:sp>
         <p:sp>
           <p:nvSpPr>
-            <p:cNvPr id="40" name="TextBox 40"/>
+            <p:cNvPr id="39" name="TextBox 39"/>
             <p:cNvSpPr txBox="1"/>
             <p:nvPr/>
           </p:nvSpPr>
           <p:spPr>
             <a:xfrm>
-              <a:off x="5166329" y="4561459"/>
+              <a:off x="9081866" y="4561459"/>
               <a:ext cx="552005" cy="308991"/>
             </a:xfrm>
             <a:prstGeom prst="rect">
@@ -23077,14 +23227,14 @@
         </p:sp>
         <p:sp>
           <p:nvSpPr>
-            <p:cNvPr id="41" name="Rectangle 41"/>
+            <p:cNvPr id="40" name="Rectangle 40"/>
             <p:cNvSpPr/>
             <p:nvPr/>
           </p:nvSpPr>
           <p:spPr>
             <a:xfrm>
-              <a:off x="5749925" y="3623818"/>
-              <a:ext cx="424688" cy="2034032"/>
+              <a:off x="9845675" y="3623818"/>
+              <a:ext cx="785114" cy="2034032"/>
             </a:xfrm>
             <a:prstGeom prst="rect">
               <a:avLst/>
@@ -23099,13 +23249,13 @@
         </p:sp>
         <p:sp>
           <p:nvSpPr>
-            <p:cNvPr id="42" name="TextBox 42"/>
+            <p:cNvPr id="41" name="TextBox 41"/>
             <p:cNvSpPr txBox="1"/>
             <p:nvPr/>
           </p:nvSpPr>
           <p:spPr>
             <a:xfrm>
-              <a:off x="5624849" y="3299968"/>
+              <a:off x="9900812" y="3299968"/>
               <a:ext cx="674839" cy="308991"/>
             </a:xfrm>
             <a:prstGeom prst="rect">
@@ -23139,13 +23289,13 @@
         </p:sp>
         <p:sp>
           <p:nvSpPr>
-            <p:cNvPr id="43" name="TextBox 43"/>
+            <p:cNvPr id="42" name="TextBox 42"/>
             <p:cNvSpPr txBox="1"/>
             <p:nvPr/>
           </p:nvSpPr>
           <p:spPr>
             <a:xfrm>
-              <a:off x="5162550" y="5791200"/>
+              <a:off x="9258300" y="5791200"/>
               <a:ext cx="1079500" cy="308991"/>
             </a:xfrm>
             <a:prstGeom prst="rect">
@@ -23180,7 +23330,7 @@
       </p:grpSp>
       <p:grpSp>
         <p:nvGrpSpPr>
-          <p:cNvPr id="46" name="source"/>
+          <p:cNvPr id="45" name="source"/>
           <p:cNvGrpSpPr/>
           <p:nvPr/>
         </p:nvGrpSpPr>
@@ -23194,7 +23344,7 @@
         </p:grpSpPr>
         <p:sp>
           <p:nvSpPr>
-            <p:cNvPr id="45" name="TextBox 45"/>
+            <p:cNvPr id="44" name="TextBox 44"/>
             <p:cNvSpPr txBox="1"/>
             <p:nvPr/>
           </p:nvSpPr>
@@ -23228,502 +23378,6 @@
                   <a:cs typeface="+mn-cs"/>
                 </a:rPr>
                 <a:t>資料：MoleDAO, Web3 Hiring Market Report Q3 2026</a:t>
-              </a:r>
-            </a:p>
-          </p:txBody>
-        </p:sp>
-      </p:grpSp>
-      <p:grpSp>
-        <p:nvGrpSpPr>
-          <p:cNvPr id="48" name="divider"/>
-          <p:cNvGrpSpPr/>
-          <p:nvPr/>
-        </p:nvGrpSpPr>
-        <p:grpSpPr>
-          <a:xfrm>
-            <a:off x="7200900" y="876300"/>
-            <a:ext cx="28575" cy="5981700"/>
-            <a:chOff x="7200900" y="876300"/>
-            <a:chExt cx="28575" cy="5981700"/>
-          </a:xfrm>
-        </p:grpSpPr>
-        <p:sp>
-          <p:nvSpPr>
-            <p:cNvPr id="47" name="Rectangle 47"/>
-            <p:cNvSpPr/>
-            <p:nvPr/>
-          </p:nvSpPr>
-          <p:spPr>
-            <a:xfrm>
-              <a:off x="7200900" y="876300"/>
-              <a:ext cx="28575" cy="5981700"/>
-            </a:xfrm>
-            <a:prstGeom prst="rect">
-              <a:avLst/>
-            </a:prstGeom>
-            <a:solidFill>
-              <a:srgbClr val="0A1138"/>
-            </a:solidFill>
-            <a:ln>
-              <a:noFill/>
-            </a:ln>
-          </p:spPr>
-        </p:sp>
-      </p:grpSp>
-      <p:grpSp>
-        <p:nvGrpSpPr>
-          <p:cNvPr id="61" name="policy"/>
-          <p:cNvGrpSpPr/>
-          <p:nvPr/>
-        </p:nvGrpSpPr>
-        <p:grpSpPr>
-          <a:xfrm>
-            <a:off x="7572375" y="1631950"/>
-            <a:ext cx="4162425" cy="4793552"/>
-            <a:chOff x="7572375" y="1631950"/>
-            <a:chExt cx="4162425" cy="4793552"/>
-          </a:xfrm>
-        </p:grpSpPr>
-        <p:sp>
-          <p:nvSpPr>
-            <p:cNvPr id="49" name="TextBox 49"/>
-            <p:cNvSpPr txBox="1"/>
-            <p:nvPr/>
-          </p:nvSpPr>
-          <p:spPr>
-            <a:xfrm>
-              <a:off x="7576185" y="1631950"/>
-              <a:ext cx="1066851" cy="220028"/>
-            </a:xfrm>
-            <a:prstGeom prst="rect">
-              <a:avLst/>
-            </a:prstGeom>
-            <a:noFill/>
-            <a:ln>
-              <a:noFill/>
-            </a:ln>
-          </p:spPr>
-          <p:txBody>
-            <a:bodyPr wrap="none" lIns="0" tIns="0" rIns="0" bIns="0" anchor="t" anchorCtr="0">
-              <a:spAutoFit/>
-            </a:bodyPr>
-            <a:lstStyle/>
-            <a:p>
-              <a:pPr algn="l"/>
-              <a:r>
-                <a:rPr lang="zh-TW" sz="1120" b="1" dirty="0">
-                  <a:solidFill>
-                    <a:srgbClr val="6B6B6B"/>
-                  </a:solidFill>
-                  <a:latin typeface="+mn-lt"/>
-                  <a:ea typeface="+mn-ea"/>
-                  <a:cs typeface="+mn-cs"/>
-                </a:rPr>
-                <a:t>新加坡正在推的</a:t>
-              </a:r>
-            </a:p>
-          </p:txBody>
-        </p:sp>
-        <p:sp>
-          <p:nvSpPr>
-            <p:cNvPr id="50" name="TextBox 50"/>
-            <p:cNvSpPr txBox="1"/>
-            <p:nvPr/>
-          </p:nvSpPr>
-          <p:spPr>
-            <a:xfrm>
-              <a:off x="7572375" y="2571750"/>
-              <a:ext cx="2174401" cy="367665"/>
-            </a:xfrm>
-            <a:prstGeom prst="rect">
-              <a:avLst/>
-            </a:prstGeom>
-            <a:noFill/>
-            <a:ln>
-              <a:noFill/>
-            </a:ln>
-          </p:spPr>
-          <p:txBody>
-            <a:bodyPr wrap="none" lIns="0" tIns="0" rIns="0" bIns="0" anchor="t" anchorCtr="0">
-              <a:spAutoFit/>
-            </a:bodyPr>
-            <a:lstStyle/>
-            <a:p>
-              <a:pPr algn="l"/>
-              <a:r>
-                <a:rPr lang="en-US" sz="1880" b="1" dirty="0">
-                  <a:solidFill>
-                    <a:srgbClr val="0A1138"/>
-                  </a:solidFill>
-                  <a:latin typeface="+mn-lt"/>
-                  <a:ea typeface="+mn-ea"/>
-                  <a:cs typeface="+mn-cs"/>
-                </a:rPr>
-                <a:t>Project Guardian</a:t>
-              </a:r>
-            </a:p>
-          </p:txBody>
-        </p:sp>
-        <p:sp>
-          <p:nvSpPr>
-            <p:cNvPr id="51" name="TextBox 51"/>
-            <p:cNvSpPr txBox="1"/>
-            <p:nvPr/>
-          </p:nvSpPr>
-          <p:spPr>
-            <a:xfrm>
-              <a:off x="7574661" y="2965450"/>
-              <a:ext cx="1543761" cy="278702"/>
-            </a:xfrm>
-            <a:prstGeom prst="rect">
-              <a:avLst/>
-            </a:prstGeom>
-            <a:noFill/>
-            <a:ln>
-              <a:noFill/>
-            </a:ln>
-          </p:spPr>
-          <p:txBody>
-            <a:bodyPr wrap="none" lIns="0" tIns="0" rIns="0" bIns="0" anchor="t" anchorCtr="0">
-              <a:spAutoFit/>
-            </a:bodyPr>
-            <a:lstStyle/>
-            <a:p>
-              <a:pPr algn="l"/>
-              <a:r>
-                <a:rPr lang="zh-TW" sz="1420" dirty="0">
-                  <a:solidFill>
-                    <a:srgbClr val="6B6B6B"/>
-                  </a:solidFill>
-                  <a:latin typeface="+mn-lt"/>
-                  <a:ea typeface="+mn-ea"/>
-                  <a:cs typeface="+mn-cs"/>
-                </a:rPr>
-                <a:t>資產代幣化試點，</a:t>
-              </a:r>
-            </a:p>
-          </p:txBody>
-        </p:sp>
-        <p:sp>
-          <p:nvSpPr>
-            <p:cNvPr id="52" name="TextBox 52"/>
-            <p:cNvSpPr txBox="1"/>
-            <p:nvPr/>
-          </p:nvSpPr>
-          <p:spPr>
-            <a:xfrm>
-              <a:off x="7574661" y="3251200"/>
-              <a:ext cx="1811386" cy="278702"/>
-            </a:xfrm>
-            <a:prstGeom prst="rect">
-              <a:avLst/>
-            </a:prstGeom>
-            <a:noFill/>
-            <a:ln>
-              <a:noFill/>
-            </a:ln>
-          </p:spPr>
-          <p:txBody>
-            <a:bodyPr wrap="none" lIns="0" tIns="0" rIns="0" bIns="0" anchor="t" anchorCtr="0">
-              <a:spAutoFit/>
-            </a:bodyPr>
-            <a:lstStyle/>
-            <a:p>
-              <a:pPr algn="l"/>
-              <a:r>
-                <a:rPr lang="zh-TW" sz="1420" dirty="0">
-                  <a:solidFill>
-                    <a:srgbClr val="6B6B6B"/>
-                  </a:solidFill>
-                  <a:latin typeface="+mn-lt"/>
-                  <a:ea typeface="+mn-ea"/>
-                  <a:cs typeface="+mn-cs"/>
-                </a:rPr>
-                <a:t>40 多家金融機構參與</a:t>
-              </a:r>
-            </a:p>
-          </p:txBody>
-        </p:sp>
-        <p:sp>
-          <p:nvSpPr>
-            <p:cNvPr id="53" name="Rectangle 53"/>
-            <p:cNvSpPr/>
-            <p:nvPr/>
-          </p:nvSpPr>
-          <p:spPr>
-            <a:xfrm>
-              <a:off x="7581900" y="3657600"/>
-              <a:ext cx="4152900" cy="19050"/>
-            </a:xfrm>
-            <a:prstGeom prst="rect">
-              <a:avLst/>
-            </a:prstGeom>
-            <a:solidFill>
-              <a:srgbClr val="C7CEE4"/>
-            </a:solidFill>
-            <a:ln>
-              <a:noFill/>
-            </a:ln>
-          </p:spPr>
-        </p:sp>
-        <p:sp>
-          <p:nvSpPr>
-            <p:cNvPr id="54" name="TextBox 54"/>
-            <p:cNvSpPr txBox="1"/>
-            <p:nvPr/>
-          </p:nvSpPr>
-          <p:spPr>
-            <a:xfrm>
-              <a:off x="7572375" y="4019550"/>
-              <a:ext cx="2170755" cy="367665"/>
-            </a:xfrm>
-            <a:prstGeom prst="rect">
-              <a:avLst/>
-            </a:prstGeom>
-            <a:noFill/>
-            <a:ln>
-              <a:noFill/>
-            </a:ln>
-          </p:spPr>
-          <p:txBody>
-            <a:bodyPr wrap="none" lIns="0" tIns="0" rIns="0" bIns="0" anchor="t" anchorCtr="0">
-              <a:spAutoFit/>
-            </a:bodyPr>
-            <a:lstStyle/>
-            <a:p>
-              <a:pPr algn="l"/>
-              <a:r>
-                <a:rPr lang="en-US" sz="1880" b="1" dirty="0">
-                  <a:solidFill>
-                    <a:srgbClr val="0A1138"/>
-                  </a:solidFill>
-                  <a:latin typeface="+mn-lt"/>
-                  <a:ea typeface="+mn-ea"/>
-                  <a:cs typeface="+mn-cs"/>
-                </a:rPr>
-                <a:t>Global Layer One</a:t>
-              </a:r>
-            </a:p>
-          </p:txBody>
-        </p:sp>
-        <p:sp>
-          <p:nvSpPr>
-            <p:cNvPr id="55" name="TextBox 55"/>
-            <p:cNvSpPr txBox="1"/>
-            <p:nvPr/>
-          </p:nvSpPr>
-          <p:spPr>
-            <a:xfrm>
-              <a:off x="7574661" y="4413250"/>
-              <a:ext cx="1352601" cy="278702"/>
-            </a:xfrm>
-            <a:prstGeom prst="rect">
-              <a:avLst/>
-            </a:prstGeom>
-            <a:noFill/>
-            <a:ln>
-              <a:noFill/>
-            </a:ln>
-          </p:spPr>
-          <p:txBody>
-            <a:bodyPr wrap="none" lIns="0" tIns="0" rIns="0" bIns="0" anchor="t" anchorCtr="0">
-              <a:spAutoFit/>
-            </a:bodyPr>
-            <a:lstStyle/>
-            <a:p>
-              <a:pPr algn="l"/>
-              <a:r>
-                <a:rPr lang="zh-TW" sz="1420" dirty="0">
-                  <a:solidFill>
-                    <a:srgbClr val="6B6B6B"/>
-                  </a:solidFill>
-                  <a:latin typeface="+mn-lt"/>
-                  <a:ea typeface="+mn-ea"/>
-                  <a:cs typeface="+mn-cs"/>
-                </a:rPr>
-                <a:t>金融機構共建的</a:t>
-              </a:r>
-            </a:p>
-          </p:txBody>
-        </p:sp>
-        <p:sp>
-          <p:nvSpPr>
-            <p:cNvPr id="56" name="TextBox 56"/>
-            <p:cNvSpPr txBox="1"/>
-            <p:nvPr/>
-          </p:nvSpPr>
-          <p:spPr>
-            <a:xfrm>
-              <a:off x="7574661" y="4699000"/>
-              <a:ext cx="1543761" cy="278702"/>
-            </a:xfrm>
-            <a:prstGeom prst="rect">
-              <a:avLst/>
-            </a:prstGeom>
-            <a:noFill/>
-            <a:ln>
-              <a:noFill/>
-            </a:ln>
-          </p:spPr>
-          <p:txBody>
-            <a:bodyPr wrap="none" lIns="0" tIns="0" rIns="0" bIns="0" anchor="t" anchorCtr="0">
-              <a:spAutoFit/>
-            </a:bodyPr>
-            <a:lstStyle/>
-            <a:p>
-              <a:pPr algn="l"/>
-              <a:r>
-                <a:rPr lang="zh-TW" sz="1420" dirty="0">
-                  <a:solidFill>
-                    <a:srgbClr val="6B6B6B"/>
-                  </a:solidFill>
-                  <a:latin typeface="+mn-lt"/>
-                  <a:ea typeface="+mn-ea"/>
-                  <a:cs typeface="+mn-cs"/>
-                </a:rPr>
-                <a:t>共享帳本基礎設施</a:t>
-              </a:r>
-            </a:p>
-          </p:txBody>
-        </p:sp>
-        <p:sp>
-          <p:nvSpPr>
-            <p:cNvPr id="57" name="Rectangle 57"/>
-            <p:cNvSpPr/>
-            <p:nvPr/>
-          </p:nvSpPr>
-          <p:spPr>
-            <a:xfrm>
-              <a:off x="7581900" y="5105400"/>
-              <a:ext cx="4152900" cy="19050"/>
-            </a:xfrm>
-            <a:prstGeom prst="rect">
-              <a:avLst/>
-            </a:prstGeom>
-            <a:solidFill>
-              <a:srgbClr val="C7CEE4"/>
-            </a:solidFill>
-            <a:ln>
-              <a:noFill/>
-            </a:ln>
-          </p:spPr>
-        </p:sp>
-        <p:sp>
-          <p:nvSpPr>
-            <p:cNvPr id="58" name="TextBox 58"/>
-            <p:cNvSpPr txBox="1"/>
-            <p:nvPr/>
-          </p:nvSpPr>
-          <p:spPr>
-            <a:xfrm>
-              <a:off x="7572375" y="5467350"/>
-              <a:ext cx="1790649" cy="367665"/>
-            </a:xfrm>
-            <a:prstGeom prst="rect">
-              <a:avLst/>
-            </a:prstGeom>
-            <a:noFill/>
-            <a:ln>
-              <a:noFill/>
-            </a:ln>
-          </p:spPr>
-          <p:txBody>
-            <a:bodyPr wrap="none" lIns="0" tIns="0" rIns="0" bIns="0" anchor="t" anchorCtr="0">
-              <a:spAutoFit/>
-            </a:bodyPr>
-            <a:lstStyle/>
-            <a:p>
-              <a:pPr algn="l"/>
-              <a:r>
-                <a:rPr lang="zh-TW" sz="1880" b="1" dirty="0">
-                  <a:solidFill>
-                    <a:srgbClr val="0A1138"/>
-                  </a:solidFill>
-                  <a:latin typeface="+mn-lt"/>
-                  <a:ea typeface="+mn-ea"/>
-                  <a:cs typeface="+mn-cs"/>
-                </a:rPr>
-                <a:t>穩定幣監管框架</a:t>
-              </a:r>
-            </a:p>
-          </p:txBody>
-        </p:sp>
-        <p:sp>
-          <p:nvSpPr>
-            <p:cNvPr id="59" name="TextBox 59"/>
-            <p:cNvSpPr txBox="1"/>
-            <p:nvPr/>
-          </p:nvSpPr>
-          <p:spPr>
-            <a:xfrm>
-              <a:off x="7574661" y="5861050"/>
-              <a:ext cx="1543761" cy="278702"/>
-            </a:xfrm>
-            <a:prstGeom prst="rect">
-              <a:avLst/>
-            </a:prstGeom>
-            <a:noFill/>
-            <a:ln>
-              <a:noFill/>
-            </a:ln>
-          </p:spPr>
-          <p:txBody>
-            <a:bodyPr wrap="none" lIns="0" tIns="0" rIns="0" bIns="0" anchor="t" anchorCtr="0">
-              <a:spAutoFit/>
-            </a:bodyPr>
-            <a:lstStyle/>
-            <a:p>
-              <a:pPr algn="l"/>
-              <a:r>
-                <a:rPr lang="zh-TW" sz="1420" dirty="0">
-                  <a:solidFill>
-                    <a:srgbClr val="6B6B6B"/>
-                  </a:solidFill>
-                  <a:latin typeface="+mn-lt"/>
-                  <a:ea typeface="+mn-ea"/>
-                  <a:cs typeface="+mn-cs"/>
-                </a:rPr>
-                <a:t>單一貨幣穩定幣的</a:t>
-              </a:r>
-            </a:p>
-          </p:txBody>
-        </p:sp>
-        <p:sp>
-          <p:nvSpPr>
-            <p:cNvPr id="60" name="TextBox 60"/>
-            <p:cNvSpPr txBox="1"/>
-            <p:nvPr/>
-          </p:nvSpPr>
-          <p:spPr>
-            <a:xfrm>
-              <a:off x="7574661" y="6146800"/>
-              <a:ext cx="1352601" cy="278702"/>
-            </a:xfrm>
-            <a:prstGeom prst="rect">
-              <a:avLst/>
-            </a:prstGeom>
-            <a:noFill/>
-            <a:ln>
-              <a:noFill/>
-            </a:ln>
-          </p:spPr>
-          <p:txBody>
-            <a:bodyPr wrap="none" lIns="0" tIns="0" rIns="0" bIns="0" anchor="t" anchorCtr="0">
-              <a:spAutoFit/>
-            </a:bodyPr>
-            <a:lstStyle/>
-            <a:p>
-              <a:pPr algn="l"/>
-              <a:r>
-                <a:rPr lang="zh-TW" sz="1420" dirty="0">
-                  <a:solidFill>
-                    <a:srgbClr val="6B6B6B"/>
-                  </a:solidFill>
-                  <a:latin typeface="+mn-lt"/>
-                  <a:ea typeface="+mn-ea"/>
-                  <a:cs typeface="+mn-cs"/>
-                </a:rPr>
-                <a:t>發行與儲備規範</a:t>
               </a:r>
             </a:p>
           </p:txBody>
@@ -23776,7 +23430,7 @@
       </p:grpSpPr>
       <p:grpSp>
         <p:nvGrpSpPr>
-          <p:cNvPr id="12" name="header"/>
+          <p:cNvPr id="11" name="header"/>
           <p:cNvGrpSpPr/>
           <p:nvPr/>
         </p:nvGrpSpPr>
@@ -23836,7 +23490,7 @@
           </p:nvSpPr>
           <p:spPr>
             <a:xfrm>
-              <a:off x="10420350" y="438150"/>
+              <a:off x="10591800" y="438150"/>
               <a:ext cx="114300" cy="114300"/>
             </a:xfrm>
             <a:prstGeom prst="rect">
@@ -23860,7 +23514,7 @@
           </p:nvSpPr>
           <p:spPr>
             <a:xfrm>
-              <a:off x="10591800" y="438150"/>
+              <a:off x="10763250" y="438150"/>
               <a:ext cx="114300" cy="114300"/>
             </a:xfrm>
             <a:prstGeom prst="rect">
@@ -23884,7 +23538,7 @@
           </p:nvSpPr>
           <p:spPr>
             <a:xfrm>
-              <a:off x="10763250" y="438150"/>
+              <a:off x="10934700" y="438150"/>
               <a:ext cx="114300" cy="114300"/>
             </a:xfrm>
             <a:prstGeom prst="rect">
@@ -23908,7 +23562,7 @@
           </p:nvSpPr>
           <p:spPr>
             <a:xfrm>
-              <a:off x="10934700" y="438150"/>
+              <a:off x="11106150" y="438150"/>
               <a:ext cx="114300" cy="114300"/>
             </a:xfrm>
             <a:prstGeom prst="rect">
@@ -23932,7 +23586,7 @@
           </p:nvSpPr>
           <p:spPr>
             <a:xfrm>
-              <a:off x="11106150" y="438150"/>
+              <a:off x="11277600" y="438150"/>
               <a:ext cx="114300" cy="114300"/>
             </a:xfrm>
             <a:prstGeom prst="rect">
@@ -23956,7 +23610,7 @@
           </p:nvSpPr>
           <p:spPr>
             <a:xfrm>
-              <a:off x="11277600" y="438150"/>
+              <a:off x="11449050" y="438150"/>
               <a:ext cx="114300" cy="114300"/>
             </a:xfrm>
             <a:prstGeom prst="rect">
@@ -23980,7 +23634,7 @@
           </p:nvSpPr>
           <p:spPr>
             <a:xfrm>
-              <a:off x="11449050" y="438150"/>
+              <a:off x="11620500" y="438150"/>
               <a:ext cx="114300" cy="114300"/>
             </a:xfrm>
             <a:prstGeom prst="rect">
@@ -24004,30 +23658,6 @@
           </p:nvSpPr>
           <p:spPr>
             <a:xfrm>
-              <a:off x="11620500" y="438150"/>
-              <a:ext cx="114300" cy="114300"/>
-            </a:xfrm>
-            <a:prstGeom prst="rect">
-              <a:avLst/>
-            </a:prstGeom>
-            <a:solidFill>
-              <a:srgbClr val="FFFFFF"/>
-            </a:solidFill>
-            <a:ln w="19050">
-              <a:solidFill>
-                <a:srgbClr val="0A1138"/>
-              </a:solidFill>
-            </a:ln>
-          </p:spPr>
-        </p:sp>
-        <p:sp>
-          <p:nvSpPr>
-            <p:cNvPr id="11" name="Rectangle 11"/>
-            <p:cNvSpPr/>
-            <p:nvPr/>
-          </p:nvSpPr>
-          <p:spPr>
-            <a:xfrm>
               <a:off x="457200" y="857250"/>
               <a:ext cx="11277600" cy="28575"/>
             </a:xfrm>
@@ -24045,7 +23675,7 @@
       </p:grpSp>
       <p:grpSp>
         <p:nvGrpSpPr>
-          <p:cNvPr id="14" name="claim"/>
+          <p:cNvPr id="13" name="claim"/>
           <p:cNvGrpSpPr/>
           <p:nvPr/>
         </p:nvGrpSpPr>
@@ -24059,7 +23689,7 @@
         </p:grpSpPr>
         <p:sp>
           <p:nvSpPr>
-            <p:cNvPr id="13" name="TextBox 13"/>
+            <p:cNvPr id="12" name="TextBox 12"/>
             <p:cNvSpPr txBox="1"/>
             <p:nvPr/>
           </p:nvSpPr>
@@ -24100,7 +23730,7 @@
       </p:grpSp>
       <p:grpSp>
         <p:nvGrpSpPr>
-          <p:cNvPr id="78" name="columns"/>
+          <p:cNvPr id="77" name="columns"/>
           <p:cNvGrpSpPr/>
           <p:nvPr/>
         </p:nvGrpSpPr>
@@ -24114,7 +23744,7 @@
         </p:grpSpPr>
         <p:sp>
           <p:nvSpPr>
-            <p:cNvPr id="15" name="Rectangle 15"/>
+            <p:cNvPr id="14" name="Rectangle 14"/>
             <p:cNvSpPr/>
             <p:nvPr/>
           </p:nvSpPr>
@@ -24136,7 +23766,7 @@
         </p:sp>
         <p:sp>
           <p:nvSpPr>
-            <p:cNvPr id="16" name="Rectangle 16"/>
+            <p:cNvPr id="15" name="Rectangle 15"/>
             <p:cNvSpPr/>
             <p:nvPr/>
           </p:nvSpPr>
@@ -24158,7 +23788,7 @@
         </p:sp>
         <p:sp>
           <p:nvSpPr>
-            <p:cNvPr id="17" name="TextBox 17"/>
+            <p:cNvPr id="16" name="TextBox 16"/>
             <p:cNvSpPr txBox="1"/>
             <p:nvPr/>
           </p:nvSpPr>
@@ -24198,7 +23828,7 @@
         </p:sp>
         <p:sp>
           <p:nvSpPr>
-            <p:cNvPr id="18" name="Rectangle 18"/>
+            <p:cNvPr id="17" name="Rectangle 17"/>
             <p:cNvSpPr/>
             <p:nvPr/>
           </p:nvSpPr>
@@ -24220,7 +23850,7 @@
         </p:sp>
         <p:sp>
           <p:nvSpPr>
-            <p:cNvPr id="19" name="TextBox 19"/>
+            <p:cNvPr id="18" name="TextBox 18"/>
             <p:cNvSpPr txBox="1"/>
             <p:nvPr/>
           </p:nvSpPr>
@@ -24260,7 +23890,7 @@
         </p:sp>
         <p:sp>
           <p:nvSpPr>
-            <p:cNvPr id="20" name="TextBox 20"/>
+            <p:cNvPr id="19" name="TextBox 19"/>
             <p:cNvSpPr txBox="1"/>
             <p:nvPr/>
           </p:nvSpPr>
@@ -24300,7 +23930,7 @@
         </p:sp>
         <p:sp>
           <p:nvSpPr>
-            <p:cNvPr id="21" name="TextBox 21"/>
+            <p:cNvPr id="20" name="TextBox 20"/>
             <p:cNvSpPr txBox="1"/>
             <p:nvPr/>
           </p:nvSpPr>
@@ -24340,7 +23970,7 @@
         </p:sp>
         <p:sp>
           <p:nvSpPr>
-            <p:cNvPr id="22" name="TextBox 22"/>
+            <p:cNvPr id="21" name="TextBox 21"/>
             <p:cNvSpPr txBox="1"/>
             <p:nvPr/>
           </p:nvSpPr>
@@ -24380,7 +24010,7 @@
         </p:sp>
         <p:sp>
           <p:nvSpPr>
-            <p:cNvPr id="23" name="TextBox 23"/>
+            <p:cNvPr id="22" name="TextBox 22"/>
             <p:cNvSpPr txBox="1"/>
             <p:nvPr/>
           </p:nvSpPr>
@@ -24420,7 +24050,7 @@
         </p:sp>
         <p:sp>
           <p:nvSpPr>
-            <p:cNvPr id="24" name="TextBox 24"/>
+            <p:cNvPr id="23" name="TextBox 23"/>
             <p:cNvSpPr txBox="1"/>
             <p:nvPr/>
           </p:nvSpPr>
@@ -24460,7 +24090,7 @@
         </p:sp>
         <p:sp>
           <p:nvSpPr>
-            <p:cNvPr id="25" name="TextBox 25"/>
+            <p:cNvPr id="24" name="TextBox 24"/>
             <p:cNvSpPr txBox="1"/>
             <p:nvPr/>
           </p:nvSpPr>
@@ -24500,7 +24130,7 @@
         </p:sp>
         <p:sp>
           <p:nvSpPr>
-            <p:cNvPr id="26" name="TextBox 26"/>
+            <p:cNvPr id="25" name="TextBox 25"/>
             <p:cNvSpPr txBox="1"/>
             <p:nvPr/>
           </p:nvSpPr>
@@ -24540,7 +24170,7 @@
         </p:sp>
         <p:sp>
           <p:nvSpPr>
-            <p:cNvPr id="27" name="TextBox 27"/>
+            <p:cNvPr id="26" name="TextBox 26"/>
             <p:cNvSpPr txBox="1"/>
             <p:nvPr/>
           </p:nvSpPr>
@@ -24580,7 +24210,7 @@
         </p:sp>
         <p:sp>
           <p:nvSpPr>
-            <p:cNvPr id="28" name="TextBox 28"/>
+            <p:cNvPr id="27" name="TextBox 27"/>
             <p:cNvSpPr txBox="1"/>
             <p:nvPr/>
           </p:nvSpPr>
@@ -24620,7 +24250,7 @@
         </p:sp>
         <p:sp>
           <p:nvSpPr>
-            <p:cNvPr id="29" name="TextBox 29"/>
+            <p:cNvPr id="28" name="TextBox 28"/>
             <p:cNvSpPr txBox="1"/>
             <p:nvPr/>
           </p:nvSpPr>
@@ -24660,7 +24290,7 @@
         </p:sp>
         <p:sp>
           <p:nvSpPr>
-            <p:cNvPr id="30" name="TextBox 30"/>
+            <p:cNvPr id="29" name="TextBox 29"/>
             <p:cNvSpPr txBox="1"/>
             <p:nvPr/>
           </p:nvSpPr>
@@ -24700,7 +24330,7 @@
         </p:sp>
         <p:sp>
           <p:nvSpPr>
-            <p:cNvPr id="31" name="TextBox 31"/>
+            <p:cNvPr id="30" name="TextBox 30"/>
             <p:cNvSpPr txBox="1"/>
             <p:nvPr/>
           </p:nvSpPr>
@@ -24740,7 +24370,7 @@
         </p:sp>
         <p:sp>
           <p:nvSpPr>
-            <p:cNvPr id="32" name="TextBox 32"/>
+            <p:cNvPr id="31" name="TextBox 31"/>
             <p:cNvSpPr txBox="1"/>
             <p:nvPr/>
           </p:nvSpPr>
@@ -24780,7 +24410,7 @@
         </p:sp>
         <p:sp>
           <p:nvSpPr>
-            <p:cNvPr id="33" name="TextBox 33"/>
+            <p:cNvPr id="32" name="TextBox 32"/>
             <p:cNvSpPr txBox="1"/>
             <p:nvPr/>
           </p:nvSpPr>
@@ -24820,7 +24450,7 @@
         </p:sp>
         <p:sp>
           <p:nvSpPr>
-            <p:cNvPr id="34" name="TextBox 34"/>
+            <p:cNvPr id="33" name="TextBox 33"/>
             <p:cNvSpPr txBox="1"/>
             <p:nvPr/>
           </p:nvSpPr>
@@ -24860,7 +24490,7 @@
         </p:sp>
         <p:sp>
           <p:nvSpPr>
-            <p:cNvPr id="35" name="TextBox 35"/>
+            <p:cNvPr id="34" name="TextBox 34"/>
             <p:cNvSpPr txBox="1"/>
             <p:nvPr/>
           </p:nvSpPr>
@@ -24900,7 +24530,7 @@
         </p:sp>
         <p:sp>
           <p:nvSpPr>
-            <p:cNvPr id="36" name="TextBox 36"/>
+            <p:cNvPr id="35" name="TextBox 35"/>
             <p:cNvSpPr txBox="1"/>
             <p:nvPr/>
           </p:nvSpPr>
@@ -24940,7 +24570,7 @@
         </p:sp>
         <p:sp>
           <p:nvSpPr>
-            <p:cNvPr id="37" name="TextBox 37"/>
+            <p:cNvPr id="36" name="TextBox 36"/>
             <p:cNvSpPr txBox="1"/>
             <p:nvPr/>
           </p:nvSpPr>
@@ -24980,7 +24610,7 @@
         </p:sp>
         <p:sp>
           <p:nvSpPr>
-            <p:cNvPr id="38" name="Rectangle 38"/>
+            <p:cNvPr id="37" name="Rectangle 37"/>
             <p:cNvSpPr/>
             <p:nvPr/>
           </p:nvSpPr>
@@ -25002,7 +24632,7 @@
         </p:sp>
         <p:sp>
           <p:nvSpPr>
-            <p:cNvPr id="39" name="Rectangle 39"/>
+            <p:cNvPr id="38" name="Rectangle 38"/>
             <p:cNvSpPr/>
             <p:nvPr/>
           </p:nvSpPr>
@@ -25024,7 +24654,7 @@
         </p:sp>
         <p:sp>
           <p:nvSpPr>
-            <p:cNvPr id="40" name="TextBox 40"/>
+            <p:cNvPr id="39" name="TextBox 39"/>
             <p:cNvSpPr txBox="1"/>
             <p:nvPr/>
           </p:nvSpPr>
@@ -25064,7 +24694,7 @@
         </p:sp>
         <p:sp>
           <p:nvSpPr>
-            <p:cNvPr id="41" name="Rectangle 41"/>
+            <p:cNvPr id="40" name="Rectangle 40"/>
             <p:cNvSpPr/>
             <p:nvPr/>
           </p:nvSpPr>
@@ -25086,7 +24716,7 @@
         </p:sp>
         <p:sp>
           <p:nvSpPr>
-            <p:cNvPr id="42" name="TextBox 42"/>
+            <p:cNvPr id="41" name="TextBox 41"/>
             <p:cNvSpPr txBox="1"/>
             <p:nvPr/>
           </p:nvSpPr>
@@ -25126,7 +24756,7 @@
         </p:sp>
         <p:sp>
           <p:nvSpPr>
-            <p:cNvPr id="43" name="TextBox 43"/>
+            <p:cNvPr id="42" name="TextBox 42"/>
             <p:cNvSpPr txBox="1"/>
             <p:nvPr/>
           </p:nvSpPr>
@@ -25166,7 +24796,7 @@
         </p:sp>
         <p:sp>
           <p:nvSpPr>
-            <p:cNvPr id="44" name="TextBox 44"/>
+            <p:cNvPr id="43" name="TextBox 43"/>
             <p:cNvSpPr txBox="1"/>
             <p:nvPr/>
           </p:nvSpPr>
@@ -25206,7 +24836,7 @@
         </p:sp>
         <p:sp>
           <p:nvSpPr>
-            <p:cNvPr id="45" name="TextBox 45"/>
+            <p:cNvPr id="44" name="TextBox 44"/>
             <p:cNvSpPr txBox="1"/>
             <p:nvPr/>
           </p:nvSpPr>
@@ -25246,7 +24876,7 @@
         </p:sp>
         <p:sp>
           <p:nvSpPr>
-            <p:cNvPr id="46" name="TextBox 46"/>
+            <p:cNvPr id="45" name="TextBox 45"/>
             <p:cNvSpPr txBox="1"/>
             <p:nvPr/>
           </p:nvSpPr>
@@ -25286,7 +24916,7 @@
         </p:sp>
         <p:sp>
           <p:nvSpPr>
-            <p:cNvPr id="47" name="TextBox 47"/>
+            <p:cNvPr id="46" name="TextBox 46"/>
             <p:cNvSpPr txBox="1"/>
             <p:nvPr/>
           </p:nvSpPr>
@@ -25326,7 +24956,7 @@
         </p:sp>
         <p:sp>
           <p:nvSpPr>
-            <p:cNvPr id="48" name="TextBox 48"/>
+            <p:cNvPr id="47" name="TextBox 47"/>
             <p:cNvSpPr txBox="1"/>
             <p:nvPr/>
           </p:nvSpPr>
@@ -25366,7 +24996,7 @@
         </p:sp>
         <p:sp>
           <p:nvSpPr>
-            <p:cNvPr id="49" name="TextBox 49"/>
+            <p:cNvPr id="48" name="TextBox 48"/>
             <p:cNvSpPr txBox="1"/>
             <p:nvPr/>
           </p:nvSpPr>
@@ -25406,7 +25036,7 @@
         </p:sp>
         <p:sp>
           <p:nvSpPr>
-            <p:cNvPr id="50" name="TextBox 50"/>
+            <p:cNvPr id="49" name="TextBox 49"/>
             <p:cNvSpPr txBox="1"/>
             <p:nvPr/>
           </p:nvSpPr>
@@ -25446,7 +25076,7 @@
         </p:sp>
         <p:sp>
           <p:nvSpPr>
-            <p:cNvPr id="51" name="TextBox 51"/>
+            <p:cNvPr id="50" name="TextBox 50"/>
             <p:cNvSpPr txBox="1"/>
             <p:nvPr/>
           </p:nvSpPr>
@@ -25486,7 +25116,7 @@
         </p:sp>
         <p:sp>
           <p:nvSpPr>
-            <p:cNvPr id="52" name="TextBox 52"/>
+            <p:cNvPr id="51" name="TextBox 51"/>
             <p:cNvSpPr txBox="1"/>
             <p:nvPr/>
           </p:nvSpPr>
@@ -25526,7 +25156,7 @@
         </p:sp>
         <p:sp>
           <p:nvSpPr>
-            <p:cNvPr id="53" name="TextBox 53"/>
+            <p:cNvPr id="52" name="TextBox 52"/>
             <p:cNvSpPr txBox="1"/>
             <p:nvPr/>
           </p:nvSpPr>
@@ -25566,7 +25196,7 @@
         </p:sp>
         <p:sp>
           <p:nvSpPr>
-            <p:cNvPr id="54" name="TextBox 54"/>
+            <p:cNvPr id="53" name="TextBox 53"/>
             <p:cNvSpPr txBox="1"/>
             <p:nvPr/>
           </p:nvSpPr>
@@ -25606,7 +25236,7 @@
         </p:sp>
         <p:sp>
           <p:nvSpPr>
-            <p:cNvPr id="55" name="TextBox 55"/>
+            <p:cNvPr id="54" name="TextBox 54"/>
             <p:cNvSpPr txBox="1"/>
             <p:nvPr/>
           </p:nvSpPr>
@@ -25646,7 +25276,7 @@
         </p:sp>
         <p:sp>
           <p:nvSpPr>
-            <p:cNvPr id="56" name="TextBox 56"/>
+            <p:cNvPr id="55" name="TextBox 55"/>
             <p:cNvSpPr txBox="1"/>
             <p:nvPr/>
           </p:nvSpPr>
@@ -25686,7 +25316,7 @@
         </p:sp>
         <p:sp>
           <p:nvSpPr>
-            <p:cNvPr id="57" name="TextBox 57"/>
+            <p:cNvPr id="56" name="TextBox 56"/>
             <p:cNvSpPr txBox="1"/>
             <p:nvPr/>
           </p:nvSpPr>
@@ -25726,7 +25356,7 @@
         </p:sp>
         <p:sp>
           <p:nvSpPr>
-            <p:cNvPr id="58" name="TextBox 58"/>
+            <p:cNvPr id="57" name="TextBox 57"/>
             <p:cNvSpPr txBox="1"/>
             <p:nvPr/>
           </p:nvSpPr>
@@ -25766,7 +25396,7 @@
         </p:sp>
         <p:sp>
           <p:nvSpPr>
-            <p:cNvPr id="59" name="Rectangle 59"/>
+            <p:cNvPr id="58" name="Rectangle 58"/>
             <p:cNvSpPr/>
             <p:nvPr/>
           </p:nvSpPr>
@@ -25788,7 +25418,7 @@
         </p:sp>
         <p:sp>
           <p:nvSpPr>
-            <p:cNvPr id="60" name="Rectangle 60"/>
+            <p:cNvPr id="59" name="Rectangle 59"/>
             <p:cNvSpPr/>
             <p:nvPr/>
           </p:nvSpPr>
@@ -25810,7 +25440,7 @@
         </p:sp>
         <p:sp>
           <p:nvSpPr>
-            <p:cNvPr id="61" name="TextBox 61"/>
+            <p:cNvPr id="60" name="TextBox 60"/>
             <p:cNvSpPr txBox="1"/>
             <p:nvPr/>
           </p:nvSpPr>
@@ -25850,7 +25480,7 @@
         </p:sp>
         <p:sp>
           <p:nvSpPr>
-            <p:cNvPr id="62" name="Rectangle 62"/>
+            <p:cNvPr id="61" name="Rectangle 61"/>
             <p:cNvSpPr/>
             <p:nvPr/>
           </p:nvSpPr>
@@ -25872,7 +25502,7 @@
         </p:sp>
         <p:sp>
           <p:nvSpPr>
-            <p:cNvPr id="63" name="TextBox 63"/>
+            <p:cNvPr id="62" name="TextBox 62"/>
             <p:cNvSpPr txBox="1"/>
             <p:nvPr/>
           </p:nvSpPr>
@@ -25912,7 +25542,7 @@
         </p:sp>
         <p:sp>
           <p:nvSpPr>
-            <p:cNvPr id="64" name="TextBox 64"/>
+            <p:cNvPr id="63" name="TextBox 63"/>
             <p:cNvSpPr txBox="1"/>
             <p:nvPr/>
           </p:nvSpPr>
@@ -25952,7 +25582,7 @@
         </p:sp>
         <p:sp>
           <p:nvSpPr>
-            <p:cNvPr id="65" name="TextBox 65"/>
+            <p:cNvPr id="64" name="TextBox 64"/>
             <p:cNvSpPr txBox="1"/>
             <p:nvPr/>
           </p:nvSpPr>
@@ -25992,7 +25622,7 @@
         </p:sp>
         <p:sp>
           <p:nvSpPr>
-            <p:cNvPr id="66" name="TextBox 66"/>
+            <p:cNvPr id="65" name="TextBox 65"/>
             <p:cNvSpPr txBox="1"/>
             <p:nvPr/>
           </p:nvSpPr>
@@ -26032,7 +25662,7 @@
         </p:sp>
         <p:sp>
           <p:nvSpPr>
-            <p:cNvPr id="67" name="TextBox 67"/>
+            <p:cNvPr id="66" name="TextBox 66"/>
             <p:cNvSpPr txBox="1"/>
             <p:nvPr/>
           </p:nvSpPr>
@@ -26072,7 +25702,7 @@
         </p:sp>
         <p:sp>
           <p:nvSpPr>
-            <p:cNvPr id="68" name="TextBox 68"/>
+            <p:cNvPr id="67" name="TextBox 67"/>
             <p:cNvSpPr txBox="1"/>
             <p:nvPr/>
           </p:nvSpPr>
@@ -26112,7 +25742,7 @@
         </p:sp>
         <p:sp>
           <p:nvSpPr>
-            <p:cNvPr id="69" name="TextBox 69"/>
+            <p:cNvPr id="68" name="TextBox 68"/>
             <p:cNvSpPr txBox="1"/>
             <p:nvPr/>
           </p:nvSpPr>
@@ -26152,7 +25782,7 @@
         </p:sp>
         <p:sp>
           <p:nvSpPr>
-            <p:cNvPr id="70" name="TextBox 70"/>
+            <p:cNvPr id="69" name="TextBox 69"/>
             <p:cNvSpPr txBox="1"/>
             <p:nvPr/>
           </p:nvSpPr>
@@ -26192,7 +25822,7 @@
         </p:sp>
         <p:sp>
           <p:nvSpPr>
-            <p:cNvPr id="71" name="TextBox 71"/>
+            <p:cNvPr id="70" name="TextBox 70"/>
             <p:cNvSpPr txBox="1"/>
             <p:nvPr/>
           </p:nvSpPr>
@@ -26232,7 +25862,7 @@
         </p:sp>
         <p:sp>
           <p:nvSpPr>
-            <p:cNvPr id="72" name="TextBox 72"/>
+            <p:cNvPr id="71" name="TextBox 71"/>
             <p:cNvSpPr txBox="1"/>
             <p:nvPr/>
           </p:nvSpPr>
@@ -26272,7 +25902,7 @@
         </p:sp>
         <p:sp>
           <p:nvSpPr>
-            <p:cNvPr id="73" name="TextBox 73"/>
+            <p:cNvPr id="72" name="TextBox 72"/>
             <p:cNvSpPr txBox="1"/>
             <p:nvPr/>
           </p:nvSpPr>
@@ -26312,7 +25942,7 @@
         </p:sp>
         <p:sp>
           <p:nvSpPr>
-            <p:cNvPr id="74" name="TextBox 74"/>
+            <p:cNvPr id="73" name="TextBox 73"/>
             <p:cNvSpPr txBox="1"/>
             <p:nvPr/>
           </p:nvSpPr>
@@ -26352,7 +25982,7 @@
         </p:sp>
         <p:sp>
           <p:nvSpPr>
-            <p:cNvPr id="75" name="TextBox 75"/>
+            <p:cNvPr id="74" name="TextBox 74"/>
             <p:cNvSpPr txBox="1"/>
             <p:nvPr/>
           </p:nvSpPr>
@@ -26392,7 +26022,7 @@
         </p:sp>
         <p:sp>
           <p:nvSpPr>
-            <p:cNvPr id="76" name="Rectangle 76"/>
+            <p:cNvPr id="75" name="Rectangle 75"/>
             <p:cNvSpPr/>
             <p:nvPr/>
           </p:nvSpPr>
@@ -26416,7 +26046,7 @@
         </p:sp>
         <p:pic>
           <p:nvPicPr>
-            <p:cNvPr id="77" name="Image 77"/>
+            <p:cNvPr id="76" name="Image 76"/>
             <p:cNvPicPr>
               <a:picLocks noChangeAspect="1"/>
             </p:cNvPicPr>
@@ -26460,2579 +26090,6 @@
 </file>
 
 <file path=ppt/slides/slide7.xml><?xml version="1.0" encoding="utf-8"?>
-<p:sld xmlns:a="http://schemas.openxmlformats.org/drawingml/2006/main" xmlns:r="http://schemas.openxmlformats.org/officeDocument/2006/relationships" xmlns:p="http://schemas.openxmlformats.org/presentationml/2006/main">
-  <p:cSld>
-    <p:bg>
-      <p:bgPr>
-        <a:solidFill>
-          <a:srgbClr val="FFFFFF"/>
-        </a:solidFill>
-        <a:effectLst/>
-      </p:bgPr>
-    </p:bg>
-    <p:spTree>
-      <p:nvGrpSpPr>
-        <p:cNvPr id="1" name=""/>
-        <p:cNvGrpSpPr/>
-        <p:nvPr/>
-      </p:nvGrpSpPr>
-      <p:grpSpPr>
-        <a:xfrm>
-          <a:off x="0" y="0"/>
-          <a:ext cx="0" cy="0"/>
-          <a:chOff x="0" y="0"/>
-          <a:chExt cx="0" cy="0"/>
-        </a:xfrm>
-      </p:grpSpPr>
-      <p:grpSp>
-        <p:nvGrpSpPr>
-          <p:cNvPr id="66" name="flower"/>
-          <p:cNvGrpSpPr/>
-          <p:nvPr/>
-        </p:nvGrpSpPr>
-        <p:grpSpPr>
-          <a:xfrm>
-            <a:off x="-1459594" y="250336"/>
-            <a:ext cx="15174556" cy="6260187"/>
-            <a:chOff x="-1459594" y="250336"/>
-            <a:chExt cx="15174556" cy="6260187"/>
-          </a:xfrm>
-        </p:grpSpPr>
-        <p:grpSp>
-          <p:nvGrpSpPr>
-            <p:cNvPr id="33" name="Group 33"/>
-            <p:cNvGrpSpPr/>
-            <p:nvPr/>
-          </p:nvGrpSpPr>
-          <p:grpSpPr>
-            <a:xfrm>
-              <a:off x="-1459594" y="250336"/>
-              <a:ext cx="3771874" cy="4203754"/>
-              <a:chOff x="-1459594" y="250336"/>
-              <a:chExt cx="3771874" cy="4203754"/>
-            </a:xfrm>
-          </p:grpSpPr>
-          <p:sp>
-            <p:nvSpPr>
-              <p:cNvPr id="2" name="Freeform 2"/>
-              <p:cNvSpPr/>
-              <p:nvPr/>
-            </p:nvSpPr>
-            <p:spPr>
-              <a:xfrm>
-                <a:off x="-340176" y="444503"/>
-                <a:ext cx="2358580" cy="4009587"/>
-              </a:xfrm>
-              <a:custGeom>
-                <a:avLst/>
-                <a:gdLst/>
-                <a:ahLst/>
-                <a:cxnLst/>
-                <a:rect l="l" t="t" r="r" b="b"/>
-                <a:pathLst>
-                  <a:path w="2358580" h="4009587">
-                    <a:moveTo>
-                      <a:pt x="0" y="4009587"/>
-                    </a:moveTo>
-                    <a:cubicBezTo>
-                      <a:pt x="235858" y="2476510"/>
-                      <a:pt x="943432" y="1179290"/>
-                      <a:pt x="2358580" y="0"/>
-                    </a:cubicBezTo>
-                  </a:path>
-                </a:pathLst>
-              </a:custGeom>
-              <a:noFill/>
-              <a:ln w="23586" cap="rnd">
-                <a:solidFill>
-                  <a:srgbClr val="C7CEE4"/>
-                </a:solidFill>
-              </a:ln>
-            </p:spPr>
-          </p:sp>
-          <p:grpSp>
-            <p:nvGrpSpPr>
-              <p:cNvPr id="10" name="Group 10"/>
-              <p:cNvGrpSpPr/>
-              <p:nvPr/>
-            </p:nvGrpSpPr>
-            <p:grpSpPr>
-              <a:xfrm>
-                <a:off x="-240332" y="1984019"/>
-                <a:ext cx="1276174" cy="1073649"/>
-                <a:chOff x="-240332" y="1984019"/>
-                <a:chExt cx="1276174" cy="1073649"/>
-              </a:xfrm>
-            </p:grpSpPr>
-            <p:sp>
-              <p:nvSpPr>
-                <p:cNvPr id="3" name="Freeform 3"/>
-                <p:cNvSpPr/>
-                <p:nvPr/>
-              </p:nvSpPr>
-              <p:spPr>
-                <a:xfrm>
-                  <a:off x="-119335" y="2024866"/>
-                  <a:ext cx="494511" cy="491651"/>
-                </a:xfrm>
-                <a:custGeom>
-                  <a:avLst/>
-                  <a:gdLst/>
-                  <a:ahLst/>
-                  <a:cxnLst/>
-                  <a:rect l="l" t="t" r="r" b="b"/>
-                  <a:pathLst>
-                    <a:path w="494511" h="491651">
-                      <a:moveTo>
-                        <a:pt x="405362" y="491651"/>
-                      </a:moveTo>
-                      <a:cubicBezTo>
-                        <a:pt x="172480" y="477253"/>
-                        <a:pt x="0" y="201227"/>
-                        <a:pt x="117895" y="31607"/>
-                      </a:cubicBezTo>
-                      <a:cubicBezTo>
-                        <a:pt x="322031" y="0"/>
-                        <a:pt x="494511" y="276026"/>
-                        <a:pt x="405362" y="491651"/>
-                      </a:cubicBezTo>
-                      <a:close/>
-                    </a:path>
-                  </a:pathLst>
-                </a:custGeom>
-                <a:solidFill>
-                  <a:srgbClr val="FFFFFF"/>
-                </a:solidFill>
-                <a:ln w="16510">
-                  <a:solidFill>
-                    <a:srgbClr val="C7CEE4"/>
-                  </a:solidFill>
-                  <a:round/>
-                </a:ln>
-              </p:spPr>
-            </p:sp>
-            <p:sp>
-              <p:nvSpPr>
-                <p:cNvPr id="4" name="Freeform 4"/>
-                <p:cNvSpPr/>
-                <p:nvPr/>
-              </p:nvSpPr>
-              <p:spPr>
-                <a:xfrm>
-                  <a:off x="227755" y="2041248"/>
-                  <a:ext cx="500108" cy="493422"/>
-                </a:xfrm>
-                <a:custGeom>
-                  <a:avLst/>
-                  <a:gdLst/>
-                  <a:ahLst/>
-                  <a:cxnLst/>
-                  <a:rect l="l" t="t" r="r" b="b"/>
-                  <a:pathLst>
-                    <a:path w="500108" h="493422">
-                      <a:moveTo>
-                        <a:pt x="58272" y="475268"/>
-                      </a:moveTo>
-                      <a:cubicBezTo>
-                        <a:pt x="0" y="249335"/>
-                        <a:pt x="209217" y="0"/>
-                        <a:pt x="406967" y="59710"/>
-                      </a:cubicBezTo>
-                      <a:cubicBezTo>
-                        <a:pt x="500108" y="244087"/>
-                        <a:pt x="290891" y="493422"/>
-                        <a:pt x="58272" y="475268"/>
-                      </a:cubicBezTo>
-                      <a:close/>
-                    </a:path>
-                  </a:pathLst>
-                </a:custGeom>
-                <a:solidFill>
-                  <a:srgbClr val="FFFFFF"/>
-                </a:solidFill>
-                <a:ln w="16510">
-                  <a:solidFill>
-                    <a:srgbClr val="C7CEE4"/>
-                  </a:solidFill>
-                  <a:round/>
-                </a:ln>
-              </p:spPr>
-            </p:sp>
-            <p:sp>
-              <p:nvSpPr>
-                <p:cNvPr id="5" name="Freeform 5"/>
-                <p:cNvSpPr/>
-                <p:nvPr/>
-              </p:nvSpPr>
-              <p:spPr>
-                <a:xfrm>
-                  <a:off x="286027" y="2391279"/>
-                  <a:ext cx="502973" cy="474009"/>
-                </a:xfrm>
-                <a:custGeom>
-                  <a:avLst/>
-                  <a:gdLst/>
-                  <a:ahLst/>
-                  <a:cxnLst/>
-                  <a:rect l="l" t="t" r="r" b="b"/>
-                  <a:pathLst>
-                    <a:path w="502973" h="474009">
-                      <a:moveTo>
-                        <a:pt x="0" y="125237"/>
-                      </a:moveTo>
-                      <a:cubicBezTo>
-                        <a:pt x="196868" y="0"/>
-                        <a:pt x="498652" y="121928"/>
-                        <a:pt x="502973" y="328451"/>
-                      </a:cubicBezTo>
-                      <a:cubicBezTo>
-                        <a:pt x="356402" y="474009"/>
-                        <a:pt x="54618" y="352081"/>
-                        <a:pt x="0" y="125237"/>
-                      </a:cubicBezTo>
-                      <a:close/>
-                    </a:path>
-                  </a:pathLst>
-                </a:custGeom>
-                <a:solidFill>
-                  <a:srgbClr val="FFFFFF"/>
-                </a:solidFill>
-                <a:ln w="16510">
-                  <a:solidFill>
-                    <a:srgbClr val="C7CEE4"/>
-                  </a:solidFill>
-                  <a:round/>
-                </a:ln>
-              </p:spPr>
-            </p:sp>
-            <p:sp>
-              <p:nvSpPr>
-                <p:cNvPr id="6" name="Freeform 6"/>
-                <p:cNvSpPr/>
-                <p:nvPr/>
-              </p:nvSpPr>
-              <p:spPr>
-                <a:xfrm>
-                  <a:off x="64459" y="2516516"/>
-                  <a:ext cx="401511" cy="541152"/>
-                </a:xfrm>
-                <a:custGeom>
-                  <a:avLst/>
-                  <a:gdLst/>
-                  <a:ahLst/>
-                  <a:cxnLst/>
-                  <a:rect l="l" t="t" r="r" b="b"/>
-                  <a:pathLst>
-                    <a:path w="401511" h="541152">
-                      <a:moveTo>
-                        <a:pt x="221568" y="0"/>
-                      </a:moveTo>
-                      <a:cubicBezTo>
-                        <a:pt x="401511" y="148532"/>
-                        <a:pt x="378806" y="473224"/>
-                        <a:pt x="183727" y="541152"/>
-                      </a:cubicBezTo>
-                      <a:cubicBezTo>
-                        <a:pt x="0" y="446735"/>
-                        <a:pt x="22705" y="122044"/>
-                        <a:pt x="221568" y="0"/>
-                      </a:cubicBezTo>
-                      <a:close/>
-                    </a:path>
-                  </a:pathLst>
-                </a:custGeom>
-                <a:solidFill>
-                  <a:srgbClr val="FFFFFF"/>
-                </a:solidFill>
-                <a:ln w="16510">
-                  <a:solidFill>
-                    <a:srgbClr val="C7CEE4"/>
-                  </a:solidFill>
-                  <a:round/>
-                </a:ln>
-              </p:spPr>
-            </p:sp>
-            <p:sp>
-              <p:nvSpPr>
-                <p:cNvPr id="7" name="Freeform 7"/>
-                <p:cNvSpPr/>
-                <p:nvPr/>
-              </p:nvSpPr>
-              <p:spPr>
-                <a:xfrm>
-                  <a:off x="-240332" y="2365099"/>
-                  <a:ext cx="526360" cy="447194"/>
-                </a:xfrm>
-                <a:custGeom>
-                  <a:avLst/>
-                  <a:gdLst/>
-                  <a:ahLst/>
-                  <a:cxnLst/>
-                  <a:rect l="l" t="t" r="r" b="b"/>
-                  <a:pathLst>
-                    <a:path w="526360" h="447194">
-                      <a:moveTo>
-                        <a:pt x="526360" y="151417"/>
-                      </a:moveTo>
-                      <a:cubicBezTo>
-                        <a:pt x="440702" y="368452"/>
-                        <a:pt x="124887" y="447194"/>
-                        <a:pt x="0" y="282653"/>
-                      </a:cubicBezTo>
-                      <a:cubicBezTo>
-                        <a:pt x="33021" y="78742"/>
-                        <a:pt x="348837" y="0"/>
-                        <a:pt x="526360" y="151417"/>
-                      </a:cubicBezTo>
-                      <a:close/>
-                    </a:path>
-                  </a:pathLst>
-                </a:custGeom>
-                <a:solidFill>
-                  <a:srgbClr val="FFFFFF"/>
-                </a:solidFill>
-                <a:ln w="16510">
-                  <a:solidFill>
-                    <a:srgbClr val="C7CEE4"/>
-                  </a:solidFill>
-                  <a:round/>
-                </a:ln>
-              </p:spPr>
-            </p:sp>
-            <p:sp>
-              <p:nvSpPr>
-                <p:cNvPr id="8" name="Freeform 8"/>
-                <p:cNvSpPr/>
-                <p:nvPr/>
-              </p:nvSpPr>
-              <p:spPr>
-                <a:xfrm>
-                  <a:off x="286027" y="1984019"/>
-                  <a:ext cx="749815" cy="795818"/>
-                </a:xfrm>
-                <a:custGeom>
-                  <a:avLst/>
-                  <a:gdLst/>
-                  <a:ahLst/>
-                  <a:cxnLst/>
-                  <a:rect l="l" t="t" r="r" b="b"/>
-                  <a:pathLst>
-                    <a:path w="749815" h="795818">
-                      <a:moveTo>
-                        <a:pt x="0" y="532497"/>
-                      </a:moveTo>
-                      <a:cubicBezTo>
-                        <a:pt x="131802" y="164187"/>
-                        <a:pt x="566084" y="0"/>
-                        <a:pt x="578996" y="388137"/>
-                      </a:cubicBezTo>
-                      <a:cubicBezTo>
-                        <a:pt x="749815" y="736904"/>
-                        <a:pt x="289286" y="795818"/>
-                        <a:pt x="0" y="532497"/>
-                      </a:cubicBezTo>
-                      <a:close/>
-                    </a:path>
-                  </a:pathLst>
-                </a:custGeom>
-                <a:solidFill>
-                  <a:srgbClr val="FFFFFF"/>
-                </a:solidFill>
-                <a:ln w="16510">
-                  <a:solidFill>
-                    <a:srgbClr val="C7CEE4"/>
-                  </a:solidFill>
-                  <a:round/>
-                </a:ln>
-              </p:spPr>
-            </p:sp>
-            <p:sp>
-              <p:nvSpPr>
-                <p:cNvPr id="9" name="Ellipse 9"/>
-                <p:cNvSpPr/>
-                <p:nvPr/>
-              </p:nvSpPr>
-              <p:spPr>
-                <a:xfrm rot="-7320000">
-                  <a:off x="227063" y="2457552"/>
-                  <a:ext cx="117929" cy="117929"/>
-                </a:xfrm>
-                <a:prstGeom prst="ellipse">
-                  <a:avLst/>
-                </a:prstGeom>
-                <a:solidFill>
-                  <a:srgbClr val="C7CEE4"/>
-                </a:solidFill>
-                <a:ln>
-                  <a:noFill/>
-                </a:ln>
-              </p:spPr>
-            </p:sp>
-          </p:grpSp>
-          <p:grpSp>
-            <p:nvGrpSpPr>
-              <p:cNvPr id="18" name="Group 18"/>
-              <p:cNvGrpSpPr/>
-              <p:nvPr/>
-            </p:nvGrpSpPr>
-            <p:grpSpPr>
-              <a:xfrm>
-                <a:off x="469449" y="1110767"/>
-                <a:ext cx="1053246" cy="875867"/>
-                <a:chOff x="469449" y="1110767"/>
-                <a:chExt cx="1053246" cy="875867"/>
-              </a:xfrm>
-            </p:grpSpPr>
-            <p:sp>
-              <p:nvSpPr>
-                <p:cNvPr id="11" name="Freeform 11"/>
-                <p:cNvSpPr/>
-                <p:nvPr/>
-              </p:nvSpPr>
-              <p:spPr>
-                <a:xfrm>
-                  <a:off x="638778" y="1110767"/>
-                  <a:ext cx="400557" cy="430476"/>
-                </a:xfrm>
-                <a:custGeom>
-                  <a:avLst/>
-                  <a:gdLst/>
-                  <a:ahLst/>
-                  <a:cxnLst/>
-                  <a:rect l="l" t="t" r="r" b="b"/>
-                  <a:pathLst>
-                    <a:path w="400557" h="430476">
-                      <a:moveTo>
-                        <a:pt x="291142" y="430476"/>
-                      </a:moveTo>
-                      <a:cubicBezTo>
-                        <a:pt x="98893" y="380481"/>
-                        <a:pt x="0" y="122856"/>
-                        <a:pt x="125897" y="0"/>
-                      </a:cubicBezTo>
-                      <a:cubicBezTo>
-                        <a:pt x="301664" y="7058"/>
-                        <a:pt x="400557" y="264683"/>
-                        <a:pt x="291142" y="430476"/>
-                      </a:cubicBezTo>
-                      <a:close/>
-                    </a:path>
-                  </a:pathLst>
-                </a:custGeom>
-                <a:solidFill>
-                  <a:srgbClr val="FFFFFF"/>
-                </a:solidFill>
-                <a:ln w="16510">
-                  <a:solidFill>
-                    <a:srgbClr val="C7CEE4"/>
-                  </a:solidFill>
-                  <a:round/>
-                </a:ln>
-              </p:spPr>
-            </p:sp>
-            <p:sp>
-              <p:nvSpPr>
-                <p:cNvPr id="12" name="Freeform 12"/>
-                <p:cNvSpPr/>
-                <p:nvPr/>
-              </p:nvSpPr>
-              <p:spPr>
-                <a:xfrm>
-                  <a:off x="918060" y="1169291"/>
-                  <a:ext cx="417806" cy="424779"/>
-                </a:xfrm>
-                <a:custGeom>
-                  <a:avLst/>
-                  <a:gdLst/>
-                  <a:ahLst/>
-                  <a:cxnLst/>
-                  <a:rect l="l" t="t" r="r" b="b"/>
-                  <a:pathLst>
-                    <a:path w="417806" h="424779">
-                      <a:moveTo>
-                        <a:pt x="11860" y="371952"/>
-                      </a:moveTo>
-                      <a:cubicBezTo>
-                        <a:pt x="0" y="173663"/>
-                        <a:pt x="214456" y="0"/>
-                        <a:pt x="370204" y="81771"/>
-                      </a:cubicBezTo>
-                      <a:cubicBezTo>
-                        <a:pt x="417806" y="251116"/>
-                        <a:pt x="203349" y="424779"/>
-                        <a:pt x="11860" y="371952"/>
-                      </a:cubicBezTo>
-                      <a:close/>
-                    </a:path>
-                  </a:pathLst>
-                </a:custGeom>
-                <a:solidFill>
-                  <a:srgbClr val="FFFFFF"/>
-                </a:solidFill>
-                <a:ln w="16510">
-                  <a:solidFill>
-                    <a:srgbClr val="C7CEE4"/>
-                  </a:solidFill>
-                  <a:round/>
-                </a:ln>
-              </p:spPr>
-            </p:sp>
-            <p:sp>
-              <p:nvSpPr>
-                <p:cNvPr id="13" name="Freeform 13"/>
-                <p:cNvSpPr/>
-                <p:nvPr/>
-              </p:nvSpPr>
-              <p:spPr>
-                <a:xfrm>
-                  <a:off x="929920" y="1468689"/>
-                  <a:ext cx="416353" cy="421291"/>
-                </a:xfrm>
-                <a:custGeom>
-                  <a:avLst/>
-                  <a:gdLst/>
-                  <a:ahLst/>
-                  <a:cxnLst/>
-                  <a:rect l="l" t="t" r="r" b="b"/>
-                  <a:pathLst>
-                    <a:path w="416353" h="421291">
-                      <a:moveTo>
-                        <a:pt x="0" y="72554"/>
-                      </a:moveTo>
-                      <a:cubicBezTo>
-                        <a:pt x="184919" y="0"/>
-                        <a:pt x="416353" y="150295"/>
-                        <a:pt x="386713" y="323688"/>
-                      </a:cubicBezTo>
-                      <a:cubicBezTo>
-                        <a:pt x="240367" y="421291"/>
-                        <a:pt x="8932" y="270996"/>
-                        <a:pt x="0" y="72554"/>
-                      </a:cubicBezTo>
-                      <a:close/>
-                    </a:path>
-                  </a:pathLst>
-                </a:custGeom>
-                <a:solidFill>
-                  <a:srgbClr val="FFFFFF"/>
-                </a:solidFill>
-                <a:ln w="16510">
-                  <a:solidFill>
-                    <a:srgbClr val="C7CEE4"/>
-                  </a:solidFill>
-                  <a:round/>
-                </a:ln>
-              </p:spPr>
-            </p:sp>
-            <p:sp>
-              <p:nvSpPr>
-                <p:cNvPr id="14" name="Freeform 14"/>
-                <p:cNvSpPr/>
-                <p:nvPr/>
-              </p:nvSpPr>
-              <p:spPr>
-                <a:xfrm>
-                  <a:off x="672528" y="1541243"/>
-                  <a:ext cx="383537" cy="445391"/>
-                </a:xfrm>
-                <a:custGeom>
-                  <a:avLst/>
-                  <a:gdLst/>
-                  <a:ahLst/>
-                  <a:cxnLst/>
-                  <a:rect l="l" t="t" r="r" b="b"/>
-                  <a:pathLst>
-                    <a:path w="383537" h="445391">
-                      <a:moveTo>
-                        <a:pt x="257392" y="0"/>
-                      </a:moveTo>
-                      <a:cubicBezTo>
-                        <a:pt x="383537" y="153448"/>
-                        <a:pt x="312115" y="419999"/>
-                        <a:pt x="138050" y="445391"/>
-                      </a:cubicBezTo>
-                      <a:cubicBezTo>
-                        <a:pt x="0" y="336368"/>
-                        <a:pt x="71422" y="69817"/>
-                        <a:pt x="257392" y="0"/>
-                      </a:cubicBezTo>
-                      <a:close/>
-                    </a:path>
-                  </a:pathLst>
-                </a:custGeom>
-                <a:solidFill>
-                  <a:srgbClr val="FFFFFF"/>
-                </a:solidFill>
-                <a:ln w="16510">
-                  <a:solidFill>
-                    <a:srgbClr val="C7CEE4"/>
-                  </a:solidFill>
-                  <a:round/>
-                </a:ln>
-              </p:spPr>
-            </p:sp>
-            <p:sp>
-              <p:nvSpPr>
-                <p:cNvPr id="15" name="Freeform 15"/>
-                <p:cNvSpPr/>
-                <p:nvPr/>
-              </p:nvSpPr>
-              <p:spPr>
-                <a:xfrm>
-                  <a:off x="469449" y="1385950"/>
-                  <a:ext cx="460471" cy="337125"/>
-                </a:xfrm>
-                <a:custGeom>
-                  <a:avLst/>
-                  <a:gdLst/>
-                  <a:ahLst/>
-                  <a:cxnLst/>
-                  <a:rect l="l" t="t" r="r" b="b"/>
-                  <a:pathLst>
-                    <a:path w="460471" h="337125">
-                      <a:moveTo>
-                        <a:pt x="460471" y="155293"/>
-                      </a:moveTo>
-                      <a:cubicBezTo>
-                        <a:pt x="353514" y="322683"/>
-                        <a:pt x="77938" y="337125"/>
-                        <a:pt x="0" y="179425"/>
-                      </a:cubicBezTo>
-                      <a:cubicBezTo>
-                        <a:pt x="61027" y="14442"/>
-                        <a:pt x="336603" y="0"/>
-                        <a:pt x="460471" y="155293"/>
-                      </a:cubicBezTo>
-                      <a:close/>
-                    </a:path>
-                  </a:pathLst>
-                </a:custGeom>
-                <a:solidFill>
-                  <a:srgbClr val="FFFFFF"/>
-                </a:solidFill>
-                <a:ln w="16510">
-                  <a:solidFill>
-                    <a:srgbClr val="C7CEE4"/>
-                  </a:solidFill>
-                  <a:round/>
-                </a:ln>
-              </p:spPr>
-            </p:sp>
-            <p:sp>
-              <p:nvSpPr>
-                <p:cNvPr id="16" name="Freeform 16"/>
-                <p:cNvSpPr/>
-                <p:nvPr/>
-              </p:nvSpPr>
-              <p:spPr>
-                <a:xfrm>
-                  <a:off x="929920" y="1188733"/>
-                  <a:ext cx="592775" cy="644659"/>
-                </a:xfrm>
-                <a:custGeom>
-                  <a:avLst/>
-                  <a:gdLst/>
-                  <a:ahLst/>
-                  <a:cxnLst/>
-                  <a:rect l="l" t="t" r="r" b="b"/>
-                  <a:pathLst>
-                    <a:path w="592775" h="644659">
-                      <a:moveTo>
-                        <a:pt x="0" y="352510"/>
-                      </a:moveTo>
-                      <a:cubicBezTo>
-                        <a:pt x="169709" y="66575"/>
-                        <a:pt x="558990" y="0"/>
-                        <a:pt x="506400" y="325971"/>
-                      </a:cubicBezTo>
-                      <a:cubicBezTo>
-                        <a:pt x="592775" y="644659"/>
-                        <a:pt x="198668" y="619140"/>
-                        <a:pt x="0" y="352510"/>
-                      </a:cubicBezTo>
-                      <a:close/>
-                    </a:path>
-                  </a:pathLst>
-                </a:custGeom>
-                <a:solidFill>
-                  <a:srgbClr val="FFFFFF"/>
-                </a:solidFill>
-                <a:ln w="16510">
-                  <a:solidFill>
-                    <a:srgbClr val="C7CEE4"/>
-                  </a:solidFill>
-                  <a:round/>
-                </a:ln>
-              </p:spPr>
-            </p:sp>
-            <p:sp>
-              <p:nvSpPr>
-                <p:cNvPr id="17" name="Ellipse 17"/>
-                <p:cNvSpPr/>
-                <p:nvPr/>
-              </p:nvSpPr>
-              <p:spPr>
-                <a:xfrm rot="-6660000">
-                  <a:off x="870955" y="1482279"/>
-                  <a:ext cx="117929" cy="117929"/>
-                </a:xfrm>
-                <a:prstGeom prst="ellipse">
-                  <a:avLst/>
-                </a:prstGeom>
-                <a:solidFill>
-                  <a:srgbClr val="C7CEE4"/>
-                </a:solidFill>
-                <a:ln>
-                  <a:noFill/>
-                </a:ln>
-              </p:spPr>
-            </p:sp>
-          </p:grpSp>
-          <p:grpSp>
-            <p:nvGrpSpPr>
-              <p:cNvPr id="26" name="Group 26"/>
-              <p:cNvGrpSpPr/>
-              <p:nvPr/>
-            </p:nvGrpSpPr>
-            <p:grpSpPr>
-              <a:xfrm>
-                <a:off x="1433635" y="250336"/>
-                <a:ext cx="878645" cy="721511"/>
-                <a:chOff x="1433635" y="250336"/>
-                <a:chExt cx="878645" cy="721511"/>
-              </a:xfrm>
-            </p:grpSpPr>
-            <p:sp>
-              <p:nvSpPr>
-                <p:cNvPr id="19" name="Freeform 19"/>
-                <p:cNvSpPr/>
-                <p:nvPr/>
-              </p:nvSpPr>
-              <p:spPr>
-                <a:xfrm>
-                  <a:off x="1616351" y="250336"/>
-                  <a:ext cx="306482" cy="372240"/>
-                </a:xfrm>
-                <a:custGeom>
-                  <a:avLst/>
-                  <a:gdLst/>
-                  <a:ahLst/>
-                  <a:cxnLst/>
-                  <a:rect l="l" t="t" r="r" b="b"/>
-                  <a:pathLst>
-                    <a:path w="306482" h="372240">
-                      <a:moveTo>
-                        <a:pt x="194499" y="372240"/>
-                      </a:moveTo>
-                      <a:cubicBezTo>
-                        <a:pt x="45221" y="306098"/>
-                        <a:pt x="0" y="81829"/>
-                        <a:pt x="119442" y="0"/>
-                      </a:cubicBezTo>
-                      <a:cubicBezTo>
-                        <a:pt x="261261" y="29149"/>
-                        <a:pt x="306482" y="253418"/>
-                        <a:pt x="194499" y="372240"/>
-                      </a:cubicBezTo>
-                      <a:close/>
-                    </a:path>
-                  </a:pathLst>
-                </a:custGeom>
-                <a:solidFill>
-                  <a:srgbClr val="FFFFFF"/>
-                </a:solidFill>
-                <a:ln w="16510">
-                  <a:solidFill>
-                    <a:srgbClr val="C7CEE4"/>
-                  </a:solidFill>
-                  <a:round/>
-                </a:ln>
-              </p:spPr>
-            </p:sp>
-            <p:sp>
-              <p:nvSpPr>
-                <p:cNvPr id="20" name="Freeform 20"/>
-                <p:cNvSpPr/>
-                <p:nvPr/>
-              </p:nvSpPr>
-              <p:spPr>
-                <a:xfrm>
-                  <a:off x="1810850" y="347855"/>
-                  <a:ext cx="346929" cy="344506"/>
-                </a:xfrm>
-                <a:custGeom>
-                  <a:avLst/>
-                  <a:gdLst/>
-                  <a:ahLst/>
-                  <a:cxnLst/>
-                  <a:rect l="l" t="t" r="r" b="b"/>
-                  <a:pathLst>
-                    <a:path w="346929" h="344506">
-                      <a:moveTo>
-                        <a:pt x="0" y="274721"/>
-                      </a:moveTo>
-                      <a:cubicBezTo>
-                        <a:pt x="16775" y="112310"/>
-                        <a:pt x="216094" y="0"/>
-                        <a:pt x="330827" y="88310"/>
-                      </a:cubicBezTo>
-                      <a:cubicBezTo>
-                        <a:pt x="346929" y="232196"/>
-                        <a:pt x="147611" y="344506"/>
-                        <a:pt x="0" y="274721"/>
-                      </a:cubicBezTo>
-                      <a:close/>
-                    </a:path>
-                  </a:pathLst>
-                </a:custGeom>
-                <a:solidFill>
-                  <a:srgbClr val="FFFFFF"/>
-                </a:solidFill>
-                <a:ln w="16510">
-                  <a:solidFill>
-                    <a:srgbClr val="C7CEE4"/>
-                  </a:solidFill>
-                  <a:round/>
-                </a:ln>
-              </p:spPr>
-            </p:sp>
-            <p:sp>
-              <p:nvSpPr>
-                <p:cNvPr id="21" name="Freeform 21"/>
-                <p:cNvSpPr/>
-                <p:nvPr/>
-              </p:nvSpPr>
-              <p:spPr>
-                <a:xfrm>
-                  <a:off x="1790095" y="588343"/>
-                  <a:ext cx="348807" cy="351042"/>
-                </a:xfrm>
-                <a:custGeom>
-                  <a:avLst/>
-                  <a:gdLst/>
-                  <a:ahLst/>
-                  <a:cxnLst/>
-                  <a:rect l="l" t="t" r="r" b="b"/>
-                  <a:pathLst>
-                    <a:path w="348807" h="351042">
-                      <a:moveTo>
-                        <a:pt x="20755" y="34233"/>
-                      </a:moveTo>
-                      <a:cubicBezTo>
-                        <a:pt x="180401" y="0"/>
-                        <a:pt x="348807" y="154857"/>
-                        <a:pt x="300274" y="291265"/>
-                      </a:cubicBezTo>
-                      <a:cubicBezTo>
-                        <a:pt x="168406" y="351042"/>
-                        <a:pt x="0" y="196184"/>
-                        <a:pt x="20755" y="34233"/>
-                      </a:cubicBezTo>
-                      <a:close/>
-                    </a:path>
-                  </a:pathLst>
-                </a:custGeom>
-                <a:solidFill>
-                  <a:srgbClr val="FFFFFF"/>
-                </a:solidFill>
-                <a:ln w="16510">
-                  <a:solidFill>
-                    <a:srgbClr val="C7CEE4"/>
-                  </a:solidFill>
-                  <a:round/>
-                </a:ln>
-              </p:spPr>
-            </p:sp>
-            <p:sp>
-              <p:nvSpPr>
-                <p:cNvPr id="22" name="Freeform 22"/>
-                <p:cNvSpPr/>
-                <p:nvPr/>
-              </p:nvSpPr>
-              <p:spPr>
-                <a:xfrm>
-                  <a:off x="1555174" y="622576"/>
-                  <a:ext cx="337567" cy="349271"/>
-                </a:xfrm>
-                <a:custGeom>
-                  <a:avLst/>
-                  <a:gdLst/>
-                  <a:ahLst/>
-                  <a:cxnLst/>
-                  <a:rect l="l" t="t" r="r" b="b"/>
-                  <a:pathLst>
-                    <a:path w="337567" h="349271">
-                      <a:moveTo>
-                        <a:pt x="255676" y="0"/>
-                      </a:moveTo>
-                      <a:cubicBezTo>
-                        <a:pt x="337567" y="141254"/>
-                        <a:pt x="242329" y="349271"/>
-                        <a:pt x="97601" y="345266"/>
-                      </a:cubicBezTo>
-                      <a:cubicBezTo>
-                        <a:pt x="0" y="238324"/>
-                        <a:pt x="95238" y="30307"/>
-                        <a:pt x="255676" y="0"/>
-                      </a:cubicBezTo>
-                      <a:close/>
-                    </a:path>
-                  </a:pathLst>
-                </a:custGeom>
-                <a:solidFill>
-                  <a:srgbClr val="FFFFFF"/>
-                </a:solidFill>
-                <a:ln w="16510">
-                  <a:solidFill>
-                    <a:srgbClr val="C7CEE4"/>
-                  </a:solidFill>
-                  <a:round/>
-                </a:ln>
-              </p:spPr>
-            </p:sp>
-            <p:sp>
-              <p:nvSpPr>
-                <p:cNvPr id="23" name="Freeform 23"/>
-                <p:cNvSpPr/>
-                <p:nvPr/>
-              </p:nvSpPr>
-              <p:spPr>
-                <a:xfrm>
-                  <a:off x="1433635" y="453060"/>
-                  <a:ext cx="377215" cy="291049"/>
-                </a:xfrm>
-                <a:custGeom>
-                  <a:avLst/>
-                  <a:gdLst/>
-                  <a:ahLst/>
-                  <a:cxnLst/>
-                  <a:rect l="l" t="t" r="r" b="b"/>
-                  <a:pathLst>
-                    <a:path w="377215" h="291049">
-                      <a:moveTo>
-                        <a:pt x="377215" y="169516"/>
-                      </a:moveTo>
-                      <a:cubicBezTo>
-                        <a:pt x="268180" y="291049"/>
-                        <a:pt x="40914" y="264753"/>
-                        <a:pt x="0" y="125871"/>
-                      </a:cubicBezTo>
-                      <a:cubicBezTo>
-                        <a:pt x="71547" y="0"/>
-                        <a:pt x="298813" y="26296"/>
-                        <a:pt x="377215" y="169516"/>
-                      </a:cubicBezTo>
-                      <a:close/>
-                    </a:path>
-                  </a:pathLst>
-                </a:custGeom>
-                <a:solidFill>
-                  <a:srgbClr val="FFFFFF"/>
-                </a:solidFill>
-                <a:ln w="16510">
-                  <a:solidFill>
-                    <a:srgbClr val="C7CEE4"/>
-                  </a:solidFill>
-                  <a:round/>
-                </a:ln>
-              </p:spPr>
-            </p:sp>
-            <p:sp>
-              <p:nvSpPr>
-                <p:cNvPr id="24" name="Freeform 24"/>
-                <p:cNvSpPr/>
-                <p:nvPr/>
-              </p:nvSpPr>
-              <p:spPr>
-                <a:xfrm>
-                  <a:off x="1810850" y="413483"/>
-                  <a:ext cx="501430" cy="527164"/>
-                </a:xfrm>
-                <a:custGeom>
-                  <a:avLst/>
-                  <a:gdLst/>
-                  <a:ahLst/>
-                  <a:cxnLst/>
-                  <a:rect l="l" t="t" r="r" b="b"/>
-                  <a:pathLst>
-                    <a:path w="501430" h="527164">
-                      <a:moveTo>
-                        <a:pt x="0" y="209093"/>
-                      </a:moveTo>
-                      <a:cubicBezTo>
-                        <a:pt x="177280" y="484"/>
-                        <a:pt x="501430" y="0"/>
-                        <a:pt x="414936" y="257103"/>
-                      </a:cubicBezTo>
-                      <a:cubicBezTo>
-                        <a:pt x="440435" y="527164"/>
-                        <a:pt x="124960" y="452673"/>
-                        <a:pt x="0" y="209093"/>
-                      </a:cubicBezTo>
-                      <a:close/>
-                    </a:path>
-                  </a:pathLst>
-                </a:custGeom>
-                <a:solidFill>
-                  <a:srgbClr val="FFFFFF"/>
-                </a:solidFill>
-                <a:ln w="16510">
-                  <a:solidFill>
-                    <a:srgbClr val="C7CEE4"/>
-                  </a:solidFill>
-                  <a:round/>
-                </a:ln>
-              </p:spPr>
-            </p:sp>
-            <p:sp>
-              <p:nvSpPr>
-                <p:cNvPr id="25" name="Ellipse 25"/>
-                <p:cNvSpPr/>
-                <p:nvPr/>
-              </p:nvSpPr>
-              <p:spPr>
-                <a:xfrm rot="-6084000">
-                  <a:off x="1751885" y="563611"/>
-                  <a:ext cx="117929" cy="117929"/>
-                </a:xfrm>
-                <a:prstGeom prst="ellipse">
-                  <a:avLst/>
-                </a:prstGeom>
-                <a:solidFill>
-                  <a:srgbClr val="C7CEE4"/>
-                </a:solidFill>
-                <a:ln>
-                  <a:noFill/>
-                </a:ln>
-              </p:spPr>
-            </p:sp>
-          </p:grpSp>
-          <p:grpSp>
-            <p:nvGrpSpPr>
-              <p:cNvPr id="29" name="Group 29"/>
-              <p:cNvGrpSpPr/>
-              <p:nvPr/>
-            </p:nvGrpSpPr>
-            <p:grpSpPr>
-              <a:xfrm>
-                <a:off x="-1459594" y="3204042"/>
-                <a:ext cx="1225554" cy="707574"/>
-                <a:chOff x="-1459594" y="3204042"/>
-                <a:chExt cx="1225554" cy="707574"/>
-              </a:xfrm>
-            </p:grpSpPr>
-            <p:sp>
-              <p:nvSpPr>
-                <p:cNvPr id="27" name="Freeform 27"/>
-                <p:cNvSpPr/>
-                <p:nvPr/>
-              </p:nvSpPr>
-              <p:spPr>
-                <a:xfrm>
-                  <a:off x="-1459594" y="3204042"/>
-                  <a:ext cx="1225554" cy="707574"/>
-                </a:xfrm>
-                <a:custGeom>
-                  <a:avLst/>
-                  <a:gdLst/>
-                  <a:ahLst/>
-                  <a:cxnLst/>
-                  <a:rect l="l" t="t" r="r" b="b"/>
-                  <a:pathLst>
-                    <a:path w="1225554" h="707574">
-                      <a:moveTo>
-                        <a:pt x="1225554" y="707574"/>
-                      </a:moveTo>
-                      <a:cubicBezTo>
-                        <a:pt x="775338" y="638283"/>
-                        <a:pt x="285116" y="355254"/>
-                        <a:pt x="0" y="0"/>
-                      </a:cubicBezTo>
-                      <a:cubicBezTo>
-                        <a:pt x="450217" y="69291"/>
-                        <a:pt x="940438" y="352321"/>
-                        <a:pt x="1225554" y="707574"/>
-                      </a:cubicBezTo>
-                      <a:close/>
-                    </a:path>
-                  </a:pathLst>
-                </a:custGeom>
-                <a:solidFill>
-                  <a:srgbClr val="FFFFFF"/>
-                </a:solidFill>
-                <a:ln w="16510">
-                  <a:solidFill>
-                    <a:srgbClr val="C7CEE4"/>
-                  </a:solidFill>
-                  <a:round/>
-                </a:ln>
-              </p:spPr>
-            </p:sp>
-            <p:sp>
-              <p:nvSpPr>
-                <p:cNvPr id="28" name="Freeform 28"/>
-                <p:cNvSpPr/>
-                <p:nvPr/>
-              </p:nvSpPr>
-              <p:spPr>
-                <a:xfrm>
-                  <a:off x="-1275761" y="3310178"/>
-                  <a:ext cx="943677" cy="544832"/>
-                </a:xfrm>
-                <a:custGeom>
-                  <a:avLst/>
-                  <a:gdLst/>
-                  <a:ahLst/>
-                  <a:cxnLst/>
-                  <a:rect l="l" t="t" r="r" b="b"/>
-                  <a:pathLst>
-                    <a:path w="943677" h="544832">
-                      <a:moveTo>
-                        <a:pt x="943677" y="544832"/>
-                      </a:moveTo>
-                      <a:lnTo>
-                        <a:pt x="0" y="0"/>
-                      </a:lnTo>
-                    </a:path>
-                  </a:pathLst>
-                </a:custGeom>
-                <a:noFill/>
-                <a:ln w="9434">
-                  <a:solidFill>
-                    <a:srgbClr val="C7CEE4"/>
-                  </a:solidFill>
-                </a:ln>
-              </p:spPr>
-            </p:sp>
-          </p:grpSp>
-          <p:grpSp>
-            <p:nvGrpSpPr>
-              <p:cNvPr id="32" name="Group 32"/>
-              <p:cNvGrpSpPr/>
-              <p:nvPr/>
-            </p:nvGrpSpPr>
-            <p:grpSpPr>
-              <a:xfrm>
-                <a:off x="-113752" y="2767705"/>
-                <a:ext cx="1225554" cy="707574"/>
-                <a:chOff x="-113752" y="2767705"/>
-                <a:chExt cx="1225554" cy="707574"/>
-              </a:xfrm>
-            </p:grpSpPr>
-            <p:sp>
-              <p:nvSpPr>
-                <p:cNvPr id="30" name="Freeform 30"/>
-                <p:cNvSpPr/>
-                <p:nvPr/>
-              </p:nvSpPr>
-              <p:spPr>
-                <a:xfrm>
-                  <a:off x="-113752" y="2767705"/>
-                  <a:ext cx="1225554" cy="707574"/>
-                </a:xfrm>
-                <a:custGeom>
-                  <a:avLst/>
-                  <a:gdLst/>
-                  <a:ahLst/>
-                  <a:cxnLst/>
-                  <a:rect l="l" t="t" r="r" b="b"/>
-                  <a:pathLst>
-                    <a:path w="1225554" h="707574">
-                      <a:moveTo>
-                        <a:pt x="0" y="707574"/>
-                      </a:moveTo>
-                      <a:cubicBezTo>
-                        <a:pt x="285116" y="352321"/>
-                        <a:pt x="775338" y="69291"/>
-                        <a:pt x="1225554" y="0"/>
-                      </a:cubicBezTo>
-                      <a:cubicBezTo>
-                        <a:pt x="940438" y="355254"/>
-                        <a:pt x="450217" y="638283"/>
-                        <a:pt x="0" y="707574"/>
-                      </a:cubicBezTo>
-                      <a:close/>
-                    </a:path>
-                  </a:pathLst>
-                </a:custGeom>
-                <a:solidFill>
-                  <a:srgbClr val="FFFFFF"/>
-                </a:solidFill>
-                <a:ln w="16510">
-                  <a:solidFill>
-                    <a:srgbClr val="C7CEE4"/>
-                  </a:solidFill>
-                  <a:round/>
-                </a:ln>
-              </p:spPr>
-            </p:sp>
-            <p:sp>
-              <p:nvSpPr>
-                <p:cNvPr id="31" name="Freeform 31"/>
-                <p:cNvSpPr/>
-                <p:nvPr/>
-              </p:nvSpPr>
-              <p:spPr>
-                <a:xfrm>
-                  <a:off x="-15708" y="2873841"/>
-                  <a:ext cx="943677" cy="544832"/>
-                </a:xfrm>
-                <a:custGeom>
-                  <a:avLst/>
-                  <a:gdLst/>
-                  <a:ahLst/>
-                  <a:cxnLst/>
-                  <a:rect l="l" t="t" r="r" b="b"/>
-                  <a:pathLst>
-                    <a:path w="943677" h="544832">
-                      <a:moveTo>
-                        <a:pt x="0" y="544832"/>
-                      </a:moveTo>
-                      <a:lnTo>
-                        <a:pt x="943677" y="0"/>
-                      </a:lnTo>
-                    </a:path>
-                  </a:pathLst>
-                </a:custGeom>
-                <a:noFill/>
-                <a:ln w="9434">
-                  <a:solidFill>
-                    <a:srgbClr val="C7CEE4"/>
-                  </a:solidFill>
-                </a:ln>
-              </p:spPr>
-            </p:sp>
-          </p:grpSp>
-        </p:grpSp>
-        <p:grpSp>
-          <p:nvGrpSpPr>
-            <p:cNvPr id="65" name="Group 65"/>
-            <p:cNvGrpSpPr/>
-            <p:nvPr/>
-          </p:nvGrpSpPr>
-          <p:grpSpPr>
-            <a:xfrm>
-              <a:off x="9362730" y="1659960"/>
-              <a:ext cx="4352232" cy="4850563"/>
-              <a:chOff x="9362730" y="1659960"/>
-              <a:chExt cx="4352232" cy="4850563"/>
-            </a:xfrm>
-          </p:grpSpPr>
-          <p:sp>
-            <p:nvSpPr>
-              <p:cNvPr id="34" name="Freeform 34"/>
-              <p:cNvSpPr/>
-              <p:nvPr/>
-            </p:nvSpPr>
-            <p:spPr>
-              <a:xfrm>
-                <a:off x="9701822" y="1659960"/>
-                <a:ext cx="2721483" cy="4626521"/>
-              </a:xfrm>
-              <a:custGeom>
-                <a:avLst/>
-                <a:gdLst/>
-                <a:ahLst/>
-                <a:cxnLst/>
-                <a:rect l="l" t="t" r="r" b="b"/>
-                <a:pathLst>
-                  <a:path w="2721483" h="4626521">
-                    <a:moveTo>
-                      <a:pt x="2721483" y="0"/>
-                    </a:moveTo>
-                    <a:cubicBezTo>
-                      <a:pt x="2449335" y="1768964"/>
-                      <a:pt x="1632890" y="3265780"/>
-                      <a:pt x="0" y="4626521"/>
-                    </a:cubicBezTo>
-                  </a:path>
-                </a:pathLst>
-              </a:custGeom>
-              <a:noFill/>
-              <a:ln w="27215" cap="rnd">
-                <a:solidFill>
-                  <a:srgbClr val="C7CEE4"/>
-                </a:solidFill>
-              </a:ln>
-            </p:spPr>
-          </p:sp>
-          <p:grpSp>
-            <p:nvGrpSpPr>
-              <p:cNvPr id="42" name="Group 42"/>
-              <p:cNvGrpSpPr/>
-              <p:nvPr/>
-            </p:nvGrpSpPr>
-            <p:grpSpPr>
-              <a:xfrm>
-                <a:off x="10835566" y="3271242"/>
-                <a:ext cx="1472533" cy="1238846"/>
-                <a:chOff x="10835566" y="3271242"/>
-                <a:chExt cx="1472533" cy="1238846"/>
-              </a:xfrm>
-            </p:grpSpPr>
-            <p:sp>
-              <p:nvSpPr>
-                <p:cNvPr id="35" name="Freeform 35"/>
-                <p:cNvSpPr/>
-                <p:nvPr/>
-              </p:nvSpPr>
-              <p:spPr>
-                <a:xfrm>
-                  <a:off x="11597886" y="3895658"/>
-                  <a:ext cx="570599" cy="567298"/>
-                </a:xfrm>
-                <a:custGeom>
-                  <a:avLst/>
-                  <a:gdLst/>
-                  <a:ahLst/>
-                  <a:cxnLst/>
-                  <a:rect l="l" t="t" r="r" b="b"/>
-                  <a:pathLst>
-                    <a:path w="570599" h="567298">
-                      <a:moveTo>
-                        <a:pt x="102865" y="0"/>
-                      </a:moveTo>
-                      <a:cubicBezTo>
-                        <a:pt x="371580" y="16613"/>
-                        <a:pt x="570599" y="335110"/>
-                        <a:pt x="434564" y="530828"/>
-                      </a:cubicBezTo>
-                      <a:cubicBezTo>
-                        <a:pt x="199019" y="567298"/>
-                        <a:pt x="0" y="248801"/>
-                        <a:pt x="102865" y="0"/>
-                      </a:cubicBezTo>
-                      <a:close/>
-                    </a:path>
-                  </a:pathLst>
-                </a:custGeom>
-                <a:solidFill>
-                  <a:srgbClr val="FFFFFF"/>
-                </a:solidFill>
-                <a:ln w="19050">
-                  <a:solidFill>
-                    <a:srgbClr val="C7CEE4"/>
-                  </a:solidFill>
-                  <a:round/>
-                </a:ln>
-              </p:spPr>
-            </p:sp>
-            <p:sp>
-              <p:nvSpPr>
-                <p:cNvPr id="36" name="Freeform 36"/>
-                <p:cNvSpPr/>
-                <p:nvPr/>
-              </p:nvSpPr>
-              <p:spPr>
-                <a:xfrm>
-                  <a:off x="11190932" y="3874711"/>
-                  <a:ext cx="577057" cy="569342"/>
-                </a:xfrm>
-                <a:custGeom>
-                  <a:avLst/>
-                  <a:gdLst/>
-                  <a:ahLst/>
-                  <a:cxnLst/>
-                  <a:rect l="l" t="t" r="r" b="b"/>
-                  <a:pathLst>
-                    <a:path w="577057" h="569342">
-                      <a:moveTo>
-                        <a:pt x="509820" y="20947"/>
-                      </a:moveTo>
-                      <a:cubicBezTo>
-                        <a:pt x="577057" y="281643"/>
-                        <a:pt x="335649" y="569342"/>
-                        <a:pt x="107472" y="500446"/>
-                      </a:cubicBezTo>
-                      <a:cubicBezTo>
-                        <a:pt x="0" y="287699"/>
-                        <a:pt x="241408" y="0"/>
-                        <a:pt x="509820" y="20947"/>
-                      </a:cubicBezTo>
-                      <a:close/>
-                    </a:path>
-                  </a:pathLst>
-                </a:custGeom>
-                <a:solidFill>
-                  <a:srgbClr val="FFFFFF"/>
-                </a:solidFill>
-                <a:ln w="19050">
-                  <a:solidFill>
-                    <a:srgbClr val="C7CEE4"/>
-                  </a:solidFill>
-                  <a:round/>
-                </a:ln>
-              </p:spPr>
-            </p:sp>
-            <p:sp>
-              <p:nvSpPr>
-                <p:cNvPr id="37" name="Freeform 37"/>
-                <p:cNvSpPr/>
-                <p:nvPr/>
-              </p:nvSpPr>
-              <p:spPr>
-                <a:xfrm>
-                  <a:off x="11120389" y="3493222"/>
-                  <a:ext cx="580362" cy="546943"/>
-                </a:xfrm>
-                <a:custGeom>
-                  <a:avLst/>
-                  <a:gdLst/>
-                  <a:ahLst/>
-                  <a:cxnLst/>
-                  <a:rect l="l" t="t" r="r" b="b"/>
-                  <a:pathLst>
-                    <a:path w="580362" h="546943">
-                      <a:moveTo>
-                        <a:pt x="580362" y="402436"/>
-                      </a:moveTo>
-                      <a:cubicBezTo>
-                        <a:pt x="353203" y="546943"/>
-                        <a:pt x="4986" y="406254"/>
-                        <a:pt x="0" y="167955"/>
-                      </a:cubicBezTo>
-                      <a:cubicBezTo>
-                        <a:pt x="169123" y="0"/>
-                        <a:pt x="517340" y="140689"/>
-                        <a:pt x="580362" y="402436"/>
-                      </a:cubicBezTo>
-                      <a:close/>
-                    </a:path>
-                  </a:pathLst>
-                </a:custGeom>
-                <a:solidFill>
-                  <a:srgbClr val="FFFFFF"/>
-                </a:solidFill>
-                <a:ln w="19050">
-                  <a:solidFill>
-                    <a:srgbClr val="C7CEE4"/>
-                  </a:solidFill>
-                  <a:round/>
-                </a:ln>
-              </p:spPr>
-            </p:sp>
-            <p:sp>
-              <p:nvSpPr>
-                <p:cNvPr id="38" name="Freeform 38"/>
-                <p:cNvSpPr/>
-                <p:nvPr/>
-              </p:nvSpPr>
-              <p:spPr>
-                <a:xfrm>
-                  <a:off x="11493122" y="3271242"/>
-                  <a:ext cx="463289" cy="624416"/>
-                </a:xfrm>
-                <a:custGeom>
-                  <a:avLst/>
-                  <a:gdLst/>
-                  <a:ahLst/>
-                  <a:cxnLst/>
-                  <a:rect l="l" t="t" r="r" b="b"/>
-                  <a:pathLst>
-                    <a:path w="463289" h="624416">
-                      <a:moveTo>
-                        <a:pt x="207630" y="624416"/>
-                      </a:moveTo>
-                      <a:cubicBezTo>
-                        <a:pt x="0" y="453030"/>
-                        <a:pt x="26198" y="78380"/>
-                        <a:pt x="251293" y="0"/>
-                      </a:cubicBezTo>
-                      <a:cubicBezTo>
-                        <a:pt x="463289" y="108945"/>
-                        <a:pt x="437091" y="483594"/>
-                        <a:pt x="207630" y="624416"/>
-                      </a:cubicBezTo>
-                      <a:close/>
-                    </a:path>
-                  </a:pathLst>
-                </a:custGeom>
-                <a:solidFill>
-                  <a:srgbClr val="FFFFFF"/>
-                </a:solidFill>
-                <a:ln w="19050">
-                  <a:solidFill>
-                    <a:srgbClr val="C7CEE4"/>
-                  </a:solidFill>
-                  <a:round/>
-                </a:ln>
-              </p:spPr>
-            </p:sp>
-            <p:sp>
-              <p:nvSpPr>
-                <p:cNvPr id="39" name="Freeform 39"/>
-                <p:cNvSpPr/>
-                <p:nvPr/>
-              </p:nvSpPr>
-              <p:spPr>
-                <a:xfrm>
-                  <a:off x="11700751" y="3554372"/>
-                  <a:ext cx="607348" cy="516001"/>
-                </a:xfrm>
-                <a:custGeom>
-                  <a:avLst/>
-                  <a:gdLst/>
-                  <a:ahLst/>
-                  <a:cxnLst/>
-                  <a:rect l="l" t="t" r="r" b="b"/>
-                  <a:pathLst>
-                    <a:path w="607348" h="516001">
-                      <a:moveTo>
-                        <a:pt x="0" y="341286"/>
-                      </a:moveTo>
-                      <a:cubicBezTo>
-                        <a:pt x="98837" y="90857"/>
-                        <a:pt x="463246" y="0"/>
-                        <a:pt x="607348" y="189857"/>
-                      </a:cubicBezTo>
-                      <a:cubicBezTo>
-                        <a:pt x="569246" y="425144"/>
-                        <a:pt x="204837" y="516001"/>
-                        <a:pt x="0" y="341286"/>
-                      </a:cubicBezTo>
-                      <a:close/>
-                    </a:path>
-                  </a:pathLst>
-                </a:custGeom>
-                <a:solidFill>
-                  <a:srgbClr val="FFFFFF"/>
-                </a:solidFill>
-                <a:ln w="19050">
-                  <a:solidFill>
-                    <a:srgbClr val="C7CEE4"/>
-                  </a:solidFill>
-                  <a:round/>
-                </a:ln>
-              </p:spPr>
-            </p:sp>
-            <p:sp>
-              <p:nvSpPr>
-                <p:cNvPr id="40" name="Freeform 40"/>
-                <p:cNvSpPr/>
-                <p:nvPr/>
-              </p:nvSpPr>
-              <p:spPr>
-                <a:xfrm>
-                  <a:off x="10835566" y="3591821"/>
-                  <a:ext cx="865185" cy="918267"/>
-                </a:xfrm>
-                <a:custGeom>
-                  <a:avLst/>
-                  <a:gdLst/>
-                  <a:ahLst/>
-                  <a:cxnLst/>
-                  <a:rect l="l" t="t" r="r" b="b"/>
-                  <a:pathLst>
-                    <a:path w="865185" h="918267">
-                      <a:moveTo>
-                        <a:pt x="865185" y="303837"/>
-                      </a:moveTo>
-                      <a:cubicBezTo>
-                        <a:pt x="713103" y="728818"/>
-                        <a:pt x="212000" y="918267"/>
-                        <a:pt x="197102" y="470409"/>
-                      </a:cubicBezTo>
-                      <a:cubicBezTo>
-                        <a:pt x="0" y="67980"/>
-                        <a:pt x="531389" y="0"/>
-                        <a:pt x="865185" y="303837"/>
-                      </a:cubicBezTo>
-                      <a:close/>
-                    </a:path>
-                  </a:pathLst>
-                </a:custGeom>
-                <a:solidFill>
-                  <a:srgbClr val="FFFFFF"/>
-                </a:solidFill>
-                <a:ln w="19050">
-                  <a:solidFill>
-                    <a:srgbClr val="C7CEE4"/>
-                  </a:solidFill>
-                  <a:round/>
-                </a:ln>
-              </p:spPr>
-            </p:sp>
-            <p:sp>
-              <p:nvSpPr>
-                <p:cNvPr id="41" name="Ellipse 41"/>
-                <p:cNvSpPr/>
-                <p:nvPr/>
-              </p:nvSpPr>
-              <p:spPr>
-                <a:xfrm rot="3480000">
-                  <a:off x="11632714" y="3827621"/>
-                  <a:ext cx="136074" cy="136074"/>
-                </a:xfrm>
-                <a:prstGeom prst="ellipse">
-                  <a:avLst/>
-                </a:prstGeom>
-                <a:solidFill>
-                  <a:srgbClr val="C7CEE4"/>
-                </a:solidFill>
-                <a:ln>
-                  <a:noFill/>
-                </a:ln>
-              </p:spPr>
-            </p:sp>
-          </p:grpSp>
-          <p:grpSp>
-            <p:nvGrpSpPr>
-              <p:cNvPr id="50" name="Group 50"/>
-              <p:cNvGrpSpPr/>
-              <p:nvPr/>
-            </p:nvGrpSpPr>
-            <p:grpSpPr>
-              <a:xfrm>
-                <a:off x="10273804" y="4507071"/>
-                <a:ext cx="1215304" cy="1010631"/>
-                <a:chOff x="10273804" y="4507071"/>
-                <a:chExt cx="1215304" cy="1010631"/>
-              </a:xfrm>
-            </p:grpSpPr>
-            <p:sp>
-              <p:nvSpPr>
-                <p:cNvPr id="43" name="Freeform 43"/>
-                <p:cNvSpPr/>
-                <p:nvPr/>
-              </p:nvSpPr>
-              <p:spPr>
-                <a:xfrm>
-                  <a:off x="10831536" y="5020991"/>
-                  <a:ext cx="462188" cy="496711"/>
-                </a:xfrm>
-                <a:custGeom>
-                  <a:avLst/>
-                  <a:gdLst/>
-                  <a:ahLst/>
-                  <a:cxnLst/>
-                  <a:rect l="l" t="t" r="r" b="b"/>
-                  <a:pathLst>
-                    <a:path w="462188" h="496711">
-                      <a:moveTo>
-                        <a:pt x="126250" y="0"/>
-                      </a:moveTo>
-                      <a:cubicBezTo>
-                        <a:pt x="348079" y="57688"/>
-                        <a:pt x="462188" y="354953"/>
-                        <a:pt x="316920" y="496711"/>
-                      </a:cubicBezTo>
-                      <a:cubicBezTo>
-                        <a:pt x="114109" y="488568"/>
-                        <a:pt x="0" y="191303"/>
-                        <a:pt x="126250" y="0"/>
-                      </a:cubicBezTo>
-                      <a:close/>
-                    </a:path>
-                  </a:pathLst>
-                </a:custGeom>
-                <a:solidFill>
-                  <a:srgbClr val="FFFFFF"/>
-                </a:solidFill>
-                <a:ln w="19050">
-                  <a:solidFill>
-                    <a:srgbClr val="C7CEE4"/>
-                  </a:solidFill>
-                  <a:round/>
-                </a:ln>
-              </p:spPr>
-            </p:sp>
-            <p:sp>
-              <p:nvSpPr>
-                <p:cNvPr id="44" name="Freeform 44"/>
-                <p:cNvSpPr/>
-                <p:nvPr/>
-              </p:nvSpPr>
-              <p:spPr>
-                <a:xfrm>
-                  <a:off x="10489379" y="4960036"/>
-                  <a:ext cx="482092" cy="490138"/>
-                </a:xfrm>
-                <a:custGeom>
-                  <a:avLst/>
-                  <a:gdLst/>
-                  <a:ahLst/>
-                  <a:cxnLst/>
-                  <a:rect l="l" t="t" r="r" b="b"/>
-                  <a:pathLst>
-                    <a:path w="482092" h="490138">
-                      <a:moveTo>
-                        <a:pt x="468407" y="60955"/>
-                      </a:moveTo>
-                      <a:cubicBezTo>
-                        <a:pt x="482092" y="289754"/>
-                        <a:pt x="234638" y="490138"/>
-                        <a:pt x="54927" y="395785"/>
-                      </a:cubicBezTo>
-                      <a:cubicBezTo>
-                        <a:pt x="0" y="200384"/>
-                        <a:pt x="247454" y="0"/>
-                        <a:pt x="468407" y="60955"/>
-                      </a:cubicBezTo>
-                      <a:close/>
-                    </a:path>
-                  </a:pathLst>
-                </a:custGeom>
-                <a:solidFill>
-                  <a:srgbClr val="FFFFFF"/>
-                </a:solidFill>
-                <a:ln w="19050">
-                  <a:solidFill>
-                    <a:srgbClr val="C7CEE4"/>
-                  </a:solidFill>
-                  <a:round/>
-                </a:ln>
-              </p:spPr>
-            </p:sp>
-            <p:sp>
-              <p:nvSpPr>
-                <p:cNvPr id="45" name="Freeform 45"/>
-                <p:cNvSpPr/>
-                <p:nvPr/>
-              </p:nvSpPr>
-              <p:spPr>
-                <a:xfrm>
-                  <a:off x="10477371" y="4618596"/>
-                  <a:ext cx="480415" cy="486113"/>
-                </a:xfrm>
-                <a:custGeom>
-                  <a:avLst/>
-                  <a:gdLst/>
-                  <a:ahLst/>
-                  <a:cxnLst/>
-                  <a:rect l="l" t="t" r="r" b="b"/>
-                  <a:pathLst>
-                    <a:path w="480415" h="486113">
-                      <a:moveTo>
-                        <a:pt x="480415" y="402396"/>
-                      </a:moveTo>
-                      <a:cubicBezTo>
-                        <a:pt x="267044" y="486113"/>
-                        <a:pt x="0" y="312693"/>
-                        <a:pt x="34201" y="112621"/>
-                      </a:cubicBezTo>
-                      <a:cubicBezTo>
-                        <a:pt x="203065" y="0"/>
-                        <a:pt x="470109" y="173420"/>
-                        <a:pt x="480415" y="402396"/>
-                      </a:cubicBezTo>
-                      <a:close/>
-                    </a:path>
-                  </a:pathLst>
-                </a:custGeom>
-                <a:solidFill>
-                  <a:srgbClr val="FFFFFF"/>
-                </a:solidFill>
-                <a:ln w="19050">
-                  <a:solidFill>
-                    <a:srgbClr val="C7CEE4"/>
-                  </a:solidFill>
-                  <a:round/>
-                </a:ln>
-              </p:spPr>
-            </p:sp>
-            <p:sp>
-              <p:nvSpPr>
-                <p:cNvPr id="46" name="Freeform 46"/>
-                <p:cNvSpPr/>
-                <p:nvPr/>
-              </p:nvSpPr>
-              <p:spPr>
-                <a:xfrm>
-                  <a:off x="10812231" y="4507071"/>
-                  <a:ext cx="442550" cy="513921"/>
-                </a:xfrm>
-                <a:custGeom>
-                  <a:avLst/>
-                  <a:gdLst/>
-                  <a:ahLst/>
-                  <a:cxnLst/>
-                  <a:rect l="l" t="t" r="r" b="b"/>
-                  <a:pathLst>
-                    <a:path w="442550" h="513921">
-                      <a:moveTo>
-                        <a:pt x="145555" y="513921"/>
-                      </a:moveTo>
-                      <a:cubicBezTo>
-                        <a:pt x="0" y="336863"/>
-                        <a:pt x="82411" y="29299"/>
-                        <a:pt x="283260" y="0"/>
-                      </a:cubicBezTo>
-                      <a:cubicBezTo>
-                        <a:pt x="442550" y="125798"/>
-                        <a:pt x="360139" y="433361"/>
-                        <a:pt x="145555" y="513921"/>
-                      </a:cubicBezTo>
-                      <a:close/>
-                    </a:path>
-                  </a:pathLst>
-                </a:custGeom>
-                <a:solidFill>
-                  <a:srgbClr val="FFFFFF"/>
-                </a:solidFill>
-                <a:ln w="19050">
-                  <a:solidFill>
-                    <a:srgbClr val="C7CEE4"/>
-                  </a:solidFill>
-                  <a:round/>
-                </a:ln>
-              </p:spPr>
-            </p:sp>
-            <p:sp>
-              <p:nvSpPr>
-                <p:cNvPr id="47" name="Freeform 47"/>
-                <p:cNvSpPr/>
-                <p:nvPr/>
-              </p:nvSpPr>
-              <p:spPr>
-                <a:xfrm>
-                  <a:off x="10957787" y="4811182"/>
-                  <a:ext cx="531321" cy="388997"/>
-                </a:xfrm>
-                <a:custGeom>
-                  <a:avLst/>
-                  <a:gdLst/>
-                  <a:ahLst/>
-                  <a:cxnLst/>
-                  <a:rect l="l" t="t" r="r" b="b"/>
-                  <a:pathLst>
-                    <a:path w="531321" h="388997">
-                      <a:moveTo>
-                        <a:pt x="0" y="209810"/>
-                      </a:moveTo>
-                      <a:cubicBezTo>
-                        <a:pt x="123413" y="16664"/>
-                        <a:pt x="441390" y="0"/>
-                        <a:pt x="531321" y="181964"/>
-                      </a:cubicBezTo>
-                      <a:cubicBezTo>
-                        <a:pt x="460904" y="372332"/>
-                        <a:pt x="142926" y="388997"/>
-                        <a:pt x="0" y="209810"/>
-                      </a:cubicBezTo>
-                      <a:close/>
-                    </a:path>
-                  </a:pathLst>
-                </a:custGeom>
-                <a:solidFill>
-                  <a:srgbClr val="FFFFFF"/>
-                </a:solidFill>
-                <a:ln w="19050">
-                  <a:solidFill>
-                    <a:srgbClr val="C7CEE4"/>
-                  </a:solidFill>
-                  <a:round/>
-                </a:ln>
-              </p:spPr>
-            </p:sp>
-            <p:sp>
-              <p:nvSpPr>
-                <p:cNvPr id="48" name="Freeform 48"/>
-                <p:cNvSpPr/>
-                <p:nvPr/>
-              </p:nvSpPr>
-              <p:spPr>
-                <a:xfrm>
-                  <a:off x="10273804" y="4683891"/>
-                  <a:ext cx="683982" cy="743849"/>
-                </a:xfrm>
-                <a:custGeom>
-                  <a:avLst/>
-                  <a:gdLst/>
-                  <a:ahLst/>
-                  <a:cxnLst/>
-                  <a:rect l="l" t="t" r="r" b="b"/>
-                  <a:pathLst>
-                    <a:path w="683982" h="743849">
-                      <a:moveTo>
-                        <a:pt x="683982" y="337100"/>
-                      </a:moveTo>
-                      <a:cubicBezTo>
-                        <a:pt x="488161" y="667031"/>
-                        <a:pt x="38983" y="743849"/>
-                        <a:pt x="99665" y="367723"/>
-                      </a:cubicBezTo>
-                      <a:cubicBezTo>
-                        <a:pt x="0" y="0"/>
-                        <a:pt x="454747" y="29446"/>
-                        <a:pt x="683982" y="337100"/>
-                      </a:cubicBezTo>
-                      <a:close/>
-                    </a:path>
-                  </a:pathLst>
-                </a:custGeom>
-                <a:solidFill>
-                  <a:srgbClr val="FFFFFF"/>
-                </a:solidFill>
-                <a:ln w="19050">
-                  <a:solidFill>
-                    <a:srgbClr val="C7CEE4"/>
-                  </a:solidFill>
-                  <a:round/>
-                </a:ln>
-              </p:spPr>
-            </p:sp>
-            <p:sp>
-              <p:nvSpPr>
-                <p:cNvPr id="49" name="Ellipse 49"/>
-                <p:cNvSpPr/>
-                <p:nvPr/>
-              </p:nvSpPr>
-              <p:spPr>
-                <a:xfrm rot="4140000">
-                  <a:off x="10889749" y="4952954"/>
-                  <a:ext cx="136074" cy="136074"/>
-                </a:xfrm>
-                <a:prstGeom prst="ellipse">
-                  <a:avLst/>
-                </a:prstGeom>
-                <a:solidFill>
-                  <a:srgbClr val="C7CEE4"/>
-                </a:solidFill>
-                <a:ln>
-                  <a:noFill/>
-                </a:ln>
-              </p:spPr>
-            </p:sp>
-          </p:grpSp>
-          <p:grpSp>
-            <p:nvGrpSpPr>
-              <p:cNvPr id="58" name="Group 58"/>
-              <p:cNvGrpSpPr/>
-              <p:nvPr/>
-            </p:nvGrpSpPr>
-            <p:grpSpPr>
-              <a:xfrm>
-                <a:off x="9362730" y="5677998"/>
-                <a:ext cx="1013838" cy="832525"/>
-                <a:chOff x="9362730" y="5677998"/>
-                <a:chExt cx="1013838" cy="832525"/>
-              </a:xfrm>
-            </p:grpSpPr>
-            <p:sp>
-              <p:nvSpPr>
-                <p:cNvPr id="51" name="Freeform 51"/>
-                <p:cNvSpPr/>
-                <p:nvPr/>
-              </p:nvSpPr>
-              <p:spPr>
-                <a:xfrm>
-                  <a:off x="9812099" y="6081009"/>
-                  <a:ext cx="353639" cy="429514"/>
-                </a:xfrm>
-                <a:custGeom>
-                  <a:avLst/>
-                  <a:gdLst/>
-                  <a:ahLst/>
-                  <a:cxnLst/>
-                  <a:rect l="l" t="t" r="r" b="b"/>
-                  <a:pathLst>
-                    <a:path w="353639" h="429514">
-                      <a:moveTo>
-                        <a:pt x="129213" y="0"/>
-                      </a:moveTo>
-                      <a:cubicBezTo>
-                        <a:pt x="301460" y="76319"/>
-                        <a:pt x="353639" y="335095"/>
-                        <a:pt x="215819" y="429514"/>
-                      </a:cubicBezTo>
-                      <a:cubicBezTo>
-                        <a:pt x="52178" y="395880"/>
-                        <a:pt x="0" y="137104"/>
-                        <a:pt x="129213" y="0"/>
-                      </a:cubicBezTo>
-                      <a:close/>
-                    </a:path>
-                  </a:pathLst>
-                </a:custGeom>
-                <a:solidFill>
-                  <a:srgbClr val="FFFFFF"/>
-                </a:solidFill>
-                <a:ln w="19050">
-                  <a:solidFill>
-                    <a:srgbClr val="C7CEE4"/>
-                  </a:solidFill>
-                  <a:round/>
-                </a:ln>
-              </p:spPr>
-            </p:sp>
-            <p:sp>
-              <p:nvSpPr>
-                <p:cNvPr id="52" name="Freeform 52"/>
-                <p:cNvSpPr/>
-                <p:nvPr/>
-              </p:nvSpPr>
-              <p:spPr>
-                <a:xfrm>
-                  <a:off x="9541003" y="6000487"/>
-                  <a:ext cx="400309" cy="397513"/>
-                </a:xfrm>
-                <a:custGeom>
-                  <a:avLst/>
-                  <a:gdLst/>
-                  <a:ahLst/>
-                  <a:cxnLst/>
-                  <a:rect l="l" t="t" r="r" b="b"/>
-                  <a:pathLst>
-                    <a:path w="400309" h="397513">
-                      <a:moveTo>
-                        <a:pt x="400309" y="80522"/>
-                      </a:moveTo>
-                      <a:cubicBezTo>
-                        <a:pt x="380953" y="267922"/>
-                        <a:pt x="150966" y="397513"/>
-                        <a:pt x="18579" y="295615"/>
-                      </a:cubicBezTo>
-                      <a:cubicBezTo>
-                        <a:pt x="0" y="129591"/>
-                        <a:pt x="229986" y="0"/>
-                        <a:pt x="400309" y="80522"/>
-                      </a:cubicBezTo>
-                      <a:close/>
-                    </a:path>
-                  </a:pathLst>
-                </a:custGeom>
-                <a:solidFill>
-                  <a:srgbClr val="FFFFFF"/>
-                </a:solidFill>
-                <a:ln w="19050">
-                  <a:solidFill>
-                    <a:srgbClr val="C7CEE4"/>
-                  </a:solidFill>
-                  <a:round/>
-                </a:ln>
-              </p:spPr>
-            </p:sp>
-            <p:sp>
-              <p:nvSpPr>
-                <p:cNvPr id="53" name="Freeform 53"/>
-                <p:cNvSpPr/>
-                <p:nvPr/>
-              </p:nvSpPr>
-              <p:spPr>
-                <a:xfrm>
-                  <a:off x="9562785" y="5715455"/>
-                  <a:ext cx="402476" cy="405054"/>
-                </a:xfrm>
-                <a:custGeom>
-                  <a:avLst/>
-                  <a:gdLst/>
-                  <a:ahLst/>
-                  <a:cxnLst/>
-                  <a:rect l="l" t="t" r="r" b="b"/>
-                  <a:pathLst>
-                    <a:path w="402476" h="405054">
-                      <a:moveTo>
-                        <a:pt x="378528" y="365554"/>
-                      </a:moveTo>
-                      <a:cubicBezTo>
-                        <a:pt x="194318" y="405054"/>
-                        <a:pt x="0" y="226370"/>
-                        <a:pt x="56000" y="68975"/>
-                      </a:cubicBezTo>
-                      <a:cubicBezTo>
-                        <a:pt x="208158" y="0"/>
-                        <a:pt x="402476" y="178684"/>
-                        <a:pt x="378528" y="365554"/>
-                      </a:cubicBezTo>
-                      <a:close/>
-                    </a:path>
-                  </a:pathLst>
-                </a:custGeom>
-                <a:solidFill>
-                  <a:srgbClr val="FFFFFF"/>
-                </a:solidFill>
-                <a:ln w="19050">
-                  <a:solidFill>
-                    <a:srgbClr val="C7CEE4"/>
-                  </a:solidFill>
-                  <a:round/>
-                </a:ln>
-              </p:spPr>
-            </p:sp>
-            <p:sp>
-              <p:nvSpPr>
-                <p:cNvPr id="54" name="Freeform 54"/>
-                <p:cNvSpPr/>
-                <p:nvPr/>
-              </p:nvSpPr>
-              <p:spPr>
-                <a:xfrm>
-                  <a:off x="9846821" y="5677998"/>
-                  <a:ext cx="389507" cy="403011"/>
-                </a:xfrm>
-                <a:custGeom>
-                  <a:avLst/>
-                  <a:gdLst/>
-                  <a:ahLst/>
-                  <a:cxnLst/>
-                  <a:rect l="l" t="t" r="r" b="b"/>
-                  <a:pathLst>
-                    <a:path w="389507" h="403011">
-                      <a:moveTo>
-                        <a:pt x="94492" y="403011"/>
-                      </a:moveTo>
-                      <a:cubicBezTo>
-                        <a:pt x="0" y="240024"/>
-                        <a:pt x="109891" y="0"/>
-                        <a:pt x="276889" y="4622"/>
-                      </a:cubicBezTo>
-                      <a:cubicBezTo>
-                        <a:pt x="389507" y="128018"/>
-                        <a:pt x="279615" y="368041"/>
-                        <a:pt x="94492" y="403011"/>
-                      </a:cubicBezTo>
-                      <a:close/>
-                    </a:path>
-                  </a:pathLst>
-                </a:custGeom>
-                <a:solidFill>
-                  <a:srgbClr val="FFFFFF"/>
-                </a:solidFill>
-                <a:ln w="19050">
-                  <a:solidFill>
-                    <a:srgbClr val="C7CEE4"/>
-                  </a:solidFill>
-                  <a:round/>
-                </a:ln>
-              </p:spPr>
-            </p:sp>
-            <p:sp>
-              <p:nvSpPr>
-                <p:cNvPr id="55" name="Freeform 55"/>
-                <p:cNvSpPr/>
-                <p:nvPr/>
-              </p:nvSpPr>
-              <p:spPr>
-                <a:xfrm>
-                  <a:off x="9941313" y="5940776"/>
-                  <a:ext cx="435255" cy="335831"/>
-                </a:xfrm>
-                <a:custGeom>
-                  <a:avLst/>
-                  <a:gdLst/>
-                  <a:ahLst/>
-                  <a:cxnLst/>
-                  <a:rect l="l" t="t" r="r" b="b"/>
-                  <a:pathLst>
-                    <a:path w="435255" h="335831">
-                      <a:moveTo>
-                        <a:pt x="0" y="140233"/>
-                      </a:moveTo>
-                      <a:cubicBezTo>
-                        <a:pt x="125811" y="0"/>
-                        <a:pt x="388045" y="30342"/>
-                        <a:pt x="435255" y="190594"/>
-                      </a:cubicBezTo>
-                      <a:cubicBezTo>
-                        <a:pt x="352699" y="335831"/>
-                        <a:pt x="90465" y="305490"/>
-                        <a:pt x="0" y="140233"/>
-                      </a:cubicBezTo>
-                      <a:close/>
-                    </a:path>
-                  </a:pathLst>
-                </a:custGeom>
-                <a:solidFill>
-                  <a:srgbClr val="FFFFFF"/>
-                </a:solidFill>
-                <a:ln w="19050">
-                  <a:solidFill>
-                    <a:srgbClr val="C7CEE4"/>
-                  </a:solidFill>
-                  <a:round/>
-                </a:ln>
-              </p:spPr>
-            </p:sp>
-            <p:sp>
-              <p:nvSpPr>
-                <p:cNvPr id="56" name="Freeform 56"/>
-                <p:cNvSpPr/>
-                <p:nvPr/>
-              </p:nvSpPr>
-              <p:spPr>
-                <a:xfrm>
-                  <a:off x="9362730" y="5713998"/>
-                  <a:ext cx="578583" cy="608276"/>
-                </a:xfrm>
-                <a:custGeom>
-                  <a:avLst/>
-                  <a:gdLst/>
-                  <a:ahLst/>
-                  <a:cxnLst/>
-                  <a:rect l="l" t="t" r="r" b="b"/>
-                  <a:pathLst>
-                    <a:path w="578583" h="608276">
-                      <a:moveTo>
-                        <a:pt x="578583" y="367010"/>
-                      </a:moveTo>
-                      <a:cubicBezTo>
-                        <a:pt x="374025" y="607718"/>
-                        <a:pt x="0" y="608276"/>
-                        <a:pt x="99802" y="311614"/>
-                      </a:cubicBezTo>
-                      <a:cubicBezTo>
-                        <a:pt x="70380" y="0"/>
-                        <a:pt x="434396" y="85952"/>
-                        <a:pt x="578583" y="367010"/>
-                      </a:cubicBezTo>
-                      <a:close/>
-                    </a:path>
-                  </a:pathLst>
-                </a:custGeom>
-                <a:solidFill>
-                  <a:srgbClr val="FFFFFF"/>
-                </a:solidFill>
-                <a:ln w="19050">
-                  <a:solidFill>
-                    <a:srgbClr val="C7CEE4"/>
-                  </a:solidFill>
-                  <a:round/>
-                </a:ln>
-              </p:spPr>
-            </p:sp>
-            <p:sp>
-              <p:nvSpPr>
-                <p:cNvPr id="57" name="Ellipse 57"/>
-                <p:cNvSpPr/>
-                <p:nvPr/>
-              </p:nvSpPr>
-              <p:spPr>
-                <a:xfrm rot="4716000">
-                  <a:off x="9873276" y="6012972"/>
-                  <a:ext cx="136074" cy="136074"/>
-                </a:xfrm>
-                <a:prstGeom prst="ellipse">
-                  <a:avLst/>
-                </a:prstGeom>
-                <a:solidFill>
-                  <a:srgbClr val="C7CEE4"/>
-                </a:solidFill>
-                <a:ln>
-                  <a:noFill/>
-                </a:ln>
-              </p:spPr>
-            </p:sp>
-          </p:grpSp>
-          <p:grpSp>
-            <p:nvGrpSpPr>
-              <p:cNvPr id="61" name="Group 61"/>
-              <p:cNvGrpSpPr/>
-              <p:nvPr/>
-            </p:nvGrpSpPr>
-            <p:grpSpPr>
-              <a:xfrm>
-                <a:off x="12300838" y="2285901"/>
-                <a:ext cx="1414124" cy="816445"/>
-                <a:chOff x="12300838" y="2285901"/>
-                <a:chExt cx="1414124" cy="816445"/>
-              </a:xfrm>
-            </p:grpSpPr>
-            <p:sp>
-              <p:nvSpPr>
-                <p:cNvPr id="59" name="Freeform 59"/>
-                <p:cNvSpPr/>
-                <p:nvPr/>
-              </p:nvSpPr>
-              <p:spPr>
-                <a:xfrm>
-                  <a:off x="12300838" y="2285901"/>
-                  <a:ext cx="1414124" cy="816445"/>
-                </a:xfrm>
-                <a:custGeom>
-                  <a:avLst/>
-                  <a:gdLst/>
-                  <a:ahLst/>
-                  <a:cxnLst/>
-                  <a:rect l="l" t="t" r="r" b="b"/>
-                  <a:pathLst>
-                    <a:path w="1414124" h="816445">
-                      <a:moveTo>
-                        <a:pt x="0" y="0"/>
-                      </a:moveTo>
-                      <a:cubicBezTo>
-                        <a:pt x="519489" y="79952"/>
-                        <a:pt x="1085139" y="406530"/>
-                        <a:pt x="1414124" y="816445"/>
-                      </a:cubicBezTo>
-                      <a:cubicBezTo>
-                        <a:pt x="894635" y="736493"/>
-                        <a:pt x="328985" y="409915"/>
-                        <a:pt x="0" y="0"/>
-                      </a:cubicBezTo>
-                      <a:close/>
-                    </a:path>
-                  </a:pathLst>
-                </a:custGeom>
-                <a:solidFill>
-                  <a:srgbClr val="FFFFFF"/>
-                </a:solidFill>
-                <a:ln w="19050">
-                  <a:solidFill>
-                    <a:srgbClr val="C7CEE4"/>
-                  </a:solidFill>
-                  <a:round/>
-                </a:ln>
-              </p:spPr>
-            </p:sp>
-            <p:sp>
-              <p:nvSpPr>
-                <p:cNvPr id="60" name="Freeform 60"/>
-                <p:cNvSpPr/>
-                <p:nvPr/>
-              </p:nvSpPr>
-              <p:spPr>
-                <a:xfrm>
-                  <a:off x="12413968" y="2351217"/>
-                  <a:ext cx="1088876" cy="628663"/>
-                </a:xfrm>
-                <a:custGeom>
-                  <a:avLst/>
-                  <a:gdLst/>
-                  <a:ahLst/>
-                  <a:cxnLst/>
-                  <a:rect l="l" t="t" r="r" b="b"/>
-                  <a:pathLst>
-                    <a:path w="1088876" h="628663">
-                      <a:moveTo>
-                        <a:pt x="0" y="0"/>
-                      </a:moveTo>
-                      <a:lnTo>
-                        <a:pt x="1088876" y="628663"/>
-                      </a:lnTo>
-                    </a:path>
-                  </a:pathLst>
-                </a:custGeom>
-                <a:noFill/>
-                <a:ln w="10886">
-                  <a:solidFill>
-                    <a:srgbClr val="C7CEE4"/>
-                  </a:solidFill>
-                </a:ln>
-              </p:spPr>
-            </p:sp>
-          </p:grpSp>
-          <p:grpSp>
-            <p:nvGrpSpPr>
-              <p:cNvPr id="64" name="Group 64"/>
-              <p:cNvGrpSpPr/>
-              <p:nvPr/>
-            </p:nvGrpSpPr>
-            <p:grpSpPr>
-              <a:xfrm>
-                <a:off x="10747919" y="2789375"/>
-                <a:ext cx="1414124" cy="816445"/>
-                <a:chOff x="10747919" y="2789375"/>
-                <a:chExt cx="1414124" cy="816445"/>
-              </a:xfrm>
-            </p:grpSpPr>
-            <p:sp>
-              <p:nvSpPr>
-                <p:cNvPr id="62" name="Freeform 62"/>
-                <p:cNvSpPr/>
-                <p:nvPr/>
-              </p:nvSpPr>
-              <p:spPr>
-                <a:xfrm>
-                  <a:off x="10747919" y="2789375"/>
-                  <a:ext cx="1414124" cy="816445"/>
-                </a:xfrm>
-                <a:custGeom>
-                  <a:avLst/>
-                  <a:gdLst/>
-                  <a:ahLst/>
-                  <a:cxnLst/>
-                  <a:rect l="l" t="t" r="r" b="b"/>
-                  <a:pathLst>
-                    <a:path w="1414124" h="816445">
-                      <a:moveTo>
-                        <a:pt x="1414124" y="0"/>
-                      </a:moveTo>
-                      <a:cubicBezTo>
-                        <a:pt x="1085139" y="409915"/>
-                        <a:pt x="519489" y="736493"/>
-                        <a:pt x="0" y="816445"/>
-                      </a:cubicBezTo>
-                      <a:cubicBezTo>
-                        <a:pt x="328985" y="406530"/>
-                        <a:pt x="894635" y="79952"/>
-                        <a:pt x="1414124" y="0"/>
-                      </a:cubicBezTo>
-                      <a:close/>
-                    </a:path>
-                  </a:pathLst>
-                </a:custGeom>
-                <a:solidFill>
-                  <a:srgbClr val="FFFFFF"/>
-                </a:solidFill>
-                <a:ln w="19050">
-                  <a:solidFill>
-                    <a:srgbClr val="C7CEE4"/>
-                  </a:solidFill>
-                  <a:round/>
-                </a:ln>
-              </p:spPr>
-            </p:sp>
-            <p:sp>
-              <p:nvSpPr>
-                <p:cNvPr id="63" name="Freeform 63"/>
-                <p:cNvSpPr/>
-                <p:nvPr/>
-              </p:nvSpPr>
-              <p:spPr>
-                <a:xfrm>
-                  <a:off x="10960037" y="2854691"/>
-                  <a:ext cx="1088876" cy="628663"/>
-                </a:xfrm>
-                <a:custGeom>
-                  <a:avLst/>
-                  <a:gdLst/>
-                  <a:ahLst/>
-                  <a:cxnLst/>
-                  <a:rect l="l" t="t" r="r" b="b"/>
-                  <a:pathLst>
-                    <a:path w="1088876" h="628663">
-                      <a:moveTo>
-                        <a:pt x="1088876" y="0"/>
-                      </a:moveTo>
-                      <a:lnTo>
-                        <a:pt x="0" y="628663"/>
-                      </a:lnTo>
-                    </a:path>
-                  </a:pathLst>
-                </a:custGeom>
-                <a:noFill/>
-                <a:ln w="10886">
-                  <a:solidFill>
-                    <a:srgbClr val="C7CEE4"/>
-                  </a:solidFill>
-                </a:ln>
-              </p:spPr>
-            </p:sp>
-          </p:grpSp>
-        </p:grpSp>
-      </p:grpSp>
-      <p:grpSp>
-        <p:nvGrpSpPr>
-          <p:cNvPr id="70" name="word"/>
-          <p:cNvGrpSpPr/>
-          <p:nvPr/>
-        </p:nvGrpSpPr>
-        <p:grpSpPr>
-          <a:xfrm>
-            <a:off x="3924300" y="2667000"/>
-            <a:ext cx="4400550" cy="1682750"/>
-            <a:chOff x="3924300" y="2667000"/>
-            <a:chExt cx="4400550" cy="1682750"/>
-          </a:xfrm>
-        </p:grpSpPr>
-        <p:sp>
-          <p:nvSpPr>
-            <p:cNvPr id="67" name="Rectangle 67"/>
-            <p:cNvSpPr/>
-            <p:nvPr/>
-          </p:nvSpPr>
-          <p:spPr>
-            <a:xfrm>
-              <a:off x="3981450" y="2724150"/>
-              <a:ext cx="4343400" cy="1562100"/>
-            </a:xfrm>
-            <a:prstGeom prst="rect">
-              <a:avLst/>
-            </a:prstGeom>
-            <a:solidFill>
-              <a:srgbClr val="0A1138"/>
-            </a:solidFill>
-            <a:ln>
-              <a:noFill/>
-            </a:ln>
-          </p:spPr>
-        </p:sp>
-        <p:sp>
-          <p:nvSpPr>
-            <p:cNvPr id="68" name="Rectangle 68"/>
-            <p:cNvSpPr/>
-            <p:nvPr/>
-          </p:nvSpPr>
-          <p:spPr>
-            <a:xfrm>
-              <a:off x="3924300" y="2667000"/>
-              <a:ext cx="4343400" cy="1562100"/>
-            </a:xfrm>
-            <a:prstGeom prst="rect">
-              <a:avLst/>
-            </a:prstGeom>
-            <a:solidFill>
-              <a:srgbClr val="FFFFFF"/>
-            </a:solidFill>
-            <a:ln w="28575">
-              <a:solidFill>
-                <a:srgbClr val="0A1138"/>
-              </a:solidFill>
-            </a:ln>
-          </p:spPr>
-        </p:sp>
-        <p:sp>
-          <p:nvSpPr>
-            <p:cNvPr id="69" name="TextBox 69"/>
-            <p:cNvSpPr txBox="1"/>
-            <p:nvPr/>
-          </p:nvSpPr>
-          <p:spPr>
-            <a:xfrm>
-              <a:off x="4946142" y="2730500"/>
-              <a:ext cx="2299716" cy="1619250"/>
-            </a:xfrm>
-            <a:prstGeom prst="rect">
-              <a:avLst/>
-            </a:prstGeom>
-            <a:noFill/>
-            <a:ln>
-              <a:noFill/>
-            </a:ln>
-          </p:spPr>
-          <p:txBody>
-            <a:bodyPr wrap="none" lIns="0" tIns="0" rIns="0" bIns="0" anchor="t" anchorCtr="0">
-              <a:spAutoFit/>
-            </a:bodyPr>
-            <a:lstStyle/>
-            <a:p>
-              <a:pPr algn="ctr"/>
-              <a:r>
-                <a:rPr lang="zh-TW" sz="8400" b="1" dirty="0">
-                  <a:solidFill>
-                    <a:srgbClr val="0A1138"/>
-                  </a:solidFill>
-                  <a:latin typeface="+mn-lt"/>
-                  <a:ea typeface="+mn-ea"/>
-                  <a:cs typeface="+mn-cs"/>
-                </a:rPr>
-                <a:t>結語</a:t>
-              </a:r>
-            </a:p>
-          </p:txBody>
-        </p:sp>
-      </p:grpSp>
-    </p:spTree>
-  </p:cSld>
-  <p:clrMapOvr>
-    <a:masterClrMapping/>
-  </p:clrMapOvr>
-  <mc:AlternateContent xmlns:mc="http://schemas.openxmlformats.org/markup-compatibility/2006">
-    <mc:Choice xmlns:p159="http://schemas.microsoft.com/office/powerpoint/2015/09/main" Requires="p159">
-      <p:transition xmlns:p14="http://schemas.microsoft.com/office/powerpoint/2010/main" p14:dur="400">
-        <p159:morph option="byObject"/>
-      </p:transition>
-    </mc:Choice>
-    <mc:Fallback>
-      <p:transition>
-        <p:fade/>
-      </p:transition>
-    </mc:Fallback>
-  </mc:AlternateContent>
-</p:sld>
-</file>
-
-<file path=ppt/slides/slide8.xml><?xml version="1.0" encoding="utf-8"?>
 <p:sld xmlns:a="http://schemas.openxmlformats.org/drawingml/2006/main" xmlns:r="http://schemas.openxmlformats.org/officeDocument/2006/relationships" xmlns:p="http://schemas.openxmlformats.org/presentationml/2006/main">
   <p:cSld>
     <p:bg>
